--- a/docs/theme-preview/pptx/bentogrid.pptx
+++ b/docs/theme-preview/pptx/bentogrid.pptx
@@ -366,7 +366,7 @@
             <a:pPr>
               <a:defRPr sz="1100" b="0" i="0" u="none" strike="noStrike">
                 <a:solidFill>
-                  <a:srgbClr val="111827"/>
+                  <a:srgbClr val="111111"/>
                 </a:solidFill>
                 <a:latin typeface="Pretendard"/>
               </a:defRPr>
@@ -418,7 +418,7 @@
             <a:pPr>
               <a:defRPr sz="1100" b="0" i="0" u="none" strike="noStrike">
                 <a:solidFill>
-                  <a:srgbClr val="475569"/>
+                  <a:srgbClr val="919191"/>
                 </a:solidFill>
                 <a:latin typeface="Pretendard"/>
               </a:defRPr>
@@ -448,7 +448,7 @@
           <a:pPr>
             <a:defRPr sz="1100">
               <a:solidFill>
-                <a:srgbClr val="475569"/>
+                <a:srgbClr val="919191"/>
               </a:solidFill>
               <a:latin typeface="Pretendard"/>
               <a:cs typeface="Pretendard"/>
@@ -626,7 +626,7 @@
             <a:pPr>
               <a:defRPr sz="1100" b="0" i="0" u="none" strike="noStrike">
                 <a:solidFill>
-                  <a:srgbClr val="111827"/>
+                  <a:srgbClr val="111111"/>
                 </a:solidFill>
                 <a:latin typeface="Pretendard"/>
               </a:defRPr>
@@ -678,7 +678,7 @@
             <a:pPr>
               <a:defRPr sz="1100" b="0" i="0" u="none" strike="noStrike">
                 <a:solidFill>
-                  <a:srgbClr val="475569"/>
+                  <a:srgbClr val="919191"/>
                 </a:solidFill>
                 <a:latin typeface="Pretendard"/>
               </a:defRPr>
@@ -5474,7 +5474,7 @@
             <a:r>
               <a:rPr lang="en-US" sz="3400" b="1" dirty="0">
                 <a:solidFill>
-                  <a:srgbClr val="111827"/>
+                  <a:srgbClr val="111111"/>
                 </a:solidFill>
                 <a:latin typeface="Pretendard" pitchFamily="34" charset="0"/>
                 <a:ea typeface="Pretendard" pitchFamily="34" charset="-122"/>
@@ -5533,7 +5533,7 @@
             <a:r>
               <a:rPr lang="en-US" sz="2200" dirty="0">
                 <a:solidFill>
-                  <a:srgbClr val="111827"/>
+                  <a:srgbClr val="111111"/>
                 </a:solidFill>
                 <a:latin typeface="Pretendard" pitchFamily="34" charset="0"/>
                 <a:ea typeface="Pretendard" pitchFamily="34" charset="-122"/>
@@ -5592,7 +5592,7 @@
             <a:r>
               <a:rPr lang="en-US" sz="2200" dirty="0">
                 <a:solidFill>
-                  <a:srgbClr val="111827"/>
+                  <a:srgbClr val="111111"/>
                 </a:solidFill>
                 <a:latin typeface="Pretendard" pitchFamily="34" charset="0"/>
                 <a:ea typeface="Pretendard" pitchFamily="34" charset="-122"/>
@@ -6499,7 +6499,7 @@
             <a:r>
               <a:rPr lang="en-US" sz="3400" b="1" dirty="0">
                 <a:solidFill>
-                  <a:srgbClr val="111827"/>
+                  <a:srgbClr val="111111"/>
                 </a:solidFill>
                 <a:latin typeface="Pretendard" pitchFamily="34" charset="0"/>
                 <a:ea typeface="Pretendard" pitchFamily="34" charset="-122"/>
@@ -6795,7 +6795,7 @@
             <a:r>
               <a:rPr lang="en-US" sz="1600" dirty="0">
                 <a:solidFill>
-                  <a:srgbClr val="111827"/>
+                  <a:srgbClr val="111111"/>
                 </a:solidFill>
                 <a:latin typeface="Pretendard" pitchFamily="34" charset="0"/>
                 <a:ea typeface="Pretendard" pitchFamily="34" charset="-122"/>
@@ -6971,7 +6971,7 @@
             <a:r>
               <a:rPr lang="en-US" sz="1600" dirty="0">
                 <a:solidFill>
-                  <a:srgbClr val="111827"/>
+                  <a:srgbClr val="111111"/>
                 </a:solidFill>
                 <a:latin typeface="Pretendard" pitchFamily="34" charset="0"/>
                 <a:ea typeface="Pretendard" pitchFamily="34" charset="-122"/>
@@ -7147,7 +7147,7 @@
             <a:r>
               <a:rPr lang="en-US" sz="1600" dirty="0">
                 <a:solidFill>
-                  <a:srgbClr val="111827"/>
+                  <a:srgbClr val="111111"/>
                 </a:solidFill>
                 <a:latin typeface="Pretendard" pitchFamily="34" charset="0"/>
                 <a:ea typeface="Pretendard" pitchFamily="34" charset="-122"/>
@@ -7323,7 +7323,7 @@
             <a:r>
               <a:rPr lang="en-US" sz="1600" dirty="0">
                 <a:solidFill>
-                  <a:srgbClr val="111827"/>
+                  <a:srgbClr val="111111"/>
                 </a:solidFill>
                 <a:latin typeface="Pretendard" pitchFamily="34" charset="0"/>
                 <a:ea typeface="Pretendard" pitchFamily="34" charset="-122"/>
@@ -7499,7 +7499,7 @@
             <a:r>
               <a:rPr lang="en-US" sz="1600" dirty="0">
                 <a:solidFill>
-                  <a:srgbClr val="111827"/>
+                  <a:srgbClr val="111111"/>
                 </a:solidFill>
                 <a:latin typeface="Pretendard" pitchFamily="34" charset="0"/>
                 <a:ea typeface="Pretendard" pitchFamily="34" charset="-122"/>
@@ -7675,7 +7675,7 @@
             <a:r>
               <a:rPr lang="en-US" sz="1600" dirty="0">
                 <a:solidFill>
-                  <a:srgbClr val="111827"/>
+                  <a:srgbClr val="111111"/>
                 </a:solidFill>
                 <a:latin typeface="Pretendard" pitchFamily="34" charset="0"/>
                 <a:ea typeface="Pretendard" pitchFamily="34" charset="-122"/>
@@ -8954,7 +8954,7 @@
             <a:r>
               <a:rPr lang="en-US" sz="3400" b="1" dirty="0">
                 <a:solidFill>
-                  <a:srgbClr val="111827"/>
+                  <a:srgbClr val="111111"/>
                 </a:solidFill>
                 <a:latin typeface="Pretendard" pitchFamily="34" charset="0"/>
                 <a:ea typeface="Pretendard" pitchFamily="34" charset="-122"/>
@@ -9070,7 +9070,7 @@
             <a:r>
               <a:rPr lang="en-US" sz="2200" dirty="0">
                 <a:solidFill>
-                  <a:srgbClr val="111827"/>
+                  <a:srgbClr val="111111"/>
                 </a:solidFill>
                 <a:latin typeface="Pretendard" pitchFamily="34" charset="0"/>
                 <a:ea typeface="Pretendard" pitchFamily="34" charset="-122"/>
@@ -9186,7 +9186,7 @@
             <a:r>
               <a:rPr lang="en-US" sz="2200" dirty="0">
                 <a:solidFill>
-                  <a:srgbClr val="111827"/>
+                  <a:srgbClr val="111111"/>
                 </a:solidFill>
                 <a:latin typeface="Pretendard" pitchFamily="34" charset="0"/>
                 <a:ea typeface="Pretendard" pitchFamily="34" charset="-122"/>
@@ -9302,7 +9302,7 @@
             <a:r>
               <a:rPr lang="en-US" sz="2200" dirty="0">
                 <a:solidFill>
-                  <a:srgbClr val="111827"/>
+                  <a:srgbClr val="111111"/>
                 </a:solidFill>
                 <a:latin typeface="Pretendard" pitchFamily="34" charset="0"/>
                 <a:ea typeface="Pretendard" pitchFamily="34" charset="-122"/>
@@ -9418,7 +9418,7 @@
             <a:r>
               <a:rPr lang="en-US" sz="2200" dirty="0">
                 <a:solidFill>
-                  <a:srgbClr val="111827"/>
+                  <a:srgbClr val="111111"/>
                 </a:solidFill>
                 <a:latin typeface="Pretendard" pitchFamily="34" charset="0"/>
                 <a:ea typeface="Pretendard" pitchFamily="34" charset="-122"/>
@@ -10379,7 +10379,7 @@
             <a:r>
               <a:rPr lang="en-US" sz="3400" b="1" dirty="0">
                 <a:solidFill>
-                  <a:srgbClr val="111827"/>
+                  <a:srgbClr val="111111"/>
                 </a:solidFill>
                 <a:latin typeface="Pretendard" pitchFamily="34" charset="0"/>
                 <a:ea typeface="Pretendard" pitchFamily="34" charset="-122"/>
@@ -10438,7 +10438,7 @@
             <a:r>
               <a:rPr lang="en-US" sz="2200" dirty="0">
                 <a:solidFill>
-                  <a:srgbClr val="111827"/>
+                  <a:srgbClr val="111111"/>
                 </a:solidFill>
                 <a:latin typeface="Pretendard" pitchFamily="34" charset="0"/>
                 <a:ea typeface="Pretendard" pitchFamily="34" charset="-122"/>
@@ -10497,7 +10497,7 @@
             <a:r>
               <a:rPr lang="en-US" sz="2200" dirty="0">
                 <a:solidFill>
-                  <a:srgbClr val="111827"/>
+                  <a:srgbClr val="111111"/>
                 </a:solidFill>
                 <a:latin typeface="Pretendard" pitchFamily="34" charset="0"/>
                 <a:ea typeface="Pretendard" pitchFamily="34" charset="-122"/>
@@ -11470,7 +11470,7 @@
             <a:r>
               <a:rPr lang="en-US" sz="3400" b="1" dirty="0">
                 <a:solidFill>
-                  <a:srgbClr val="111827"/>
+                  <a:srgbClr val="111111"/>
                 </a:solidFill>
                 <a:latin typeface="Pretendard" pitchFamily="34" charset="0"/>
                 <a:ea typeface="Pretendard" pitchFamily="34" charset="-122"/>
@@ -11727,7 +11727,7 @@
                       <a:r>
                         <a:rPr lang="en-US" sz="1800" b="1" dirty="0">
                           <a:solidFill>
-                            <a:srgbClr val="111827"/>
+                            <a:srgbClr val="111111"/>
                           </a:solidFill>
                           <a:latin typeface="Pretendard" pitchFamily="34" charset="0"/>
                           <a:ea typeface="Pretendard" pitchFamily="34" charset="-122"/>
@@ -11792,7 +11792,7 @@
                       <a:r>
                         <a:rPr lang="en-US" sz="1800" dirty="0">
                           <a:solidFill>
-                            <a:srgbClr val="111827"/>
+                            <a:srgbClr val="111111"/>
                           </a:solidFill>
                           <a:latin typeface="Pretendard" pitchFamily="34" charset="0"/>
                           <a:ea typeface="Pretendard" pitchFamily="34" charset="-122"/>
@@ -11857,7 +11857,7 @@
                       <a:r>
                         <a:rPr lang="en-US" sz="1800" dirty="0">
                           <a:solidFill>
-                            <a:srgbClr val="111827"/>
+                            <a:srgbClr val="111111"/>
                           </a:solidFill>
                           <a:latin typeface="Pretendard" pitchFamily="34" charset="0"/>
                           <a:ea typeface="Pretendard" pitchFamily="34" charset="-122"/>
@@ -11924,7 +11924,7 @@
                       <a:r>
                         <a:rPr lang="en-US" sz="1800" b="1" dirty="0">
                           <a:solidFill>
-                            <a:srgbClr val="111827"/>
+                            <a:srgbClr val="111111"/>
                           </a:solidFill>
                           <a:latin typeface="Pretendard" pitchFamily="34" charset="0"/>
                           <a:ea typeface="Pretendard" pitchFamily="34" charset="-122"/>
@@ -11994,7 +11994,7 @@
                       <a:r>
                         <a:rPr lang="en-US" sz="1800" dirty="0">
                           <a:solidFill>
-                            <a:srgbClr val="111827"/>
+                            <a:srgbClr val="111111"/>
                           </a:solidFill>
                           <a:latin typeface="Pretendard" pitchFamily="34" charset="0"/>
                           <a:ea typeface="Pretendard" pitchFamily="34" charset="-122"/>
@@ -12064,7 +12064,7 @@
                       <a:r>
                         <a:rPr lang="en-US" sz="1800" dirty="0">
                           <a:solidFill>
-                            <a:srgbClr val="111827"/>
+                            <a:srgbClr val="111111"/>
                           </a:solidFill>
                           <a:latin typeface="Pretendard" pitchFamily="34" charset="0"/>
                           <a:ea typeface="Pretendard" pitchFamily="34" charset="-122"/>
@@ -12136,7 +12136,7 @@
                       <a:r>
                         <a:rPr lang="en-US" sz="1800" b="1" dirty="0">
                           <a:solidFill>
-                            <a:srgbClr val="111827"/>
+                            <a:srgbClr val="111111"/>
                           </a:solidFill>
                           <a:latin typeface="Pretendard" pitchFamily="34" charset="0"/>
                           <a:ea typeface="Pretendard" pitchFamily="34" charset="-122"/>
@@ -12201,7 +12201,7 @@
                       <a:r>
                         <a:rPr lang="en-US" sz="1800" dirty="0">
                           <a:solidFill>
-                            <a:srgbClr val="111827"/>
+                            <a:srgbClr val="111111"/>
                           </a:solidFill>
                           <a:latin typeface="Pretendard" pitchFamily="34" charset="0"/>
                           <a:ea typeface="Pretendard" pitchFamily="34" charset="-122"/>
@@ -12266,7 +12266,7 @@
                       <a:r>
                         <a:rPr lang="en-US" sz="1800" dirty="0">
                           <a:solidFill>
-                            <a:srgbClr val="111827"/>
+                            <a:srgbClr val="111111"/>
                           </a:solidFill>
                           <a:latin typeface="Pretendard" pitchFamily="34" charset="0"/>
                           <a:ea typeface="Pretendard" pitchFamily="34" charset="-122"/>
@@ -12333,7 +12333,7 @@
                       <a:r>
                         <a:rPr lang="en-US" sz="1800" b="1" dirty="0">
                           <a:solidFill>
-                            <a:srgbClr val="111827"/>
+                            <a:srgbClr val="111111"/>
                           </a:solidFill>
                           <a:latin typeface="Pretendard" pitchFamily="34" charset="0"/>
                           <a:ea typeface="Pretendard" pitchFamily="34" charset="-122"/>
@@ -12403,7 +12403,7 @@
                       <a:r>
                         <a:rPr lang="en-US" sz="1800" dirty="0">
                           <a:solidFill>
-                            <a:srgbClr val="111827"/>
+                            <a:srgbClr val="111111"/>
                           </a:solidFill>
                           <a:latin typeface="Pretendard" pitchFamily="34" charset="0"/>
                           <a:ea typeface="Pretendard" pitchFamily="34" charset="-122"/>
@@ -12473,7 +12473,7 @@
                       <a:r>
                         <a:rPr lang="en-US" sz="1800" dirty="0">
                           <a:solidFill>
-                            <a:srgbClr val="111827"/>
+                            <a:srgbClr val="111111"/>
                           </a:solidFill>
                           <a:latin typeface="Pretendard" pitchFamily="34" charset="0"/>
                           <a:ea typeface="Pretendard" pitchFamily="34" charset="-122"/>
@@ -13525,7 +13525,7 @@
             <a:r>
               <a:rPr lang="en-US" sz="3400" b="1" dirty="0">
                 <a:solidFill>
-                  <a:srgbClr val="111827"/>
+                  <a:srgbClr val="111111"/>
                 </a:solidFill>
                 <a:latin typeface="Pretendard" pitchFamily="34" charset="0"/>
                 <a:ea typeface="Pretendard" pitchFamily="34" charset="-122"/>
@@ -13584,7 +13584,7 @@
             <a:r>
               <a:rPr lang="en-US" sz="2200" dirty="0">
                 <a:solidFill>
-                  <a:srgbClr val="111827"/>
+                  <a:srgbClr val="111111"/>
                 </a:solidFill>
                 <a:latin typeface="Pretendard" pitchFamily="34" charset="0"/>
                 <a:ea typeface="Pretendard" pitchFamily="34" charset="-122"/>
@@ -13624,7 +13624,7 @@
             <a:r>
               <a:rPr lang="en-US" sz="2200" dirty="0">
                 <a:solidFill>
-                  <a:srgbClr val="111827"/>
+                  <a:srgbClr val="111111"/>
                 </a:solidFill>
                 <a:latin typeface="Pretendard" pitchFamily="34" charset="0"/>
                 <a:ea typeface="Pretendard" pitchFamily="34" charset="-122"/>
@@ -13664,7 +13664,7 @@
             <a:r>
               <a:rPr lang="en-US" sz="2200" dirty="0">
                 <a:solidFill>
-                  <a:srgbClr val="111827"/>
+                  <a:srgbClr val="111111"/>
                 </a:solidFill>
                 <a:latin typeface="Pretendard" pitchFamily="34" charset="0"/>
                 <a:ea typeface="Pretendard" pitchFamily="34" charset="-122"/>
@@ -14653,7 +14653,7 @@
             <a:r>
               <a:rPr lang="en-US" sz="3400" b="1" dirty="0">
                 <a:solidFill>
-                  <a:srgbClr val="111827"/>
+                  <a:srgbClr val="111111"/>
                 </a:solidFill>
                 <a:latin typeface="Pretendard" pitchFamily="34" charset="0"/>
                 <a:ea typeface="Pretendard" pitchFamily="34" charset="-122"/>
@@ -14910,7 +14910,7 @@
                       <a:r>
                         <a:rPr lang="en-US" sz="1800" b="1" dirty="0">
                           <a:solidFill>
-                            <a:srgbClr val="111827"/>
+                            <a:srgbClr val="111111"/>
                           </a:solidFill>
                           <a:latin typeface="Pretendard" pitchFamily="34" charset="0"/>
                           <a:ea typeface="Pretendard" pitchFamily="34" charset="-122"/>
@@ -14975,7 +14975,7 @@
                       <a:r>
                         <a:rPr lang="en-US" sz="1800" dirty="0">
                           <a:solidFill>
-                            <a:srgbClr val="111827"/>
+                            <a:srgbClr val="111111"/>
                           </a:solidFill>
                           <a:latin typeface="Pretendard" pitchFamily="34" charset="0"/>
                           <a:ea typeface="Pretendard" pitchFamily="34" charset="-122"/>
@@ -15040,7 +15040,7 @@
                       <a:r>
                         <a:rPr lang="en-US" sz="1800" dirty="0">
                           <a:solidFill>
-                            <a:srgbClr val="111827"/>
+                            <a:srgbClr val="111111"/>
                           </a:solidFill>
                           <a:latin typeface="Pretendard" pitchFamily="34" charset="0"/>
                           <a:ea typeface="Pretendard" pitchFamily="34" charset="-122"/>
@@ -15107,7 +15107,7 @@
                       <a:r>
                         <a:rPr lang="en-US" sz="1800" b="1" dirty="0">
                           <a:solidFill>
-                            <a:srgbClr val="111827"/>
+                            <a:srgbClr val="111111"/>
                           </a:solidFill>
                           <a:latin typeface="Pretendard" pitchFamily="34" charset="0"/>
                           <a:ea typeface="Pretendard" pitchFamily="34" charset="-122"/>
@@ -15177,7 +15177,7 @@
                       <a:r>
                         <a:rPr lang="en-US" sz="1800" dirty="0">
                           <a:solidFill>
-                            <a:srgbClr val="111827"/>
+                            <a:srgbClr val="111111"/>
                           </a:solidFill>
                           <a:latin typeface="Pretendard" pitchFamily="34" charset="0"/>
                           <a:ea typeface="Pretendard" pitchFamily="34" charset="-122"/>
@@ -15247,7 +15247,7 @@
                       <a:r>
                         <a:rPr lang="en-US" sz="1800" dirty="0">
                           <a:solidFill>
-                            <a:srgbClr val="111827"/>
+                            <a:srgbClr val="111111"/>
                           </a:solidFill>
                           <a:latin typeface="Pretendard" pitchFamily="34" charset="0"/>
                           <a:ea typeface="Pretendard" pitchFamily="34" charset="-122"/>
@@ -15319,7 +15319,7 @@
                       <a:r>
                         <a:rPr lang="en-US" sz="1800" b="1" dirty="0">
                           <a:solidFill>
-                            <a:srgbClr val="111827"/>
+                            <a:srgbClr val="111111"/>
                           </a:solidFill>
                           <a:latin typeface="Pretendard" pitchFamily="34" charset="0"/>
                           <a:ea typeface="Pretendard" pitchFamily="34" charset="-122"/>
@@ -15384,7 +15384,7 @@
                       <a:r>
                         <a:rPr lang="en-US" sz="1800" dirty="0">
                           <a:solidFill>
-                            <a:srgbClr val="111827"/>
+                            <a:srgbClr val="111111"/>
                           </a:solidFill>
                           <a:latin typeface="Pretendard" pitchFamily="34" charset="0"/>
                           <a:ea typeface="Pretendard" pitchFamily="34" charset="-122"/>
@@ -15449,7 +15449,7 @@
                       <a:r>
                         <a:rPr lang="en-US" sz="1800" dirty="0">
                           <a:solidFill>
-                            <a:srgbClr val="111827"/>
+                            <a:srgbClr val="111111"/>
                           </a:solidFill>
                           <a:latin typeface="Pretendard" pitchFamily="34" charset="0"/>
                           <a:ea typeface="Pretendard" pitchFamily="34" charset="-122"/>
@@ -16469,7 +16469,7 @@
             <a:r>
               <a:rPr lang="en-US" sz="3400" b="1" dirty="0">
                 <a:solidFill>
-                  <a:srgbClr val="111827"/>
+                  <a:srgbClr val="111111"/>
                 </a:solidFill>
                 <a:latin typeface="Pretendard" pitchFamily="34" charset="0"/>
                 <a:ea typeface="Pretendard" pitchFamily="34" charset="-122"/>
@@ -16660,7 +16660,7 @@
             <a:r>
               <a:rPr lang="en-US" sz="3000" b="1" dirty="0">
                 <a:solidFill>
-                  <a:srgbClr val="111827"/>
+                  <a:srgbClr val="111111"/>
                 </a:solidFill>
                 <a:latin typeface="Pretendard" pitchFamily="34" charset="0"/>
                 <a:ea typeface="Pretendard" pitchFamily="34" charset="-122"/>
@@ -16702,7 +16702,7 @@
             <a:r>
               <a:rPr lang="en-US" sz="1600" dirty="0">
                 <a:solidFill>
-                  <a:srgbClr val="475569"/>
+                  <a:srgbClr val="919191"/>
                 </a:solidFill>
                 <a:latin typeface="Pretendard" pitchFamily="34" charset="0"/>
                 <a:ea typeface="Pretendard" pitchFamily="34" charset="-122"/>
@@ -16773,7 +16773,7 @@
             <a:r>
               <a:rPr lang="en-US" sz="1600" b="1" dirty="0">
                 <a:solidFill>
-                  <a:srgbClr val="111827"/>
+                  <a:srgbClr val="111111"/>
                 </a:solidFill>
                 <a:latin typeface="Pretendard" pitchFamily="34" charset="0"/>
                 <a:ea typeface="Pretendard" pitchFamily="34" charset="-122"/>
@@ -16844,7 +16844,7 @@
             <a:r>
               <a:rPr lang="en-US" sz="1600" dirty="0">
                 <a:solidFill>
-                  <a:srgbClr val="475569"/>
+                  <a:srgbClr val="919191"/>
                 </a:solidFill>
                 <a:latin typeface="Pretendard" pitchFamily="34" charset="0"/>
                 <a:ea typeface="Pretendard" pitchFamily="34" charset="-122"/>
@@ -16933,7 +16933,7 @@
           <a:noFill/>
           <a:ln w="12700">
             <a:solidFill>
-              <a:srgbClr val="111827"/>
+              <a:srgbClr val="111111"/>
             </a:solidFill>
             <a:prstDash val="solid"/>
           </a:ln>
@@ -17046,7 +17046,7 @@
             <a:r>
               <a:rPr lang="en-US" sz="3200" b="1" dirty="0">
                 <a:solidFill>
-                  <a:srgbClr val="111827"/>
+                  <a:srgbClr val="111111"/>
                 </a:solidFill>
                 <a:latin typeface="Pretendard" pitchFamily="34" charset="0"/>
                 <a:ea typeface="Pretendard" pitchFamily="34" charset="-122"/>
@@ -17088,7 +17088,7 @@
             <a:r>
               <a:rPr lang="en-US" sz="1700" dirty="0">
                 <a:solidFill>
-                  <a:srgbClr val="475569"/>
+                  <a:srgbClr val="919191"/>
                 </a:solidFill>
                 <a:latin typeface="Pretendard" pitchFamily="34" charset="0"/>
                 <a:ea typeface="Pretendard" pitchFamily="34" charset="-122"/>
@@ -17130,7 +17130,7 @@
             <a:r>
               <a:rPr lang="en-US" sz="1400" dirty="0">
                 <a:solidFill>
-                  <a:srgbClr val="475569"/>
+                  <a:srgbClr val="919191"/>
                 </a:solidFill>
                 <a:latin typeface="Pretendard" pitchFamily="34" charset="0"/>
                 <a:ea typeface="Pretendard" pitchFamily="34" charset="-122"/>
@@ -17172,7 +17172,7 @@
             <a:r>
               <a:rPr lang="en-US" sz="1400" dirty="0">
                 <a:solidFill>
-                  <a:srgbClr val="475569"/>
+                  <a:srgbClr val="919191"/>
                 </a:solidFill>
                 <a:latin typeface="Pretendard" pitchFamily="34" charset="0"/>
                 <a:ea typeface="Pretendard" pitchFamily="34" charset="-122"/>
@@ -18145,7 +18145,7 @@
             <a:r>
               <a:rPr lang="en-US" sz="3400" b="1" dirty="0">
                 <a:solidFill>
-                  <a:srgbClr val="111827"/>
+                  <a:srgbClr val="111111"/>
                 </a:solidFill>
                 <a:latin typeface="Pretendard" pitchFamily="34" charset="0"/>
                 <a:ea typeface="Pretendard" pitchFamily="34" charset="-122"/>
@@ -18243,7 +18243,7 @@
             <a:r>
               <a:rPr lang="en-US" sz="1800" b="1" dirty="0">
                 <a:solidFill>
-                  <a:srgbClr val="111827"/>
+                  <a:srgbClr val="111111"/>
                 </a:solidFill>
                 <a:latin typeface="Pretendard" pitchFamily="34" charset="0"/>
                 <a:ea typeface="Pretendard" pitchFamily="34" charset="-122"/>
@@ -18385,7 +18385,7 @@
             <a:r>
               <a:rPr lang="en-US" sz="1800" b="1" dirty="0">
                 <a:solidFill>
-                  <a:srgbClr val="111827"/>
+                  <a:srgbClr val="111111"/>
                 </a:solidFill>
                 <a:latin typeface="Pretendard" pitchFamily="34" charset="0"/>
                 <a:ea typeface="Pretendard" pitchFamily="34" charset="-122"/>
@@ -18527,7 +18527,7 @@
             <a:r>
               <a:rPr lang="en-US" sz="1800" b="1" dirty="0">
                 <a:solidFill>
-                  <a:srgbClr val="111827"/>
+                  <a:srgbClr val="111111"/>
                 </a:solidFill>
                 <a:latin typeface="Pretendard" pitchFamily="34" charset="0"/>
                 <a:ea typeface="Pretendard" pitchFamily="34" charset="-122"/>
@@ -18669,7 +18669,7 @@
             <a:r>
               <a:rPr lang="en-US" sz="1800" b="1" dirty="0">
                 <a:solidFill>
-                  <a:srgbClr val="111827"/>
+                  <a:srgbClr val="111111"/>
                 </a:solidFill>
                 <a:latin typeface="Pretendard" pitchFamily="34" charset="0"/>
                 <a:ea typeface="Pretendard" pitchFamily="34" charset="-122"/>
@@ -20000,7 +20000,7 @@
             <a:r>
               <a:rPr lang="en-US" sz="3400" b="1" dirty="0">
                 <a:solidFill>
-                  <a:srgbClr val="111827"/>
+                  <a:srgbClr val="111111"/>
                 </a:solidFill>
                 <a:latin typeface="Pretendard" pitchFamily="34" charset="0"/>
                 <a:ea typeface="Pretendard" pitchFamily="34" charset="-122"/>
@@ -20116,7 +20116,7 @@
             <a:r>
               <a:rPr lang="en-US" sz="2200" dirty="0">
                 <a:solidFill>
-                  <a:srgbClr val="111827"/>
+                  <a:srgbClr val="111111"/>
                 </a:solidFill>
                 <a:latin typeface="Pretendard" pitchFamily="34" charset="0"/>
                 <a:ea typeface="Pretendard" pitchFamily="34" charset="-122"/>
@@ -20232,7 +20232,7 @@
             <a:r>
               <a:rPr lang="en-US" sz="2200" dirty="0">
                 <a:solidFill>
-                  <a:srgbClr val="111827"/>
+                  <a:srgbClr val="111111"/>
                 </a:solidFill>
                 <a:latin typeface="Pretendard" pitchFamily="34" charset="0"/>
                 <a:ea typeface="Pretendard" pitchFamily="34" charset="-122"/>
@@ -20348,7 +20348,7 @@
             <a:r>
               <a:rPr lang="en-US" sz="2200" dirty="0">
                 <a:solidFill>
-                  <a:srgbClr val="111827"/>
+                  <a:srgbClr val="111111"/>
                 </a:solidFill>
                 <a:latin typeface="Pretendard" pitchFamily="34" charset="0"/>
                 <a:ea typeface="Pretendard" pitchFamily="34" charset="-122"/>
@@ -21716,7 +21716,7 @@
             <a:r>
               <a:rPr lang="en-US" sz="3800" b="1" dirty="0">
                 <a:solidFill>
-                  <a:srgbClr val="111827"/>
+                  <a:srgbClr val="111111"/>
                 </a:solidFill>
                 <a:latin typeface="Pretendard" pitchFamily="34" charset="0"/>
                 <a:ea typeface="Pretendard" pitchFamily="34" charset="-122"/>
@@ -21758,7 +21758,7 @@
             <a:r>
               <a:rPr lang="en-US" sz="1800" dirty="0">
                 <a:solidFill>
-                  <a:srgbClr val="111827"/>
+                  <a:srgbClr val="111111"/>
                 </a:solidFill>
                 <a:latin typeface="Pretendard" pitchFamily="34" charset="0"/>
                 <a:ea typeface="Pretendard" pitchFamily="34" charset="-122"/>
@@ -21800,7 +21800,7 @@
             <a:r>
               <a:rPr lang="en-US" sz="1800" dirty="0">
                 <a:solidFill>
-                  <a:srgbClr val="111827"/>
+                  <a:srgbClr val="111111"/>
                 </a:solidFill>
                 <a:latin typeface="Pretendard" pitchFamily="34" charset="0"/>
                 <a:ea typeface="Pretendard" pitchFamily="34" charset="-122"/>
@@ -21842,7 +21842,7 @@
             <a:r>
               <a:rPr lang="en-US" sz="1800" dirty="0">
                 <a:solidFill>
-                  <a:srgbClr val="111827"/>
+                  <a:srgbClr val="111111"/>
                 </a:solidFill>
                 <a:latin typeface="Pretendard" pitchFamily="34" charset="0"/>
                 <a:ea typeface="Pretendard" pitchFamily="34" charset="-122"/>
@@ -21884,7 +21884,7 @@
             <a:r>
               <a:rPr lang="en-US" sz="1800" dirty="0">
                 <a:solidFill>
-                  <a:srgbClr val="111827"/>
+                  <a:srgbClr val="111111"/>
                 </a:solidFill>
                 <a:latin typeface="Pretendard" pitchFamily="34" charset="0"/>
                 <a:ea typeface="Pretendard" pitchFamily="34" charset="-122"/>
@@ -21926,7 +21926,7 @@
             <a:r>
               <a:rPr lang="en-US" sz="1800" dirty="0">
                 <a:solidFill>
-                  <a:srgbClr val="111827"/>
+                  <a:srgbClr val="111111"/>
                 </a:solidFill>
                 <a:latin typeface="Pretendard" pitchFamily="34" charset="0"/>
                 <a:ea typeface="Pretendard" pitchFamily="34" charset="-122"/>
@@ -21968,7 +21968,7 @@
             <a:r>
               <a:rPr lang="en-US" sz="1800" dirty="0">
                 <a:solidFill>
-                  <a:srgbClr val="111827"/>
+                  <a:srgbClr val="111111"/>
                 </a:solidFill>
                 <a:latin typeface="Pretendard" pitchFamily="34" charset="0"/>
                 <a:ea typeface="Pretendard" pitchFamily="34" charset="-122"/>
@@ -22010,7 +22010,7 @@
             <a:r>
               <a:rPr lang="en-US" sz="1800" dirty="0">
                 <a:solidFill>
-                  <a:srgbClr val="111827"/>
+                  <a:srgbClr val="111111"/>
                 </a:solidFill>
                 <a:latin typeface="Pretendard" pitchFamily="34" charset="0"/>
                 <a:ea typeface="Pretendard" pitchFamily="34" charset="-122"/>
@@ -22052,7 +22052,7 @@
             <a:r>
               <a:rPr lang="en-US" sz="1800" dirty="0">
                 <a:solidFill>
-                  <a:srgbClr val="111827"/>
+                  <a:srgbClr val="111111"/>
                 </a:solidFill>
                 <a:latin typeface="Pretendard" pitchFamily="34" charset="0"/>
                 <a:ea typeface="Pretendard" pitchFamily="34" charset="-122"/>
@@ -22094,7 +22094,7 @@
             <a:r>
               <a:rPr lang="en-US" sz="1800" dirty="0">
                 <a:solidFill>
-                  <a:srgbClr val="111827"/>
+                  <a:srgbClr val="111111"/>
                 </a:solidFill>
                 <a:latin typeface="Pretendard" pitchFamily="34" charset="0"/>
                 <a:ea typeface="Pretendard" pitchFamily="34" charset="-122"/>
@@ -22136,7 +22136,7 @@
             <a:r>
               <a:rPr lang="en-US" sz="1800" dirty="0">
                 <a:solidFill>
-                  <a:srgbClr val="111827"/>
+                  <a:srgbClr val="111111"/>
                 </a:solidFill>
                 <a:latin typeface="Pretendard" pitchFamily="34" charset="0"/>
                 <a:ea typeface="Pretendard" pitchFamily="34" charset="-122"/>
@@ -22178,7 +22178,7 @@
             <a:r>
               <a:rPr lang="en-US" sz="1800" dirty="0">
                 <a:solidFill>
-                  <a:srgbClr val="111827"/>
+                  <a:srgbClr val="111111"/>
                 </a:solidFill>
                 <a:latin typeface="Pretendard" pitchFamily="34" charset="0"/>
                 <a:ea typeface="Pretendard" pitchFamily="34" charset="-122"/>
@@ -22220,7 +22220,7 @@
             <a:r>
               <a:rPr lang="en-US" sz="1800" dirty="0">
                 <a:solidFill>
-                  <a:srgbClr val="111827"/>
+                  <a:srgbClr val="111111"/>
                 </a:solidFill>
                 <a:latin typeface="Pretendard" pitchFamily="34" charset="0"/>
                 <a:ea typeface="Pretendard" pitchFamily="34" charset="-122"/>
@@ -22262,7 +22262,7 @@
             <a:r>
               <a:rPr lang="en-US" sz="1800" dirty="0">
                 <a:solidFill>
-                  <a:srgbClr val="111827"/>
+                  <a:srgbClr val="111111"/>
                 </a:solidFill>
                 <a:latin typeface="Pretendard" pitchFamily="34" charset="0"/>
                 <a:ea typeface="Pretendard" pitchFamily="34" charset="-122"/>
@@ -22304,7 +22304,7 @@
             <a:r>
               <a:rPr lang="en-US" sz="1800" dirty="0">
                 <a:solidFill>
-                  <a:srgbClr val="111827"/>
+                  <a:srgbClr val="111111"/>
                 </a:solidFill>
                 <a:latin typeface="Pretendard" pitchFamily="34" charset="0"/>
                 <a:ea typeface="Pretendard" pitchFamily="34" charset="-122"/>
@@ -23265,7 +23265,7 @@
             <a:r>
               <a:rPr lang="en-US" sz="3400" b="1" dirty="0">
                 <a:solidFill>
-                  <a:srgbClr val="111827"/>
+                  <a:srgbClr val="111111"/>
                 </a:solidFill>
                 <a:latin typeface="Pretendard" pitchFamily="34" charset="0"/>
                 <a:ea typeface="Pretendard" pitchFamily="34" charset="-122"/>
@@ -23324,7 +23324,7 @@
             <a:r>
               <a:rPr lang="en-US" sz="2200" dirty="0">
                 <a:solidFill>
-                  <a:srgbClr val="111827"/>
+                  <a:srgbClr val="111111"/>
                 </a:solidFill>
                 <a:latin typeface="Pretendard" pitchFamily="34" charset="0"/>
                 <a:ea typeface="Pretendard" pitchFamily="34" charset="-122"/>
@@ -23383,7 +23383,7 @@
             <a:r>
               <a:rPr lang="en-US" sz="2200" dirty="0">
                 <a:solidFill>
-                  <a:srgbClr val="111827"/>
+                  <a:srgbClr val="111111"/>
                 </a:solidFill>
                 <a:latin typeface="Pretendard" pitchFamily="34" charset="0"/>
                 <a:ea typeface="Pretendard" pitchFamily="34" charset="-122"/>
@@ -24662,7 +24662,7 @@
             <a:r>
               <a:rPr lang="en-US" sz="3400" b="1" dirty="0">
                 <a:solidFill>
-                  <a:srgbClr val="111827"/>
+                  <a:srgbClr val="111111"/>
                 </a:solidFill>
                 <a:latin typeface="Pretendard" pitchFamily="34" charset="0"/>
                 <a:ea typeface="Pretendard" pitchFamily="34" charset="-122"/>
@@ -24778,7 +24778,7 @@
             <a:r>
               <a:rPr lang="en-US" sz="2200" dirty="0">
                 <a:solidFill>
-                  <a:srgbClr val="111827"/>
+                  <a:srgbClr val="111111"/>
                 </a:solidFill>
                 <a:latin typeface="Pretendard" pitchFamily="34" charset="0"/>
                 <a:ea typeface="Pretendard" pitchFamily="34" charset="-122"/>
@@ -24894,7 +24894,7 @@
             <a:r>
               <a:rPr lang="en-US" sz="2200" dirty="0">
                 <a:solidFill>
-                  <a:srgbClr val="111827"/>
+                  <a:srgbClr val="111111"/>
                 </a:solidFill>
                 <a:latin typeface="Pretendard" pitchFamily="34" charset="0"/>
                 <a:ea typeface="Pretendard" pitchFamily="34" charset="-122"/>
@@ -25010,7 +25010,7 @@
             <a:r>
               <a:rPr lang="en-US" sz="2200" dirty="0">
                 <a:solidFill>
-                  <a:srgbClr val="111827"/>
+                  <a:srgbClr val="111111"/>
                 </a:solidFill>
                 <a:latin typeface="Pretendard" pitchFamily="34" charset="0"/>
                 <a:ea typeface="Pretendard" pitchFamily="34" charset="-122"/>
@@ -25126,7 +25126,7 @@
             <a:r>
               <a:rPr lang="en-US" sz="2200" dirty="0">
                 <a:solidFill>
-                  <a:srgbClr val="111827"/>
+                  <a:srgbClr val="111111"/>
                 </a:solidFill>
                 <a:latin typeface="Pretendard" pitchFamily="34" charset="0"/>
                 <a:ea typeface="Pretendard" pitchFamily="34" charset="-122"/>
@@ -26405,7 +26405,7 @@
             <a:r>
               <a:rPr lang="en-US" sz="3400" b="1" dirty="0">
                 <a:solidFill>
-                  <a:srgbClr val="111827"/>
+                  <a:srgbClr val="111111"/>
                 </a:solidFill>
                 <a:latin typeface="Pretendard" pitchFamily="34" charset="0"/>
                 <a:ea typeface="Pretendard" pitchFamily="34" charset="-122"/>
@@ -26521,7 +26521,7 @@
             <a:r>
               <a:rPr lang="en-US" sz="2200" dirty="0">
                 <a:solidFill>
-                  <a:srgbClr val="111827"/>
+                  <a:srgbClr val="111111"/>
                 </a:solidFill>
                 <a:latin typeface="Pretendard" pitchFamily="34" charset="0"/>
                 <a:ea typeface="Pretendard" pitchFamily="34" charset="-122"/>
@@ -26637,7 +26637,7 @@
             <a:r>
               <a:rPr lang="en-US" sz="2200" dirty="0">
                 <a:solidFill>
-                  <a:srgbClr val="111827"/>
+                  <a:srgbClr val="111111"/>
                 </a:solidFill>
                 <a:latin typeface="Pretendard" pitchFamily="34" charset="0"/>
                 <a:ea typeface="Pretendard" pitchFamily="34" charset="-122"/>
@@ -26753,7 +26753,7 @@
             <a:r>
               <a:rPr lang="en-US" sz="2200" dirty="0">
                 <a:solidFill>
-                  <a:srgbClr val="111827"/>
+                  <a:srgbClr val="111111"/>
                 </a:solidFill>
                 <a:latin typeface="Pretendard" pitchFamily="34" charset="0"/>
                 <a:ea typeface="Pretendard" pitchFamily="34" charset="-122"/>
@@ -26869,7 +26869,7 @@
             <a:r>
               <a:rPr lang="en-US" sz="2200" dirty="0">
                 <a:solidFill>
-                  <a:srgbClr val="111827"/>
+                  <a:srgbClr val="111111"/>
                 </a:solidFill>
                 <a:latin typeface="Pretendard" pitchFamily="34" charset="0"/>
                 <a:ea typeface="Pretendard" pitchFamily="34" charset="-122"/>
@@ -27869,7 +27869,7 @@
             <a:r>
               <a:rPr lang="en-US" sz="3400" b="1" dirty="0">
                 <a:solidFill>
-                  <a:srgbClr val="111827"/>
+                  <a:srgbClr val="111111"/>
                 </a:solidFill>
                 <a:latin typeface="Pretendard" pitchFamily="34" charset="0"/>
                 <a:ea typeface="Pretendard" pitchFamily="34" charset="-122"/>
@@ -27928,7 +27928,7 @@
             <a:r>
               <a:rPr lang="en-US" sz="2200" dirty="0">
                 <a:solidFill>
-                  <a:srgbClr val="111827"/>
+                  <a:srgbClr val="111111"/>
                 </a:solidFill>
                 <a:latin typeface="Pretendard" pitchFamily="34" charset="0"/>
                 <a:ea typeface="Pretendard" pitchFamily="34" charset="-122"/>
@@ -27968,7 +27968,7 @@
             <a:r>
               <a:rPr lang="en-US" sz="2200" dirty="0">
                 <a:solidFill>
-                  <a:srgbClr val="111827"/>
+                  <a:srgbClr val="111111"/>
                 </a:solidFill>
                 <a:latin typeface="Pretendard" pitchFamily="34" charset="0"/>
                 <a:ea typeface="Pretendard" pitchFamily="34" charset="-122"/>
@@ -28008,7 +28008,7 @@
             <a:r>
               <a:rPr lang="en-US" sz="2200" dirty="0">
                 <a:solidFill>
-                  <a:srgbClr val="111827"/>
+                  <a:srgbClr val="111111"/>
                 </a:solidFill>
                 <a:latin typeface="Pretendard" pitchFamily="34" charset="0"/>
                 <a:ea typeface="Pretendard" pitchFamily="34" charset="-122"/>
@@ -29170,7 +29170,7 @@
             <a:r>
               <a:rPr lang="en-US" sz="3400" b="1" dirty="0">
                 <a:solidFill>
-                  <a:srgbClr val="111827"/>
+                  <a:srgbClr val="111111"/>
                 </a:solidFill>
                 <a:latin typeface="Pretendard" pitchFamily="34" charset="0"/>
                 <a:ea typeface="Pretendard" pitchFamily="34" charset="-122"/>
@@ -29374,7 +29374,7 @@
                       <a:r>
                         <a:rPr lang="en-US" sz="1800" b="1" dirty="0">
                           <a:solidFill>
-                            <a:srgbClr val="111827"/>
+                            <a:srgbClr val="111111"/>
                           </a:solidFill>
                           <a:latin typeface="Pretendard" pitchFamily="34" charset="0"/>
                           <a:ea typeface="Pretendard" pitchFamily="34" charset="-122"/>
@@ -29439,7 +29439,7 @@
                       <a:r>
                         <a:rPr lang="en-US" sz="1800" dirty="0">
                           <a:solidFill>
-                            <a:srgbClr val="111827"/>
+                            <a:srgbClr val="111111"/>
                           </a:solidFill>
                           <a:latin typeface="Pretendard" pitchFamily="34" charset="0"/>
                           <a:ea typeface="Pretendard" pitchFamily="34" charset="-122"/>
@@ -29506,7 +29506,7 @@
                       <a:r>
                         <a:rPr lang="en-US" sz="1800" b="1" dirty="0">
                           <a:solidFill>
-                            <a:srgbClr val="111827"/>
+                            <a:srgbClr val="111111"/>
                           </a:solidFill>
                           <a:latin typeface="Pretendard" pitchFamily="34" charset="0"/>
                           <a:ea typeface="Pretendard" pitchFamily="34" charset="-122"/>
@@ -29576,7 +29576,7 @@
                       <a:r>
                         <a:rPr lang="en-US" sz="1800" dirty="0">
                           <a:solidFill>
-                            <a:srgbClr val="111827"/>
+                            <a:srgbClr val="111111"/>
                           </a:solidFill>
                           <a:latin typeface="Pretendard" pitchFamily="34" charset="0"/>
                           <a:ea typeface="Pretendard" pitchFamily="34" charset="-122"/>
@@ -29687,7 +29687,7 @@
             <a:r>
               <a:rPr lang="en-US" sz="1800" dirty="0">
                 <a:solidFill>
-                  <a:srgbClr val="111827"/>
+                  <a:srgbClr val="111111"/>
                 </a:solidFill>
                 <a:latin typeface="Pretendard" pitchFamily="34" charset="0"/>
                 <a:ea typeface="Pretendard" pitchFamily="34" charset="-122"/>
@@ -29727,7 +29727,7 @@
             <a:r>
               <a:rPr lang="en-US" sz="1800" dirty="0">
                 <a:solidFill>
-                  <a:srgbClr val="111827"/>
+                  <a:srgbClr val="111111"/>
                 </a:solidFill>
                 <a:latin typeface="Pretendard" pitchFamily="34" charset="0"/>
                 <a:ea typeface="Pretendard" pitchFamily="34" charset="-122"/>
@@ -30972,7 +30972,7 @@
             <a:r>
               <a:rPr lang="en-US" sz="3400" b="1" dirty="0">
                 <a:solidFill>
-                  <a:srgbClr val="111827"/>
+                  <a:srgbClr val="111111"/>
                 </a:solidFill>
                 <a:latin typeface="Pretendard" pitchFamily="34" charset="0"/>
                 <a:ea typeface="Pretendard" pitchFamily="34" charset="-122"/>
@@ -31088,7 +31088,7 @@
             <a:r>
               <a:rPr lang="en-US" sz="2200" dirty="0">
                 <a:solidFill>
-                  <a:srgbClr val="111827"/>
+                  <a:srgbClr val="111111"/>
                 </a:solidFill>
                 <a:latin typeface="Pretendard" pitchFamily="34" charset="0"/>
                 <a:ea typeface="Pretendard" pitchFamily="34" charset="-122"/>
@@ -31204,7 +31204,7 @@
             <a:r>
               <a:rPr lang="en-US" sz="2200" dirty="0">
                 <a:solidFill>
-                  <a:srgbClr val="111827"/>
+                  <a:srgbClr val="111111"/>
                 </a:solidFill>
                 <a:latin typeface="Pretendard" pitchFamily="34" charset="0"/>
                 <a:ea typeface="Pretendard" pitchFamily="34" charset="-122"/>
@@ -31320,7 +31320,7 @@
             <a:r>
               <a:rPr lang="en-US" sz="2200" dirty="0">
                 <a:solidFill>
-                  <a:srgbClr val="111827"/>
+                  <a:srgbClr val="111111"/>
                 </a:solidFill>
                 <a:latin typeface="Pretendard" pitchFamily="34" charset="0"/>
                 <a:ea typeface="Pretendard" pitchFamily="34" charset="-122"/>
@@ -32308,7 +32308,7 @@
             <a:r>
               <a:rPr lang="en-US" sz="3800" b="1" dirty="0">
                 <a:solidFill>
-                  <a:srgbClr val="111827"/>
+                  <a:srgbClr val="111111"/>
                 </a:solidFill>
                 <a:latin typeface="Pretendard" pitchFamily="34" charset="0"/>
                 <a:ea typeface="Pretendard" pitchFamily="34" charset="-122"/>
@@ -32350,7 +32350,7 @@
             <a:r>
               <a:rPr lang="en-US" sz="2200" dirty="0">
                 <a:solidFill>
-                  <a:srgbClr val="111827"/>
+                  <a:srgbClr val="111111"/>
                 </a:solidFill>
                 <a:latin typeface="Pretendard" pitchFamily="34" charset="0"/>
                 <a:ea typeface="Pretendard" pitchFamily="34" charset="-122"/>
@@ -33379,7 +33379,7 @@
             <a:r>
               <a:rPr lang="en-US" sz="3400" b="1" dirty="0">
                 <a:solidFill>
-                  <a:srgbClr val="111827"/>
+                  <a:srgbClr val="111111"/>
                 </a:solidFill>
                 <a:latin typeface="Pretendard" pitchFamily="34" charset="0"/>
                 <a:ea typeface="Pretendard" pitchFamily="34" charset="-122"/>
@@ -33421,7 +33421,7 @@
             <a:r>
               <a:rPr lang="en-US" sz="2200" b="1" dirty="0">
                 <a:solidFill>
-                  <a:srgbClr val="111827"/>
+                  <a:srgbClr val="111111"/>
                 </a:solidFill>
                 <a:latin typeface="Pretendard" pitchFamily="34" charset="0"/>
                 <a:ea typeface="Pretendard" pitchFamily="34" charset="-122"/>
@@ -33480,7 +33480,7 @@
             <a:r>
               <a:rPr lang="en-US" sz="2200" dirty="0">
                 <a:solidFill>
-                  <a:srgbClr val="111827"/>
+                  <a:srgbClr val="111111"/>
                 </a:solidFill>
                 <a:latin typeface="Pretendard" pitchFamily="34" charset="0"/>
                 <a:ea typeface="Pretendard" pitchFamily="34" charset="-122"/>
@@ -33520,7 +33520,7 @@
             <a:r>
               <a:rPr lang="en-US" sz="2200" dirty="0">
                 <a:solidFill>
-                  <a:srgbClr val="111827"/>
+                  <a:srgbClr val="111111"/>
                 </a:solidFill>
                 <a:latin typeface="Pretendard" pitchFamily="34" charset="0"/>
                 <a:ea typeface="Pretendard" pitchFamily="34" charset="-122"/>
@@ -33560,7 +33560,7 @@
             <a:r>
               <a:rPr lang="en-US" sz="2200" dirty="0">
                 <a:solidFill>
-                  <a:srgbClr val="111827"/>
+                  <a:srgbClr val="111111"/>
                 </a:solidFill>
                 <a:latin typeface="Pretendard" pitchFamily="34" charset="0"/>
                 <a:ea typeface="Pretendard" pitchFamily="34" charset="-122"/>
@@ -33600,7 +33600,7 @@
             <a:r>
               <a:rPr lang="en-US" sz="2200" dirty="0">
                 <a:solidFill>
-                  <a:srgbClr val="111827"/>
+                  <a:srgbClr val="111111"/>
                 </a:solidFill>
                 <a:latin typeface="Pretendard" pitchFamily="34" charset="0"/>
                 <a:ea typeface="Pretendard" pitchFamily="34" charset="-122"/>
@@ -34815,7 +34815,7 @@
             <a:r>
               <a:rPr lang="en-US" sz="3400" b="1" dirty="0">
                 <a:solidFill>
-                  <a:srgbClr val="111827"/>
+                  <a:srgbClr val="111111"/>
                 </a:solidFill>
                 <a:latin typeface="Pretendard" pitchFamily="34" charset="0"/>
                 <a:ea typeface="Pretendard" pitchFamily="34" charset="-122"/>
@@ -34931,7 +34931,7 @@
             <a:r>
               <a:rPr lang="en-US" sz="2200" dirty="0">
                 <a:solidFill>
-                  <a:srgbClr val="111827"/>
+                  <a:srgbClr val="111111"/>
                 </a:solidFill>
                 <a:latin typeface="Pretendard" pitchFamily="34" charset="0"/>
                 <a:ea typeface="Pretendard" pitchFamily="34" charset="-122"/>
@@ -35047,7 +35047,7 @@
             <a:r>
               <a:rPr lang="en-US" sz="2200" dirty="0">
                 <a:solidFill>
-                  <a:srgbClr val="111827"/>
+                  <a:srgbClr val="111111"/>
                 </a:solidFill>
                 <a:latin typeface="Pretendard" pitchFamily="34" charset="0"/>
                 <a:ea typeface="Pretendard" pitchFamily="34" charset="-122"/>
@@ -35163,7 +35163,7 @@
             <a:r>
               <a:rPr lang="en-US" sz="2200" dirty="0">
                 <a:solidFill>
-                  <a:srgbClr val="111827"/>
+                  <a:srgbClr val="111111"/>
                 </a:solidFill>
                 <a:latin typeface="Pretendard" pitchFamily="34" charset="0"/>
                 <a:ea typeface="Pretendard" pitchFamily="34" charset="-122"/>
@@ -36124,7 +36124,7 @@
             <a:r>
               <a:rPr lang="en-US" sz="3400" b="1" dirty="0">
                 <a:solidFill>
-                  <a:srgbClr val="111827"/>
+                  <a:srgbClr val="111111"/>
                 </a:solidFill>
                 <a:latin typeface="Pretendard" pitchFamily="34" charset="0"/>
                 <a:ea typeface="Pretendard" pitchFamily="34" charset="-122"/>
@@ -36183,7 +36183,7 @@
             <a:r>
               <a:rPr lang="en-US" sz="2200" dirty="0">
                 <a:solidFill>
-                  <a:srgbClr val="111827"/>
+                  <a:srgbClr val="111111"/>
                 </a:solidFill>
                 <a:latin typeface="Pretendard" pitchFamily="34" charset="0"/>
                 <a:ea typeface="Pretendard" pitchFamily="34" charset="-122"/>
@@ -36242,7 +36242,7 @@
             <a:r>
               <a:rPr lang="en-US" sz="2200" dirty="0">
                 <a:solidFill>
-                  <a:srgbClr val="111827"/>
+                  <a:srgbClr val="111111"/>
                 </a:solidFill>
                 <a:latin typeface="Pretendard" pitchFamily="34" charset="0"/>
                 <a:ea typeface="Pretendard" pitchFamily="34" charset="-122"/>
@@ -37457,7 +37457,7 @@
             <a:r>
               <a:rPr lang="en-US" sz="3400" b="1" dirty="0">
                 <a:solidFill>
-                  <a:srgbClr val="111827"/>
+                  <a:srgbClr val="111111"/>
                 </a:solidFill>
                 <a:latin typeface="Pretendard" pitchFamily="34" charset="0"/>
                 <a:ea typeface="Pretendard" pitchFamily="34" charset="-122"/>
@@ -37573,7 +37573,7 @@
             <a:r>
               <a:rPr lang="en-US" sz="2200" dirty="0">
                 <a:solidFill>
-                  <a:srgbClr val="111827"/>
+                  <a:srgbClr val="111111"/>
                 </a:solidFill>
                 <a:latin typeface="Pretendard" pitchFamily="34" charset="0"/>
                 <a:ea typeface="Pretendard" pitchFamily="34" charset="-122"/>
@@ -37689,7 +37689,7 @@
             <a:r>
               <a:rPr lang="en-US" sz="2200" dirty="0">
                 <a:solidFill>
-                  <a:srgbClr val="111827"/>
+                  <a:srgbClr val="111111"/>
                 </a:solidFill>
                 <a:latin typeface="Pretendard" pitchFamily="34" charset="0"/>
                 <a:ea typeface="Pretendard" pitchFamily="34" charset="-122"/>
@@ -37805,7 +37805,7 @@
             <a:r>
               <a:rPr lang="en-US" sz="2200" dirty="0">
                 <a:solidFill>
-                  <a:srgbClr val="111827"/>
+                  <a:srgbClr val="111111"/>
                 </a:solidFill>
                 <a:latin typeface="Pretendard" pitchFamily="34" charset="0"/>
                 <a:ea typeface="Pretendard" pitchFamily="34" charset="-122"/>
@@ -38766,7 +38766,7 @@
             <a:r>
               <a:rPr lang="en-US" sz="3400" b="1" dirty="0">
                 <a:solidFill>
-                  <a:srgbClr val="111827"/>
+                  <a:srgbClr val="111111"/>
                 </a:solidFill>
                 <a:latin typeface="Pretendard" pitchFamily="34" charset="0"/>
                 <a:ea typeface="Pretendard" pitchFamily="34" charset="-122"/>
@@ -38825,7 +38825,7 @@
             <a:r>
               <a:rPr lang="en-US" sz="2200" dirty="0">
                 <a:solidFill>
-                  <a:srgbClr val="111827"/>
+                  <a:srgbClr val="111111"/>
                 </a:solidFill>
                 <a:latin typeface="Pretendard" pitchFamily="34" charset="0"/>
                 <a:ea typeface="Pretendard" pitchFamily="34" charset="-122"/>
@@ -38884,7 +38884,7 @@
             <a:r>
               <a:rPr lang="en-US" sz="2200" dirty="0">
                 <a:solidFill>
-                  <a:srgbClr val="111827"/>
+                  <a:srgbClr val="111111"/>
                 </a:solidFill>
                 <a:latin typeface="Pretendard" pitchFamily="34" charset="0"/>
                 <a:ea typeface="Pretendard" pitchFamily="34" charset="-122"/>
@@ -39845,7 +39845,7 @@
             <a:r>
               <a:rPr lang="en-US" sz="3400" b="1" dirty="0">
                 <a:solidFill>
-                  <a:srgbClr val="111827"/>
+                  <a:srgbClr val="111111"/>
                 </a:solidFill>
                 <a:latin typeface="Pretendard" pitchFamily="34" charset="0"/>
                 <a:ea typeface="Pretendard" pitchFamily="34" charset="-122"/>
@@ -39904,7 +39904,7 @@
             <a:r>
               <a:rPr lang="en-US" sz="2200" dirty="0">
                 <a:solidFill>
-                  <a:srgbClr val="111827"/>
+                  <a:srgbClr val="111111"/>
                 </a:solidFill>
                 <a:latin typeface="Pretendard" pitchFamily="34" charset="0"/>
                 <a:ea typeface="Pretendard" pitchFamily="34" charset="-122"/>
@@ -39963,7 +39963,7 @@
             <a:r>
               <a:rPr lang="en-US" sz="2200" dirty="0">
                 <a:solidFill>
-                  <a:srgbClr val="111827"/>
+                  <a:srgbClr val="111111"/>
                 </a:solidFill>
                 <a:latin typeface="Pretendard" pitchFamily="34" charset="0"/>
                 <a:ea typeface="Pretendard" pitchFamily="34" charset="-122"/>
@@ -39988,13 +39988,13 @@
   <a:themeElements>
     <a:clrScheme name="Office">
       <a:dk1>
-        <a:srgbClr val="111827"/>
+        <a:srgbClr val="111111"/>
       </a:dk1>
       <a:lt1>
         <a:srgbClr val="F8FAFC"/>
       </a:lt1>
       <a:dk2>
-        <a:srgbClr val="475569"/>
+        <a:srgbClr val="919191"/>
       </a:dk2>
       <a:lt2>
         <a:srgbClr val="FFFFFF"/>
@@ -40009,13 +40009,13 @@
         <a:srgbClr val="0F766E"/>
       </a:accent3>
       <a:accent4>
-        <a:srgbClr val="475569"/>
+        <a:srgbClr val="919191"/>
       </a:accent4>
       <a:accent5>
         <a:srgbClr val="CBD5E1"/>
       </a:accent5>
       <a:accent6>
-        <a:srgbClr val="111827"/>
+        <a:srgbClr val="111111"/>
       </a:accent6>
       <a:hlink>
         <a:srgbClr val="0F766E"/>

--- a/docs/theme-preview/pptx/bentogrid.pptx
+++ b/docs/theme-preview/pptx/bentogrid.pptx
@@ -4377,6 +4377,68 @@
         </p:nvSpPr>
         <p:spPr>
           <a:xfrm>
+            <a:off x="658368" y="603504"/>
+            <a:ext cx="1005840" cy="292608"/>
+          </a:xfrm>
+          <a:prstGeom prst="roundRect">
+            <a:avLst>
+              <a:gd name="adj" fmla="val 12500"/>
+            </a:avLst>
+          </a:prstGeom>
+          <a:solidFill>
+            <a:srgbClr val="0F766E">
+              <a:alpha val="28000"/>
+            </a:srgbClr>
+          </a:solidFill>
+          <a:ln w="12700">
+            <a:solidFill>
+              <a:srgbClr val="0F766E">
+                <a:alpha val="0"/>
+              </a:srgbClr>
+            </a:solidFill>
+            <a:prstDash val="solid"/>
+          </a:ln>
+        </p:spPr>
+      </p:sp>
+      <p:sp>
+        <p:nvSpPr>
+          <p:cNvPr id="34" name="Shape 32"/>
+          <p:cNvSpPr/>
+          <p:nvPr/>
+        </p:nvSpPr>
+        <p:spPr>
+          <a:xfrm>
+            <a:off x="9859975" y="5980176"/>
+            <a:ext cx="1591056" cy="292608"/>
+          </a:xfrm>
+          <a:prstGeom prst="roundRect">
+            <a:avLst>
+              <a:gd name="adj" fmla="val 12500"/>
+            </a:avLst>
+          </a:prstGeom>
+          <a:solidFill>
+            <a:srgbClr val="F0AA11">
+              <a:alpha val="18000"/>
+            </a:srgbClr>
+          </a:solidFill>
+          <a:ln w="12700">
+            <a:solidFill>
+              <a:srgbClr val="F0AA11">
+                <a:alpha val="0"/>
+              </a:srgbClr>
+            </a:solidFill>
+            <a:prstDash val="solid"/>
+          </a:ln>
+        </p:spPr>
+      </p:sp>
+      <p:sp>
+        <p:nvSpPr>
+          <p:cNvPr id="35" name="Shape 33"/>
+          <p:cNvSpPr/>
+          <p:nvPr/>
+        </p:nvSpPr>
+        <p:spPr>
+          <a:xfrm>
             <a:off x="10600639" y="457200"/>
             <a:ext cx="914400" cy="256032"/>
           </a:xfrm>
@@ -4402,7 +4464,7 @@
       </p:sp>
       <p:sp>
         <p:nvSpPr>
-          <p:cNvPr id="34" name="Shape 32"/>
+          <p:cNvPr id="36" name="Shape 34"/>
           <p:cNvSpPr/>
           <p:nvPr/>
         </p:nvSpPr>
@@ -4429,7 +4491,7 @@
       </p:sp>
       <p:sp>
         <p:nvSpPr>
-          <p:cNvPr id="35" name="Shape 33"/>
+          <p:cNvPr id="37" name="Shape 35"/>
           <p:cNvSpPr/>
           <p:nvPr/>
         </p:nvSpPr>
@@ -4456,7 +4518,7 @@
       </p:sp>
       <p:sp>
         <p:nvSpPr>
-          <p:cNvPr id="36" name="Shape 34"/>
+          <p:cNvPr id="38" name="Shape 36"/>
           <p:cNvSpPr/>
           <p:nvPr/>
         </p:nvSpPr>
@@ -4485,7 +4547,7 @@
       </p:sp>
       <p:sp>
         <p:nvSpPr>
-          <p:cNvPr id="37" name="mdpr:mdpr-design-grammar-b3a462:title:__title:mdpr-design-grammar-b3a462"/>
+          <p:cNvPr id="39" name="mdpr:mdpr-design-grammar-b3a462:title:__title:mdpr-design-grammar-b3a462"/>
           <p:cNvSpPr txBox="1"/>
           <p:nvPr/>
         </p:nvSpPr>
@@ -5340,6 +5402,68 @@
         </p:nvSpPr>
         <p:spPr>
           <a:xfrm>
+            <a:off x="658368" y="603504"/>
+            <a:ext cx="1005840" cy="292608"/>
+          </a:xfrm>
+          <a:prstGeom prst="roundRect">
+            <a:avLst>
+              <a:gd name="adj" fmla="val 12500"/>
+            </a:avLst>
+          </a:prstGeom>
+          <a:solidFill>
+            <a:srgbClr val="0F766E">
+              <a:alpha val="28000"/>
+            </a:srgbClr>
+          </a:solidFill>
+          <a:ln w="12700">
+            <a:solidFill>
+              <a:srgbClr val="0F766E">
+                <a:alpha val="0"/>
+              </a:srgbClr>
+            </a:solidFill>
+            <a:prstDash val="solid"/>
+          </a:ln>
+        </p:spPr>
+      </p:sp>
+      <p:sp>
+        <p:nvSpPr>
+          <p:cNvPr id="34" name="Shape 32"/>
+          <p:cNvSpPr/>
+          <p:nvPr/>
+        </p:nvSpPr>
+        <p:spPr>
+          <a:xfrm>
+            <a:off x="9859975" y="5980176"/>
+            <a:ext cx="1591056" cy="292608"/>
+          </a:xfrm>
+          <a:prstGeom prst="roundRect">
+            <a:avLst>
+              <a:gd name="adj" fmla="val 12500"/>
+            </a:avLst>
+          </a:prstGeom>
+          <a:solidFill>
+            <a:srgbClr val="F0AA11">
+              <a:alpha val="18000"/>
+            </a:srgbClr>
+          </a:solidFill>
+          <a:ln w="12700">
+            <a:solidFill>
+              <a:srgbClr val="F0AA11">
+                <a:alpha val="0"/>
+              </a:srgbClr>
+            </a:solidFill>
+            <a:prstDash val="solid"/>
+          </a:ln>
+        </p:spPr>
+      </p:sp>
+      <p:sp>
+        <p:nvSpPr>
+          <p:cNvPr id="35" name="Shape 33"/>
+          <p:cNvSpPr/>
+          <p:nvPr/>
+        </p:nvSpPr>
+        <p:spPr>
+          <a:xfrm>
             <a:off x="10600639" y="457200"/>
             <a:ext cx="914400" cy="256032"/>
           </a:xfrm>
@@ -5365,7 +5489,7 @@
       </p:sp>
       <p:sp>
         <p:nvSpPr>
-          <p:cNvPr id="34" name="Shape 32"/>
+          <p:cNvPr id="36" name="Shape 34"/>
           <p:cNvSpPr/>
           <p:nvPr/>
         </p:nvSpPr>
@@ -5392,7 +5516,7 @@
       </p:sp>
       <p:sp>
         <p:nvSpPr>
-          <p:cNvPr id="35" name="Shape 33"/>
+          <p:cNvPr id="37" name="Shape 35"/>
           <p:cNvSpPr/>
           <p:nvPr/>
         </p:nvSpPr>
@@ -5419,7 +5543,7 @@
       </p:sp>
       <p:sp>
         <p:nvSpPr>
-          <p:cNvPr id="36" name="Shape 34"/>
+          <p:cNvPr id="38" name="Shape 36"/>
           <p:cNvSpPr/>
           <p:nvPr/>
         </p:nvSpPr>
@@ -5446,7 +5570,7 @@
       </p:sp>
       <p:sp>
         <p:nvSpPr>
-          <p:cNvPr id="37" name="mdpr:2-2-a9df10:title:__title:2-2-a9df10"/>
+          <p:cNvPr id="39" name="mdpr:2-2-a9df10:title:__title:2-2-a9df10"/>
           <p:cNvSpPr txBox="1"/>
           <p:nvPr/>
         </p:nvSpPr>
@@ -5488,7 +5612,7 @@
       </p:sp>
       <p:sp>
         <p:nvSpPr>
-          <p:cNvPr id="38" name="mdpr:2-2-a9df10:left:block-10-chunk-2"/>
+          <p:cNvPr id="40" name="mdpr:2-2-a9df10:left:block-10-chunk-2"/>
           <p:cNvSpPr txBox="1"/>
           <p:nvPr/>
         </p:nvSpPr>
@@ -5547,7 +5671,7 @@
       </p:sp>
       <p:sp>
         <p:nvSpPr>
-          <p:cNvPr id="39" name="mdpr:2-2-a9df10:right:block-10-chunk-2"/>
+          <p:cNvPr id="41" name="mdpr:2-2-a9df10:right:block-10-chunk-2"/>
           <p:cNvSpPr txBox="1"/>
           <p:nvPr/>
         </p:nvSpPr>
@@ -6419,6 +6543,68 @@
         </p:nvSpPr>
         <p:spPr>
           <a:xfrm>
+            <a:off x="658368" y="603504"/>
+            <a:ext cx="1005840" cy="292608"/>
+          </a:xfrm>
+          <a:prstGeom prst="roundRect">
+            <a:avLst>
+              <a:gd name="adj" fmla="val 12500"/>
+            </a:avLst>
+          </a:prstGeom>
+          <a:solidFill>
+            <a:srgbClr val="0F766E">
+              <a:alpha val="28000"/>
+            </a:srgbClr>
+          </a:solidFill>
+          <a:ln w="12700">
+            <a:solidFill>
+              <a:srgbClr val="0F766E">
+                <a:alpha val="0"/>
+              </a:srgbClr>
+            </a:solidFill>
+            <a:prstDash val="solid"/>
+          </a:ln>
+        </p:spPr>
+      </p:sp>
+      <p:sp>
+        <p:nvSpPr>
+          <p:cNvPr id="34" name="Shape 32"/>
+          <p:cNvSpPr/>
+          <p:nvPr/>
+        </p:nvSpPr>
+        <p:spPr>
+          <a:xfrm>
+            <a:off x="9859975" y="5980176"/>
+            <a:ext cx="1591056" cy="292608"/>
+          </a:xfrm>
+          <a:prstGeom prst="roundRect">
+            <a:avLst>
+              <a:gd name="adj" fmla="val 12500"/>
+            </a:avLst>
+          </a:prstGeom>
+          <a:solidFill>
+            <a:srgbClr val="F0AA11">
+              <a:alpha val="18000"/>
+            </a:srgbClr>
+          </a:solidFill>
+          <a:ln w="12700">
+            <a:solidFill>
+              <a:srgbClr val="F0AA11">
+                <a:alpha val="0"/>
+              </a:srgbClr>
+            </a:solidFill>
+            <a:prstDash val="solid"/>
+          </a:ln>
+        </p:spPr>
+      </p:sp>
+      <p:sp>
+        <p:nvSpPr>
+          <p:cNvPr id="35" name="Shape 33"/>
+          <p:cNvSpPr/>
+          <p:nvPr/>
+        </p:nvSpPr>
+        <p:spPr>
+          <a:xfrm>
             <a:off x="10600639" y="457200"/>
             <a:ext cx="914400" cy="256032"/>
           </a:xfrm>
@@ -6444,7 +6630,7 @@
       </p:sp>
       <p:sp>
         <p:nvSpPr>
-          <p:cNvPr id="34" name="Shape 32"/>
+          <p:cNvPr id="36" name="Shape 34"/>
           <p:cNvSpPr/>
           <p:nvPr/>
         </p:nvSpPr>
@@ -6471,7 +6657,7 @@
       </p:sp>
       <p:sp>
         <p:nvSpPr>
-          <p:cNvPr id="35" name="mdpr:pipeline-diagram-51792c:title:__title:pipeline-diagram-51792c"/>
+          <p:cNvPr id="37" name="mdpr:pipeline-diagram-51792c:title:__title:pipeline-diagram-51792c"/>
           <p:cNvSpPr txBox="1"/>
           <p:nvPr/>
         </p:nvSpPr>
@@ -6513,7 +6699,7 @@
       </p:sp>
       <p:sp>
         <p:nvSpPr>
-          <p:cNvPr id="36" name="Shape 34"/>
+          <p:cNvPr id="38" name="Shape 36"/>
           <p:cNvSpPr/>
           <p:nvPr/>
         </p:nvSpPr>
@@ -6537,7 +6723,7 @@
       </p:sp>
       <p:sp>
         <p:nvSpPr>
-          <p:cNvPr id="37" name="Shape 35"/>
+          <p:cNvPr id="39" name="Shape 37"/>
           <p:cNvSpPr/>
           <p:nvPr/>
         </p:nvSpPr>
@@ -6561,7 +6747,7 @@
       </p:sp>
       <p:sp>
         <p:nvSpPr>
-          <p:cNvPr id="38" name="Shape 36"/>
+          <p:cNvPr id="40" name="Shape 38"/>
           <p:cNvSpPr/>
           <p:nvPr/>
         </p:nvSpPr>
@@ -6585,7 +6771,7 @@
       </p:sp>
       <p:sp>
         <p:nvSpPr>
-          <p:cNvPr id="39" name="Shape 37"/>
+          <p:cNvPr id="41" name="Shape 39"/>
           <p:cNvSpPr/>
           <p:nvPr/>
         </p:nvSpPr>
@@ -6609,7 +6795,7 @@
       </p:sp>
       <p:sp>
         <p:nvSpPr>
-          <p:cNvPr id="40" name="Shape 38"/>
+          <p:cNvPr id="42" name="Shape 40"/>
           <p:cNvSpPr/>
           <p:nvPr/>
         </p:nvSpPr>
@@ -6633,7 +6819,7 @@
       </p:sp>
       <p:sp>
         <p:nvSpPr>
-          <p:cNvPr id="41" name="Shape 39"/>
+          <p:cNvPr id="43" name="Shape 41"/>
           <p:cNvSpPr/>
           <p:nvPr/>
         </p:nvSpPr>
@@ -6667,7 +6853,7 @@
       </p:sp>
       <p:sp>
         <p:nvSpPr>
-          <p:cNvPr id="42" name="Shape 40"/>
+          <p:cNvPr id="44" name="Shape 42"/>
           <p:cNvSpPr/>
           <p:nvPr/>
         </p:nvSpPr>
@@ -6694,7 +6880,7 @@
       </p:sp>
       <p:sp>
         <p:nvSpPr>
-          <p:cNvPr id="43" name="Shape 41"/>
+          <p:cNvPr id="45" name="Shape 43"/>
           <p:cNvSpPr/>
           <p:nvPr/>
         </p:nvSpPr>
@@ -6721,7 +6907,7 @@
       </p:sp>
       <p:sp>
         <p:nvSpPr>
-          <p:cNvPr id="44" name="Text 42"/>
+          <p:cNvPr id="46" name="Text 44"/>
           <p:cNvSpPr txBox="1"/>
           <p:nvPr/>
         </p:nvSpPr>
@@ -6765,7 +6951,7 @@
       </p:sp>
       <p:sp>
         <p:nvSpPr>
-          <p:cNvPr id="45" name="Text 43"/>
+          <p:cNvPr id="47" name="Text 45"/>
           <p:cNvSpPr txBox="1"/>
           <p:nvPr/>
         </p:nvSpPr>
@@ -6809,7 +6995,7 @@
       </p:sp>
       <p:sp>
         <p:nvSpPr>
-          <p:cNvPr id="46" name="Shape 44"/>
+          <p:cNvPr id="48" name="Shape 46"/>
           <p:cNvSpPr/>
           <p:nvPr/>
         </p:nvSpPr>
@@ -6843,7 +7029,7 @@
       </p:sp>
       <p:sp>
         <p:nvSpPr>
-          <p:cNvPr id="47" name="Shape 45"/>
+          <p:cNvPr id="49" name="Shape 47"/>
           <p:cNvSpPr/>
           <p:nvPr/>
         </p:nvSpPr>
@@ -6870,7 +7056,7 @@
       </p:sp>
       <p:sp>
         <p:nvSpPr>
-          <p:cNvPr id="48" name="Shape 46"/>
+          <p:cNvPr id="50" name="Shape 48"/>
           <p:cNvSpPr/>
           <p:nvPr/>
         </p:nvSpPr>
@@ -6897,7 +7083,7 @@
       </p:sp>
       <p:sp>
         <p:nvSpPr>
-          <p:cNvPr id="49" name="Text 47"/>
+          <p:cNvPr id="51" name="Text 49"/>
           <p:cNvSpPr txBox="1"/>
           <p:nvPr/>
         </p:nvSpPr>
@@ -6941,7 +7127,7 @@
       </p:sp>
       <p:sp>
         <p:nvSpPr>
-          <p:cNvPr id="50" name="Text 48"/>
+          <p:cNvPr id="52" name="Text 50"/>
           <p:cNvSpPr txBox="1"/>
           <p:nvPr/>
         </p:nvSpPr>
@@ -6985,7 +7171,7 @@
       </p:sp>
       <p:sp>
         <p:nvSpPr>
-          <p:cNvPr id="51" name="Shape 49"/>
+          <p:cNvPr id="53" name="Shape 51"/>
           <p:cNvSpPr/>
           <p:nvPr/>
         </p:nvSpPr>
@@ -7019,7 +7205,7 @@
       </p:sp>
       <p:sp>
         <p:nvSpPr>
-          <p:cNvPr id="52" name="Shape 50"/>
+          <p:cNvPr id="54" name="Shape 52"/>
           <p:cNvSpPr/>
           <p:nvPr/>
         </p:nvSpPr>
@@ -7046,7 +7232,7 @@
       </p:sp>
       <p:sp>
         <p:nvSpPr>
-          <p:cNvPr id="53" name="Shape 51"/>
+          <p:cNvPr id="55" name="Shape 53"/>
           <p:cNvSpPr/>
           <p:nvPr/>
         </p:nvSpPr>
@@ -7073,7 +7259,7 @@
       </p:sp>
       <p:sp>
         <p:nvSpPr>
-          <p:cNvPr id="54" name="Text 52"/>
+          <p:cNvPr id="56" name="Text 54"/>
           <p:cNvSpPr txBox="1"/>
           <p:nvPr/>
         </p:nvSpPr>
@@ -7117,7 +7303,7 @@
       </p:sp>
       <p:sp>
         <p:nvSpPr>
-          <p:cNvPr id="55" name="Text 53"/>
+          <p:cNvPr id="57" name="Text 55"/>
           <p:cNvSpPr txBox="1"/>
           <p:nvPr/>
         </p:nvSpPr>
@@ -7161,7 +7347,7 @@
       </p:sp>
       <p:sp>
         <p:nvSpPr>
-          <p:cNvPr id="56" name="Shape 54"/>
+          <p:cNvPr id="58" name="Shape 56"/>
           <p:cNvSpPr/>
           <p:nvPr/>
         </p:nvSpPr>
@@ -7195,7 +7381,7 @@
       </p:sp>
       <p:sp>
         <p:nvSpPr>
-          <p:cNvPr id="57" name="Shape 55"/>
+          <p:cNvPr id="59" name="Shape 57"/>
           <p:cNvSpPr/>
           <p:nvPr/>
         </p:nvSpPr>
@@ -7222,7 +7408,7 @@
       </p:sp>
       <p:sp>
         <p:nvSpPr>
-          <p:cNvPr id="58" name="Shape 56"/>
+          <p:cNvPr id="60" name="Shape 58"/>
           <p:cNvSpPr/>
           <p:nvPr/>
         </p:nvSpPr>
@@ -7249,7 +7435,7 @@
       </p:sp>
       <p:sp>
         <p:nvSpPr>
-          <p:cNvPr id="59" name="Text 57"/>
+          <p:cNvPr id="61" name="Text 59"/>
           <p:cNvSpPr txBox="1"/>
           <p:nvPr/>
         </p:nvSpPr>
@@ -7293,7 +7479,7 @@
       </p:sp>
       <p:sp>
         <p:nvSpPr>
-          <p:cNvPr id="60" name="Text 58"/>
+          <p:cNvPr id="62" name="Text 60"/>
           <p:cNvSpPr txBox="1"/>
           <p:nvPr/>
         </p:nvSpPr>
@@ -7337,7 +7523,7 @@
       </p:sp>
       <p:sp>
         <p:nvSpPr>
-          <p:cNvPr id="61" name="Shape 59"/>
+          <p:cNvPr id="63" name="Shape 61"/>
           <p:cNvSpPr/>
           <p:nvPr/>
         </p:nvSpPr>
@@ -7371,7 +7557,7 @@
       </p:sp>
       <p:sp>
         <p:nvSpPr>
-          <p:cNvPr id="62" name="Shape 60"/>
+          <p:cNvPr id="64" name="Shape 62"/>
           <p:cNvSpPr/>
           <p:nvPr/>
         </p:nvSpPr>
@@ -7398,7 +7584,7 @@
       </p:sp>
       <p:sp>
         <p:nvSpPr>
-          <p:cNvPr id="63" name="Shape 61"/>
+          <p:cNvPr id="65" name="Shape 63"/>
           <p:cNvSpPr/>
           <p:nvPr/>
         </p:nvSpPr>
@@ -7425,7 +7611,7 @@
       </p:sp>
       <p:sp>
         <p:nvSpPr>
-          <p:cNvPr id="64" name="Text 62"/>
+          <p:cNvPr id="66" name="Text 64"/>
           <p:cNvSpPr txBox="1"/>
           <p:nvPr/>
         </p:nvSpPr>
@@ -7469,7 +7655,7 @@
       </p:sp>
       <p:sp>
         <p:nvSpPr>
-          <p:cNvPr id="65" name="Text 63"/>
+          <p:cNvPr id="67" name="Text 65"/>
           <p:cNvSpPr txBox="1"/>
           <p:nvPr/>
         </p:nvSpPr>
@@ -7513,7 +7699,7 @@
       </p:sp>
       <p:sp>
         <p:nvSpPr>
-          <p:cNvPr id="66" name="Shape 64"/>
+          <p:cNvPr id="68" name="Shape 66"/>
           <p:cNvSpPr/>
           <p:nvPr/>
         </p:nvSpPr>
@@ -7547,7 +7733,7 @@
       </p:sp>
       <p:sp>
         <p:nvSpPr>
-          <p:cNvPr id="67" name="Shape 65"/>
+          <p:cNvPr id="69" name="Shape 67"/>
           <p:cNvSpPr/>
           <p:nvPr/>
         </p:nvSpPr>
@@ -7574,7 +7760,7 @@
       </p:sp>
       <p:sp>
         <p:nvSpPr>
-          <p:cNvPr id="68" name="Shape 66"/>
+          <p:cNvPr id="70" name="Shape 68"/>
           <p:cNvSpPr/>
           <p:nvPr/>
         </p:nvSpPr>
@@ -7601,7 +7787,7 @@
       </p:sp>
       <p:sp>
         <p:nvSpPr>
-          <p:cNvPr id="69" name="Text 67"/>
+          <p:cNvPr id="71" name="Text 69"/>
           <p:cNvSpPr txBox="1"/>
           <p:nvPr/>
         </p:nvSpPr>
@@ -7645,7 +7831,7 @@
       </p:sp>
       <p:sp>
         <p:nvSpPr>
-          <p:cNvPr id="70" name="Text 68"/>
+          <p:cNvPr id="72" name="Text 70"/>
           <p:cNvSpPr txBox="1"/>
           <p:nvPr/>
         </p:nvSpPr>
@@ -8502,6 +8688,68 @@
         </p:nvSpPr>
         <p:spPr>
           <a:xfrm>
+            <a:off x="658368" y="603504"/>
+            <a:ext cx="1005840" cy="292608"/>
+          </a:xfrm>
+          <a:prstGeom prst="roundRect">
+            <a:avLst>
+              <a:gd name="adj" fmla="val 12500"/>
+            </a:avLst>
+          </a:prstGeom>
+          <a:solidFill>
+            <a:srgbClr val="0F766E">
+              <a:alpha val="28000"/>
+            </a:srgbClr>
+          </a:solidFill>
+          <a:ln w="12700">
+            <a:solidFill>
+              <a:srgbClr val="0F766E">
+                <a:alpha val="0"/>
+              </a:srgbClr>
+            </a:solidFill>
+            <a:prstDash val="solid"/>
+          </a:ln>
+        </p:spPr>
+      </p:sp>
+      <p:sp>
+        <p:nvSpPr>
+          <p:cNvPr id="34" name="Shape 32"/>
+          <p:cNvSpPr/>
+          <p:nvPr/>
+        </p:nvSpPr>
+        <p:spPr>
+          <a:xfrm>
+            <a:off x="9859975" y="5980176"/>
+            <a:ext cx="1591056" cy="292608"/>
+          </a:xfrm>
+          <a:prstGeom prst="roundRect">
+            <a:avLst>
+              <a:gd name="adj" fmla="val 12500"/>
+            </a:avLst>
+          </a:prstGeom>
+          <a:solidFill>
+            <a:srgbClr val="F0AA11">
+              <a:alpha val="18000"/>
+            </a:srgbClr>
+          </a:solidFill>
+          <a:ln w="12700">
+            <a:solidFill>
+              <a:srgbClr val="F0AA11">
+                <a:alpha val="0"/>
+              </a:srgbClr>
+            </a:solidFill>
+            <a:prstDash val="solid"/>
+          </a:ln>
+        </p:spPr>
+      </p:sp>
+      <p:sp>
+        <p:nvSpPr>
+          <p:cNvPr id="35" name="Shape 33"/>
+          <p:cNvSpPr/>
+          <p:nvPr/>
+        </p:nvSpPr>
+        <p:spPr>
+          <a:xfrm>
             <a:off x="10600639" y="457200"/>
             <a:ext cx="914400" cy="256032"/>
           </a:xfrm>
@@ -8527,7 +8775,7 @@
       </p:sp>
       <p:sp>
         <p:nvSpPr>
-          <p:cNvPr id="34" name="Shape 32"/>
+          <p:cNvPr id="36" name="Shape 34"/>
           <p:cNvSpPr/>
           <p:nvPr/>
         </p:nvSpPr>
@@ -8554,7 +8802,7 @@
       </p:sp>
       <p:pic>
         <p:nvPicPr>
-          <p:cNvPr id="35" name="Image 0" descr="preencoded.png">    </p:cNvPr>
+          <p:cNvPr id="37" name="Image 0" descr="preencoded.png">    </p:cNvPr>
           <p:cNvPicPr>
             <a:picLocks noChangeAspect="1"/>
           </p:cNvPicPr>
@@ -8584,7 +8832,7 @@
       </p:pic>
       <p:sp>
         <p:nvSpPr>
-          <p:cNvPr id="36" name="Shape 33"/>
+          <p:cNvPr id="38" name="Shape 35"/>
           <p:cNvSpPr/>
           <p:nvPr/>
         </p:nvSpPr>
@@ -8620,7 +8868,7 @@
       </p:sp>
       <p:pic>
         <p:nvPicPr>
-          <p:cNvPr id="37" name="Image 1" descr="preencoded.png">    </p:cNvPr>
+          <p:cNvPr id="39" name="Image 1" descr="preencoded.png">    </p:cNvPr>
           <p:cNvPicPr>
             <a:picLocks noChangeAspect="1"/>
           </p:cNvPicPr>
@@ -8650,7 +8898,7 @@
       </p:pic>
       <p:sp>
         <p:nvSpPr>
-          <p:cNvPr id="38" name="Shape 34"/>
+          <p:cNvPr id="40" name="Shape 36"/>
           <p:cNvSpPr/>
           <p:nvPr/>
         </p:nvSpPr>
@@ -8686,7 +8934,7 @@
       </p:sp>
       <p:pic>
         <p:nvPicPr>
-          <p:cNvPr id="39" name="Image 2" descr="preencoded.png">    </p:cNvPr>
+          <p:cNvPr id="41" name="Image 2" descr="preencoded.png">    </p:cNvPr>
           <p:cNvPicPr>
             <a:picLocks noChangeAspect="1"/>
           </p:cNvPicPr>
@@ -8716,7 +8964,7 @@
       </p:pic>
       <p:sp>
         <p:nvSpPr>
-          <p:cNvPr id="40" name="Shape 35"/>
+          <p:cNvPr id="42" name="Shape 37"/>
           <p:cNvSpPr/>
           <p:nvPr/>
         </p:nvSpPr>
@@ -8752,7 +9000,7 @@
       </p:sp>
       <p:pic>
         <p:nvPicPr>
-          <p:cNvPr id="41" name="Image 3" descr="preencoded.png">    </p:cNvPr>
+          <p:cNvPr id="43" name="Image 3" descr="preencoded.png">    </p:cNvPr>
           <p:cNvPicPr>
             <a:picLocks noChangeAspect="1"/>
           </p:cNvPicPr>
@@ -8782,7 +9030,7 @@
       </p:pic>
       <p:sp>
         <p:nvSpPr>
-          <p:cNvPr id="42" name="Shape 36"/>
+          <p:cNvPr id="44" name="Shape 38"/>
           <p:cNvSpPr/>
           <p:nvPr/>
         </p:nvSpPr>
@@ -8818,7 +9066,7 @@
       </p:sp>
       <p:sp>
         <p:nvSpPr>
-          <p:cNvPr id="43" name="Shape 37"/>
+          <p:cNvPr id="45" name="Shape 39"/>
           <p:cNvSpPr/>
           <p:nvPr/>
         </p:nvSpPr>
@@ -8845,7 +9093,7 @@
       </p:sp>
       <p:sp>
         <p:nvSpPr>
-          <p:cNvPr id="44" name="Shape 38"/>
+          <p:cNvPr id="46" name="Shape 40"/>
           <p:cNvSpPr/>
           <p:nvPr/>
         </p:nvSpPr>
@@ -8872,7 +9120,7 @@
       </p:sp>
       <p:sp>
         <p:nvSpPr>
-          <p:cNvPr id="45" name="Shape 39"/>
+          <p:cNvPr id="47" name="Shape 41"/>
           <p:cNvSpPr/>
           <p:nvPr/>
         </p:nvSpPr>
@@ -8899,7 +9147,7 @@
       </p:sp>
       <p:sp>
         <p:nvSpPr>
-          <p:cNvPr id="46" name="Shape 40"/>
+          <p:cNvPr id="48" name="Shape 42"/>
           <p:cNvSpPr/>
           <p:nvPr/>
         </p:nvSpPr>
@@ -8926,7 +9174,7 @@
       </p:sp>
       <p:sp>
         <p:nvSpPr>
-          <p:cNvPr id="47" name="mdpr:1-2-e3669a:title:__title:1-2-e3669a"/>
+          <p:cNvPr id="49" name="mdpr:1-2-e3669a:title:__title:1-2-e3669a"/>
           <p:cNvSpPr txBox="1"/>
           <p:nvPr/>
         </p:nvSpPr>
@@ -8968,7 +9216,7 @@
       </p:sp>
       <p:sp>
         <p:nvSpPr>
-          <p:cNvPr id="48" name="Shape 42"/>
+          <p:cNvPr id="50" name="Shape 44"/>
           <p:cNvSpPr/>
           <p:nvPr/>
         </p:nvSpPr>
@@ -8995,7 +9243,7 @@
       </p:sp>
       <p:pic>
         <p:nvPicPr>
-          <p:cNvPr id="49" name="Image 4" descr="article icon from tabler-icons (MIT)">    </p:cNvPr>
+          <p:cNvPr id="51" name="Image 4" descr="article icon from tabler-icons (MIT)">    </p:cNvPr>
           <p:cNvPicPr>
             <a:picLocks noChangeAspect="1"/>
           </p:cNvPicPr>
@@ -9025,7 +9273,7 @@
       </p:pic>
       <p:sp>
         <p:nvSpPr>
-          <p:cNvPr id="50" name="mdpr:1-2-e3669a:item-1:block-15-chunk-1"/>
+          <p:cNvPr id="52" name="mdpr:1-2-e3669a:item-1:block-15-chunk-1"/>
           <p:cNvSpPr txBox="1"/>
           <p:nvPr/>
         </p:nvSpPr>
@@ -9084,7 +9332,7 @@
       </p:sp>
       <p:sp>
         <p:nvSpPr>
-          <p:cNvPr id="51" name="Shape 44"/>
+          <p:cNvPr id="53" name="Shape 46"/>
           <p:cNvSpPr/>
           <p:nvPr/>
         </p:nvSpPr>
@@ -9111,7 +9359,7 @@
       </p:sp>
       <p:pic>
         <p:nvPicPr>
-          <p:cNvPr id="52" name="Image 5" descr="table icon from tabler-icons (MIT)">    </p:cNvPr>
+          <p:cNvPr id="54" name="Image 5" descr="table icon from tabler-icons (MIT)">    </p:cNvPr>
           <p:cNvPicPr>
             <a:picLocks noChangeAspect="1"/>
           </p:cNvPicPr>
@@ -9141,7 +9389,7 @@
       </p:pic>
       <p:sp>
         <p:nvSpPr>
-          <p:cNvPr id="53" name="mdpr:1-2-e3669a:item-2:block-15-chunk-1"/>
+          <p:cNvPr id="55" name="mdpr:1-2-e3669a:item-2:block-15-chunk-1"/>
           <p:cNvSpPr txBox="1"/>
           <p:nvPr/>
         </p:nvSpPr>
@@ -9200,7 +9448,7 @@
       </p:sp>
       <p:sp>
         <p:nvSpPr>
-          <p:cNvPr id="54" name="Shape 46"/>
+          <p:cNvPr id="56" name="Shape 48"/>
           <p:cNvSpPr/>
           <p:nvPr/>
         </p:nvSpPr>
@@ -9227,7 +9475,7 @@
       </p:sp>
       <p:pic>
         <p:nvPicPr>
-          <p:cNvPr id="55" name="Image 6" descr="chart icon from tabler-icons (MIT)">    </p:cNvPr>
+          <p:cNvPr id="57" name="Image 6" descr="chart icon from tabler-icons (MIT)">    </p:cNvPr>
           <p:cNvPicPr>
             <a:picLocks noChangeAspect="1"/>
           </p:cNvPicPr>
@@ -9257,7 +9505,7 @@
       </p:pic>
       <p:sp>
         <p:nvSpPr>
-          <p:cNvPr id="56" name="mdpr:1-2-e3669a:item-3:block-15-chunk-1"/>
+          <p:cNvPr id="58" name="mdpr:1-2-e3669a:item-3:block-15-chunk-1"/>
           <p:cNvSpPr txBox="1"/>
           <p:nvPr/>
         </p:nvSpPr>
@@ -9316,7 +9564,7 @@
       </p:sp>
       <p:sp>
         <p:nvSpPr>
-          <p:cNvPr id="57" name="Shape 48"/>
+          <p:cNvPr id="59" name="Shape 50"/>
           <p:cNvSpPr/>
           <p:nvPr/>
         </p:nvSpPr>
@@ -9343,7 +9591,7 @@
       </p:sp>
       <p:pic>
         <p:nvPicPr>
-          <p:cNvPr id="58" name="Image 7" descr="flow icon from tabler-icons (MIT)">    </p:cNvPr>
+          <p:cNvPr id="60" name="Image 7" descr="flow icon from tabler-icons (MIT)">    </p:cNvPr>
           <p:cNvPicPr>
             <a:picLocks noChangeAspect="1"/>
           </p:cNvPicPr>
@@ -9373,7 +9621,7 @@
       </p:pic>
       <p:sp>
         <p:nvSpPr>
-          <p:cNvPr id="59" name="mdpr:1-2-e3669a:item-4:block-15-chunk-1"/>
+          <p:cNvPr id="61" name="mdpr:1-2-e3669a:item-4:block-15-chunk-1"/>
           <p:cNvSpPr txBox="1"/>
           <p:nvPr/>
         </p:nvSpPr>
@@ -10245,6 +10493,68 @@
         </p:nvSpPr>
         <p:spPr>
           <a:xfrm>
+            <a:off x="658368" y="603504"/>
+            <a:ext cx="1005840" cy="292608"/>
+          </a:xfrm>
+          <a:prstGeom prst="roundRect">
+            <a:avLst>
+              <a:gd name="adj" fmla="val 12500"/>
+            </a:avLst>
+          </a:prstGeom>
+          <a:solidFill>
+            <a:srgbClr val="0F766E">
+              <a:alpha val="28000"/>
+            </a:srgbClr>
+          </a:solidFill>
+          <a:ln w="12700">
+            <a:solidFill>
+              <a:srgbClr val="0F766E">
+                <a:alpha val="0"/>
+              </a:srgbClr>
+            </a:solidFill>
+            <a:prstDash val="solid"/>
+          </a:ln>
+        </p:spPr>
+      </p:sp>
+      <p:sp>
+        <p:nvSpPr>
+          <p:cNvPr id="34" name="Shape 32"/>
+          <p:cNvSpPr/>
+          <p:nvPr/>
+        </p:nvSpPr>
+        <p:spPr>
+          <a:xfrm>
+            <a:off x="9859975" y="5980176"/>
+            <a:ext cx="1591056" cy="292608"/>
+          </a:xfrm>
+          <a:prstGeom prst="roundRect">
+            <a:avLst>
+              <a:gd name="adj" fmla="val 12500"/>
+            </a:avLst>
+          </a:prstGeom>
+          <a:solidFill>
+            <a:srgbClr val="F0AA11">
+              <a:alpha val="18000"/>
+            </a:srgbClr>
+          </a:solidFill>
+          <a:ln w="12700">
+            <a:solidFill>
+              <a:srgbClr val="F0AA11">
+                <a:alpha val="0"/>
+              </a:srgbClr>
+            </a:solidFill>
+            <a:prstDash val="solid"/>
+          </a:ln>
+        </p:spPr>
+      </p:sp>
+      <p:sp>
+        <p:nvSpPr>
+          <p:cNvPr id="35" name="Shape 33"/>
+          <p:cNvSpPr/>
+          <p:nvPr/>
+        </p:nvSpPr>
+        <p:spPr>
+          <a:xfrm>
             <a:off x="10600639" y="457200"/>
             <a:ext cx="914400" cy="256032"/>
           </a:xfrm>
@@ -10270,7 +10580,7 @@
       </p:sp>
       <p:sp>
         <p:nvSpPr>
-          <p:cNvPr id="34" name="Shape 32"/>
+          <p:cNvPr id="36" name="Shape 34"/>
           <p:cNvSpPr/>
           <p:nvPr/>
         </p:nvSpPr>
@@ -10297,7 +10607,7 @@
       </p:sp>
       <p:sp>
         <p:nvSpPr>
-          <p:cNvPr id="35" name="Shape 33"/>
+          <p:cNvPr id="37" name="Shape 35"/>
           <p:cNvSpPr/>
           <p:nvPr/>
         </p:nvSpPr>
@@ -10324,7 +10634,7 @@
       </p:sp>
       <p:sp>
         <p:nvSpPr>
-          <p:cNvPr id="36" name="Shape 34"/>
+          <p:cNvPr id="38" name="Shape 36"/>
           <p:cNvSpPr/>
           <p:nvPr/>
         </p:nvSpPr>
@@ -10351,7 +10661,7 @@
       </p:sp>
       <p:sp>
         <p:nvSpPr>
-          <p:cNvPr id="37" name="mdpr:2-2-c23e9b:title:__title:2-2-c23e9b"/>
+          <p:cNvPr id="39" name="mdpr:2-2-c23e9b:title:__title:2-2-c23e9b"/>
           <p:cNvSpPr txBox="1"/>
           <p:nvPr/>
         </p:nvSpPr>
@@ -10393,7 +10703,7 @@
       </p:sp>
       <p:sp>
         <p:nvSpPr>
-          <p:cNvPr id="38" name="mdpr:2-2-c23e9b:left:block-15-chunk-2"/>
+          <p:cNvPr id="40" name="mdpr:2-2-c23e9b:left:block-15-chunk-2"/>
           <p:cNvSpPr txBox="1"/>
           <p:nvPr/>
         </p:nvSpPr>
@@ -10452,7 +10762,7 @@
       </p:sp>
       <p:sp>
         <p:nvSpPr>
-          <p:cNvPr id="39" name="mdpr:2-2-c23e9b:right:block-15-chunk-2"/>
+          <p:cNvPr id="41" name="mdpr:2-2-c23e9b:right:block-15-chunk-2"/>
           <p:cNvSpPr txBox="1"/>
           <p:nvPr/>
         </p:nvSpPr>
@@ -11324,6 +11634,68 @@
         </p:nvSpPr>
         <p:spPr>
           <a:xfrm>
+            <a:off x="658368" y="603504"/>
+            <a:ext cx="1005840" cy="292608"/>
+          </a:xfrm>
+          <a:prstGeom prst="roundRect">
+            <a:avLst>
+              <a:gd name="adj" fmla="val 12500"/>
+            </a:avLst>
+          </a:prstGeom>
+          <a:solidFill>
+            <a:srgbClr val="0F766E">
+              <a:alpha val="28000"/>
+            </a:srgbClr>
+          </a:solidFill>
+          <a:ln w="12700">
+            <a:solidFill>
+              <a:srgbClr val="0F766E">
+                <a:alpha val="0"/>
+              </a:srgbClr>
+            </a:solidFill>
+            <a:prstDash val="solid"/>
+          </a:ln>
+        </p:spPr>
+      </p:sp>
+      <p:sp>
+        <p:nvSpPr>
+          <p:cNvPr id="34" name="Shape 32"/>
+          <p:cNvSpPr/>
+          <p:nvPr/>
+        </p:nvSpPr>
+        <p:spPr>
+          <a:xfrm>
+            <a:off x="9859975" y="5980176"/>
+            <a:ext cx="1591056" cy="292608"/>
+          </a:xfrm>
+          <a:prstGeom prst="roundRect">
+            <a:avLst>
+              <a:gd name="adj" fmla="val 12500"/>
+            </a:avLst>
+          </a:prstGeom>
+          <a:solidFill>
+            <a:srgbClr val="F0AA11">
+              <a:alpha val="18000"/>
+            </a:srgbClr>
+          </a:solidFill>
+          <a:ln w="12700">
+            <a:solidFill>
+              <a:srgbClr val="F0AA11">
+                <a:alpha val="0"/>
+              </a:srgbClr>
+            </a:solidFill>
+            <a:prstDash val="solid"/>
+          </a:ln>
+        </p:spPr>
+      </p:sp>
+      <p:sp>
+        <p:nvSpPr>
+          <p:cNvPr id="35" name="Shape 33"/>
+          <p:cNvSpPr/>
+          <p:nvPr/>
+        </p:nvSpPr>
+        <p:spPr>
+          <a:xfrm>
             <a:off x="10600639" y="457200"/>
             <a:ext cx="914400" cy="256032"/>
           </a:xfrm>
@@ -11349,7 +11721,7 @@
       </p:sp>
       <p:sp>
         <p:nvSpPr>
-          <p:cNvPr id="34" name="Shape 32"/>
+          <p:cNvPr id="36" name="Shape 34"/>
           <p:cNvSpPr/>
           <p:nvPr/>
         </p:nvSpPr>
@@ -11376,7 +11748,7 @@
       </p:sp>
       <p:pic>
         <p:nvPicPr>
-          <p:cNvPr id="35" name="Image 0" descr="preencoded.png">    </p:cNvPr>
+          <p:cNvPr id="37" name="Image 0" descr="preencoded.png">    </p:cNvPr>
           <p:cNvPicPr>
             <a:picLocks noChangeAspect="1"/>
           </p:cNvPicPr>
@@ -11406,7 +11778,7 @@
       </p:pic>
       <p:sp>
         <p:nvSpPr>
-          <p:cNvPr id="36" name="Shape 33"/>
+          <p:cNvPr id="38" name="Shape 35"/>
           <p:cNvSpPr/>
           <p:nvPr/>
         </p:nvSpPr>
@@ -11442,7 +11814,7 @@
       </p:sp>
       <p:sp>
         <p:nvSpPr>
-          <p:cNvPr id="37" name="mdpr:table-coherence-2f9a7b:title:__title:table-coherence-2f9a7b"/>
+          <p:cNvPr id="39" name="mdpr:table-coherence-2f9a7b:title:__title:table-coherence-2f9a7b"/>
           <p:cNvSpPr txBox="1"/>
           <p:nvPr/>
         </p:nvSpPr>
@@ -13352,6 +13724,68 @@
         </p:nvSpPr>
         <p:spPr>
           <a:xfrm>
+            <a:off x="658368" y="603504"/>
+            <a:ext cx="1005840" cy="292608"/>
+          </a:xfrm>
+          <a:prstGeom prst="roundRect">
+            <a:avLst>
+              <a:gd name="adj" fmla="val 12500"/>
+            </a:avLst>
+          </a:prstGeom>
+          <a:solidFill>
+            <a:srgbClr val="0F766E">
+              <a:alpha val="28000"/>
+            </a:srgbClr>
+          </a:solidFill>
+          <a:ln w="12700">
+            <a:solidFill>
+              <a:srgbClr val="0F766E">
+                <a:alpha val="0"/>
+              </a:srgbClr>
+            </a:solidFill>
+            <a:prstDash val="solid"/>
+          </a:ln>
+        </p:spPr>
+      </p:sp>
+      <p:sp>
+        <p:nvSpPr>
+          <p:cNvPr id="34" name="Shape 32"/>
+          <p:cNvSpPr/>
+          <p:nvPr/>
+        </p:nvSpPr>
+        <p:spPr>
+          <a:xfrm>
+            <a:off x="9859975" y="5980176"/>
+            <a:ext cx="1591056" cy="292608"/>
+          </a:xfrm>
+          <a:prstGeom prst="roundRect">
+            <a:avLst>
+              <a:gd name="adj" fmla="val 12500"/>
+            </a:avLst>
+          </a:prstGeom>
+          <a:solidFill>
+            <a:srgbClr val="F0AA11">
+              <a:alpha val="18000"/>
+            </a:srgbClr>
+          </a:solidFill>
+          <a:ln w="12700">
+            <a:solidFill>
+              <a:srgbClr val="F0AA11">
+                <a:alpha val="0"/>
+              </a:srgbClr>
+            </a:solidFill>
+            <a:prstDash val="solid"/>
+          </a:ln>
+        </p:spPr>
+      </p:sp>
+      <p:sp>
+        <p:nvSpPr>
+          <p:cNvPr id="35" name="Shape 33"/>
+          <p:cNvSpPr/>
+          <p:nvPr/>
+        </p:nvSpPr>
+        <p:spPr>
+          <a:xfrm>
             <a:off x="10600639" y="457200"/>
             <a:ext cx="914400" cy="256032"/>
           </a:xfrm>
@@ -13377,7 +13811,7 @@
       </p:sp>
       <p:sp>
         <p:nvSpPr>
-          <p:cNvPr id="34" name="Shape 32"/>
+          <p:cNvPr id="36" name="Shape 34"/>
           <p:cNvSpPr/>
           <p:nvPr/>
         </p:nvSpPr>
@@ -13404,7 +13838,7 @@
       </p:sp>
       <p:pic>
         <p:nvPicPr>
-          <p:cNvPr id="35" name="Image 0" descr="preencoded.png">    </p:cNvPr>
+          <p:cNvPr id="37" name="Image 0" descr="preencoded.png">    </p:cNvPr>
           <p:cNvPicPr>
             <a:picLocks noChangeAspect="1"/>
           </p:cNvPicPr>
@@ -13434,7 +13868,7 @@
       </p:pic>
       <p:sp>
         <p:nvSpPr>
-          <p:cNvPr id="36" name="Shape 33"/>
+          <p:cNvPr id="38" name="Shape 35"/>
           <p:cNvSpPr/>
           <p:nvPr/>
         </p:nvSpPr>
@@ -13470,7 +13904,7 @@
       </p:sp>
       <p:sp>
         <p:nvSpPr>
-          <p:cNvPr id="37" name="Shape 34"/>
+          <p:cNvPr id="39" name="Shape 36"/>
           <p:cNvSpPr/>
           <p:nvPr/>
         </p:nvSpPr>
@@ -13497,7 +13931,7 @@
       </p:sp>
       <p:sp>
         <p:nvSpPr>
-          <p:cNvPr id="38" name="mdpr:1-2-2ff3f0:title:__title:1-2-2ff3f0"/>
+          <p:cNvPr id="40" name="mdpr:1-2-2ff3f0:title:__title:1-2-2ff3f0"/>
           <p:cNvSpPr txBox="1"/>
           <p:nvPr/>
         </p:nvSpPr>
@@ -13539,7 +13973,7 @@
       </p:sp>
       <p:sp>
         <p:nvSpPr>
-          <p:cNvPr id="39" name="mdpr:1-2-2ff3f0:body:block-19"/>
+          <p:cNvPr id="41" name="mdpr:1-2-2ff3f0:body:block-19"/>
           <p:cNvSpPr txBox="1"/>
           <p:nvPr/>
         </p:nvSpPr>
@@ -13678,7 +14112,7 @@
       </p:sp>
       <p:graphicFrame>
         <p:nvGraphicFramePr>
-          <p:cNvPr id="40" name="Chart 0" descr=""/>
+          <p:cNvPr id="42" name="Chart 0" descr=""/>
           <p:cNvGraphicFramePr/>
           <p:nvPr/>
         </p:nvGraphicFramePr>
@@ -14507,6 +14941,68 @@
         </p:nvSpPr>
         <p:spPr>
           <a:xfrm>
+            <a:off x="658368" y="603504"/>
+            <a:ext cx="1005840" cy="292608"/>
+          </a:xfrm>
+          <a:prstGeom prst="roundRect">
+            <a:avLst>
+              <a:gd name="adj" fmla="val 12500"/>
+            </a:avLst>
+          </a:prstGeom>
+          <a:solidFill>
+            <a:srgbClr val="0F766E">
+              <a:alpha val="28000"/>
+            </a:srgbClr>
+          </a:solidFill>
+          <a:ln w="12700">
+            <a:solidFill>
+              <a:srgbClr val="0F766E">
+                <a:alpha val="0"/>
+              </a:srgbClr>
+            </a:solidFill>
+            <a:prstDash val="solid"/>
+          </a:ln>
+        </p:spPr>
+      </p:sp>
+      <p:sp>
+        <p:nvSpPr>
+          <p:cNvPr id="34" name="Shape 32"/>
+          <p:cNvSpPr/>
+          <p:nvPr/>
+        </p:nvSpPr>
+        <p:spPr>
+          <a:xfrm>
+            <a:off x="9859975" y="5980176"/>
+            <a:ext cx="1591056" cy="292608"/>
+          </a:xfrm>
+          <a:prstGeom prst="roundRect">
+            <a:avLst>
+              <a:gd name="adj" fmla="val 12500"/>
+            </a:avLst>
+          </a:prstGeom>
+          <a:solidFill>
+            <a:srgbClr val="F0AA11">
+              <a:alpha val="18000"/>
+            </a:srgbClr>
+          </a:solidFill>
+          <a:ln w="12700">
+            <a:solidFill>
+              <a:srgbClr val="F0AA11">
+                <a:alpha val="0"/>
+              </a:srgbClr>
+            </a:solidFill>
+            <a:prstDash val="solid"/>
+          </a:ln>
+        </p:spPr>
+      </p:sp>
+      <p:sp>
+        <p:nvSpPr>
+          <p:cNvPr id="35" name="Shape 33"/>
+          <p:cNvSpPr/>
+          <p:nvPr/>
+        </p:nvSpPr>
+        <p:spPr>
+          <a:xfrm>
             <a:off x="10600639" y="457200"/>
             <a:ext cx="914400" cy="256032"/>
           </a:xfrm>
@@ -14532,7 +15028,7 @@
       </p:sp>
       <p:sp>
         <p:nvSpPr>
-          <p:cNvPr id="34" name="Shape 32"/>
+          <p:cNvPr id="36" name="Shape 34"/>
           <p:cNvSpPr/>
           <p:nvPr/>
         </p:nvSpPr>
@@ -14559,7 +15055,7 @@
       </p:sp>
       <p:pic>
         <p:nvPicPr>
-          <p:cNvPr id="35" name="Image 0" descr="preencoded.png">    </p:cNvPr>
+          <p:cNvPr id="37" name="Image 0" descr="preencoded.png">    </p:cNvPr>
           <p:cNvPicPr>
             <a:picLocks noChangeAspect="1"/>
           </p:cNvPicPr>
@@ -14589,7 +15085,7 @@
       </p:pic>
       <p:sp>
         <p:nvSpPr>
-          <p:cNvPr id="36" name="Shape 33"/>
+          <p:cNvPr id="38" name="Shape 35"/>
           <p:cNvSpPr/>
           <p:nvPr/>
         </p:nvSpPr>
@@ -14625,7 +15121,7 @@
       </p:sp>
       <p:sp>
         <p:nvSpPr>
-          <p:cNvPr id="37" name="mdpr:2-2-542095:title:__title:2-2-542095"/>
+          <p:cNvPr id="39" name="mdpr:2-2-542095:title:__title:2-2-542095"/>
           <p:cNvSpPr txBox="1"/>
           <p:nvPr/>
         </p:nvSpPr>
@@ -16323,6 +16819,68 @@
         </p:nvSpPr>
         <p:spPr>
           <a:xfrm>
+            <a:off x="658368" y="603504"/>
+            <a:ext cx="1005840" cy="292608"/>
+          </a:xfrm>
+          <a:prstGeom prst="roundRect">
+            <a:avLst>
+              <a:gd name="adj" fmla="val 12500"/>
+            </a:avLst>
+          </a:prstGeom>
+          <a:solidFill>
+            <a:srgbClr val="0F766E">
+              <a:alpha val="28000"/>
+            </a:srgbClr>
+          </a:solidFill>
+          <a:ln w="12700">
+            <a:solidFill>
+              <a:srgbClr val="0F766E">
+                <a:alpha val="0"/>
+              </a:srgbClr>
+            </a:solidFill>
+            <a:prstDash val="solid"/>
+          </a:ln>
+        </p:spPr>
+      </p:sp>
+      <p:sp>
+        <p:nvSpPr>
+          <p:cNvPr id="34" name="Shape 32"/>
+          <p:cNvSpPr/>
+          <p:nvPr/>
+        </p:nvSpPr>
+        <p:spPr>
+          <a:xfrm>
+            <a:off x="9859975" y="5980176"/>
+            <a:ext cx="1591056" cy="292608"/>
+          </a:xfrm>
+          <a:prstGeom prst="roundRect">
+            <a:avLst>
+              <a:gd name="adj" fmla="val 12500"/>
+            </a:avLst>
+          </a:prstGeom>
+          <a:solidFill>
+            <a:srgbClr val="F0AA11">
+              <a:alpha val="18000"/>
+            </a:srgbClr>
+          </a:solidFill>
+          <a:ln w="12700">
+            <a:solidFill>
+              <a:srgbClr val="F0AA11">
+                <a:alpha val="0"/>
+              </a:srgbClr>
+            </a:solidFill>
+            <a:prstDash val="solid"/>
+          </a:ln>
+        </p:spPr>
+      </p:sp>
+      <p:sp>
+        <p:nvSpPr>
+          <p:cNvPr id="35" name="Shape 33"/>
+          <p:cNvSpPr/>
+          <p:nvPr/>
+        </p:nvSpPr>
+        <p:spPr>
+          <a:xfrm>
             <a:off x="10600639" y="457200"/>
             <a:ext cx="914400" cy="256032"/>
           </a:xfrm>
@@ -16348,7 +16906,7 @@
       </p:sp>
       <p:sp>
         <p:nvSpPr>
-          <p:cNvPr id="34" name="Shape 32"/>
+          <p:cNvPr id="36" name="Shape 34"/>
           <p:cNvSpPr/>
           <p:nvPr/>
         </p:nvSpPr>
@@ -16375,7 +16933,7 @@
       </p:sp>
       <p:pic>
         <p:nvPicPr>
-          <p:cNvPr id="35" name="Image 0" descr="preencoded.png">    </p:cNvPr>
+          <p:cNvPr id="37" name="Image 0" descr="preencoded.png">    </p:cNvPr>
           <p:cNvPicPr>
             <a:picLocks noChangeAspect="1"/>
           </p:cNvPicPr>
@@ -16405,7 +16963,7 @@
       </p:pic>
       <p:sp>
         <p:nvSpPr>
-          <p:cNvPr id="36" name="Shape 33"/>
+          <p:cNvPr id="38" name="Shape 35"/>
           <p:cNvSpPr/>
           <p:nvPr/>
         </p:nvSpPr>
@@ -16441,7 +16999,7 @@
       </p:sp>
       <p:sp>
         <p:nvSpPr>
-          <p:cNvPr id="37" name="mdpr:1-2-b8955f:title:__title:1-2-b8955f"/>
+          <p:cNvPr id="39" name="mdpr:1-2-b8955f:title:__title:1-2-b8955f"/>
           <p:cNvSpPr txBox="1"/>
           <p:nvPr/>
         </p:nvSpPr>
@@ -16483,7 +17041,7 @@
       </p:sp>
       <p:sp>
         <p:nvSpPr>
-          <p:cNvPr id="38" name="Shape 35"/>
+          <p:cNvPr id="40" name="Shape 37"/>
           <p:cNvSpPr/>
           <p:nvPr/>
         </p:nvSpPr>
@@ -16516,7 +17074,7 @@
       </p:sp>
       <p:sp>
         <p:nvSpPr>
-          <p:cNvPr id="39" name="Shape 36"/>
+          <p:cNvPr id="41" name="Shape 38"/>
           <p:cNvSpPr/>
           <p:nvPr/>
         </p:nvSpPr>
@@ -16547,7 +17105,7 @@
       </p:sp>
       <p:sp>
         <p:nvSpPr>
-          <p:cNvPr id="40" name="Shape 37"/>
+          <p:cNvPr id="42" name="Shape 39"/>
           <p:cNvSpPr/>
           <p:nvPr/>
         </p:nvSpPr>
@@ -16578,7 +17136,7 @@
       </p:sp>
       <p:sp>
         <p:nvSpPr>
-          <p:cNvPr id="41" name="Shape 38"/>
+          <p:cNvPr id="43" name="Shape 40"/>
           <p:cNvSpPr/>
           <p:nvPr/>
         </p:nvSpPr>
@@ -16603,7 +17161,7 @@
       </p:sp>
       <p:sp>
         <p:nvSpPr>
-          <p:cNvPr id="42" name="Shape 39"/>
+          <p:cNvPr id="44" name="Shape 41"/>
           <p:cNvSpPr/>
           <p:nvPr/>
         </p:nvSpPr>
@@ -16630,7 +17188,7 @@
       </p:sp>
       <p:sp>
         <p:nvSpPr>
-          <p:cNvPr id="43" name="Text 40"/>
+          <p:cNvPr id="45" name="Text 42"/>
           <p:cNvSpPr txBox="1"/>
           <p:nvPr/>
         </p:nvSpPr>
@@ -16674,7 +17232,7 @@
       </p:sp>
       <p:sp>
         <p:nvSpPr>
-          <p:cNvPr id="44" name="Text 41"/>
+          <p:cNvPr id="46" name="Text 43"/>
           <p:cNvSpPr txBox="1"/>
           <p:nvPr/>
         </p:nvSpPr>
@@ -16716,7 +17274,7 @@
       </p:sp>
       <p:sp>
         <p:nvSpPr>
-          <p:cNvPr id="45" name="Shape 42"/>
+          <p:cNvPr id="47" name="Shape 44"/>
           <p:cNvSpPr/>
           <p:nvPr/>
         </p:nvSpPr>
@@ -16743,7 +17301,7 @@
       </p:sp>
       <p:sp>
         <p:nvSpPr>
-          <p:cNvPr id="46" name="Text 43"/>
+          <p:cNvPr id="48" name="Text 45"/>
           <p:cNvSpPr txBox="1"/>
           <p:nvPr/>
         </p:nvSpPr>
@@ -16787,7 +17345,7 @@
       </p:sp>
       <p:sp>
         <p:nvSpPr>
-          <p:cNvPr id="47" name="Shape 44"/>
+          <p:cNvPr id="49" name="Shape 46"/>
           <p:cNvSpPr/>
           <p:nvPr/>
         </p:nvSpPr>
@@ -16814,7 +17372,7 @@
       </p:sp>
       <p:sp>
         <p:nvSpPr>
-          <p:cNvPr id="48" name="Text 45"/>
+          <p:cNvPr id="50" name="Text 47"/>
           <p:cNvSpPr txBox="1"/>
           <p:nvPr/>
         </p:nvSpPr>
@@ -16858,7 +17416,7 @@
       </p:sp>
       <p:sp>
         <p:nvSpPr>
-          <p:cNvPr id="49" name="Shape 46"/>
+          <p:cNvPr id="51" name="Shape 48"/>
           <p:cNvSpPr/>
           <p:nvPr/>
         </p:nvSpPr>
@@ -16889,7 +17447,7 @@
       </p:sp>
       <p:sp>
         <p:nvSpPr>
-          <p:cNvPr id="50" name="Shape 47"/>
+          <p:cNvPr id="52" name="Shape 49"/>
           <p:cNvSpPr/>
           <p:nvPr/>
         </p:nvSpPr>
@@ -16918,7 +17476,7 @@
       </p:sp>
       <p:sp>
         <p:nvSpPr>
-          <p:cNvPr id="51" name="Shape 48"/>
+          <p:cNvPr id="53" name="Shape 50"/>
           <p:cNvSpPr/>
           <p:nvPr/>
         </p:nvSpPr>
@@ -16941,7 +17499,7 @@
       </p:sp>
       <p:sp>
         <p:nvSpPr>
-          <p:cNvPr id="52" name="Shape 49"/>
+          <p:cNvPr id="54" name="Shape 51"/>
           <p:cNvSpPr/>
           <p:nvPr/>
         </p:nvSpPr>
@@ -16966,7 +17524,7 @@
       </p:sp>
       <p:sp>
         <p:nvSpPr>
-          <p:cNvPr id="53" name="Shape 50"/>
+          <p:cNvPr id="55" name="Shape 52"/>
           <p:cNvSpPr/>
           <p:nvPr/>
         </p:nvSpPr>
@@ -16991,7 +17549,7 @@
       </p:sp>
       <p:sp>
         <p:nvSpPr>
-          <p:cNvPr id="54" name="Shape 51"/>
+          <p:cNvPr id="56" name="Shape 53"/>
           <p:cNvSpPr/>
           <p:nvPr/>
         </p:nvSpPr>
@@ -17016,7 +17574,7 @@
       </p:sp>
       <p:sp>
         <p:nvSpPr>
-          <p:cNvPr id="55" name="Text 52"/>
+          <p:cNvPr id="57" name="Text 54"/>
           <p:cNvSpPr txBox="1"/>
           <p:nvPr/>
         </p:nvSpPr>
@@ -17060,7 +17618,7 @@
       </p:sp>
       <p:sp>
         <p:nvSpPr>
-          <p:cNvPr id="56" name="Text 53"/>
+          <p:cNvPr id="58" name="Text 55"/>
           <p:cNvSpPr txBox="1"/>
           <p:nvPr/>
         </p:nvSpPr>
@@ -17102,7 +17660,7 @@
       </p:sp>
       <p:sp>
         <p:nvSpPr>
-          <p:cNvPr id="57" name="Text 54"/>
+          <p:cNvPr id="59" name="Text 56"/>
           <p:cNvSpPr txBox="1"/>
           <p:nvPr/>
         </p:nvSpPr>
@@ -17144,7 +17702,7 @@
       </p:sp>
       <p:sp>
         <p:nvSpPr>
-          <p:cNvPr id="58" name="Text 55"/>
+          <p:cNvPr id="60" name="Text 57"/>
           <p:cNvSpPr txBox="1"/>
           <p:nvPr/>
         </p:nvSpPr>
@@ -17999,6 +18557,68 @@
         </p:nvSpPr>
         <p:spPr>
           <a:xfrm>
+            <a:off x="658368" y="603504"/>
+            <a:ext cx="1005840" cy="292608"/>
+          </a:xfrm>
+          <a:prstGeom prst="roundRect">
+            <a:avLst>
+              <a:gd name="adj" fmla="val 12500"/>
+            </a:avLst>
+          </a:prstGeom>
+          <a:solidFill>
+            <a:srgbClr val="0F766E">
+              <a:alpha val="28000"/>
+            </a:srgbClr>
+          </a:solidFill>
+          <a:ln w="12700">
+            <a:solidFill>
+              <a:srgbClr val="0F766E">
+                <a:alpha val="0"/>
+              </a:srgbClr>
+            </a:solidFill>
+            <a:prstDash val="solid"/>
+          </a:ln>
+        </p:spPr>
+      </p:sp>
+      <p:sp>
+        <p:nvSpPr>
+          <p:cNvPr id="34" name="Shape 32"/>
+          <p:cNvSpPr/>
+          <p:nvPr/>
+        </p:nvSpPr>
+        <p:spPr>
+          <a:xfrm>
+            <a:off x="9859975" y="5980176"/>
+            <a:ext cx="1591056" cy="292608"/>
+          </a:xfrm>
+          <a:prstGeom prst="roundRect">
+            <a:avLst>
+              <a:gd name="adj" fmla="val 12500"/>
+            </a:avLst>
+          </a:prstGeom>
+          <a:solidFill>
+            <a:srgbClr val="F0AA11">
+              <a:alpha val="18000"/>
+            </a:srgbClr>
+          </a:solidFill>
+          <a:ln w="12700">
+            <a:solidFill>
+              <a:srgbClr val="F0AA11">
+                <a:alpha val="0"/>
+              </a:srgbClr>
+            </a:solidFill>
+            <a:prstDash val="solid"/>
+          </a:ln>
+        </p:spPr>
+      </p:sp>
+      <p:sp>
+        <p:nvSpPr>
+          <p:cNvPr id="35" name="Shape 33"/>
+          <p:cNvSpPr/>
+          <p:nvPr/>
+        </p:nvSpPr>
+        <p:spPr>
+          <a:xfrm>
             <a:off x="10600639" y="457200"/>
             <a:ext cx="914400" cy="256032"/>
           </a:xfrm>
@@ -18024,7 +18644,7 @@
       </p:sp>
       <p:sp>
         <p:nvSpPr>
-          <p:cNvPr id="34" name="Shape 32"/>
+          <p:cNvPr id="36" name="Shape 34"/>
           <p:cNvSpPr/>
           <p:nvPr/>
         </p:nvSpPr>
@@ -18051,7 +18671,7 @@
       </p:sp>
       <p:pic>
         <p:nvPicPr>
-          <p:cNvPr id="35" name="Image 0" descr="preencoded.png">    </p:cNvPr>
+          <p:cNvPr id="37" name="Image 0" descr="preencoded.png">    </p:cNvPr>
           <p:cNvPicPr>
             <a:picLocks noChangeAspect="1"/>
           </p:cNvPicPr>
@@ -18081,7 +18701,7 @@
       </p:pic>
       <p:sp>
         <p:nvSpPr>
-          <p:cNvPr id="36" name="Shape 33"/>
+          <p:cNvPr id="38" name="Shape 35"/>
           <p:cNvSpPr/>
           <p:nvPr/>
         </p:nvSpPr>
@@ -18117,7 +18737,7 @@
       </p:sp>
       <p:sp>
         <p:nvSpPr>
-          <p:cNvPr id="37" name="mdpr:2-2-4dc4c1:title:__title:2-2-4dc4c1"/>
+          <p:cNvPr id="39" name="mdpr:2-2-4dc4c1:title:__title:2-2-4dc4c1"/>
           <p:cNvSpPr txBox="1"/>
           <p:nvPr/>
         </p:nvSpPr>
@@ -18159,7 +18779,7 @@
       </p:sp>
       <p:sp>
         <p:nvSpPr>
-          <p:cNvPr id="38" name="Shape 35"/>
+          <p:cNvPr id="40" name="Shape 37"/>
           <p:cNvSpPr/>
           <p:nvPr/>
         </p:nvSpPr>
@@ -18186,7 +18806,7 @@
       </p:sp>
       <p:sp>
         <p:nvSpPr>
-          <p:cNvPr id="39" name="Shape 36"/>
+          <p:cNvPr id="41" name="Shape 38"/>
           <p:cNvSpPr/>
           <p:nvPr/>
         </p:nvSpPr>
@@ -18213,7 +18833,7 @@
       </p:sp>
       <p:sp>
         <p:nvSpPr>
-          <p:cNvPr id="40" name="Text 37"/>
+          <p:cNvPr id="42" name="Text 39"/>
           <p:cNvSpPr txBox="1"/>
           <p:nvPr/>
         </p:nvSpPr>
@@ -18257,7 +18877,7 @@
       </p:sp>
       <p:sp>
         <p:nvSpPr>
-          <p:cNvPr id="41" name="Text 38"/>
+          <p:cNvPr id="43" name="Text 40"/>
           <p:cNvSpPr txBox="1"/>
           <p:nvPr/>
         </p:nvSpPr>
@@ -18301,7 +18921,7 @@
       </p:sp>
       <p:sp>
         <p:nvSpPr>
-          <p:cNvPr id="42" name="Shape 39"/>
+          <p:cNvPr id="44" name="Shape 41"/>
           <p:cNvSpPr/>
           <p:nvPr/>
         </p:nvSpPr>
@@ -18328,7 +18948,7 @@
       </p:sp>
       <p:sp>
         <p:nvSpPr>
-          <p:cNvPr id="43" name="Shape 40"/>
+          <p:cNvPr id="45" name="Shape 42"/>
           <p:cNvSpPr/>
           <p:nvPr/>
         </p:nvSpPr>
@@ -18355,7 +18975,7 @@
       </p:sp>
       <p:sp>
         <p:nvSpPr>
-          <p:cNvPr id="44" name="Text 41"/>
+          <p:cNvPr id="46" name="Text 43"/>
           <p:cNvSpPr txBox="1"/>
           <p:nvPr/>
         </p:nvSpPr>
@@ -18399,7 +19019,7 @@
       </p:sp>
       <p:sp>
         <p:nvSpPr>
-          <p:cNvPr id="45" name="Text 42"/>
+          <p:cNvPr id="47" name="Text 44"/>
           <p:cNvSpPr txBox="1"/>
           <p:nvPr/>
         </p:nvSpPr>
@@ -18443,7 +19063,7 @@
       </p:sp>
       <p:sp>
         <p:nvSpPr>
-          <p:cNvPr id="46" name="Shape 43"/>
+          <p:cNvPr id="48" name="Shape 45"/>
           <p:cNvSpPr/>
           <p:nvPr/>
         </p:nvSpPr>
@@ -18470,7 +19090,7 @@
       </p:sp>
       <p:sp>
         <p:nvSpPr>
-          <p:cNvPr id="47" name="Shape 44"/>
+          <p:cNvPr id="49" name="Shape 46"/>
           <p:cNvSpPr/>
           <p:nvPr/>
         </p:nvSpPr>
@@ -18497,7 +19117,7 @@
       </p:sp>
       <p:sp>
         <p:nvSpPr>
-          <p:cNvPr id="48" name="Text 45"/>
+          <p:cNvPr id="50" name="Text 47"/>
           <p:cNvSpPr txBox="1"/>
           <p:nvPr/>
         </p:nvSpPr>
@@ -18541,7 +19161,7 @@
       </p:sp>
       <p:sp>
         <p:nvSpPr>
-          <p:cNvPr id="49" name="Text 46"/>
+          <p:cNvPr id="51" name="Text 48"/>
           <p:cNvSpPr txBox="1"/>
           <p:nvPr/>
         </p:nvSpPr>
@@ -18585,7 +19205,7 @@
       </p:sp>
       <p:sp>
         <p:nvSpPr>
-          <p:cNvPr id="50" name="Shape 47"/>
+          <p:cNvPr id="52" name="Shape 49"/>
           <p:cNvSpPr/>
           <p:nvPr/>
         </p:nvSpPr>
@@ -18612,7 +19232,7 @@
       </p:sp>
       <p:sp>
         <p:nvSpPr>
-          <p:cNvPr id="51" name="Shape 48"/>
+          <p:cNvPr id="53" name="Shape 50"/>
           <p:cNvSpPr/>
           <p:nvPr/>
         </p:nvSpPr>
@@ -18639,7 +19259,7 @@
       </p:sp>
       <p:sp>
         <p:nvSpPr>
-          <p:cNvPr id="52" name="Text 49"/>
+          <p:cNvPr id="54" name="Text 51"/>
           <p:cNvSpPr txBox="1"/>
           <p:nvPr/>
         </p:nvSpPr>
@@ -18683,7 +19303,7 @@
       </p:sp>
       <p:sp>
         <p:nvSpPr>
-          <p:cNvPr id="53" name="Text 50"/>
+          <p:cNvPr id="55" name="Text 52"/>
           <p:cNvSpPr txBox="1"/>
           <p:nvPr/>
         </p:nvSpPr>
@@ -18727,7 +19347,7 @@
       </p:sp>
       <p:sp>
         <p:nvSpPr>
-          <p:cNvPr id="54" name="Shape 51"/>
+          <p:cNvPr id="56" name="Shape 53"/>
           <p:cNvSpPr/>
           <p:nvPr/>
         </p:nvSpPr>
@@ -18751,7 +19371,7 @@
       </p:sp>
       <p:sp>
         <p:nvSpPr>
-          <p:cNvPr id="55" name="Shape 52"/>
+          <p:cNvPr id="57" name="Shape 54"/>
           <p:cNvSpPr/>
           <p:nvPr/>
         </p:nvSpPr>
@@ -18775,7 +19395,7 @@
       </p:sp>
       <p:sp>
         <p:nvSpPr>
-          <p:cNvPr id="56" name="Shape 53"/>
+          <p:cNvPr id="58" name="Shape 55"/>
           <p:cNvSpPr/>
           <p:nvPr/>
         </p:nvSpPr>
@@ -19612,6 +20232,68 @@
         </p:nvSpPr>
         <p:spPr>
           <a:xfrm>
+            <a:off x="658368" y="603504"/>
+            <a:ext cx="1005840" cy="292608"/>
+          </a:xfrm>
+          <a:prstGeom prst="roundRect">
+            <a:avLst>
+              <a:gd name="adj" fmla="val 12500"/>
+            </a:avLst>
+          </a:prstGeom>
+          <a:solidFill>
+            <a:srgbClr val="0F766E">
+              <a:alpha val="28000"/>
+            </a:srgbClr>
+          </a:solidFill>
+          <a:ln w="12700">
+            <a:solidFill>
+              <a:srgbClr val="0F766E">
+                <a:alpha val="0"/>
+              </a:srgbClr>
+            </a:solidFill>
+            <a:prstDash val="solid"/>
+          </a:ln>
+        </p:spPr>
+      </p:sp>
+      <p:sp>
+        <p:nvSpPr>
+          <p:cNvPr id="34" name="Shape 32"/>
+          <p:cNvSpPr/>
+          <p:nvPr/>
+        </p:nvSpPr>
+        <p:spPr>
+          <a:xfrm>
+            <a:off x="9859975" y="5980176"/>
+            <a:ext cx="1591056" cy="292608"/>
+          </a:xfrm>
+          <a:prstGeom prst="roundRect">
+            <a:avLst>
+              <a:gd name="adj" fmla="val 12500"/>
+            </a:avLst>
+          </a:prstGeom>
+          <a:solidFill>
+            <a:srgbClr val="F0AA11">
+              <a:alpha val="18000"/>
+            </a:srgbClr>
+          </a:solidFill>
+          <a:ln w="12700">
+            <a:solidFill>
+              <a:srgbClr val="F0AA11">
+                <a:alpha val="0"/>
+              </a:srgbClr>
+            </a:solidFill>
+            <a:prstDash val="solid"/>
+          </a:ln>
+        </p:spPr>
+      </p:sp>
+      <p:sp>
+        <p:nvSpPr>
+          <p:cNvPr id="35" name="Shape 33"/>
+          <p:cNvSpPr/>
+          <p:nvPr/>
+        </p:nvSpPr>
+        <p:spPr>
+          <a:xfrm>
             <a:off x="10600639" y="457200"/>
             <a:ext cx="914400" cy="256032"/>
           </a:xfrm>
@@ -19637,7 +20319,7 @@
       </p:sp>
       <p:sp>
         <p:nvSpPr>
-          <p:cNvPr id="34" name="Shape 32"/>
+          <p:cNvPr id="36" name="Shape 34"/>
           <p:cNvSpPr/>
           <p:nvPr/>
         </p:nvSpPr>
@@ -19664,7 +20346,7 @@
       </p:sp>
       <p:pic>
         <p:nvPicPr>
-          <p:cNvPr id="35" name="Image 0" descr="preencoded.png">    </p:cNvPr>
+          <p:cNvPr id="37" name="Image 0" descr="preencoded.png">    </p:cNvPr>
           <p:cNvPicPr>
             <a:picLocks noChangeAspect="1"/>
           </p:cNvPicPr>
@@ -19694,7 +20376,7 @@
       </p:pic>
       <p:sp>
         <p:nvSpPr>
-          <p:cNvPr id="36" name="Shape 33"/>
+          <p:cNvPr id="38" name="Shape 35"/>
           <p:cNvSpPr/>
           <p:nvPr/>
         </p:nvSpPr>
@@ -19730,7 +20412,7 @@
       </p:sp>
       <p:pic>
         <p:nvPicPr>
-          <p:cNvPr id="37" name="Image 1" descr="preencoded.png">    </p:cNvPr>
+          <p:cNvPr id="39" name="Image 1" descr="preencoded.png">    </p:cNvPr>
           <p:cNvPicPr>
             <a:picLocks noChangeAspect="1"/>
           </p:cNvPicPr>
@@ -19760,7 +20442,7 @@
       </p:pic>
       <p:sp>
         <p:nvSpPr>
-          <p:cNvPr id="38" name="Shape 34"/>
+          <p:cNvPr id="40" name="Shape 36"/>
           <p:cNvSpPr/>
           <p:nvPr/>
         </p:nvSpPr>
@@ -19796,7 +20478,7 @@
       </p:sp>
       <p:pic>
         <p:nvPicPr>
-          <p:cNvPr id="39" name="Image 2" descr="preencoded.png">    </p:cNvPr>
+          <p:cNvPr id="41" name="Image 2" descr="preencoded.png">    </p:cNvPr>
           <p:cNvPicPr>
             <a:picLocks noChangeAspect="1"/>
           </p:cNvPicPr>
@@ -19826,7 +20508,7 @@
       </p:pic>
       <p:sp>
         <p:nvSpPr>
-          <p:cNvPr id="40" name="Shape 35"/>
+          <p:cNvPr id="42" name="Shape 37"/>
           <p:cNvSpPr/>
           <p:nvPr/>
         </p:nvSpPr>
@@ -19862,7 +20544,7 @@
       </p:sp>
       <p:sp>
         <p:nvSpPr>
-          <p:cNvPr id="41" name="Shape 36"/>
+          <p:cNvPr id="43" name="Shape 38"/>
           <p:cNvSpPr/>
           <p:nvPr/>
         </p:nvSpPr>
@@ -19891,7 +20573,7 @@
       </p:sp>
       <p:sp>
         <p:nvSpPr>
-          <p:cNvPr id="42" name="Shape 37"/>
+          <p:cNvPr id="44" name="Shape 39"/>
           <p:cNvSpPr/>
           <p:nvPr/>
         </p:nvSpPr>
@@ -19918,7 +20600,7 @@
       </p:sp>
       <p:sp>
         <p:nvSpPr>
-          <p:cNvPr id="43" name="Shape 38"/>
+          <p:cNvPr id="45" name="Shape 40"/>
           <p:cNvSpPr/>
           <p:nvPr/>
         </p:nvSpPr>
@@ -19945,7 +20627,7 @@
       </p:sp>
       <p:sp>
         <p:nvSpPr>
-          <p:cNvPr id="44" name="Shape 39"/>
+          <p:cNvPr id="46" name="Shape 41"/>
           <p:cNvSpPr/>
           <p:nvPr/>
         </p:nvSpPr>
@@ -19972,7 +20654,7 @@
       </p:sp>
       <p:sp>
         <p:nvSpPr>
-          <p:cNvPr id="45" name="mdpr:1-2-ea42c8:title:__title:1-2-ea42c8"/>
+          <p:cNvPr id="47" name="mdpr:1-2-ea42c8:title:__title:1-2-ea42c8"/>
           <p:cNvSpPr txBox="1"/>
           <p:nvPr/>
         </p:nvSpPr>
@@ -20014,7 +20696,7 @@
       </p:sp>
       <p:sp>
         <p:nvSpPr>
-          <p:cNvPr id="46" name="Shape 41"/>
+          <p:cNvPr id="48" name="Shape 43"/>
           <p:cNvSpPr/>
           <p:nvPr/>
         </p:nvSpPr>
@@ -20041,7 +20723,7 @@
       </p:sp>
       <p:pic>
         <p:nvPicPr>
-          <p:cNvPr id="47" name="Image 3" descr="article icon from tabler-icons (MIT)">    </p:cNvPr>
+          <p:cNvPr id="49" name="Image 3" descr="article icon from tabler-icons (MIT)">    </p:cNvPr>
           <p:cNvPicPr>
             <a:picLocks noChangeAspect="1"/>
           </p:cNvPicPr>
@@ -20071,7 +20753,7 @@
       </p:pic>
       <p:sp>
         <p:nvSpPr>
-          <p:cNvPr id="48" name="mdpr:1-2-ea42c8:item-1:block-27-chunk-1"/>
+          <p:cNvPr id="50" name="mdpr:1-2-ea42c8:item-1:block-27-chunk-1"/>
           <p:cNvSpPr txBox="1"/>
           <p:nvPr/>
         </p:nvSpPr>
@@ -20130,7 +20812,7 @@
       </p:sp>
       <p:sp>
         <p:nvSpPr>
-          <p:cNvPr id="49" name="Shape 43"/>
+          <p:cNvPr id="51" name="Shape 45"/>
           <p:cNvSpPr/>
           <p:nvPr/>
         </p:nvSpPr>
@@ -20157,7 +20839,7 @@
       </p:sp>
       <p:pic>
         <p:nvPicPr>
-          <p:cNvPr id="50" name="Image 4" descr="article icon from tabler-icons (MIT)">    </p:cNvPr>
+          <p:cNvPr id="52" name="Image 4" descr="article icon from tabler-icons (MIT)">    </p:cNvPr>
           <p:cNvPicPr>
             <a:picLocks noChangeAspect="1"/>
           </p:cNvPicPr>
@@ -20187,7 +20869,7 @@
       </p:pic>
       <p:sp>
         <p:nvSpPr>
-          <p:cNvPr id="51" name="mdpr:1-2-ea42c8:item-2:block-27-chunk-1"/>
+          <p:cNvPr id="53" name="mdpr:1-2-ea42c8:item-2:block-27-chunk-1"/>
           <p:cNvSpPr txBox="1"/>
           <p:nvPr/>
         </p:nvSpPr>
@@ -20246,7 +20928,7 @@
       </p:sp>
       <p:sp>
         <p:nvSpPr>
-          <p:cNvPr id="52" name="Shape 45"/>
+          <p:cNvPr id="54" name="Shape 47"/>
           <p:cNvSpPr/>
           <p:nvPr/>
         </p:nvSpPr>
@@ -20273,7 +20955,7 @@
       </p:sp>
       <p:pic>
         <p:nvPicPr>
-          <p:cNvPr id="53" name="Image 5" descr="article icon from tabler-icons (MIT)">    </p:cNvPr>
+          <p:cNvPr id="55" name="Image 5" descr="article icon from tabler-icons (MIT)">    </p:cNvPr>
           <p:cNvPicPr>
             <a:picLocks noChangeAspect="1"/>
           </p:cNvPicPr>
@@ -20303,7 +20985,7 @@
       </p:pic>
       <p:sp>
         <p:nvSpPr>
-          <p:cNvPr id="54" name="mdpr:1-2-ea42c8:item-3:block-27-chunk-1"/>
+          <p:cNvPr id="56" name="mdpr:1-2-ea42c8:item-3:block-27-chunk-1"/>
           <p:cNvSpPr txBox="1"/>
           <p:nvPr/>
         </p:nvSpPr>
@@ -21175,6 +21857,68 @@
         </p:nvSpPr>
         <p:spPr>
           <a:xfrm>
+            <a:off x="658368" y="603504"/>
+            <a:ext cx="1005840" cy="292608"/>
+          </a:xfrm>
+          <a:prstGeom prst="roundRect">
+            <a:avLst>
+              <a:gd name="adj" fmla="val 12500"/>
+            </a:avLst>
+          </a:prstGeom>
+          <a:solidFill>
+            <a:srgbClr val="0F766E">
+              <a:alpha val="28000"/>
+            </a:srgbClr>
+          </a:solidFill>
+          <a:ln w="12700">
+            <a:solidFill>
+              <a:srgbClr val="0F766E">
+                <a:alpha val="0"/>
+              </a:srgbClr>
+            </a:solidFill>
+            <a:prstDash val="solid"/>
+          </a:ln>
+        </p:spPr>
+      </p:sp>
+      <p:sp>
+        <p:nvSpPr>
+          <p:cNvPr id="34" name="Shape 32"/>
+          <p:cNvSpPr/>
+          <p:nvPr/>
+        </p:nvSpPr>
+        <p:spPr>
+          <a:xfrm>
+            <a:off x="9859975" y="5980176"/>
+            <a:ext cx="1591056" cy="292608"/>
+          </a:xfrm>
+          <a:prstGeom prst="roundRect">
+            <a:avLst>
+              <a:gd name="adj" fmla="val 12500"/>
+            </a:avLst>
+          </a:prstGeom>
+          <a:solidFill>
+            <a:srgbClr val="F0AA11">
+              <a:alpha val="18000"/>
+            </a:srgbClr>
+          </a:solidFill>
+          <a:ln w="12700">
+            <a:solidFill>
+              <a:srgbClr val="F0AA11">
+                <a:alpha val="0"/>
+              </a:srgbClr>
+            </a:solidFill>
+            <a:prstDash val="solid"/>
+          </a:ln>
+        </p:spPr>
+      </p:sp>
+      <p:sp>
+        <p:nvSpPr>
+          <p:cNvPr id="35" name="Shape 33"/>
+          <p:cNvSpPr/>
+          <p:nvPr/>
+        </p:nvSpPr>
+        <p:spPr>
+          <a:xfrm>
             <a:off x="10600639" y="457200"/>
             <a:ext cx="914400" cy="256032"/>
           </a:xfrm>
@@ -21200,7 +21944,7 @@
       </p:sp>
       <p:sp>
         <p:nvSpPr>
-          <p:cNvPr id="34" name="Shape 32"/>
+          <p:cNvPr id="36" name="Shape 34"/>
           <p:cNvSpPr/>
           <p:nvPr/>
         </p:nvSpPr>
@@ -21227,7 +21971,7 @@
       </p:sp>
       <p:sp>
         <p:nvSpPr>
-          <p:cNvPr id="35" name="Shape 33"/>
+          <p:cNvPr id="37" name="Shape 35"/>
           <p:cNvSpPr/>
           <p:nvPr/>
         </p:nvSpPr>
@@ -21254,7 +21998,7 @@
       </p:sp>
       <p:sp>
         <p:nvSpPr>
-          <p:cNvPr id="36" name="Shape 34"/>
+          <p:cNvPr id="38" name="Shape 36"/>
           <p:cNvSpPr/>
           <p:nvPr/>
         </p:nvSpPr>
@@ -21281,7 +22025,7 @@
       </p:sp>
       <p:sp>
         <p:nvSpPr>
-          <p:cNvPr id="37" name="Shape 35"/>
+          <p:cNvPr id="39" name="Shape 37"/>
           <p:cNvSpPr/>
           <p:nvPr/>
         </p:nvSpPr>
@@ -21310,7 +22054,7 @@
       </p:sp>
       <p:sp>
         <p:nvSpPr>
-          <p:cNvPr id="38" name="Shape 36"/>
+          <p:cNvPr id="40" name="Shape 38"/>
           <p:cNvSpPr/>
           <p:nvPr/>
         </p:nvSpPr>
@@ -21337,7 +22081,7 @@
       </p:sp>
       <p:sp>
         <p:nvSpPr>
-          <p:cNvPr id="39" name="Shape 37"/>
+          <p:cNvPr id="41" name="Shape 39"/>
           <p:cNvSpPr/>
           <p:nvPr/>
         </p:nvSpPr>
@@ -21364,7 +22108,7 @@
       </p:sp>
       <p:sp>
         <p:nvSpPr>
-          <p:cNvPr id="40" name="Shape 38"/>
+          <p:cNvPr id="42" name="Shape 40"/>
           <p:cNvSpPr/>
           <p:nvPr/>
         </p:nvSpPr>
@@ -21391,7 +22135,7 @@
       </p:sp>
       <p:sp>
         <p:nvSpPr>
-          <p:cNvPr id="41" name="Shape 39"/>
+          <p:cNvPr id="43" name="Shape 41"/>
           <p:cNvSpPr/>
           <p:nvPr/>
         </p:nvSpPr>
@@ -21418,7 +22162,7 @@
       </p:sp>
       <p:sp>
         <p:nvSpPr>
-          <p:cNvPr id="42" name="Shape 40"/>
+          <p:cNvPr id="44" name="Shape 42"/>
           <p:cNvSpPr/>
           <p:nvPr/>
         </p:nvSpPr>
@@ -21445,7 +22189,7 @@
       </p:sp>
       <p:sp>
         <p:nvSpPr>
-          <p:cNvPr id="43" name="Shape 41"/>
+          <p:cNvPr id="45" name="Shape 43"/>
           <p:cNvSpPr/>
           <p:nvPr/>
         </p:nvSpPr>
@@ -21472,7 +22216,7 @@
       </p:sp>
       <p:sp>
         <p:nvSpPr>
-          <p:cNvPr id="44" name="Shape 42"/>
+          <p:cNvPr id="46" name="Shape 44"/>
           <p:cNvSpPr/>
           <p:nvPr/>
         </p:nvSpPr>
@@ -21499,7 +22243,7 @@
       </p:sp>
       <p:sp>
         <p:nvSpPr>
-          <p:cNvPr id="45" name="Shape 43"/>
+          <p:cNvPr id="47" name="Shape 45"/>
           <p:cNvSpPr/>
           <p:nvPr/>
         </p:nvSpPr>
@@ -21526,7 +22270,7 @@
       </p:sp>
       <p:sp>
         <p:nvSpPr>
-          <p:cNvPr id="46" name="Shape 44"/>
+          <p:cNvPr id="48" name="Shape 46"/>
           <p:cNvSpPr/>
           <p:nvPr/>
         </p:nvSpPr>
@@ -21553,7 +22297,7 @@
       </p:sp>
       <p:sp>
         <p:nvSpPr>
-          <p:cNvPr id="47" name="Shape 45"/>
+          <p:cNvPr id="49" name="Shape 47"/>
           <p:cNvSpPr/>
           <p:nvPr/>
         </p:nvSpPr>
@@ -21580,7 +22324,7 @@
       </p:sp>
       <p:sp>
         <p:nvSpPr>
-          <p:cNvPr id="48" name="Shape 46"/>
+          <p:cNvPr id="50" name="Shape 48"/>
           <p:cNvSpPr/>
           <p:nvPr/>
         </p:nvSpPr>
@@ -21607,7 +22351,7 @@
       </p:sp>
       <p:sp>
         <p:nvSpPr>
-          <p:cNvPr id="49" name="Shape 47"/>
+          <p:cNvPr id="51" name="Shape 49"/>
           <p:cNvSpPr/>
           <p:nvPr/>
         </p:nvSpPr>
@@ -21634,7 +22378,7 @@
       </p:sp>
       <p:sp>
         <p:nvSpPr>
-          <p:cNvPr id="50" name="Shape 48"/>
+          <p:cNvPr id="52" name="Shape 50"/>
           <p:cNvSpPr/>
           <p:nvPr/>
         </p:nvSpPr>
@@ -21661,7 +22405,7 @@
       </p:sp>
       <p:sp>
         <p:nvSpPr>
-          <p:cNvPr id="51" name="Shape 49"/>
+          <p:cNvPr id="53" name="Shape 51"/>
           <p:cNvSpPr/>
           <p:nvPr/>
         </p:nvSpPr>
@@ -21688,7 +22432,7 @@
       </p:sp>
       <p:sp>
         <p:nvSpPr>
-          <p:cNvPr id="52" name="mdpr:1-2-0772f8:title:__title:1-2-0772f8"/>
+          <p:cNvPr id="54" name="mdpr:1-2-0772f8:title:__title:1-2-0772f8"/>
           <p:cNvSpPr txBox="1"/>
           <p:nvPr/>
         </p:nvSpPr>
@@ -21730,7 +22474,7 @@
       </p:sp>
       <p:sp>
         <p:nvSpPr>
-          <p:cNvPr id="53" name="mdpr:1-2-0772f8:toc-item-1:toc-item-1"/>
+          <p:cNvPr id="55" name="mdpr:1-2-0772f8:toc-item-1:toc-item-1"/>
           <p:cNvSpPr txBox="1"/>
           <p:nvPr/>
         </p:nvSpPr>
@@ -21772,7 +22516,7 @@
       </p:sp>
       <p:sp>
         <p:nvSpPr>
-          <p:cNvPr id="54" name="mdpr:1-2-0772f8:toc-item-2:toc-item-2"/>
+          <p:cNvPr id="56" name="mdpr:1-2-0772f8:toc-item-2:toc-item-2"/>
           <p:cNvSpPr txBox="1"/>
           <p:nvPr/>
         </p:nvSpPr>
@@ -21814,7 +22558,7 @@
       </p:sp>
       <p:sp>
         <p:nvSpPr>
-          <p:cNvPr id="55" name="mdpr:1-2-0772f8:toc-item-3:toc-item-3"/>
+          <p:cNvPr id="57" name="mdpr:1-2-0772f8:toc-item-3:toc-item-3"/>
           <p:cNvSpPr txBox="1"/>
           <p:nvPr/>
         </p:nvSpPr>
@@ -21856,7 +22600,7 @@
       </p:sp>
       <p:sp>
         <p:nvSpPr>
-          <p:cNvPr id="56" name="mdpr:1-2-0772f8:toc-item-4:toc-item-4"/>
+          <p:cNvPr id="58" name="mdpr:1-2-0772f8:toc-item-4:toc-item-4"/>
           <p:cNvSpPr txBox="1"/>
           <p:nvPr/>
         </p:nvSpPr>
@@ -21898,7 +22642,7 @@
       </p:sp>
       <p:sp>
         <p:nvSpPr>
-          <p:cNvPr id="57" name="mdpr:1-2-0772f8:toc-item-5:toc-item-5"/>
+          <p:cNvPr id="59" name="mdpr:1-2-0772f8:toc-item-5:toc-item-5"/>
           <p:cNvSpPr txBox="1"/>
           <p:nvPr/>
         </p:nvSpPr>
@@ -21940,7 +22684,7 @@
       </p:sp>
       <p:sp>
         <p:nvSpPr>
-          <p:cNvPr id="58" name="mdpr:1-2-0772f8:toc-item-6:toc-item-6"/>
+          <p:cNvPr id="60" name="mdpr:1-2-0772f8:toc-item-6:toc-item-6"/>
           <p:cNvSpPr txBox="1"/>
           <p:nvPr/>
         </p:nvSpPr>
@@ -21982,7 +22726,7 @@
       </p:sp>
       <p:sp>
         <p:nvSpPr>
-          <p:cNvPr id="59" name="mdpr:1-2-0772f8:toc-item-7:toc-item-7"/>
+          <p:cNvPr id="61" name="mdpr:1-2-0772f8:toc-item-7:toc-item-7"/>
           <p:cNvSpPr txBox="1"/>
           <p:nvPr/>
         </p:nvSpPr>
@@ -22024,7 +22768,7 @@
       </p:sp>
       <p:sp>
         <p:nvSpPr>
-          <p:cNvPr id="60" name="mdpr:1-2-0772f8:toc-item-8:toc-item-8"/>
+          <p:cNvPr id="62" name="mdpr:1-2-0772f8:toc-item-8:toc-item-8"/>
           <p:cNvSpPr txBox="1"/>
           <p:nvPr/>
         </p:nvSpPr>
@@ -22066,7 +22810,7 @@
       </p:sp>
       <p:sp>
         <p:nvSpPr>
-          <p:cNvPr id="61" name="mdpr:1-2-0772f8:toc-item-9:toc-item-9"/>
+          <p:cNvPr id="63" name="mdpr:1-2-0772f8:toc-item-9:toc-item-9"/>
           <p:cNvSpPr txBox="1"/>
           <p:nvPr/>
         </p:nvSpPr>
@@ -22108,7 +22852,7 @@
       </p:sp>
       <p:sp>
         <p:nvSpPr>
-          <p:cNvPr id="62" name="mdpr:1-2-0772f8:toc-item-10:toc-item-10"/>
+          <p:cNvPr id="64" name="mdpr:1-2-0772f8:toc-item-10:toc-item-10"/>
           <p:cNvSpPr txBox="1"/>
           <p:nvPr/>
         </p:nvSpPr>
@@ -22150,7 +22894,7 @@
       </p:sp>
       <p:sp>
         <p:nvSpPr>
-          <p:cNvPr id="63" name="mdpr:1-2-0772f8:toc-item-11:toc-item-11"/>
+          <p:cNvPr id="65" name="mdpr:1-2-0772f8:toc-item-11:toc-item-11"/>
           <p:cNvSpPr txBox="1"/>
           <p:nvPr/>
         </p:nvSpPr>
@@ -22192,7 +22936,7 @@
       </p:sp>
       <p:sp>
         <p:nvSpPr>
-          <p:cNvPr id="64" name="mdpr:1-2-0772f8:toc-item-12:toc-item-12"/>
+          <p:cNvPr id="66" name="mdpr:1-2-0772f8:toc-item-12:toc-item-12"/>
           <p:cNvSpPr txBox="1"/>
           <p:nvPr/>
         </p:nvSpPr>
@@ -22234,7 +22978,7 @@
       </p:sp>
       <p:sp>
         <p:nvSpPr>
-          <p:cNvPr id="65" name="mdpr:1-2-0772f8:toc-item-13:toc-item-13"/>
+          <p:cNvPr id="67" name="mdpr:1-2-0772f8:toc-item-13:toc-item-13"/>
           <p:cNvSpPr txBox="1"/>
           <p:nvPr/>
         </p:nvSpPr>
@@ -22276,7 +23020,7 @@
       </p:sp>
       <p:sp>
         <p:nvSpPr>
-          <p:cNvPr id="66" name="mdpr:1-2-0772f8:toc-item-14:toc-item-14"/>
+          <p:cNvPr id="68" name="mdpr:1-2-0772f8:toc-item-14:toc-item-14"/>
           <p:cNvSpPr txBox="1"/>
           <p:nvPr/>
         </p:nvSpPr>
@@ -23131,6 +23875,68 @@
         </p:nvSpPr>
         <p:spPr>
           <a:xfrm>
+            <a:off x="658368" y="603504"/>
+            <a:ext cx="1005840" cy="292608"/>
+          </a:xfrm>
+          <a:prstGeom prst="roundRect">
+            <a:avLst>
+              <a:gd name="adj" fmla="val 12500"/>
+            </a:avLst>
+          </a:prstGeom>
+          <a:solidFill>
+            <a:srgbClr val="0F766E">
+              <a:alpha val="28000"/>
+            </a:srgbClr>
+          </a:solidFill>
+          <a:ln w="12700">
+            <a:solidFill>
+              <a:srgbClr val="0F766E">
+                <a:alpha val="0"/>
+              </a:srgbClr>
+            </a:solidFill>
+            <a:prstDash val="solid"/>
+          </a:ln>
+        </p:spPr>
+      </p:sp>
+      <p:sp>
+        <p:nvSpPr>
+          <p:cNvPr id="34" name="Shape 32"/>
+          <p:cNvSpPr/>
+          <p:nvPr/>
+        </p:nvSpPr>
+        <p:spPr>
+          <a:xfrm>
+            <a:off x="9859975" y="5980176"/>
+            <a:ext cx="1591056" cy="292608"/>
+          </a:xfrm>
+          <a:prstGeom prst="roundRect">
+            <a:avLst>
+              <a:gd name="adj" fmla="val 12500"/>
+            </a:avLst>
+          </a:prstGeom>
+          <a:solidFill>
+            <a:srgbClr val="F0AA11">
+              <a:alpha val="18000"/>
+            </a:srgbClr>
+          </a:solidFill>
+          <a:ln w="12700">
+            <a:solidFill>
+              <a:srgbClr val="F0AA11">
+                <a:alpha val="0"/>
+              </a:srgbClr>
+            </a:solidFill>
+            <a:prstDash val="solid"/>
+          </a:ln>
+        </p:spPr>
+      </p:sp>
+      <p:sp>
+        <p:nvSpPr>
+          <p:cNvPr id="35" name="Shape 33"/>
+          <p:cNvSpPr/>
+          <p:nvPr/>
+        </p:nvSpPr>
+        <p:spPr>
+          <a:xfrm>
             <a:off x="10600639" y="457200"/>
             <a:ext cx="914400" cy="256032"/>
           </a:xfrm>
@@ -23156,7 +23962,7 @@
       </p:sp>
       <p:sp>
         <p:nvSpPr>
-          <p:cNvPr id="34" name="Shape 32"/>
+          <p:cNvPr id="36" name="Shape 34"/>
           <p:cNvSpPr/>
           <p:nvPr/>
         </p:nvSpPr>
@@ -23183,7 +23989,7 @@
       </p:sp>
       <p:sp>
         <p:nvSpPr>
-          <p:cNvPr id="35" name="Shape 33"/>
+          <p:cNvPr id="37" name="Shape 35"/>
           <p:cNvSpPr/>
           <p:nvPr/>
         </p:nvSpPr>
@@ -23210,7 +24016,7 @@
       </p:sp>
       <p:sp>
         <p:nvSpPr>
-          <p:cNvPr id="36" name="Shape 34"/>
+          <p:cNvPr id="38" name="Shape 36"/>
           <p:cNvSpPr/>
           <p:nvPr/>
         </p:nvSpPr>
@@ -23237,7 +24043,7 @@
       </p:sp>
       <p:sp>
         <p:nvSpPr>
-          <p:cNvPr id="37" name="mdpr:2-2-4f71ba:title:__title:2-2-4f71ba"/>
+          <p:cNvPr id="39" name="mdpr:2-2-4f71ba:title:__title:2-2-4f71ba"/>
           <p:cNvSpPr txBox="1"/>
           <p:nvPr/>
         </p:nvSpPr>
@@ -23279,7 +24085,7 @@
       </p:sp>
       <p:sp>
         <p:nvSpPr>
-          <p:cNvPr id="38" name="mdpr:2-2-4f71ba:left:block-27-chunk-2"/>
+          <p:cNvPr id="40" name="mdpr:2-2-4f71ba:left:block-27-chunk-2"/>
           <p:cNvSpPr txBox="1"/>
           <p:nvPr/>
         </p:nvSpPr>
@@ -23338,7 +24144,7 @@
       </p:sp>
       <p:sp>
         <p:nvSpPr>
-          <p:cNvPr id="39" name="mdpr:2-2-4f71ba:right:block-27-chunk-2"/>
+          <p:cNvPr id="41" name="mdpr:2-2-4f71ba:right:block-27-chunk-2"/>
           <p:cNvSpPr txBox="1"/>
           <p:nvPr/>
         </p:nvSpPr>
@@ -24210,6 +25016,68 @@
         </p:nvSpPr>
         <p:spPr>
           <a:xfrm>
+            <a:off x="658368" y="603504"/>
+            <a:ext cx="1005840" cy="292608"/>
+          </a:xfrm>
+          <a:prstGeom prst="roundRect">
+            <a:avLst>
+              <a:gd name="adj" fmla="val 12500"/>
+            </a:avLst>
+          </a:prstGeom>
+          <a:solidFill>
+            <a:srgbClr val="0F766E">
+              <a:alpha val="28000"/>
+            </a:srgbClr>
+          </a:solidFill>
+          <a:ln w="12700">
+            <a:solidFill>
+              <a:srgbClr val="0F766E">
+                <a:alpha val="0"/>
+              </a:srgbClr>
+            </a:solidFill>
+            <a:prstDash val="solid"/>
+          </a:ln>
+        </p:spPr>
+      </p:sp>
+      <p:sp>
+        <p:nvSpPr>
+          <p:cNvPr id="34" name="Shape 32"/>
+          <p:cNvSpPr/>
+          <p:nvPr/>
+        </p:nvSpPr>
+        <p:spPr>
+          <a:xfrm>
+            <a:off x="9859975" y="5980176"/>
+            <a:ext cx="1591056" cy="292608"/>
+          </a:xfrm>
+          <a:prstGeom prst="roundRect">
+            <a:avLst>
+              <a:gd name="adj" fmla="val 12500"/>
+            </a:avLst>
+          </a:prstGeom>
+          <a:solidFill>
+            <a:srgbClr val="F0AA11">
+              <a:alpha val="18000"/>
+            </a:srgbClr>
+          </a:solidFill>
+          <a:ln w="12700">
+            <a:solidFill>
+              <a:srgbClr val="F0AA11">
+                <a:alpha val="0"/>
+              </a:srgbClr>
+            </a:solidFill>
+            <a:prstDash val="solid"/>
+          </a:ln>
+        </p:spPr>
+      </p:sp>
+      <p:sp>
+        <p:nvSpPr>
+          <p:cNvPr id="35" name="Shape 33"/>
+          <p:cNvSpPr/>
+          <p:nvPr/>
+        </p:nvSpPr>
+        <p:spPr>
+          <a:xfrm>
             <a:off x="10600639" y="457200"/>
             <a:ext cx="914400" cy="256032"/>
           </a:xfrm>
@@ -24235,7 +25103,7 @@
       </p:sp>
       <p:sp>
         <p:nvSpPr>
-          <p:cNvPr id="34" name="Shape 32"/>
+          <p:cNvPr id="36" name="Shape 34"/>
           <p:cNvSpPr/>
           <p:nvPr/>
         </p:nvSpPr>
@@ -24262,7 +25130,7 @@
       </p:sp>
       <p:pic>
         <p:nvPicPr>
-          <p:cNvPr id="35" name="Image 0" descr="preencoded.png">    </p:cNvPr>
+          <p:cNvPr id="37" name="Image 0" descr="preencoded.png">    </p:cNvPr>
           <p:cNvPicPr>
             <a:picLocks noChangeAspect="1"/>
           </p:cNvPicPr>
@@ -24292,7 +25160,7 @@
       </p:pic>
       <p:sp>
         <p:nvSpPr>
-          <p:cNvPr id="36" name="Shape 33"/>
+          <p:cNvPr id="38" name="Shape 35"/>
           <p:cNvSpPr/>
           <p:nvPr/>
         </p:nvSpPr>
@@ -24328,7 +25196,7 @@
       </p:sp>
       <p:pic>
         <p:nvPicPr>
-          <p:cNvPr id="37" name="Image 1" descr="preencoded.png">    </p:cNvPr>
+          <p:cNvPr id="39" name="Image 1" descr="preencoded.png">    </p:cNvPr>
           <p:cNvPicPr>
             <a:picLocks noChangeAspect="1"/>
           </p:cNvPicPr>
@@ -24358,7 +25226,7 @@
       </p:pic>
       <p:sp>
         <p:nvSpPr>
-          <p:cNvPr id="38" name="Shape 34"/>
+          <p:cNvPr id="40" name="Shape 36"/>
           <p:cNvSpPr/>
           <p:nvPr/>
         </p:nvSpPr>
@@ -24394,7 +25262,7 @@
       </p:sp>
       <p:pic>
         <p:nvPicPr>
-          <p:cNvPr id="39" name="Image 2" descr="preencoded.png">    </p:cNvPr>
+          <p:cNvPr id="41" name="Image 2" descr="preencoded.png">    </p:cNvPr>
           <p:cNvPicPr>
             <a:picLocks noChangeAspect="1"/>
           </p:cNvPicPr>
@@ -24424,7 +25292,7 @@
       </p:pic>
       <p:sp>
         <p:nvSpPr>
-          <p:cNvPr id="40" name="Shape 35"/>
+          <p:cNvPr id="42" name="Shape 37"/>
           <p:cNvSpPr/>
           <p:nvPr/>
         </p:nvSpPr>
@@ -24460,7 +25328,7 @@
       </p:sp>
       <p:pic>
         <p:nvPicPr>
-          <p:cNvPr id="41" name="Image 3" descr="preencoded.png">    </p:cNvPr>
+          <p:cNvPr id="43" name="Image 3" descr="preencoded.png">    </p:cNvPr>
           <p:cNvPicPr>
             <a:picLocks noChangeAspect="1"/>
           </p:cNvPicPr>
@@ -24490,7 +25358,7 @@
       </p:pic>
       <p:sp>
         <p:nvSpPr>
-          <p:cNvPr id="42" name="Shape 36"/>
+          <p:cNvPr id="44" name="Shape 38"/>
           <p:cNvSpPr/>
           <p:nvPr/>
         </p:nvSpPr>
@@ -24526,7 +25394,7 @@
       </p:sp>
       <p:sp>
         <p:nvSpPr>
-          <p:cNvPr id="43" name="Shape 37"/>
+          <p:cNvPr id="45" name="Shape 39"/>
           <p:cNvSpPr/>
           <p:nvPr/>
         </p:nvSpPr>
@@ -24553,7 +25421,7 @@
       </p:sp>
       <p:sp>
         <p:nvSpPr>
-          <p:cNvPr id="44" name="Shape 38"/>
+          <p:cNvPr id="46" name="Shape 40"/>
           <p:cNvSpPr/>
           <p:nvPr/>
         </p:nvSpPr>
@@ -24580,7 +25448,7 @@
       </p:sp>
       <p:sp>
         <p:nvSpPr>
-          <p:cNvPr id="45" name="Shape 39"/>
+          <p:cNvPr id="47" name="Shape 41"/>
           <p:cNvSpPr/>
           <p:nvPr/>
         </p:nvSpPr>
@@ -24607,7 +25475,7 @@
       </p:sp>
       <p:sp>
         <p:nvSpPr>
-          <p:cNvPr id="46" name="Shape 40"/>
+          <p:cNvPr id="48" name="Shape 42"/>
           <p:cNvSpPr/>
           <p:nvPr/>
         </p:nvSpPr>
@@ -24634,7 +25502,7 @@
       </p:sp>
       <p:sp>
         <p:nvSpPr>
-          <p:cNvPr id="47" name="mdpr:icon-and-text-aside-8429fc:title:__title:icon-and-text-aside-8429fc"/>
+          <p:cNvPr id="49" name="mdpr:icon-and-text-aside-8429fc:title:__title:icon-and-text-aside-8429fc"/>
           <p:cNvSpPr txBox="1"/>
           <p:nvPr/>
         </p:nvSpPr>
@@ -24676,7 +25544,7 @@
       </p:sp>
       <p:sp>
         <p:nvSpPr>
-          <p:cNvPr id="48" name="Shape 42"/>
+          <p:cNvPr id="50" name="Shape 44"/>
           <p:cNvSpPr/>
           <p:nvPr/>
         </p:nvSpPr>
@@ -24703,7 +25571,7 @@
       </p:sp>
       <p:pic>
         <p:nvPicPr>
-          <p:cNvPr id="49" name="Image 4" descr="article icon from tabler-icons (MIT)">    </p:cNvPr>
+          <p:cNvPr id="51" name="Image 4" descr="article icon from tabler-icons (MIT)">    </p:cNvPr>
           <p:cNvPicPr>
             <a:picLocks noChangeAspect="1"/>
           </p:cNvPicPr>
@@ -24733,7 +25601,7 @@
       </p:pic>
       <p:sp>
         <p:nvSpPr>
-          <p:cNvPr id="50" name="mdpr:icon-and-text-aside-8429fc:item-1:block-29"/>
+          <p:cNvPr id="52" name="mdpr:icon-and-text-aside-8429fc:item-1:block-29"/>
           <p:cNvSpPr txBox="1"/>
           <p:nvPr/>
         </p:nvSpPr>
@@ -24792,7 +25660,7 @@
       </p:sp>
       <p:sp>
         <p:nvSpPr>
-          <p:cNvPr id="51" name="Shape 44"/>
+          <p:cNvPr id="53" name="Shape 46"/>
           <p:cNvSpPr/>
           <p:nvPr/>
         </p:nvSpPr>
@@ -24819,7 +25687,7 @@
       </p:sp>
       <p:pic>
         <p:nvPicPr>
-          <p:cNvPr id="52" name="Image 5" descr="article icon from tabler-icons (MIT)">    </p:cNvPr>
+          <p:cNvPr id="54" name="Image 5" descr="article icon from tabler-icons (MIT)">    </p:cNvPr>
           <p:cNvPicPr>
             <a:picLocks noChangeAspect="1"/>
           </p:cNvPicPr>
@@ -24849,7 +25717,7 @@
       </p:pic>
       <p:sp>
         <p:nvSpPr>
-          <p:cNvPr id="53" name="mdpr:icon-and-text-aside-8429fc:item-2:block-29"/>
+          <p:cNvPr id="55" name="mdpr:icon-and-text-aside-8429fc:item-2:block-29"/>
           <p:cNvSpPr txBox="1"/>
           <p:nvPr/>
         </p:nvSpPr>
@@ -24908,7 +25776,7 @@
       </p:sp>
       <p:sp>
         <p:nvSpPr>
-          <p:cNvPr id="54" name="Shape 46"/>
+          <p:cNvPr id="56" name="Shape 48"/>
           <p:cNvSpPr/>
           <p:nvPr/>
         </p:nvSpPr>
@@ -24935,7 +25803,7 @@
       </p:sp>
       <p:pic>
         <p:nvPicPr>
-          <p:cNvPr id="55" name="Image 6" descr="article icon from tabler-icons (MIT)">    </p:cNvPr>
+          <p:cNvPr id="57" name="Image 6" descr="article icon from tabler-icons (MIT)">    </p:cNvPr>
           <p:cNvPicPr>
             <a:picLocks noChangeAspect="1"/>
           </p:cNvPicPr>
@@ -24965,7 +25833,7 @@
       </p:pic>
       <p:sp>
         <p:nvSpPr>
-          <p:cNvPr id="56" name="mdpr:icon-and-text-aside-8429fc:item-3:block-29"/>
+          <p:cNvPr id="58" name="mdpr:icon-and-text-aside-8429fc:item-3:block-29"/>
           <p:cNvSpPr txBox="1"/>
           <p:nvPr/>
         </p:nvSpPr>
@@ -25024,7 +25892,7 @@
       </p:sp>
       <p:sp>
         <p:nvSpPr>
-          <p:cNvPr id="57" name="Shape 48"/>
+          <p:cNvPr id="59" name="Shape 50"/>
           <p:cNvSpPr/>
           <p:nvPr/>
         </p:nvSpPr>
@@ -25051,7 +25919,7 @@
       </p:sp>
       <p:pic>
         <p:nvPicPr>
-          <p:cNvPr id="58" name="Image 7" descr="table icon from tabler-icons (MIT)">    </p:cNvPr>
+          <p:cNvPr id="60" name="Image 7" descr="table icon from tabler-icons (MIT)">    </p:cNvPr>
           <p:cNvPicPr>
             <a:picLocks noChangeAspect="1"/>
           </p:cNvPicPr>
@@ -25081,7 +25949,7 @@
       </p:pic>
       <p:sp>
         <p:nvSpPr>
-          <p:cNvPr id="59" name="mdpr:icon-and-text-aside-8429fc:item-4:block-29"/>
+          <p:cNvPr id="61" name="mdpr:icon-and-text-aside-8429fc:item-4:block-29"/>
           <p:cNvSpPr txBox="1"/>
           <p:nvPr/>
         </p:nvSpPr>
@@ -25953,6 +26821,68 @@
         </p:nvSpPr>
         <p:spPr>
           <a:xfrm>
+            <a:off x="658368" y="603504"/>
+            <a:ext cx="1005840" cy="292608"/>
+          </a:xfrm>
+          <a:prstGeom prst="roundRect">
+            <a:avLst>
+              <a:gd name="adj" fmla="val 12500"/>
+            </a:avLst>
+          </a:prstGeom>
+          <a:solidFill>
+            <a:srgbClr val="0F766E">
+              <a:alpha val="28000"/>
+            </a:srgbClr>
+          </a:solidFill>
+          <a:ln w="12700">
+            <a:solidFill>
+              <a:srgbClr val="0F766E">
+                <a:alpha val="0"/>
+              </a:srgbClr>
+            </a:solidFill>
+            <a:prstDash val="solid"/>
+          </a:ln>
+        </p:spPr>
+      </p:sp>
+      <p:sp>
+        <p:nvSpPr>
+          <p:cNvPr id="34" name="Shape 32"/>
+          <p:cNvSpPr/>
+          <p:nvPr/>
+        </p:nvSpPr>
+        <p:spPr>
+          <a:xfrm>
+            <a:off x="9859975" y="5980176"/>
+            <a:ext cx="1591056" cy="292608"/>
+          </a:xfrm>
+          <a:prstGeom prst="roundRect">
+            <a:avLst>
+              <a:gd name="adj" fmla="val 12500"/>
+            </a:avLst>
+          </a:prstGeom>
+          <a:solidFill>
+            <a:srgbClr val="F0AA11">
+              <a:alpha val="18000"/>
+            </a:srgbClr>
+          </a:solidFill>
+          <a:ln w="12700">
+            <a:solidFill>
+              <a:srgbClr val="F0AA11">
+                <a:alpha val="0"/>
+              </a:srgbClr>
+            </a:solidFill>
+            <a:prstDash val="solid"/>
+          </a:ln>
+        </p:spPr>
+      </p:sp>
+      <p:sp>
+        <p:nvSpPr>
+          <p:cNvPr id="35" name="Shape 33"/>
+          <p:cNvSpPr/>
+          <p:nvPr/>
+        </p:nvSpPr>
+        <p:spPr>
+          <a:xfrm>
             <a:off x="10600639" y="457200"/>
             <a:ext cx="914400" cy="256032"/>
           </a:xfrm>
@@ -25978,7 +26908,7 @@
       </p:sp>
       <p:sp>
         <p:nvSpPr>
-          <p:cNvPr id="34" name="Shape 32"/>
+          <p:cNvPr id="36" name="Shape 34"/>
           <p:cNvSpPr/>
           <p:nvPr/>
         </p:nvSpPr>
@@ -26005,7 +26935,7 @@
       </p:sp>
       <p:pic>
         <p:nvPicPr>
-          <p:cNvPr id="35" name="Image 0" descr="preencoded.png">    </p:cNvPr>
+          <p:cNvPr id="37" name="Image 0" descr="preencoded.png">    </p:cNvPr>
           <p:cNvPicPr>
             <a:picLocks noChangeAspect="1"/>
           </p:cNvPicPr>
@@ -26035,7 +26965,7 @@
       </p:pic>
       <p:sp>
         <p:nvSpPr>
-          <p:cNvPr id="36" name="Shape 33"/>
+          <p:cNvPr id="38" name="Shape 35"/>
           <p:cNvSpPr/>
           <p:nvPr/>
         </p:nvSpPr>
@@ -26071,7 +27001,7 @@
       </p:sp>
       <p:pic>
         <p:nvPicPr>
-          <p:cNvPr id="37" name="Image 1" descr="preencoded.png">    </p:cNvPr>
+          <p:cNvPr id="39" name="Image 1" descr="preencoded.png">    </p:cNvPr>
           <p:cNvPicPr>
             <a:picLocks noChangeAspect="1"/>
           </p:cNvPicPr>
@@ -26101,7 +27031,7 @@
       </p:pic>
       <p:sp>
         <p:nvSpPr>
-          <p:cNvPr id="38" name="Shape 34"/>
+          <p:cNvPr id="40" name="Shape 36"/>
           <p:cNvSpPr/>
           <p:nvPr/>
         </p:nvSpPr>
@@ -26137,7 +27067,7 @@
       </p:sp>
       <p:pic>
         <p:nvPicPr>
-          <p:cNvPr id="39" name="Image 2" descr="preencoded.png">    </p:cNvPr>
+          <p:cNvPr id="41" name="Image 2" descr="preencoded.png">    </p:cNvPr>
           <p:cNvPicPr>
             <a:picLocks noChangeAspect="1"/>
           </p:cNvPicPr>
@@ -26167,7 +27097,7 @@
       </p:pic>
       <p:sp>
         <p:nvSpPr>
-          <p:cNvPr id="40" name="Shape 35"/>
+          <p:cNvPr id="42" name="Shape 37"/>
           <p:cNvSpPr/>
           <p:nvPr/>
         </p:nvSpPr>
@@ -26203,7 +27133,7 @@
       </p:sp>
       <p:pic>
         <p:nvPicPr>
-          <p:cNvPr id="41" name="Image 3" descr="preencoded.png">    </p:cNvPr>
+          <p:cNvPr id="43" name="Image 3" descr="preencoded.png">    </p:cNvPr>
           <p:cNvPicPr>
             <a:picLocks noChangeAspect="1"/>
           </p:cNvPicPr>
@@ -26233,7 +27163,7 @@
       </p:pic>
       <p:sp>
         <p:nvSpPr>
-          <p:cNvPr id="42" name="Shape 36"/>
+          <p:cNvPr id="44" name="Shape 38"/>
           <p:cNvSpPr/>
           <p:nvPr/>
         </p:nvSpPr>
@@ -26269,7 +27199,7 @@
       </p:sp>
       <p:sp>
         <p:nvSpPr>
-          <p:cNvPr id="43" name="Shape 37"/>
+          <p:cNvPr id="45" name="Shape 39"/>
           <p:cNvSpPr/>
           <p:nvPr/>
         </p:nvSpPr>
@@ -26296,7 +27226,7 @@
       </p:sp>
       <p:sp>
         <p:nvSpPr>
-          <p:cNvPr id="44" name="Shape 38"/>
+          <p:cNvPr id="46" name="Shape 40"/>
           <p:cNvSpPr/>
           <p:nvPr/>
         </p:nvSpPr>
@@ -26323,7 +27253,7 @@
       </p:sp>
       <p:sp>
         <p:nvSpPr>
-          <p:cNvPr id="45" name="Shape 39"/>
+          <p:cNvPr id="47" name="Shape 41"/>
           <p:cNvSpPr/>
           <p:nvPr/>
         </p:nvSpPr>
@@ -26350,7 +27280,7 @@
       </p:sp>
       <p:sp>
         <p:nvSpPr>
-          <p:cNvPr id="46" name="Shape 40"/>
+          <p:cNvPr id="48" name="Shape 42"/>
           <p:cNvSpPr/>
           <p:nvPr/>
         </p:nvSpPr>
@@ -26377,7 +27307,7 @@
       </p:sp>
       <p:sp>
         <p:nvSpPr>
-          <p:cNvPr id="47" name="mdpr:overflow-guard-f8d03e:title:__title:overflow-guard-f8d03e"/>
+          <p:cNvPr id="49" name="mdpr:overflow-guard-f8d03e:title:__title:overflow-guard-f8d03e"/>
           <p:cNvSpPr txBox="1"/>
           <p:nvPr/>
         </p:nvSpPr>
@@ -26419,7 +27349,7 @@
       </p:sp>
       <p:sp>
         <p:nvSpPr>
-          <p:cNvPr id="48" name="Shape 42"/>
+          <p:cNvPr id="50" name="Shape 44"/>
           <p:cNvSpPr/>
           <p:nvPr/>
         </p:nvSpPr>
@@ -26446,7 +27376,7 @@
       </p:sp>
       <p:pic>
         <p:nvPicPr>
-          <p:cNvPr id="49" name="Image 4" descr="verified icon from tabler-icons (MIT)">    </p:cNvPr>
+          <p:cNvPr id="51" name="Image 4" descr="verified icon from tabler-icons (MIT)">    </p:cNvPr>
           <p:cNvPicPr>
             <a:picLocks noChangeAspect="1"/>
           </p:cNvPicPr>
@@ -26476,7 +27406,7 @@
       </p:pic>
       <p:sp>
         <p:nvSpPr>
-          <p:cNvPr id="50" name="mdpr:overflow-guard-f8d03e:item-1:block-31"/>
+          <p:cNvPr id="52" name="mdpr:overflow-guard-f8d03e:item-1:block-31"/>
           <p:cNvSpPr txBox="1"/>
           <p:nvPr/>
         </p:nvSpPr>
@@ -26535,7 +27465,7 @@
       </p:sp>
       <p:sp>
         <p:nvSpPr>
-          <p:cNvPr id="51" name="Shape 44"/>
+          <p:cNvPr id="53" name="Shape 46"/>
           <p:cNvSpPr/>
           <p:nvPr/>
         </p:nvSpPr>
@@ -26562,7 +27492,7 @@
       </p:sp>
       <p:pic>
         <p:nvPicPr>
-          <p:cNvPr id="52" name="Image 5" descr="table icon from tabler-icons (MIT)">    </p:cNvPr>
+          <p:cNvPr id="54" name="Image 5" descr="table icon from tabler-icons (MIT)">    </p:cNvPr>
           <p:cNvPicPr>
             <a:picLocks noChangeAspect="1"/>
           </p:cNvPicPr>
@@ -26592,7 +27522,7 @@
       </p:pic>
       <p:sp>
         <p:nvSpPr>
-          <p:cNvPr id="53" name="mdpr:overflow-guard-f8d03e:item-2:block-31"/>
+          <p:cNvPr id="55" name="mdpr:overflow-guard-f8d03e:item-2:block-31"/>
           <p:cNvSpPr txBox="1"/>
           <p:nvPr/>
         </p:nvSpPr>
@@ -26651,7 +27581,7 @@
       </p:sp>
       <p:sp>
         <p:nvSpPr>
-          <p:cNvPr id="54" name="Shape 46"/>
+          <p:cNvPr id="56" name="Shape 48"/>
           <p:cNvSpPr/>
           <p:nvPr/>
         </p:nvSpPr>
@@ -26678,7 +27608,7 @@
       </p:sp>
       <p:pic>
         <p:nvPicPr>
-          <p:cNvPr id="55" name="Image 6" descr="article icon from tabler-icons (MIT)">    </p:cNvPr>
+          <p:cNvPr id="57" name="Image 6" descr="article icon from tabler-icons (MIT)">    </p:cNvPr>
           <p:cNvPicPr>
             <a:picLocks noChangeAspect="1"/>
           </p:cNvPicPr>
@@ -26708,7 +27638,7 @@
       </p:pic>
       <p:sp>
         <p:nvSpPr>
-          <p:cNvPr id="56" name="mdpr:overflow-guard-f8d03e:item-3:block-31"/>
+          <p:cNvPr id="58" name="mdpr:overflow-guard-f8d03e:item-3:block-31"/>
           <p:cNvSpPr txBox="1"/>
           <p:nvPr/>
         </p:nvSpPr>
@@ -26767,7 +27697,7 @@
       </p:sp>
       <p:sp>
         <p:nvSpPr>
-          <p:cNvPr id="57" name="Shape 48"/>
+          <p:cNvPr id="59" name="Shape 50"/>
           <p:cNvSpPr/>
           <p:nvPr/>
         </p:nvSpPr>
@@ -26794,7 +27724,7 @@
       </p:sp>
       <p:pic>
         <p:nvPicPr>
-          <p:cNvPr id="58" name="Image 7" descr="article icon from tabler-icons (MIT)">    </p:cNvPr>
+          <p:cNvPr id="60" name="Image 7" descr="article icon from tabler-icons (MIT)">    </p:cNvPr>
           <p:cNvPicPr>
             <a:picLocks noChangeAspect="1"/>
           </p:cNvPicPr>
@@ -26824,7 +27754,7 @@
       </p:pic>
       <p:sp>
         <p:nvSpPr>
-          <p:cNvPr id="59" name="mdpr:overflow-guard-f8d03e:item-4:block-31"/>
+          <p:cNvPr id="61" name="mdpr:overflow-guard-f8d03e:item-4:block-31"/>
           <p:cNvSpPr txBox="1"/>
           <p:nvPr/>
         </p:nvSpPr>
@@ -27696,6 +28626,68 @@
         </p:nvSpPr>
         <p:spPr>
           <a:xfrm>
+            <a:off x="658368" y="603504"/>
+            <a:ext cx="1005840" cy="292608"/>
+          </a:xfrm>
+          <a:prstGeom prst="roundRect">
+            <a:avLst>
+              <a:gd name="adj" fmla="val 12500"/>
+            </a:avLst>
+          </a:prstGeom>
+          <a:solidFill>
+            <a:srgbClr val="0F766E">
+              <a:alpha val="28000"/>
+            </a:srgbClr>
+          </a:solidFill>
+          <a:ln w="12700">
+            <a:solidFill>
+              <a:srgbClr val="0F766E">
+                <a:alpha val="0"/>
+              </a:srgbClr>
+            </a:solidFill>
+            <a:prstDash val="solid"/>
+          </a:ln>
+        </p:spPr>
+      </p:sp>
+      <p:sp>
+        <p:nvSpPr>
+          <p:cNvPr id="34" name="Shape 32"/>
+          <p:cNvSpPr/>
+          <p:nvPr/>
+        </p:nvSpPr>
+        <p:spPr>
+          <a:xfrm>
+            <a:off x="9859975" y="5980176"/>
+            <a:ext cx="1591056" cy="292608"/>
+          </a:xfrm>
+          <a:prstGeom prst="roundRect">
+            <a:avLst>
+              <a:gd name="adj" fmla="val 12500"/>
+            </a:avLst>
+          </a:prstGeom>
+          <a:solidFill>
+            <a:srgbClr val="F0AA11">
+              <a:alpha val="18000"/>
+            </a:srgbClr>
+          </a:solidFill>
+          <a:ln w="12700">
+            <a:solidFill>
+              <a:srgbClr val="F0AA11">
+                <a:alpha val="0"/>
+              </a:srgbClr>
+            </a:solidFill>
+            <a:prstDash val="solid"/>
+          </a:ln>
+        </p:spPr>
+      </p:sp>
+      <p:sp>
+        <p:nvSpPr>
+          <p:cNvPr id="35" name="Shape 33"/>
+          <p:cNvSpPr/>
+          <p:nvPr/>
+        </p:nvSpPr>
+        <p:spPr>
+          <a:xfrm>
             <a:off x="10600639" y="457200"/>
             <a:ext cx="914400" cy="256032"/>
           </a:xfrm>
@@ -27721,7 +28713,7 @@
       </p:sp>
       <p:sp>
         <p:nvSpPr>
-          <p:cNvPr id="34" name="Shape 32"/>
+          <p:cNvPr id="36" name="Shape 34"/>
           <p:cNvSpPr/>
           <p:nvPr/>
         </p:nvSpPr>
@@ -27748,7 +28740,7 @@
       </p:sp>
       <p:pic>
         <p:nvPicPr>
-          <p:cNvPr id="35" name="Image 0" descr="preencoded.png">    </p:cNvPr>
+          <p:cNvPr id="37" name="Image 0" descr="preencoded.png">    </p:cNvPr>
           <p:cNvPicPr>
             <a:picLocks noChangeAspect="1"/>
           </p:cNvPicPr>
@@ -27778,7 +28770,7 @@
       </p:pic>
       <p:sp>
         <p:nvSpPr>
-          <p:cNvPr id="36" name="Shape 33"/>
+          <p:cNvPr id="38" name="Shape 35"/>
           <p:cNvSpPr/>
           <p:nvPr/>
         </p:nvSpPr>
@@ -27814,7 +28806,7 @@
       </p:sp>
       <p:sp>
         <p:nvSpPr>
-          <p:cNvPr id="37" name="Shape 34"/>
+          <p:cNvPr id="39" name="Shape 36"/>
           <p:cNvSpPr/>
           <p:nvPr/>
         </p:nvSpPr>
@@ -27841,7 +28833,7 @@
       </p:sp>
       <p:sp>
         <p:nvSpPr>
-          <p:cNvPr id="38" name="mdpr:image-safe-frame-d4d6a4:title:__title:image-safe-frame-d4d6a4"/>
+          <p:cNvPr id="40" name="mdpr:image-safe-frame-d4d6a4:title:__title:image-safe-frame-d4d6a4"/>
           <p:cNvSpPr txBox="1"/>
           <p:nvPr/>
         </p:nvSpPr>
@@ -27883,7 +28875,7 @@
       </p:sp>
       <p:sp>
         <p:nvSpPr>
-          <p:cNvPr id="39" name="mdpr:image-safe-frame-d4d6a4:body:block-33-block-33-block-33"/>
+          <p:cNvPr id="41" name="mdpr:image-safe-frame-d4d6a4:body:block-33-block-33-block-33"/>
           <p:cNvSpPr txBox="1"/>
           <p:nvPr/>
         </p:nvSpPr>
@@ -28022,7 +29014,7 @@
       </p:sp>
       <p:pic>
         <p:nvPicPr>
-          <p:cNvPr id="40" name="mdpr:image-safe-frame-d4d6a4:image-1:block-34" descr="{&quot;mdpr&quot;:{&quot;slideId&quot;:&quot;image-safe-frame-d4d6a4&quot;,&quot;layoutSlideId&quot;:&quot;layout-image-safe-frame-d4d6a4&quot;,&quot;regionId&quot;:&quot;image-1&quot;,&quot;blockIds&quot;:[&quot;block-34&quot;],&quot;objectKind&quot;:&quot;native-image&quot;,&quot;role&quot;:&quot;image&quot;,&quot;editable&quot;:false}}">    </p:cNvPr>
+          <p:cNvPr id="42" name="mdpr:image-safe-frame-d4d6a4:image-1:block-34" descr="{&quot;mdpr&quot;:{&quot;slideId&quot;:&quot;image-safe-frame-d4d6a4&quot;,&quot;layoutSlideId&quot;:&quot;layout-image-safe-frame-d4d6a4&quot;,&quot;regionId&quot;:&quot;image-1&quot;,&quot;blockIds&quot;:[&quot;block-34&quot;],&quot;objectKind&quot;:&quot;native-image&quot;,&quot;role&quot;:&quot;image&quot;,&quot;editable&quot;:false}}">    </p:cNvPr>
           <p:cNvPicPr>
             <a:picLocks noChangeAspect="1"/>
           </p:cNvPicPr>
@@ -28865,6 +29857,68 @@
         </p:nvSpPr>
         <p:spPr>
           <a:xfrm>
+            <a:off x="658368" y="603504"/>
+            <a:ext cx="1005840" cy="292608"/>
+          </a:xfrm>
+          <a:prstGeom prst="roundRect">
+            <a:avLst>
+              <a:gd name="adj" fmla="val 12500"/>
+            </a:avLst>
+          </a:prstGeom>
+          <a:solidFill>
+            <a:srgbClr val="0F766E">
+              <a:alpha val="28000"/>
+            </a:srgbClr>
+          </a:solidFill>
+          <a:ln w="12700">
+            <a:solidFill>
+              <a:srgbClr val="0F766E">
+                <a:alpha val="0"/>
+              </a:srgbClr>
+            </a:solidFill>
+            <a:prstDash val="solid"/>
+          </a:ln>
+        </p:spPr>
+      </p:sp>
+      <p:sp>
+        <p:nvSpPr>
+          <p:cNvPr id="34" name="Shape 32"/>
+          <p:cNvSpPr/>
+          <p:nvPr/>
+        </p:nvSpPr>
+        <p:spPr>
+          <a:xfrm>
+            <a:off x="9859975" y="5980176"/>
+            <a:ext cx="1591056" cy="292608"/>
+          </a:xfrm>
+          <a:prstGeom prst="roundRect">
+            <a:avLst>
+              <a:gd name="adj" fmla="val 12500"/>
+            </a:avLst>
+          </a:prstGeom>
+          <a:solidFill>
+            <a:srgbClr val="F0AA11">
+              <a:alpha val="18000"/>
+            </a:srgbClr>
+          </a:solidFill>
+          <a:ln w="12700">
+            <a:solidFill>
+              <a:srgbClr val="F0AA11">
+                <a:alpha val="0"/>
+              </a:srgbClr>
+            </a:solidFill>
+            <a:prstDash val="solid"/>
+          </a:ln>
+        </p:spPr>
+      </p:sp>
+      <p:sp>
+        <p:nvSpPr>
+          <p:cNvPr id="35" name="Shape 33"/>
+          <p:cNvSpPr/>
+          <p:nvPr/>
+        </p:nvSpPr>
+        <p:spPr>
+          <a:xfrm>
             <a:off x="10600639" y="457200"/>
             <a:ext cx="914400" cy="256032"/>
           </a:xfrm>
@@ -28890,7 +29944,7 @@
       </p:sp>
       <p:sp>
         <p:nvSpPr>
-          <p:cNvPr id="34" name="Shape 32"/>
+          <p:cNvPr id="36" name="Shape 34"/>
           <p:cNvSpPr/>
           <p:nvPr/>
         </p:nvSpPr>
@@ -28917,7 +29971,7 @@
       </p:sp>
       <p:pic>
         <p:nvPicPr>
-          <p:cNvPr id="35" name="Image 0" descr="preencoded.png">    </p:cNvPr>
+          <p:cNvPr id="37" name="Image 0" descr="preencoded.png">    </p:cNvPr>
           <p:cNvPicPr>
             <a:picLocks noChangeAspect="1"/>
           </p:cNvPicPr>
@@ -28947,7 +30001,7 @@
       </p:pic>
       <p:sp>
         <p:nvSpPr>
-          <p:cNvPr id="36" name="Shape 33"/>
+          <p:cNvPr id="38" name="Shape 35"/>
           <p:cNvSpPr/>
           <p:nvPr/>
         </p:nvSpPr>
@@ -28983,7 +30037,7 @@
       </p:sp>
       <p:pic>
         <p:nvPicPr>
-          <p:cNvPr id="37" name="Image 1" descr="preencoded.png">    </p:cNvPr>
+          <p:cNvPr id="39" name="Image 1" descr="preencoded.png">    </p:cNvPr>
           <p:cNvPicPr>
             <a:picLocks noChangeAspect="1"/>
           </p:cNvPicPr>
@@ -29013,7 +30067,7 @@
       </p:pic>
       <p:sp>
         <p:nvSpPr>
-          <p:cNvPr id="38" name="Shape 34"/>
+          <p:cNvPr id="40" name="Shape 36"/>
           <p:cNvSpPr/>
           <p:nvPr/>
         </p:nvSpPr>
@@ -29049,7 +30103,7 @@
       </p:sp>
       <p:pic>
         <p:nvPicPr>
-          <p:cNvPr id="39" name="Image 2" descr="preencoded.png">    </p:cNvPr>
+          <p:cNvPr id="41" name="Image 2" descr="preencoded.png">    </p:cNvPr>
           <p:cNvPicPr>
             <a:picLocks noChangeAspect="1"/>
           </p:cNvPicPr>
@@ -29079,7 +30133,7 @@
       </p:pic>
       <p:sp>
         <p:nvSpPr>
-          <p:cNvPr id="40" name="Shape 35"/>
+          <p:cNvPr id="42" name="Shape 37"/>
           <p:cNvSpPr/>
           <p:nvPr/>
         </p:nvSpPr>
@@ -29115,7 +30169,7 @@
       </p:sp>
       <p:sp>
         <p:nvSpPr>
-          <p:cNvPr id="41" name="Shape 36"/>
+          <p:cNvPr id="43" name="Shape 38"/>
           <p:cNvSpPr/>
           <p:nvPr/>
         </p:nvSpPr>
@@ -29142,7 +30196,7 @@
       </p:sp>
       <p:sp>
         <p:nvSpPr>
-          <p:cNvPr id="42" name="mdpr:mixed-object-packing-438299:title:__title:mixed-object-packing-438299"/>
+          <p:cNvPr id="44" name="mdpr:mixed-object-packing-438299:title:__title:mixed-object-packing-438299"/>
           <p:cNvSpPr txBox="1"/>
           <p:nvPr/>
         </p:nvSpPr>
@@ -29184,7 +30238,7 @@
       </p:sp>
       <p:graphicFrame>
         <p:nvGraphicFramePr>
-          <p:cNvPr id="43" name="Chart 0" descr=""/>
+          <p:cNvPr id="45" name="Chart 0" descr=""/>
           <p:cNvGraphicFramePr/>
           <p:nvPr/>
         </p:nvGraphicFramePr>
@@ -29642,7 +30696,7 @@
       </p:graphicFrame>
       <p:sp>
         <p:nvSpPr>
-          <p:cNvPr id="45" name="mdpr:mixed-object-packing-438299:body:block-36"/>
+          <p:cNvPr id="47" name="mdpr:mixed-object-packing-438299:body:block-36"/>
           <p:cNvSpPr txBox="1"/>
           <p:nvPr/>
         </p:nvSpPr>
@@ -29741,7 +30795,7 @@
       </p:sp>
       <p:pic>
         <p:nvPicPr>
-          <p:cNvPr id="46" name="mdpr:mixed-object-packing-438299:image-1:block-39" descr="{&quot;mdpr&quot;:{&quot;slideId&quot;:&quot;mixed-object-packing-438299&quot;,&quot;layoutSlideId&quot;:&quot;layout-mixed-object-packing-438299&quot;,&quot;regionId&quot;:&quot;image-1&quot;,&quot;blockIds&quot;:[&quot;block-39&quot;],&quot;objectKind&quot;:&quot;native-image&quot;,&quot;role&quot;:&quot;image&quot;,&quot;editable&quot;:false}}">    </p:cNvPr>
+          <p:cNvPr id="48" name="mdpr:mixed-object-packing-438299:image-1:block-39" descr="{&quot;mdpr&quot;:{&quot;slideId&quot;:&quot;mixed-object-packing-438299&quot;,&quot;layoutSlideId&quot;:&quot;layout-mixed-object-packing-438299&quot;,&quot;regionId&quot;:&quot;image-1&quot;,&quot;blockIds&quot;:[&quot;block-39&quot;],&quot;objectKind&quot;:&quot;native-image&quot;,&quot;role&quot;:&quot;image&quot;,&quot;editable&quot;:false}}">    </p:cNvPr>
           <p:cNvPicPr>
             <a:picLocks noChangeAspect="1"/>
           </p:cNvPicPr>
@@ -30584,6 +31638,68 @@
         </p:nvSpPr>
         <p:spPr>
           <a:xfrm>
+            <a:off x="658368" y="603504"/>
+            <a:ext cx="1005840" cy="292608"/>
+          </a:xfrm>
+          <a:prstGeom prst="roundRect">
+            <a:avLst>
+              <a:gd name="adj" fmla="val 12500"/>
+            </a:avLst>
+          </a:prstGeom>
+          <a:solidFill>
+            <a:srgbClr val="0F766E">
+              <a:alpha val="28000"/>
+            </a:srgbClr>
+          </a:solidFill>
+          <a:ln w="12700">
+            <a:solidFill>
+              <a:srgbClr val="0F766E">
+                <a:alpha val="0"/>
+              </a:srgbClr>
+            </a:solidFill>
+            <a:prstDash val="solid"/>
+          </a:ln>
+        </p:spPr>
+      </p:sp>
+      <p:sp>
+        <p:nvSpPr>
+          <p:cNvPr id="34" name="Shape 32"/>
+          <p:cNvSpPr/>
+          <p:nvPr/>
+        </p:nvSpPr>
+        <p:spPr>
+          <a:xfrm>
+            <a:off x="9859975" y="5980176"/>
+            <a:ext cx="1591056" cy="292608"/>
+          </a:xfrm>
+          <a:prstGeom prst="roundRect">
+            <a:avLst>
+              <a:gd name="adj" fmla="val 12500"/>
+            </a:avLst>
+          </a:prstGeom>
+          <a:solidFill>
+            <a:srgbClr val="F0AA11">
+              <a:alpha val="18000"/>
+            </a:srgbClr>
+          </a:solidFill>
+          <a:ln w="12700">
+            <a:solidFill>
+              <a:srgbClr val="F0AA11">
+                <a:alpha val="0"/>
+              </a:srgbClr>
+            </a:solidFill>
+            <a:prstDash val="solid"/>
+          </a:ln>
+        </p:spPr>
+      </p:sp>
+      <p:sp>
+        <p:nvSpPr>
+          <p:cNvPr id="35" name="Shape 33"/>
+          <p:cNvSpPr/>
+          <p:nvPr/>
+        </p:nvSpPr>
+        <p:spPr>
+          <a:xfrm>
             <a:off x="10600639" y="457200"/>
             <a:ext cx="914400" cy="256032"/>
           </a:xfrm>
@@ -30609,7 +31725,7 @@
       </p:sp>
       <p:sp>
         <p:nvSpPr>
-          <p:cNvPr id="34" name="Shape 32"/>
+          <p:cNvPr id="36" name="Shape 34"/>
           <p:cNvSpPr/>
           <p:nvPr/>
         </p:nvSpPr>
@@ -30636,7 +31752,7 @@
       </p:sp>
       <p:pic>
         <p:nvPicPr>
-          <p:cNvPr id="35" name="Image 0" descr="preencoded.png">    </p:cNvPr>
+          <p:cNvPr id="37" name="Image 0" descr="preencoded.png">    </p:cNvPr>
           <p:cNvPicPr>
             <a:picLocks noChangeAspect="1"/>
           </p:cNvPicPr>
@@ -30666,7 +31782,7 @@
       </p:pic>
       <p:sp>
         <p:nvSpPr>
-          <p:cNvPr id="36" name="Shape 33"/>
+          <p:cNvPr id="38" name="Shape 35"/>
           <p:cNvSpPr/>
           <p:nvPr/>
         </p:nvSpPr>
@@ -30702,7 +31818,7 @@
       </p:sp>
       <p:pic>
         <p:nvPicPr>
-          <p:cNvPr id="37" name="Image 1" descr="preencoded.png">    </p:cNvPr>
+          <p:cNvPr id="39" name="Image 1" descr="preencoded.png">    </p:cNvPr>
           <p:cNvPicPr>
             <a:picLocks noChangeAspect="1"/>
           </p:cNvPicPr>
@@ -30732,7 +31848,7 @@
       </p:pic>
       <p:sp>
         <p:nvSpPr>
-          <p:cNvPr id="38" name="Shape 34"/>
+          <p:cNvPr id="40" name="Shape 36"/>
           <p:cNvSpPr/>
           <p:nvPr/>
         </p:nvSpPr>
@@ -30768,7 +31884,7 @@
       </p:sp>
       <p:pic>
         <p:nvPicPr>
-          <p:cNvPr id="39" name="Image 2" descr="preencoded.png">    </p:cNvPr>
+          <p:cNvPr id="41" name="Image 2" descr="preencoded.png">    </p:cNvPr>
           <p:cNvPicPr>
             <a:picLocks noChangeAspect="1"/>
           </p:cNvPicPr>
@@ -30798,7 +31914,7 @@
       </p:pic>
       <p:sp>
         <p:nvSpPr>
-          <p:cNvPr id="40" name="Shape 35"/>
+          <p:cNvPr id="42" name="Shape 37"/>
           <p:cNvSpPr/>
           <p:nvPr/>
         </p:nvSpPr>
@@ -30834,7 +31950,7 @@
       </p:sp>
       <p:sp>
         <p:nvSpPr>
-          <p:cNvPr id="41" name="Shape 36"/>
+          <p:cNvPr id="43" name="Shape 38"/>
           <p:cNvSpPr/>
           <p:nvPr/>
         </p:nvSpPr>
@@ -30863,7 +31979,7 @@
       </p:sp>
       <p:sp>
         <p:nvSpPr>
-          <p:cNvPr id="42" name="Shape 37"/>
+          <p:cNvPr id="44" name="Shape 39"/>
           <p:cNvSpPr/>
           <p:nvPr/>
         </p:nvSpPr>
@@ -30890,7 +32006,7 @@
       </p:sp>
       <p:sp>
         <p:nvSpPr>
-          <p:cNvPr id="43" name="Shape 38"/>
+          <p:cNvPr id="45" name="Shape 40"/>
           <p:cNvSpPr/>
           <p:nvPr/>
         </p:nvSpPr>
@@ -30917,7 +32033,7 @@
       </p:sp>
       <p:sp>
         <p:nvSpPr>
-          <p:cNvPr id="44" name="Shape 39"/>
+          <p:cNvPr id="46" name="Shape 41"/>
           <p:cNvSpPr/>
           <p:nvPr/>
         </p:nvSpPr>
@@ -30944,7 +32060,7 @@
       </p:sp>
       <p:sp>
         <p:nvSpPr>
-          <p:cNvPr id="45" name="mdpr:actions-output-review-326e07:title:__title:actions-output-review-326e07"/>
+          <p:cNvPr id="47" name="mdpr:actions-output-review-326e07:title:__title:actions-output-review-326e07"/>
           <p:cNvSpPr txBox="1"/>
           <p:nvPr/>
         </p:nvSpPr>
@@ -30986,7 +32102,7 @@
       </p:sp>
       <p:sp>
         <p:nvSpPr>
-          <p:cNvPr id="46" name="Shape 41"/>
+          <p:cNvPr id="48" name="Shape 43"/>
           <p:cNvSpPr/>
           <p:nvPr/>
         </p:nvSpPr>
@@ -31013,7 +32129,7 @@
       </p:sp>
       <p:pic>
         <p:nvPicPr>
-          <p:cNvPr id="47" name="Image 3" descr="flow icon from tabler-icons (MIT)">    </p:cNvPr>
+          <p:cNvPr id="49" name="Image 3" descr="flow icon from tabler-icons (MIT)">    </p:cNvPr>
           <p:cNvPicPr>
             <a:picLocks noChangeAspect="1"/>
           </p:cNvPicPr>
@@ -31043,7 +32159,7 @@
       </p:pic>
       <p:sp>
         <p:nvSpPr>
-          <p:cNvPr id="48" name="mdpr:actions-output-review-326e07:item-1:block-41"/>
+          <p:cNvPr id="50" name="mdpr:actions-output-review-326e07:item-1:block-41"/>
           <p:cNvSpPr txBox="1"/>
           <p:nvPr/>
         </p:nvSpPr>
@@ -31102,7 +32218,7 @@
       </p:sp>
       <p:sp>
         <p:nvSpPr>
-          <p:cNvPr id="49" name="Shape 43"/>
+          <p:cNvPr id="51" name="Shape 45"/>
           <p:cNvSpPr/>
           <p:nvPr/>
         </p:nvSpPr>
@@ -31129,7 +32245,7 @@
       </p:sp>
       <p:pic>
         <p:nvPicPr>
-          <p:cNvPr id="50" name="Image 4" descr="verified icon from tabler-icons (MIT)">    </p:cNvPr>
+          <p:cNvPr id="52" name="Image 4" descr="verified icon from tabler-icons (MIT)">    </p:cNvPr>
           <p:cNvPicPr>
             <a:picLocks noChangeAspect="1"/>
           </p:cNvPicPr>
@@ -31159,7 +32275,7 @@
       </p:pic>
       <p:sp>
         <p:nvSpPr>
-          <p:cNvPr id="51" name="mdpr:actions-output-review-326e07:item-2:block-41"/>
+          <p:cNvPr id="53" name="mdpr:actions-output-review-326e07:item-2:block-41"/>
           <p:cNvSpPr txBox="1"/>
           <p:nvPr/>
         </p:nvSpPr>
@@ -31218,7 +32334,7 @@
       </p:sp>
       <p:sp>
         <p:nvSpPr>
-          <p:cNvPr id="52" name="Shape 45"/>
+          <p:cNvPr id="54" name="Shape 47"/>
           <p:cNvSpPr/>
           <p:nvPr/>
         </p:nvSpPr>
@@ -31245,7 +32361,7 @@
       </p:sp>
       <p:pic>
         <p:nvPicPr>
-          <p:cNvPr id="53" name="Image 5" descr="spark icon from tabler-icons (MIT)">    </p:cNvPr>
+          <p:cNvPr id="55" name="Image 5" descr="spark icon from tabler-icons (MIT)">    </p:cNvPr>
           <p:cNvPicPr>
             <a:picLocks noChangeAspect="1"/>
           </p:cNvPicPr>
@@ -31275,7 +32391,7 @@
       </p:pic>
       <p:sp>
         <p:nvSpPr>
-          <p:cNvPr id="54" name="mdpr:actions-output-review-326e07:item-3:block-41"/>
+          <p:cNvPr id="56" name="mdpr:actions-output-review-326e07:item-3:block-41"/>
           <p:cNvSpPr txBox="1"/>
           <p:nvPr/>
         </p:nvSpPr>
@@ -32147,6 +33263,68 @@
         </p:nvSpPr>
         <p:spPr>
           <a:xfrm>
+            <a:off x="658368" y="603504"/>
+            <a:ext cx="1005840" cy="292608"/>
+          </a:xfrm>
+          <a:prstGeom prst="roundRect">
+            <a:avLst>
+              <a:gd name="adj" fmla="val 12500"/>
+            </a:avLst>
+          </a:prstGeom>
+          <a:solidFill>
+            <a:srgbClr val="0F766E">
+              <a:alpha val="28000"/>
+            </a:srgbClr>
+          </a:solidFill>
+          <a:ln w="12700">
+            <a:solidFill>
+              <a:srgbClr val="0F766E">
+                <a:alpha val="0"/>
+              </a:srgbClr>
+            </a:solidFill>
+            <a:prstDash val="solid"/>
+          </a:ln>
+        </p:spPr>
+      </p:sp>
+      <p:sp>
+        <p:nvSpPr>
+          <p:cNvPr id="34" name="Shape 32"/>
+          <p:cNvSpPr/>
+          <p:nvPr/>
+        </p:nvSpPr>
+        <p:spPr>
+          <a:xfrm>
+            <a:off x="9859975" y="5980176"/>
+            <a:ext cx="1591056" cy="292608"/>
+          </a:xfrm>
+          <a:prstGeom prst="roundRect">
+            <a:avLst>
+              <a:gd name="adj" fmla="val 12500"/>
+            </a:avLst>
+          </a:prstGeom>
+          <a:solidFill>
+            <a:srgbClr val="F0AA11">
+              <a:alpha val="18000"/>
+            </a:srgbClr>
+          </a:solidFill>
+          <a:ln w="12700">
+            <a:solidFill>
+              <a:srgbClr val="F0AA11">
+                <a:alpha val="0"/>
+              </a:srgbClr>
+            </a:solidFill>
+            <a:prstDash val="solid"/>
+          </a:ln>
+        </p:spPr>
+      </p:sp>
+      <p:sp>
+        <p:nvSpPr>
+          <p:cNvPr id="35" name="Shape 33"/>
+          <p:cNvSpPr/>
+          <p:nvPr/>
+        </p:nvSpPr>
+        <p:spPr>
+          <a:xfrm>
             <a:off x="10600639" y="457200"/>
             <a:ext cx="914400" cy="256032"/>
           </a:xfrm>
@@ -32172,7 +33350,7 @@
       </p:sp>
       <p:sp>
         <p:nvSpPr>
-          <p:cNvPr id="34" name="Shape 32"/>
+          <p:cNvPr id="36" name="Shape 34"/>
           <p:cNvSpPr/>
           <p:nvPr/>
         </p:nvSpPr>
@@ -32199,7 +33377,7 @@
       </p:sp>
       <p:sp>
         <p:nvSpPr>
-          <p:cNvPr id="35" name="Shape 33"/>
+          <p:cNvPr id="37" name="Shape 35"/>
           <p:cNvSpPr/>
           <p:nvPr/>
         </p:nvSpPr>
@@ -32226,7 +33404,7 @@
       </p:sp>
       <p:sp>
         <p:nvSpPr>
-          <p:cNvPr id="36" name="Shape 34"/>
+          <p:cNvPr id="38" name="Shape 36"/>
           <p:cNvSpPr/>
           <p:nvPr/>
         </p:nvSpPr>
@@ -32253,7 +33431,7 @@
       </p:sp>
       <p:sp>
         <p:nvSpPr>
-          <p:cNvPr id="37" name="Shape 35"/>
+          <p:cNvPr id="39" name="Shape 37"/>
           <p:cNvSpPr/>
           <p:nvPr/>
         </p:nvSpPr>
@@ -32280,7 +33458,7 @@
       </p:sp>
       <p:sp>
         <p:nvSpPr>
-          <p:cNvPr id="38" name="mdpr:2-2-7bfb60:title:__title:2-2-7bfb60"/>
+          <p:cNvPr id="40" name="mdpr:2-2-7bfb60:title:__title:2-2-7bfb60"/>
           <p:cNvSpPr txBox="1"/>
           <p:nvPr/>
         </p:nvSpPr>
@@ -32322,7 +33500,7 @@
       </p:sp>
       <p:sp>
         <p:nvSpPr>
-          <p:cNvPr id="39" name="mdpr:2-2-7bfb60:toc-item-1:toc-item-15"/>
+          <p:cNvPr id="41" name="mdpr:2-2-7bfb60:toc-item-1:toc-item-15"/>
           <p:cNvSpPr txBox="1"/>
           <p:nvPr/>
         </p:nvSpPr>
@@ -33177,6 +34355,68 @@
         </p:nvSpPr>
         <p:spPr>
           <a:xfrm>
+            <a:off x="658368" y="603504"/>
+            <a:ext cx="1005840" cy="292608"/>
+          </a:xfrm>
+          <a:prstGeom prst="roundRect">
+            <a:avLst>
+              <a:gd name="adj" fmla="val 12500"/>
+            </a:avLst>
+          </a:prstGeom>
+          <a:solidFill>
+            <a:srgbClr val="0F766E">
+              <a:alpha val="28000"/>
+            </a:srgbClr>
+          </a:solidFill>
+          <a:ln w="12700">
+            <a:solidFill>
+              <a:srgbClr val="0F766E">
+                <a:alpha val="0"/>
+              </a:srgbClr>
+            </a:solidFill>
+            <a:prstDash val="solid"/>
+          </a:ln>
+        </p:spPr>
+      </p:sp>
+      <p:sp>
+        <p:nvSpPr>
+          <p:cNvPr id="34" name="Shape 32"/>
+          <p:cNvSpPr/>
+          <p:nvPr/>
+        </p:nvSpPr>
+        <p:spPr>
+          <a:xfrm>
+            <a:off x="9859975" y="5980176"/>
+            <a:ext cx="1591056" cy="292608"/>
+          </a:xfrm>
+          <a:prstGeom prst="roundRect">
+            <a:avLst>
+              <a:gd name="adj" fmla="val 12500"/>
+            </a:avLst>
+          </a:prstGeom>
+          <a:solidFill>
+            <a:srgbClr val="F0AA11">
+              <a:alpha val="18000"/>
+            </a:srgbClr>
+          </a:solidFill>
+          <a:ln w="12700">
+            <a:solidFill>
+              <a:srgbClr val="F0AA11">
+                <a:alpha val="0"/>
+              </a:srgbClr>
+            </a:solidFill>
+            <a:prstDash val="solid"/>
+          </a:ln>
+        </p:spPr>
+      </p:sp>
+      <p:sp>
+        <p:nvSpPr>
+          <p:cNvPr id="35" name="Shape 33"/>
+          <p:cNvSpPr/>
+          <p:nvPr/>
+        </p:nvSpPr>
+        <p:spPr>
+          <a:xfrm>
             <a:off x="10600639" y="457200"/>
             <a:ext cx="914400" cy="256032"/>
           </a:xfrm>
@@ -33202,7 +34442,7 @@
       </p:sp>
       <p:sp>
         <p:nvSpPr>
-          <p:cNvPr id="34" name="Shape 32"/>
+          <p:cNvPr id="36" name="Shape 34"/>
           <p:cNvSpPr/>
           <p:nvPr/>
         </p:nvSpPr>
@@ -33229,7 +34469,7 @@
       </p:sp>
       <p:pic>
         <p:nvPicPr>
-          <p:cNvPr id="35" name="Image 0" descr="preencoded.png">    </p:cNvPr>
+          <p:cNvPr id="37" name="Image 0" descr="preencoded.png">    </p:cNvPr>
           <p:cNvPicPr>
             <a:picLocks noChangeAspect="1"/>
           </p:cNvPicPr>
@@ -33259,7 +34499,7 @@
       </p:pic>
       <p:sp>
         <p:nvSpPr>
-          <p:cNvPr id="36" name="Shape 33"/>
+          <p:cNvPr id="38" name="Shape 35"/>
           <p:cNvSpPr/>
           <p:nvPr/>
         </p:nvSpPr>
@@ -33295,7 +34535,7 @@
       </p:sp>
       <p:sp>
         <p:nvSpPr>
-          <p:cNvPr id="37" name="Shape 34"/>
+          <p:cNvPr id="39" name="Shape 36"/>
           <p:cNvSpPr/>
           <p:nvPr/>
         </p:nvSpPr>
@@ -33324,7 +34564,7 @@
       </p:sp>
       <p:sp>
         <p:nvSpPr>
-          <p:cNvPr id="38" name="Shape 35"/>
+          <p:cNvPr id="40" name="Shape 37"/>
           <p:cNvSpPr/>
           <p:nvPr/>
         </p:nvSpPr>
@@ -33351,7 +34591,7 @@
       </p:sp>
       <p:sp>
         <p:nvSpPr>
-          <p:cNvPr id="39" name="mdpr:teaser-summary-7731dc:title:__title:teaser-summary-7731dc"/>
+          <p:cNvPr id="41" name="mdpr:teaser-summary-7731dc:title:__title:teaser-summary-7731dc"/>
           <p:cNvSpPr txBox="1"/>
           <p:nvPr/>
         </p:nvSpPr>
@@ -33393,7 +34633,7 @@
       </p:sp>
       <p:sp>
         <p:nvSpPr>
-          <p:cNvPr id="40" name="mdpr:teaser-summary-7731dc:key-message:block-3"/>
+          <p:cNvPr id="42" name="mdpr:teaser-summary-7731dc:key-message:block-3"/>
           <p:cNvSpPr txBox="1"/>
           <p:nvPr/>
         </p:nvSpPr>
@@ -33435,7 +34675,7 @@
       </p:sp>
       <p:sp>
         <p:nvSpPr>
-          <p:cNvPr id="41" name="mdpr:teaser-summary-7731dc:body:block-4"/>
+          <p:cNvPr id="43" name="mdpr:teaser-summary-7731dc:body:block-4"/>
           <p:cNvSpPr txBox="1"/>
           <p:nvPr/>
         </p:nvSpPr>
@@ -34427,6 +35667,68 @@
         </p:nvSpPr>
         <p:spPr>
           <a:xfrm>
+            <a:off x="658368" y="603504"/>
+            <a:ext cx="1005840" cy="292608"/>
+          </a:xfrm>
+          <a:prstGeom prst="roundRect">
+            <a:avLst>
+              <a:gd name="adj" fmla="val 12500"/>
+            </a:avLst>
+          </a:prstGeom>
+          <a:solidFill>
+            <a:srgbClr val="0F766E">
+              <a:alpha val="28000"/>
+            </a:srgbClr>
+          </a:solidFill>
+          <a:ln w="12700">
+            <a:solidFill>
+              <a:srgbClr val="0F766E">
+                <a:alpha val="0"/>
+              </a:srgbClr>
+            </a:solidFill>
+            <a:prstDash val="solid"/>
+          </a:ln>
+        </p:spPr>
+      </p:sp>
+      <p:sp>
+        <p:nvSpPr>
+          <p:cNvPr id="34" name="Shape 32"/>
+          <p:cNvSpPr/>
+          <p:nvPr/>
+        </p:nvSpPr>
+        <p:spPr>
+          <a:xfrm>
+            <a:off x="9859975" y="5980176"/>
+            <a:ext cx="1591056" cy="292608"/>
+          </a:xfrm>
+          <a:prstGeom prst="roundRect">
+            <a:avLst>
+              <a:gd name="adj" fmla="val 12500"/>
+            </a:avLst>
+          </a:prstGeom>
+          <a:solidFill>
+            <a:srgbClr val="F0AA11">
+              <a:alpha val="18000"/>
+            </a:srgbClr>
+          </a:solidFill>
+          <a:ln w="12700">
+            <a:solidFill>
+              <a:srgbClr val="F0AA11">
+                <a:alpha val="0"/>
+              </a:srgbClr>
+            </a:solidFill>
+            <a:prstDash val="solid"/>
+          </a:ln>
+        </p:spPr>
+      </p:sp>
+      <p:sp>
+        <p:nvSpPr>
+          <p:cNvPr id="35" name="Shape 33"/>
+          <p:cNvSpPr/>
+          <p:nvPr/>
+        </p:nvSpPr>
+        <p:spPr>
+          <a:xfrm>
             <a:off x="10600639" y="457200"/>
             <a:ext cx="914400" cy="256032"/>
           </a:xfrm>
@@ -34452,7 +35754,7 @@
       </p:sp>
       <p:sp>
         <p:nvSpPr>
-          <p:cNvPr id="34" name="Shape 32"/>
+          <p:cNvPr id="36" name="Shape 34"/>
           <p:cNvSpPr/>
           <p:nvPr/>
         </p:nvSpPr>
@@ -34479,7 +35781,7 @@
       </p:sp>
       <p:pic>
         <p:nvPicPr>
-          <p:cNvPr id="35" name="Image 0" descr="preencoded.png">    </p:cNvPr>
+          <p:cNvPr id="37" name="Image 0" descr="preencoded.png">    </p:cNvPr>
           <p:cNvPicPr>
             <a:picLocks noChangeAspect="1"/>
           </p:cNvPicPr>
@@ -34509,7 +35811,7 @@
       </p:pic>
       <p:sp>
         <p:nvSpPr>
-          <p:cNvPr id="36" name="Shape 33"/>
+          <p:cNvPr id="38" name="Shape 35"/>
           <p:cNvSpPr/>
           <p:nvPr/>
         </p:nvSpPr>
@@ -34545,7 +35847,7 @@
       </p:sp>
       <p:pic>
         <p:nvPicPr>
-          <p:cNvPr id="37" name="Image 1" descr="preencoded.png">    </p:cNvPr>
+          <p:cNvPr id="39" name="Image 1" descr="preencoded.png">    </p:cNvPr>
           <p:cNvPicPr>
             <a:picLocks noChangeAspect="1"/>
           </p:cNvPicPr>
@@ -34575,7 +35877,7 @@
       </p:pic>
       <p:sp>
         <p:nvSpPr>
-          <p:cNvPr id="38" name="Shape 34"/>
+          <p:cNvPr id="40" name="Shape 36"/>
           <p:cNvSpPr/>
           <p:nvPr/>
         </p:nvSpPr>
@@ -34611,7 +35913,7 @@
       </p:sp>
       <p:pic>
         <p:nvPicPr>
-          <p:cNvPr id="39" name="Image 2" descr="preencoded.png">    </p:cNvPr>
+          <p:cNvPr id="41" name="Image 2" descr="preencoded.png">    </p:cNvPr>
           <p:cNvPicPr>
             <a:picLocks noChangeAspect="1"/>
           </p:cNvPicPr>
@@ -34641,7 +35943,7 @@
       </p:pic>
       <p:sp>
         <p:nvSpPr>
-          <p:cNvPr id="40" name="Shape 35"/>
+          <p:cNvPr id="42" name="Shape 37"/>
           <p:cNvSpPr/>
           <p:nvPr/>
         </p:nvSpPr>
@@ -34677,7 +35979,7 @@
       </p:sp>
       <p:sp>
         <p:nvSpPr>
-          <p:cNvPr id="41" name="Shape 36"/>
+          <p:cNvPr id="43" name="Shape 38"/>
           <p:cNvSpPr/>
           <p:nvPr/>
         </p:nvSpPr>
@@ -34706,7 +36008,7 @@
       </p:sp>
       <p:sp>
         <p:nvSpPr>
-          <p:cNvPr id="42" name="Shape 37"/>
+          <p:cNvPr id="44" name="Shape 39"/>
           <p:cNvSpPr/>
           <p:nvPr/>
         </p:nvSpPr>
@@ -34733,7 +36035,7 @@
       </p:sp>
       <p:sp>
         <p:nvSpPr>
-          <p:cNvPr id="43" name="Shape 38"/>
+          <p:cNvPr id="45" name="Shape 40"/>
           <p:cNvSpPr/>
           <p:nvPr/>
         </p:nvSpPr>
@@ -34760,7 +36062,7 @@
       </p:sp>
       <p:sp>
         <p:nvSpPr>
-          <p:cNvPr id="44" name="Shape 39"/>
+          <p:cNvPr id="46" name="Shape 41"/>
           <p:cNvSpPr/>
           <p:nvPr/>
         </p:nvSpPr>
@@ -34787,7 +36089,7 @@
       </p:sp>
       <p:sp>
         <p:nvSpPr>
-          <p:cNvPr id="45" name="mdpr:1-2-32ac08:title:__title:1-2-32ac08"/>
+          <p:cNvPr id="47" name="mdpr:1-2-32ac08:title:__title:1-2-32ac08"/>
           <p:cNvSpPr txBox="1"/>
           <p:nvPr/>
         </p:nvSpPr>
@@ -34829,7 +36131,7 @@
       </p:sp>
       <p:sp>
         <p:nvSpPr>
-          <p:cNvPr id="46" name="Shape 41"/>
+          <p:cNvPr id="48" name="Shape 43"/>
           <p:cNvSpPr/>
           <p:nvPr/>
         </p:nvSpPr>
@@ -34856,7 +36158,7 @@
       </p:sp>
       <p:pic>
         <p:nvPicPr>
-          <p:cNvPr id="47" name="Image 3" descr="article icon from tabler-icons (MIT)">    </p:cNvPr>
+          <p:cNvPr id="49" name="Image 3" descr="article icon from tabler-icons (MIT)">    </p:cNvPr>
           <p:cNvPicPr>
             <a:picLocks noChangeAspect="1"/>
           </p:cNvPicPr>
@@ -34886,7 +36188,7 @@
       </p:pic>
       <p:sp>
         <p:nvSpPr>
-          <p:cNvPr id="48" name="mdpr:1-2-32ac08:item-1:block-6-chunk-1"/>
+          <p:cNvPr id="50" name="mdpr:1-2-32ac08:item-1:block-6-chunk-1"/>
           <p:cNvSpPr txBox="1"/>
           <p:nvPr/>
         </p:nvSpPr>
@@ -34945,7 +36247,7 @@
       </p:sp>
       <p:sp>
         <p:nvSpPr>
-          <p:cNvPr id="49" name="Shape 43"/>
+          <p:cNvPr id="51" name="Shape 45"/>
           <p:cNvSpPr/>
           <p:nvPr/>
         </p:nvSpPr>
@@ -34972,7 +36274,7 @@
       </p:sp>
       <p:pic>
         <p:nvPicPr>
-          <p:cNvPr id="50" name="Image 4" descr="chart icon from tabler-icons (MIT)">    </p:cNvPr>
+          <p:cNvPr id="52" name="Image 4" descr="chart icon from tabler-icons (MIT)">    </p:cNvPr>
           <p:cNvPicPr>
             <a:picLocks noChangeAspect="1"/>
           </p:cNvPicPr>
@@ -35002,7 +36304,7 @@
       </p:pic>
       <p:sp>
         <p:nvSpPr>
-          <p:cNvPr id="51" name="mdpr:1-2-32ac08:item-2:block-6-chunk-1"/>
+          <p:cNvPr id="53" name="mdpr:1-2-32ac08:item-2:block-6-chunk-1"/>
           <p:cNvSpPr txBox="1"/>
           <p:nvPr/>
         </p:nvSpPr>
@@ -35061,7 +36363,7 @@
       </p:sp>
       <p:sp>
         <p:nvSpPr>
-          <p:cNvPr id="52" name="Shape 45"/>
+          <p:cNvPr id="54" name="Shape 47"/>
           <p:cNvSpPr/>
           <p:nvPr/>
         </p:nvSpPr>
@@ -35088,7 +36390,7 @@
       </p:sp>
       <p:pic>
         <p:nvPicPr>
-          <p:cNvPr id="53" name="Image 5" descr="article icon from tabler-icons (MIT)">    </p:cNvPr>
+          <p:cNvPr id="55" name="Image 5" descr="article icon from tabler-icons (MIT)">    </p:cNvPr>
           <p:cNvPicPr>
             <a:picLocks noChangeAspect="1"/>
           </p:cNvPicPr>
@@ -35118,7 +36420,7 @@
       </p:pic>
       <p:sp>
         <p:nvSpPr>
-          <p:cNvPr id="54" name="mdpr:1-2-32ac08:item-3:block-6-chunk-1"/>
+          <p:cNvPr id="56" name="mdpr:1-2-32ac08:item-3:block-6-chunk-1"/>
           <p:cNvSpPr txBox="1"/>
           <p:nvPr/>
         </p:nvSpPr>
@@ -35990,6 +37292,68 @@
         </p:nvSpPr>
         <p:spPr>
           <a:xfrm>
+            <a:off x="658368" y="603504"/>
+            <a:ext cx="1005840" cy="292608"/>
+          </a:xfrm>
+          <a:prstGeom prst="roundRect">
+            <a:avLst>
+              <a:gd name="adj" fmla="val 12500"/>
+            </a:avLst>
+          </a:prstGeom>
+          <a:solidFill>
+            <a:srgbClr val="0F766E">
+              <a:alpha val="28000"/>
+            </a:srgbClr>
+          </a:solidFill>
+          <a:ln w="12700">
+            <a:solidFill>
+              <a:srgbClr val="0F766E">
+                <a:alpha val="0"/>
+              </a:srgbClr>
+            </a:solidFill>
+            <a:prstDash val="solid"/>
+          </a:ln>
+        </p:spPr>
+      </p:sp>
+      <p:sp>
+        <p:nvSpPr>
+          <p:cNvPr id="34" name="Shape 32"/>
+          <p:cNvSpPr/>
+          <p:nvPr/>
+        </p:nvSpPr>
+        <p:spPr>
+          <a:xfrm>
+            <a:off x="9859975" y="5980176"/>
+            <a:ext cx="1591056" cy="292608"/>
+          </a:xfrm>
+          <a:prstGeom prst="roundRect">
+            <a:avLst>
+              <a:gd name="adj" fmla="val 12500"/>
+            </a:avLst>
+          </a:prstGeom>
+          <a:solidFill>
+            <a:srgbClr val="F0AA11">
+              <a:alpha val="18000"/>
+            </a:srgbClr>
+          </a:solidFill>
+          <a:ln w="12700">
+            <a:solidFill>
+              <a:srgbClr val="F0AA11">
+                <a:alpha val="0"/>
+              </a:srgbClr>
+            </a:solidFill>
+            <a:prstDash val="solid"/>
+          </a:ln>
+        </p:spPr>
+      </p:sp>
+      <p:sp>
+        <p:nvSpPr>
+          <p:cNvPr id="35" name="Shape 33"/>
+          <p:cNvSpPr/>
+          <p:nvPr/>
+        </p:nvSpPr>
+        <p:spPr>
+          <a:xfrm>
             <a:off x="10600639" y="457200"/>
             <a:ext cx="914400" cy="256032"/>
           </a:xfrm>
@@ -36015,7 +37379,7 @@
       </p:sp>
       <p:sp>
         <p:nvSpPr>
-          <p:cNvPr id="34" name="Shape 32"/>
+          <p:cNvPr id="36" name="Shape 34"/>
           <p:cNvSpPr/>
           <p:nvPr/>
         </p:nvSpPr>
@@ -36042,7 +37406,7 @@
       </p:sp>
       <p:sp>
         <p:nvSpPr>
-          <p:cNvPr id="35" name="Shape 33"/>
+          <p:cNvPr id="37" name="Shape 35"/>
           <p:cNvSpPr/>
           <p:nvPr/>
         </p:nvSpPr>
@@ -36069,7 +37433,7 @@
       </p:sp>
       <p:sp>
         <p:nvSpPr>
-          <p:cNvPr id="36" name="Shape 34"/>
+          <p:cNvPr id="38" name="Shape 36"/>
           <p:cNvSpPr/>
           <p:nvPr/>
         </p:nvSpPr>
@@ -36096,7 +37460,7 @@
       </p:sp>
       <p:sp>
         <p:nvSpPr>
-          <p:cNvPr id="37" name="mdpr:2-2-14f8eb:title:__title:2-2-14f8eb"/>
+          <p:cNvPr id="39" name="mdpr:2-2-14f8eb:title:__title:2-2-14f8eb"/>
           <p:cNvSpPr txBox="1"/>
           <p:nvPr/>
         </p:nvSpPr>
@@ -36138,7 +37502,7 @@
       </p:sp>
       <p:sp>
         <p:nvSpPr>
-          <p:cNvPr id="38" name="mdpr:2-2-14f8eb:left:block-6-chunk-2"/>
+          <p:cNvPr id="40" name="mdpr:2-2-14f8eb:left:block-6-chunk-2"/>
           <p:cNvSpPr txBox="1"/>
           <p:nvPr/>
         </p:nvSpPr>
@@ -36197,7 +37561,7 @@
       </p:sp>
       <p:sp>
         <p:nvSpPr>
-          <p:cNvPr id="39" name="mdpr:2-2-14f8eb:right:block-6-chunk-2"/>
+          <p:cNvPr id="41" name="mdpr:2-2-14f8eb:right:block-6-chunk-2"/>
           <p:cNvSpPr txBox="1"/>
           <p:nvPr/>
         </p:nvSpPr>
@@ -37069,6 +38433,68 @@
         </p:nvSpPr>
         <p:spPr>
           <a:xfrm>
+            <a:off x="658368" y="603504"/>
+            <a:ext cx="1005840" cy="292608"/>
+          </a:xfrm>
+          <a:prstGeom prst="roundRect">
+            <a:avLst>
+              <a:gd name="adj" fmla="val 12500"/>
+            </a:avLst>
+          </a:prstGeom>
+          <a:solidFill>
+            <a:srgbClr val="0F766E">
+              <a:alpha val="28000"/>
+            </a:srgbClr>
+          </a:solidFill>
+          <a:ln w="12700">
+            <a:solidFill>
+              <a:srgbClr val="0F766E">
+                <a:alpha val="0"/>
+              </a:srgbClr>
+            </a:solidFill>
+            <a:prstDash val="solid"/>
+          </a:ln>
+        </p:spPr>
+      </p:sp>
+      <p:sp>
+        <p:nvSpPr>
+          <p:cNvPr id="34" name="Shape 32"/>
+          <p:cNvSpPr/>
+          <p:nvPr/>
+        </p:nvSpPr>
+        <p:spPr>
+          <a:xfrm>
+            <a:off x="9859975" y="5980176"/>
+            <a:ext cx="1591056" cy="292608"/>
+          </a:xfrm>
+          <a:prstGeom prst="roundRect">
+            <a:avLst>
+              <a:gd name="adj" fmla="val 12500"/>
+            </a:avLst>
+          </a:prstGeom>
+          <a:solidFill>
+            <a:srgbClr val="F0AA11">
+              <a:alpha val="18000"/>
+            </a:srgbClr>
+          </a:solidFill>
+          <a:ln w="12700">
+            <a:solidFill>
+              <a:srgbClr val="F0AA11">
+                <a:alpha val="0"/>
+              </a:srgbClr>
+            </a:solidFill>
+            <a:prstDash val="solid"/>
+          </a:ln>
+        </p:spPr>
+      </p:sp>
+      <p:sp>
+        <p:nvSpPr>
+          <p:cNvPr id="35" name="Shape 33"/>
+          <p:cNvSpPr/>
+          <p:nvPr/>
+        </p:nvSpPr>
+        <p:spPr>
+          <a:xfrm>
             <a:off x="10600639" y="457200"/>
             <a:ext cx="914400" cy="256032"/>
           </a:xfrm>
@@ -37094,7 +38520,7 @@
       </p:sp>
       <p:sp>
         <p:nvSpPr>
-          <p:cNvPr id="34" name="Shape 32"/>
+          <p:cNvPr id="36" name="Shape 34"/>
           <p:cNvSpPr/>
           <p:nvPr/>
         </p:nvSpPr>
@@ -37121,7 +38547,7 @@
       </p:sp>
       <p:pic>
         <p:nvPicPr>
-          <p:cNvPr id="35" name="Image 0" descr="preencoded.png">    </p:cNvPr>
+          <p:cNvPr id="37" name="Image 0" descr="preencoded.png">    </p:cNvPr>
           <p:cNvPicPr>
             <a:picLocks noChangeAspect="1"/>
           </p:cNvPicPr>
@@ -37151,7 +38577,7 @@
       </p:pic>
       <p:sp>
         <p:nvSpPr>
-          <p:cNvPr id="36" name="Shape 33"/>
+          <p:cNvPr id="38" name="Shape 35"/>
           <p:cNvSpPr/>
           <p:nvPr/>
         </p:nvSpPr>
@@ -37187,7 +38613,7 @@
       </p:sp>
       <p:pic>
         <p:nvPicPr>
-          <p:cNvPr id="37" name="Image 1" descr="preencoded.png">    </p:cNvPr>
+          <p:cNvPr id="39" name="Image 1" descr="preencoded.png">    </p:cNvPr>
           <p:cNvPicPr>
             <a:picLocks noChangeAspect="1"/>
           </p:cNvPicPr>
@@ -37217,7 +38643,7 @@
       </p:pic>
       <p:sp>
         <p:nvSpPr>
-          <p:cNvPr id="38" name="Shape 34"/>
+          <p:cNvPr id="40" name="Shape 36"/>
           <p:cNvSpPr/>
           <p:nvPr/>
         </p:nvSpPr>
@@ -37253,7 +38679,7 @@
       </p:sp>
       <p:pic>
         <p:nvPicPr>
-          <p:cNvPr id="39" name="Image 2" descr="preencoded.png">    </p:cNvPr>
+          <p:cNvPr id="41" name="Image 2" descr="preencoded.png">    </p:cNvPr>
           <p:cNvPicPr>
             <a:picLocks noChangeAspect="1"/>
           </p:cNvPicPr>
@@ -37283,7 +38709,7 @@
       </p:pic>
       <p:sp>
         <p:nvSpPr>
-          <p:cNvPr id="40" name="Shape 35"/>
+          <p:cNvPr id="42" name="Shape 37"/>
           <p:cNvSpPr/>
           <p:nvPr/>
         </p:nvSpPr>
@@ -37319,7 +38745,7 @@
       </p:sp>
       <p:sp>
         <p:nvSpPr>
-          <p:cNvPr id="41" name="Shape 36"/>
+          <p:cNvPr id="43" name="Shape 38"/>
           <p:cNvSpPr/>
           <p:nvPr/>
         </p:nvSpPr>
@@ -37348,7 +38774,7 @@
       </p:sp>
       <p:sp>
         <p:nvSpPr>
-          <p:cNvPr id="42" name="Shape 37"/>
+          <p:cNvPr id="44" name="Shape 39"/>
           <p:cNvSpPr/>
           <p:nvPr/>
         </p:nvSpPr>
@@ -37375,7 +38801,7 @@
       </p:sp>
       <p:sp>
         <p:nvSpPr>
-          <p:cNvPr id="43" name="Shape 38"/>
+          <p:cNvPr id="45" name="Shape 40"/>
           <p:cNvSpPr/>
           <p:nvPr/>
         </p:nvSpPr>
@@ -37402,7 +38828,7 @@
       </p:sp>
       <p:sp>
         <p:nvSpPr>
-          <p:cNvPr id="44" name="Shape 39"/>
+          <p:cNvPr id="46" name="Shape 41"/>
           <p:cNvSpPr/>
           <p:nvPr/>
         </p:nvSpPr>
@@ -37429,7 +38855,7 @@
       </p:sp>
       <p:sp>
         <p:nvSpPr>
-          <p:cNvPr id="45" name="mdpr:1-2-dfa474:title:__title:1-2-dfa474"/>
+          <p:cNvPr id="47" name="mdpr:1-2-dfa474:title:__title:1-2-dfa474"/>
           <p:cNvSpPr txBox="1"/>
           <p:nvPr/>
         </p:nvSpPr>
@@ -37471,7 +38897,7 @@
       </p:sp>
       <p:sp>
         <p:nvSpPr>
-          <p:cNvPr id="46" name="Shape 41"/>
+          <p:cNvPr id="48" name="Shape 43"/>
           <p:cNvSpPr/>
           <p:nvPr/>
         </p:nvSpPr>
@@ -37498,7 +38924,7 @@
       </p:sp>
       <p:pic>
         <p:nvPicPr>
-          <p:cNvPr id="47" name="Image 3" descr="article icon from tabler-icons (MIT)">    </p:cNvPr>
+          <p:cNvPr id="49" name="Image 3" descr="article icon from tabler-icons (MIT)">    </p:cNvPr>
           <p:cNvPicPr>
             <a:picLocks noChangeAspect="1"/>
           </p:cNvPicPr>
@@ -37528,7 +38954,7 @@
       </p:pic>
       <p:sp>
         <p:nvSpPr>
-          <p:cNvPr id="48" name="mdpr:1-2-dfa474:item-1:block-8-chunk-1"/>
+          <p:cNvPr id="50" name="mdpr:1-2-dfa474:item-1:block-8-chunk-1"/>
           <p:cNvSpPr txBox="1"/>
           <p:nvPr/>
         </p:nvSpPr>
@@ -37587,7 +39013,7 @@
       </p:sp>
       <p:sp>
         <p:nvSpPr>
-          <p:cNvPr id="49" name="Shape 43"/>
+          <p:cNvPr id="51" name="Shape 45"/>
           <p:cNvSpPr/>
           <p:nvPr/>
         </p:nvSpPr>
@@ -37614,7 +39040,7 @@
       </p:sp>
       <p:pic>
         <p:nvPicPr>
-          <p:cNvPr id="50" name="Image 4" descr="article icon from tabler-icons (MIT)">    </p:cNvPr>
+          <p:cNvPr id="52" name="Image 4" descr="article icon from tabler-icons (MIT)">    </p:cNvPr>
           <p:cNvPicPr>
             <a:picLocks noChangeAspect="1"/>
           </p:cNvPicPr>
@@ -37644,7 +39070,7 @@
       </p:pic>
       <p:sp>
         <p:nvSpPr>
-          <p:cNvPr id="51" name="mdpr:1-2-dfa474:item-2:block-8-chunk-1"/>
+          <p:cNvPr id="53" name="mdpr:1-2-dfa474:item-2:block-8-chunk-1"/>
           <p:cNvSpPr txBox="1"/>
           <p:nvPr/>
         </p:nvSpPr>
@@ -37703,7 +39129,7 @@
       </p:sp>
       <p:sp>
         <p:nvSpPr>
-          <p:cNvPr id="52" name="Shape 45"/>
+          <p:cNvPr id="54" name="Shape 47"/>
           <p:cNvSpPr/>
           <p:nvPr/>
         </p:nvSpPr>
@@ -37730,7 +39156,7 @@
       </p:sp>
       <p:pic>
         <p:nvPicPr>
-          <p:cNvPr id="53" name="Image 5" descr="article icon from tabler-icons (MIT)">    </p:cNvPr>
+          <p:cNvPr id="55" name="Image 5" descr="article icon from tabler-icons (MIT)">    </p:cNvPr>
           <p:cNvPicPr>
             <a:picLocks noChangeAspect="1"/>
           </p:cNvPicPr>
@@ -37760,7 +39186,7 @@
       </p:pic>
       <p:sp>
         <p:nvSpPr>
-          <p:cNvPr id="54" name="mdpr:1-2-dfa474:item-3:block-8-chunk-1"/>
+          <p:cNvPr id="56" name="mdpr:1-2-dfa474:item-3:block-8-chunk-1"/>
           <p:cNvSpPr txBox="1"/>
           <p:nvPr/>
         </p:nvSpPr>
@@ -38632,6 +40058,68 @@
         </p:nvSpPr>
         <p:spPr>
           <a:xfrm>
+            <a:off x="658368" y="603504"/>
+            <a:ext cx="1005840" cy="292608"/>
+          </a:xfrm>
+          <a:prstGeom prst="roundRect">
+            <a:avLst>
+              <a:gd name="adj" fmla="val 12500"/>
+            </a:avLst>
+          </a:prstGeom>
+          <a:solidFill>
+            <a:srgbClr val="0F766E">
+              <a:alpha val="28000"/>
+            </a:srgbClr>
+          </a:solidFill>
+          <a:ln w="12700">
+            <a:solidFill>
+              <a:srgbClr val="0F766E">
+                <a:alpha val="0"/>
+              </a:srgbClr>
+            </a:solidFill>
+            <a:prstDash val="solid"/>
+          </a:ln>
+        </p:spPr>
+      </p:sp>
+      <p:sp>
+        <p:nvSpPr>
+          <p:cNvPr id="34" name="Shape 32"/>
+          <p:cNvSpPr/>
+          <p:nvPr/>
+        </p:nvSpPr>
+        <p:spPr>
+          <a:xfrm>
+            <a:off x="9859975" y="5980176"/>
+            <a:ext cx="1591056" cy="292608"/>
+          </a:xfrm>
+          <a:prstGeom prst="roundRect">
+            <a:avLst>
+              <a:gd name="adj" fmla="val 12500"/>
+            </a:avLst>
+          </a:prstGeom>
+          <a:solidFill>
+            <a:srgbClr val="F0AA11">
+              <a:alpha val="18000"/>
+            </a:srgbClr>
+          </a:solidFill>
+          <a:ln w="12700">
+            <a:solidFill>
+              <a:srgbClr val="F0AA11">
+                <a:alpha val="0"/>
+              </a:srgbClr>
+            </a:solidFill>
+            <a:prstDash val="solid"/>
+          </a:ln>
+        </p:spPr>
+      </p:sp>
+      <p:sp>
+        <p:nvSpPr>
+          <p:cNvPr id="35" name="Shape 33"/>
+          <p:cNvSpPr/>
+          <p:nvPr/>
+        </p:nvSpPr>
+        <p:spPr>
+          <a:xfrm>
             <a:off x="10600639" y="457200"/>
             <a:ext cx="914400" cy="256032"/>
           </a:xfrm>
@@ -38657,7 +40145,7 @@
       </p:sp>
       <p:sp>
         <p:nvSpPr>
-          <p:cNvPr id="34" name="Shape 32"/>
+          <p:cNvPr id="36" name="Shape 34"/>
           <p:cNvSpPr/>
           <p:nvPr/>
         </p:nvSpPr>
@@ -38684,7 +40172,7 @@
       </p:sp>
       <p:sp>
         <p:nvSpPr>
-          <p:cNvPr id="35" name="Shape 33"/>
+          <p:cNvPr id="37" name="Shape 35"/>
           <p:cNvSpPr/>
           <p:nvPr/>
         </p:nvSpPr>
@@ -38711,7 +40199,7 @@
       </p:sp>
       <p:sp>
         <p:nvSpPr>
-          <p:cNvPr id="36" name="Shape 34"/>
+          <p:cNvPr id="38" name="Shape 36"/>
           <p:cNvSpPr/>
           <p:nvPr/>
         </p:nvSpPr>
@@ -38738,7 +40226,7 @@
       </p:sp>
       <p:sp>
         <p:nvSpPr>
-          <p:cNvPr id="37" name="mdpr:2-2-149bde:title:__title:2-2-149bde"/>
+          <p:cNvPr id="39" name="mdpr:2-2-149bde:title:__title:2-2-149bde"/>
           <p:cNvSpPr txBox="1"/>
           <p:nvPr/>
         </p:nvSpPr>
@@ -38780,7 +40268,7 @@
       </p:sp>
       <p:sp>
         <p:nvSpPr>
-          <p:cNvPr id="38" name="mdpr:2-2-149bde:left:block-8-chunk-2"/>
+          <p:cNvPr id="40" name="mdpr:2-2-149bde:left:block-8-chunk-2"/>
           <p:cNvSpPr txBox="1"/>
           <p:nvPr/>
         </p:nvSpPr>
@@ -38839,7 +40327,7 @@
       </p:sp>
       <p:sp>
         <p:nvSpPr>
-          <p:cNvPr id="39" name="mdpr:2-2-149bde:right:block-8-chunk-2"/>
+          <p:cNvPr id="41" name="mdpr:2-2-149bde:right:block-8-chunk-2"/>
           <p:cNvSpPr txBox="1"/>
           <p:nvPr/>
         </p:nvSpPr>
@@ -39711,6 +41199,68 @@
         </p:nvSpPr>
         <p:spPr>
           <a:xfrm>
+            <a:off x="658368" y="603504"/>
+            <a:ext cx="1005840" cy="292608"/>
+          </a:xfrm>
+          <a:prstGeom prst="roundRect">
+            <a:avLst>
+              <a:gd name="adj" fmla="val 12500"/>
+            </a:avLst>
+          </a:prstGeom>
+          <a:solidFill>
+            <a:srgbClr val="0F766E">
+              <a:alpha val="28000"/>
+            </a:srgbClr>
+          </a:solidFill>
+          <a:ln w="12700">
+            <a:solidFill>
+              <a:srgbClr val="0F766E">
+                <a:alpha val="0"/>
+              </a:srgbClr>
+            </a:solidFill>
+            <a:prstDash val="solid"/>
+          </a:ln>
+        </p:spPr>
+      </p:sp>
+      <p:sp>
+        <p:nvSpPr>
+          <p:cNvPr id="34" name="Shape 32"/>
+          <p:cNvSpPr/>
+          <p:nvPr/>
+        </p:nvSpPr>
+        <p:spPr>
+          <a:xfrm>
+            <a:off x="9859975" y="5980176"/>
+            <a:ext cx="1591056" cy="292608"/>
+          </a:xfrm>
+          <a:prstGeom prst="roundRect">
+            <a:avLst>
+              <a:gd name="adj" fmla="val 12500"/>
+            </a:avLst>
+          </a:prstGeom>
+          <a:solidFill>
+            <a:srgbClr val="F0AA11">
+              <a:alpha val="18000"/>
+            </a:srgbClr>
+          </a:solidFill>
+          <a:ln w="12700">
+            <a:solidFill>
+              <a:srgbClr val="F0AA11">
+                <a:alpha val="0"/>
+              </a:srgbClr>
+            </a:solidFill>
+            <a:prstDash val="solid"/>
+          </a:ln>
+        </p:spPr>
+      </p:sp>
+      <p:sp>
+        <p:nvSpPr>
+          <p:cNvPr id="35" name="Shape 33"/>
+          <p:cNvSpPr/>
+          <p:nvPr/>
+        </p:nvSpPr>
+        <p:spPr>
+          <a:xfrm>
             <a:off x="10600639" y="457200"/>
             <a:ext cx="914400" cy="256032"/>
           </a:xfrm>
@@ -39736,7 +41286,7 @@
       </p:sp>
       <p:sp>
         <p:nvSpPr>
-          <p:cNvPr id="34" name="Shape 32"/>
+          <p:cNvPr id="36" name="Shape 34"/>
           <p:cNvSpPr/>
           <p:nvPr/>
         </p:nvSpPr>
@@ -39763,7 +41313,7 @@
       </p:sp>
       <p:sp>
         <p:nvSpPr>
-          <p:cNvPr id="35" name="Shape 33"/>
+          <p:cNvPr id="37" name="Shape 35"/>
           <p:cNvSpPr/>
           <p:nvPr/>
         </p:nvSpPr>
@@ -39790,7 +41340,7 @@
       </p:sp>
       <p:sp>
         <p:nvSpPr>
-          <p:cNvPr id="36" name="Shape 34"/>
+          <p:cNvPr id="38" name="Shape 36"/>
           <p:cNvSpPr/>
           <p:nvPr/>
         </p:nvSpPr>
@@ -39817,7 +41367,7 @@
       </p:sp>
       <p:sp>
         <p:nvSpPr>
-          <p:cNvPr id="37" name="mdpr:1-2-5a84f1:title:__title:1-2-5a84f1"/>
+          <p:cNvPr id="39" name="mdpr:1-2-5a84f1:title:__title:1-2-5a84f1"/>
           <p:cNvSpPr txBox="1"/>
           <p:nvPr/>
         </p:nvSpPr>
@@ -39859,7 +41409,7 @@
       </p:sp>
       <p:sp>
         <p:nvSpPr>
-          <p:cNvPr id="38" name="mdpr:1-2-5a84f1:left:block-10-chunk-1"/>
+          <p:cNvPr id="40" name="mdpr:1-2-5a84f1:left:block-10-chunk-1"/>
           <p:cNvSpPr txBox="1"/>
           <p:nvPr/>
         </p:nvSpPr>
@@ -39918,7 +41468,7 @@
       </p:sp>
       <p:sp>
         <p:nvSpPr>
-          <p:cNvPr id="39" name="mdpr:1-2-5a84f1:right:block-10-chunk-1"/>
+          <p:cNvPr id="41" name="mdpr:1-2-5a84f1:right:block-10-chunk-1"/>
           <p:cNvSpPr txBox="1"/>
           <p:nvPr/>
         </p:nvSpPr>

--- a/docs/theme-preview/pptx/bentogrid.pptx
+++ b/docs/theme-preview/pptx/bentogrid.pptx
@@ -8800,280 +8800,16 @@
           </a:ln>
         </p:spPr>
       </p:sp>
-      <p:pic>
-        <p:nvPicPr>
-          <p:cNvPr id="37" name="Image 0" descr="preencoded.png">    </p:cNvPr>
-          <p:cNvPicPr>
-            <a:picLocks noChangeAspect="1"/>
-          </p:cNvPicPr>
-          <p:nvPr/>
-        </p:nvPicPr>
-        <p:blipFill>
-          <a:blip r:embed="rId1">
-            <a:extLst>
-              <a:ext uri="{96DAC541-7B7A-43D3-8B79-37D633B846F1}">
-                <asvg:svgBlip xmlns:asvg="http://schemas.microsoft.com/office/drawing/2016/SVG/main" r:embed="rId2"/>
-              </a:ext>
-            </a:extLst>
-          </a:blip>
-          <a:stretch>
-            <a:fillRect/>
-          </a:stretch>
-        </p:blipFill>
-        <p:spPr>
-          <a:xfrm>
-            <a:off x="822960" y="1463040"/>
-            <a:ext cx="5029200" cy="1920240"/>
-          </a:xfrm>
-          <a:prstGeom prst="rect">
-            <a:avLst/>
-          </a:prstGeom>
-        </p:spPr>
-      </p:pic>
-      <p:sp>
-        <p:nvSpPr>
-          <p:cNvPr id="38" name="Shape 35"/>
-          <p:cNvSpPr/>
-          <p:nvPr/>
-        </p:nvSpPr>
-        <p:spPr>
-          <a:xfrm>
-            <a:off x="822960" y="1463040"/>
-            <a:ext cx="5029200" cy="1920240"/>
-          </a:xfrm>
-          <a:prstGeom prst="rect">
-            <a:avLst/>
-          </a:prstGeom>
-          <a:solidFill>
-            <a:srgbClr val="FFFFFF">
-              <a:alpha val="0"/>
-            </a:srgbClr>
-          </a:solidFill>
-          <a:ln w="12700">
-            <a:solidFill>
-              <a:srgbClr val="CBD5E1">
-                <a:alpha val="0"/>
-              </a:srgbClr>
-            </a:solidFill>
-            <a:prstDash val="solid"/>
-          </a:ln>
-          <a:effectLst>
-            <a:outerShdw sx="100000" sy="100000" kx="0" ky="0" algn="bl" rotWithShape="0" blurRad="12700" dist="50800" dir="2700000">
-              <a:srgbClr val="000000">
-                <a:alpha val="8000"/>
-              </a:srgbClr>
-            </a:outerShdw>
-          </a:effectLst>
-        </p:spPr>
-      </p:sp>
-      <p:pic>
-        <p:nvPicPr>
-          <p:cNvPr id="39" name="Image 1" descr="preencoded.png">    </p:cNvPr>
-          <p:cNvPicPr>
-            <a:picLocks noChangeAspect="1"/>
-          </p:cNvPicPr>
-          <p:nvPr/>
-        </p:nvPicPr>
-        <p:blipFill>
-          <a:blip r:embed="rId3">
-            <a:extLst>
-              <a:ext uri="{96DAC541-7B7A-43D3-8B79-37D633B846F1}">
-                <asvg:svgBlip xmlns:asvg="http://schemas.microsoft.com/office/drawing/2016/SVG/main" r:embed="rId4"/>
-              </a:ext>
-            </a:extLst>
-          </a:blip>
-          <a:stretch>
-            <a:fillRect/>
-          </a:stretch>
-        </p:blipFill>
-        <p:spPr>
-          <a:xfrm>
-            <a:off x="6309360" y="1463040"/>
-            <a:ext cx="5029200" cy="1920240"/>
-          </a:xfrm>
-          <a:prstGeom prst="rect">
-            <a:avLst/>
-          </a:prstGeom>
-        </p:spPr>
-      </p:pic>
-      <p:sp>
-        <p:nvSpPr>
-          <p:cNvPr id="40" name="Shape 36"/>
-          <p:cNvSpPr/>
-          <p:nvPr/>
-        </p:nvSpPr>
-        <p:spPr>
-          <a:xfrm>
-            <a:off x="6309360" y="1463040"/>
-            <a:ext cx="5029200" cy="1920240"/>
-          </a:xfrm>
-          <a:prstGeom prst="rect">
-            <a:avLst/>
-          </a:prstGeom>
-          <a:solidFill>
-            <a:srgbClr val="FFFFFF">
-              <a:alpha val="0"/>
-            </a:srgbClr>
-          </a:solidFill>
-          <a:ln w="12700">
-            <a:solidFill>
-              <a:srgbClr val="CBD5E1">
-                <a:alpha val="0"/>
-              </a:srgbClr>
-            </a:solidFill>
-            <a:prstDash val="solid"/>
-          </a:ln>
-          <a:effectLst>
-            <a:outerShdw sx="100000" sy="100000" kx="0" ky="0" algn="bl" rotWithShape="0" blurRad="12700" dist="50800" dir="2700000">
-              <a:srgbClr val="000000">
-                <a:alpha val="8000"/>
-              </a:srgbClr>
-            </a:outerShdw>
-          </a:effectLst>
-        </p:spPr>
-      </p:sp>
-      <p:pic>
-        <p:nvPicPr>
-          <p:cNvPr id="41" name="Image 2" descr="preencoded.png">    </p:cNvPr>
-          <p:cNvPicPr>
-            <a:picLocks noChangeAspect="1"/>
-          </p:cNvPicPr>
-          <p:nvPr/>
-        </p:nvPicPr>
-        <p:blipFill>
-          <a:blip r:embed="rId5">
-            <a:extLst>
-              <a:ext uri="{96DAC541-7B7A-43D3-8B79-37D633B846F1}">
-                <asvg:svgBlip xmlns:asvg="http://schemas.microsoft.com/office/drawing/2016/SVG/main" r:embed="rId6"/>
-              </a:ext>
-            </a:extLst>
-          </a:blip>
-          <a:stretch>
-            <a:fillRect/>
-          </a:stretch>
-        </p:blipFill>
-        <p:spPr>
-          <a:xfrm>
-            <a:off x="822960" y="3749040"/>
-            <a:ext cx="5029200" cy="1920240"/>
-          </a:xfrm>
-          <a:prstGeom prst="rect">
-            <a:avLst/>
-          </a:prstGeom>
-        </p:spPr>
-      </p:pic>
-      <p:sp>
-        <p:nvSpPr>
-          <p:cNvPr id="42" name="Shape 37"/>
-          <p:cNvSpPr/>
-          <p:nvPr/>
-        </p:nvSpPr>
-        <p:spPr>
-          <a:xfrm>
-            <a:off x="822960" y="3749040"/>
-            <a:ext cx="5029200" cy="1920240"/>
-          </a:xfrm>
-          <a:prstGeom prst="rect">
-            <a:avLst/>
-          </a:prstGeom>
-          <a:solidFill>
-            <a:srgbClr val="FFFFFF">
-              <a:alpha val="0"/>
-            </a:srgbClr>
-          </a:solidFill>
-          <a:ln w="12700">
-            <a:solidFill>
-              <a:srgbClr val="CBD5E1">
-                <a:alpha val="0"/>
-              </a:srgbClr>
-            </a:solidFill>
-            <a:prstDash val="solid"/>
-          </a:ln>
-          <a:effectLst>
-            <a:outerShdw sx="100000" sy="100000" kx="0" ky="0" algn="bl" rotWithShape="0" blurRad="12700" dist="50800" dir="2700000">
-              <a:srgbClr val="000000">
-                <a:alpha val="8000"/>
-              </a:srgbClr>
-            </a:outerShdw>
-          </a:effectLst>
-        </p:spPr>
-      </p:sp>
-      <p:pic>
-        <p:nvPicPr>
-          <p:cNvPr id="43" name="Image 3" descr="preencoded.png">    </p:cNvPr>
-          <p:cNvPicPr>
-            <a:picLocks noChangeAspect="1"/>
-          </p:cNvPicPr>
-          <p:nvPr/>
-        </p:nvPicPr>
-        <p:blipFill>
-          <a:blip r:embed="rId7">
-            <a:extLst>
-              <a:ext uri="{96DAC541-7B7A-43D3-8B79-37D633B846F1}">
-                <asvg:svgBlip xmlns:asvg="http://schemas.microsoft.com/office/drawing/2016/SVG/main" r:embed="rId8"/>
-              </a:ext>
-            </a:extLst>
-          </a:blip>
-          <a:stretch>
-            <a:fillRect/>
-          </a:stretch>
-        </p:blipFill>
-        <p:spPr>
-          <a:xfrm>
-            <a:off x="6309360" y="3749040"/>
-            <a:ext cx="5029200" cy="1920240"/>
-          </a:xfrm>
-          <a:prstGeom prst="rect">
-            <a:avLst/>
-          </a:prstGeom>
-        </p:spPr>
-      </p:pic>
-      <p:sp>
-        <p:nvSpPr>
-          <p:cNvPr id="44" name="Shape 38"/>
-          <p:cNvSpPr/>
-          <p:nvPr/>
-        </p:nvSpPr>
-        <p:spPr>
-          <a:xfrm>
-            <a:off x="6309360" y="3749040"/>
-            <a:ext cx="5029200" cy="1920240"/>
-          </a:xfrm>
-          <a:prstGeom prst="rect">
-            <a:avLst/>
-          </a:prstGeom>
-          <a:solidFill>
-            <a:srgbClr val="FFFFFF">
-              <a:alpha val="0"/>
-            </a:srgbClr>
-          </a:solidFill>
-          <a:ln w="12700">
-            <a:solidFill>
-              <a:srgbClr val="CBD5E1">
-                <a:alpha val="0"/>
-              </a:srgbClr>
-            </a:solidFill>
-            <a:prstDash val="solid"/>
-          </a:ln>
-          <a:effectLst>
-            <a:outerShdw sx="100000" sy="100000" kx="0" ky="0" algn="bl" rotWithShape="0" blurRad="12700" dist="50800" dir="2700000">
-              <a:srgbClr val="000000">
-                <a:alpha val="8000"/>
-              </a:srgbClr>
-            </a:outerShdw>
-          </a:effectLst>
-        </p:spPr>
-      </p:sp>
-      <p:sp>
-        <p:nvSpPr>
-          <p:cNvPr id="45" name="Shape 39"/>
-          <p:cNvSpPr/>
-          <p:nvPr/>
-        </p:nvSpPr>
-        <p:spPr>
-          <a:xfrm>
-            <a:off x="822960" y="1463040"/>
-            <a:ext cx="73152" cy="1920240"/>
+      <p:sp>
+        <p:nvSpPr>
+          <p:cNvPr id="37" name="Shape 35"/>
+          <p:cNvSpPr/>
+          <p:nvPr/>
+        </p:nvSpPr>
+        <p:spPr>
+          <a:xfrm>
+            <a:off x="822960" y="1389888"/>
+            <a:ext cx="4937760" cy="73152"/>
           </a:xfrm>
           <a:prstGeom prst="rect">
             <a:avLst/>
@@ -9093,41 +8829,14 @@
       </p:sp>
       <p:sp>
         <p:nvSpPr>
-          <p:cNvPr id="46" name="Shape 40"/>
-          <p:cNvSpPr/>
-          <p:nvPr/>
-        </p:nvSpPr>
-        <p:spPr>
-          <a:xfrm>
-            <a:off x="6309360" y="1463040"/>
-            <a:ext cx="73152" cy="1920240"/>
-          </a:xfrm>
-          <a:prstGeom prst="rect">
-            <a:avLst/>
-          </a:prstGeom>
-          <a:solidFill>
-            <a:srgbClr val="F0AA11"/>
-          </a:solidFill>
-          <a:ln w="12700">
-            <a:solidFill>
-              <a:srgbClr val="F0AA11">
-                <a:alpha val="0"/>
-              </a:srgbClr>
-            </a:solidFill>
-            <a:prstDash val="solid"/>
-          </a:ln>
-        </p:spPr>
-      </p:sp>
-      <p:sp>
-        <p:nvSpPr>
-          <p:cNvPr id="47" name="Shape 41"/>
-          <p:cNvSpPr/>
-          <p:nvPr/>
-        </p:nvSpPr>
-        <p:spPr>
-          <a:xfrm>
-            <a:off x="822960" y="3749040"/>
-            <a:ext cx="73152" cy="1920240"/>
+          <p:cNvPr id="38" name="Shape 36"/>
+          <p:cNvSpPr/>
+          <p:nvPr/>
+        </p:nvSpPr>
+        <p:spPr>
+          <a:xfrm>
+            <a:off x="6400800" y="1389888"/>
+            <a:ext cx="4937760" cy="73152"/>
           </a:xfrm>
           <a:prstGeom prst="rect">
             <a:avLst/>
@@ -9147,34 +8856,7 @@
       </p:sp>
       <p:sp>
         <p:nvSpPr>
-          <p:cNvPr id="48" name="Shape 42"/>
-          <p:cNvSpPr/>
-          <p:nvPr/>
-        </p:nvSpPr>
-        <p:spPr>
-          <a:xfrm>
-            <a:off x="6309360" y="3749040"/>
-            <a:ext cx="73152" cy="1920240"/>
-          </a:xfrm>
-          <a:prstGeom prst="rect">
-            <a:avLst/>
-          </a:prstGeom>
-          <a:solidFill>
-            <a:srgbClr val="F0AA11"/>
-          </a:solidFill>
-          <a:ln w="12700">
-            <a:solidFill>
-              <a:srgbClr val="F0AA11">
-                <a:alpha val="0"/>
-              </a:srgbClr>
-            </a:solidFill>
-            <a:prstDash val="solid"/>
-          </a:ln>
-        </p:spPr>
-      </p:sp>
-      <p:sp>
-        <p:nvSpPr>
-          <p:cNvPr id="49" name="mdpr:1-2-e3669a:title:__title:1-2-e3669a"/>
+          <p:cNvPr id="39" name="mdpr:1-2-e3669a:title:__title:1-2-e3669a"/>
           <p:cNvSpPr txBox="1"/>
           <p:nvPr/>
         </p:nvSpPr>
@@ -9216,80 +8898,23 @@
       </p:sp>
       <p:sp>
         <p:nvSpPr>
-          <p:cNvPr id="50" name="Shape 44"/>
-          <p:cNvSpPr/>
-          <p:nvPr/>
-        </p:nvSpPr>
-        <p:spPr>
-          <a:xfrm>
-            <a:off x="976122" y="2130552"/>
-            <a:ext cx="585216" cy="585216"/>
-          </a:xfrm>
-          <a:prstGeom prst="roundRect">
-            <a:avLst>
-              <a:gd name="adj" fmla="val 6250"/>
-            </a:avLst>
-          </a:prstGeom>
-          <a:solidFill>
-            <a:srgbClr val="F8FAFC"/>
-          </a:solidFill>
-          <a:ln w="12700">
-            <a:solidFill>
-              <a:srgbClr val="CBD5E1"/>
-            </a:solidFill>
-            <a:prstDash val="solid"/>
-          </a:ln>
-        </p:spPr>
-      </p:sp>
-      <p:pic>
-        <p:nvPicPr>
-          <p:cNvPr id="51" name="Image 4" descr="article icon from tabler-icons (MIT)">    </p:cNvPr>
-          <p:cNvPicPr>
-            <a:picLocks noChangeAspect="1"/>
-          </p:cNvPicPr>
-          <p:nvPr/>
-        </p:nvPicPr>
-        <p:blipFill>
-          <a:blip r:embed="rId9">
-            <a:extLst>
-              <a:ext uri="{96DAC541-7B7A-43D3-8B79-37D633B846F1}">
-                <asvg:svgBlip xmlns:asvg="http://schemas.microsoft.com/office/drawing/2016/SVG/main" r:embed="rId10"/>
-              </a:ext>
-            </a:extLst>
-          </a:blip>
-          <a:stretch>
-            <a:fillRect/>
-          </a:stretch>
-        </p:blipFill>
-        <p:spPr>
-          <a:xfrm>
-            <a:off x="1049274" y="2203704"/>
-            <a:ext cx="438912" cy="438912"/>
+          <p:cNvPr id="40" name="mdpr:1-2-e3669a:left:block-15-chunk-1-block-15-chunk-1"/>
+          <p:cNvSpPr txBox="1"/>
+          <p:nvPr/>
+        </p:nvSpPr>
+        <p:spPr>
+          <a:xfrm>
+            <a:off x="896112" y="1499616"/>
+            <a:ext cx="4791456" cy="4398264"/>
           </a:xfrm>
           <a:prstGeom prst="rect">
             <a:avLst/>
           </a:prstGeom>
-        </p:spPr>
-      </p:pic>
-      <p:sp>
-        <p:nvSpPr>
-          <p:cNvPr id="52" name="mdpr:1-2-e3669a:item-1:block-15-chunk-1"/>
-          <p:cNvSpPr txBox="1"/>
-          <p:nvPr/>
-        </p:nvSpPr>
-        <p:spPr>
-          <a:xfrm>
-            <a:off x="1689354" y="1627632"/>
-            <a:ext cx="3961638" cy="1591056"/>
-          </a:xfrm>
-          <a:prstGeom prst="rect">
-            <a:avLst/>
-          </a:prstGeom>
           <a:noFill/>
           <a:ln/>
         </p:spPr>
         <p:txBody>
-          <a:bodyPr wrap="square" lIns="0" tIns="25400" rIns="25400" bIns="0" rtlCol="0" anchor="ctr"/>
+          <a:bodyPr wrap="square" lIns="0" tIns="25400" rIns="25400" bIns="0" rtlCol="0" anchor="t"/>
           <a:lstStyle/>
           <a:p>
             <a:pPr algn="l" indent="0" marL="0">
@@ -9299,7 +8924,7 @@
               <a:buNone/>
             </a:pPr>
             <a:r>
-              <a:rPr lang="en-US" sz="2200" b="1" dirty="0">
+              <a:rPr lang="en-US" sz="1800" b="1" dirty="0">
                 <a:solidFill>
                   <a:srgbClr val="0F766E"/>
                 </a:solidFill>
@@ -9307,7 +8932,7 @@
                 <a:ea typeface="Pretendard" pitchFamily="34" charset="-122"/>
                 <a:cs typeface="Pretendard" pitchFamily="34" charset="-120"/>
               </a:rPr>
-              <a:t>Surfaces</a:t>
+              <a:t>- Surfaces</a:t>
             </a:r>
             <a:pPr algn="l" indent="0" marL="0">
               <a:lnSpc>
@@ -9316,7 +8941,7 @@
               <a:buNone/>
             </a:pPr>
             <a:r>
-              <a:rPr lang="en-US" sz="2200" dirty="0">
+              <a:rPr lang="en-US" sz="1800" dirty="0">
                 <a:solidFill>
                   <a:srgbClr val="111111"/>
                 </a:solidFill>
@@ -9326,86 +8951,69 @@
               </a:rPr>
               <a:t>  rounded-card, two-corner-card, flag-drop, ticket-panel, notched-panel, circle-vine.</a:t>
             </a:r>
-            <a:endParaRPr lang="en-US" sz="2200" dirty="0"/>
+            <a:endParaRPr lang="en-US" sz="1800" dirty="0"/>
+          </a:p>
+          <a:p>
+            <a:pPr algn="l" indent="0" marL="0">
+              <a:lnSpc>
+                <a:spcPct val="120000"/>
+              </a:lnSpc>
+              <a:buNone/>
+            </a:pPr>
+            <a:r>
+              <a:rPr lang="en-US" sz="1800" b="1" dirty="0">
+                <a:solidFill>
+                  <a:srgbClr val="0F766E"/>
+                </a:solidFill>
+                <a:latin typeface="Pretendard" pitchFamily="34" charset="0"/>
+                <a:ea typeface="Pretendard" pitchFamily="34" charset="-122"/>
+                <a:cs typeface="Pretendard" pitchFamily="34" charset="-120"/>
+              </a:rPr>
+              <a:t>- Layouts</a:t>
+            </a:r>
+            <a:endParaRPr lang="en-US" sz="1800" dirty="0"/>
+          </a:p>
+          <a:p>
+            <a:pPr algn="l" indent="0" marL="0">
+              <a:lnSpc>
+                <a:spcPct val="120000"/>
+              </a:lnSpc>
+              <a:buNone/>
+            </a:pPr>
+            <a:r>
+              <a:rPr lang="en-US" sz="1800" dirty="0">
+                <a:solidFill>
+                  <a:srgbClr val="111111"/>
+                </a:solidFill>
+                <a:latin typeface="Pretendard" pitchFamily="34" charset="0"/>
+                <a:ea typeface="Pretendard" pitchFamily="34" charset="-122"/>
+                <a:cs typeface="Pretendard" pitchFamily="34" charset="-120"/>
+              </a:rPr>
+              <a:t>  toc-strips, two-column-compare, three-card-grid, six-tile-grid, timeline-rail, pipeline-chain.</a:t>
+            </a:r>
+            <a:endParaRPr lang="en-US" sz="1800" dirty="0"/>
           </a:p>
         </p:txBody>
       </p:sp>
       <p:sp>
         <p:nvSpPr>
-          <p:cNvPr id="53" name="Shape 46"/>
-          <p:cNvSpPr/>
-          <p:nvPr/>
-        </p:nvSpPr>
-        <p:spPr>
-          <a:xfrm>
-            <a:off x="6462522" y="2130552"/>
-            <a:ext cx="585216" cy="585216"/>
-          </a:xfrm>
-          <a:prstGeom prst="roundRect">
-            <a:avLst>
-              <a:gd name="adj" fmla="val 6250"/>
-            </a:avLst>
-          </a:prstGeom>
-          <a:solidFill>
-            <a:srgbClr val="F8FAFC"/>
-          </a:solidFill>
-          <a:ln w="12700">
-            <a:solidFill>
-              <a:srgbClr val="CBD5E1"/>
-            </a:solidFill>
-            <a:prstDash val="solid"/>
-          </a:ln>
-        </p:spPr>
-      </p:sp>
-      <p:pic>
-        <p:nvPicPr>
-          <p:cNvPr id="54" name="Image 5" descr="table icon from tabler-icons (MIT)">    </p:cNvPr>
-          <p:cNvPicPr>
-            <a:picLocks noChangeAspect="1"/>
-          </p:cNvPicPr>
-          <p:nvPr/>
-        </p:nvPicPr>
-        <p:blipFill>
-          <a:blip r:embed="rId11">
-            <a:extLst>
-              <a:ext uri="{96DAC541-7B7A-43D3-8B79-37D633B846F1}">
-                <asvg:svgBlip xmlns:asvg="http://schemas.microsoft.com/office/drawing/2016/SVG/main" r:embed="rId12"/>
-              </a:ext>
-            </a:extLst>
-          </a:blip>
-          <a:stretch>
-            <a:fillRect/>
-          </a:stretch>
-        </p:blipFill>
-        <p:spPr>
-          <a:xfrm>
-            <a:off x="6535674" y="2203704"/>
-            <a:ext cx="438912" cy="438912"/>
+          <p:cNvPr id="41" name="mdpr:1-2-e3669a:right:block-15-chunk-1-block-15-chunk-1"/>
+          <p:cNvSpPr txBox="1"/>
+          <p:nvPr/>
+        </p:nvSpPr>
+        <p:spPr>
+          <a:xfrm>
+            <a:off x="6473952" y="1499616"/>
+            <a:ext cx="4791456" cy="4398264"/>
           </a:xfrm>
           <a:prstGeom prst="rect">
             <a:avLst/>
           </a:prstGeom>
-        </p:spPr>
-      </p:pic>
-      <p:sp>
-        <p:nvSpPr>
-          <p:cNvPr id="55" name="mdpr:1-2-e3669a:item-2:block-15-chunk-1"/>
-          <p:cNvSpPr txBox="1"/>
-          <p:nvPr/>
-        </p:nvSpPr>
-        <p:spPr>
-          <a:xfrm>
-            <a:off x="7175754" y="1627632"/>
-            <a:ext cx="3961638" cy="1591056"/>
-          </a:xfrm>
-          <a:prstGeom prst="rect">
-            <a:avLst/>
-          </a:prstGeom>
           <a:noFill/>
           <a:ln/>
         </p:spPr>
         <p:txBody>
-          <a:bodyPr wrap="square" lIns="0" tIns="25400" rIns="25400" bIns="0" rtlCol="0" anchor="ctr"/>
+          <a:bodyPr wrap="square" lIns="0" tIns="25400" rIns="25400" bIns="0" rtlCol="0" anchor="t"/>
           <a:lstStyle/>
           <a:p>
             <a:pPr algn="l" indent="0" marL="0">
@@ -9415,7 +9023,7 @@
               <a:buNone/>
             </a:pPr>
             <a:r>
-              <a:rPr lang="en-US" sz="2200" b="1" dirty="0">
+              <a:rPr lang="en-US" sz="1800" b="1" dirty="0">
                 <a:solidFill>
                   <a:srgbClr val="0F766E"/>
                 </a:solidFill>
@@ -9423,7 +9031,7 @@
                 <a:ea typeface="Pretendard" pitchFamily="34" charset="-122"/>
                 <a:cs typeface="Pretendard" pitchFamily="34" charset="-120"/>
               </a:rPr>
-              <a:t>Layouts</a:t>
+              <a:t>- Evidence</a:t>
             </a:r>
             <a:pPr algn="l" indent="0" marL="0">
               <a:lnSpc>
@@ -9432,123 +9040,7 @@
               <a:buNone/>
             </a:pPr>
             <a:r>
-              <a:rPr lang="en-US" sz="2200" dirty="0">
-                <a:solidFill>
-                  <a:srgbClr val="111111"/>
-                </a:solidFill>
-                <a:latin typeface="Pretendard" pitchFamily="34" charset="0"/>
-                <a:ea typeface="Pretendard" pitchFamily="34" charset="-122"/>
-                <a:cs typeface="Pretendard" pitchFamily="34" charset="-120"/>
-              </a:rPr>
-              <a:t>  toc-strips, two-column-compare, three-card-grid, six-tile-grid, timeline-rail, pipeline-chain.</a:t>
-            </a:r>
-            <a:endParaRPr lang="en-US" sz="2200" dirty="0"/>
-          </a:p>
-        </p:txBody>
-      </p:sp>
-      <p:sp>
-        <p:nvSpPr>
-          <p:cNvPr id="56" name="Shape 48"/>
-          <p:cNvSpPr/>
-          <p:nvPr/>
-        </p:nvSpPr>
-        <p:spPr>
-          <a:xfrm>
-            <a:off x="976122" y="4416552"/>
-            <a:ext cx="585216" cy="585216"/>
-          </a:xfrm>
-          <a:prstGeom prst="roundRect">
-            <a:avLst>
-              <a:gd name="adj" fmla="val 6250"/>
-            </a:avLst>
-          </a:prstGeom>
-          <a:solidFill>
-            <a:srgbClr val="F8FAFC"/>
-          </a:solidFill>
-          <a:ln w="12700">
-            <a:solidFill>
-              <a:srgbClr val="CBD5E1"/>
-            </a:solidFill>
-            <a:prstDash val="solid"/>
-          </a:ln>
-        </p:spPr>
-      </p:sp>
-      <p:pic>
-        <p:nvPicPr>
-          <p:cNvPr id="57" name="Image 6" descr="chart icon from tabler-icons (MIT)">    </p:cNvPr>
-          <p:cNvPicPr>
-            <a:picLocks noChangeAspect="1"/>
-          </p:cNvPicPr>
-          <p:nvPr/>
-        </p:nvPicPr>
-        <p:blipFill>
-          <a:blip r:embed="rId13">
-            <a:extLst>
-              <a:ext uri="{96DAC541-7B7A-43D3-8B79-37D633B846F1}">
-                <asvg:svgBlip xmlns:asvg="http://schemas.microsoft.com/office/drawing/2016/SVG/main" r:embed="rId14"/>
-              </a:ext>
-            </a:extLst>
-          </a:blip>
-          <a:stretch>
-            <a:fillRect/>
-          </a:stretch>
-        </p:blipFill>
-        <p:spPr>
-          <a:xfrm>
-            <a:off x="1049274" y="4489704"/>
-            <a:ext cx="438912" cy="438912"/>
-          </a:xfrm>
-          <a:prstGeom prst="rect">
-            <a:avLst/>
-          </a:prstGeom>
-        </p:spPr>
-      </p:pic>
-      <p:sp>
-        <p:nvSpPr>
-          <p:cNvPr id="58" name="mdpr:1-2-e3669a:item-3:block-15-chunk-1"/>
-          <p:cNvSpPr txBox="1"/>
-          <p:nvPr/>
-        </p:nvSpPr>
-        <p:spPr>
-          <a:xfrm>
-            <a:off x="1689354" y="3913632"/>
-            <a:ext cx="3961638" cy="1591056"/>
-          </a:xfrm>
-          <a:prstGeom prst="rect">
-            <a:avLst/>
-          </a:prstGeom>
-          <a:noFill/>
-          <a:ln/>
-        </p:spPr>
-        <p:txBody>
-          <a:bodyPr wrap="square" lIns="0" tIns="25400" rIns="25400" bIns="0" rtlCol="0" anchor="ctr"/>
-          <a:lstStyle/>
-          <a:p>
-            <a:pPr algn="l" indent="0" marL="0">
-              <a:lnSpc>
-                <a:spcPct val="120000"/>
-              </a:lnSpc>
-              <a:buNone/>
-            </a:pPr>
-            <a:r>
-              <a:rPr lang="en-US" sz="2200" b="1" dirty="0">
-                <a:solidFill>
-                  <a:srgbClr val="0F766E"/>
-                </a:solidFill>
-                <a:latin typeface="Pretendard" pitchFamily="34" charset="0"/>
-                <a:ea typeface="Pretendard" pitchFamily="34" charset="-122"/>
-                <a:cs typeface="Pretendard" pitchFamily="34" charset="-120"/>
-              </a:rPr>
-              <a:t>Evidence</a:t>
-            </a:r>
-            <a:pPr algn="l" indent="0" marL="0">
-              <a:lnSpc>
-                <a:spcPct val="120000"/>
-              </a:lnSpc>
-              <a:buNone/>
-            </a:pPr>
-            <a:r>
-              <a:rPr lang="en-US" sz="2200" dirty="0">
+              <a:rPr lang="en-US" sz="1800" dirty="0">
                 <a:solidFill>
                   <a:srgbClr val="111111"/>
                 </a:solidFill>
@@ -9558,87 +9050,8 @@
               </a:rPr>
               <a:t>  chart-table-pair, metric-proof, arc-ring-proof, gauge-proof, connected-strip, mixed-object-pack.</a:t>
             </a:r>
-            <a:endParaRPr lang="en-US" sz="2200" dirty="0"/>
+            <a:endParaRPr lang="en-US" sz="1800" dirty="0"/>
           </a:p>
-        </p:txBody>
-      </p:sp>
-      <p:sp>
-        <p:nvSpPr>
-          <p:cNvPr id="59" name="Shape 50"/>
-          <p:cNvSpPr/>
-          <p:nvPr/>
-        </p:nvSpPr>
-        <p:spPr>
-          <a:xfrm>
-            <a:off x="6462522" y="4416552"/>
-            <a:ext cx="585216" cy="585216"/>
-          </a:xfrm>
-          <a:prstGeom prst="roundRect">
-            <a:avLst>
-              <a:gd name="adj" fmla="val 6250"/>
-            </a:avLst>
-          </a:prstGeom>
-          <a:solidFill>
-            <a:srgbClr val="F8FAFC"/>
-          </a:solidFill>
-          <a:ln w="12700">
-            <a:solidFill>
-              <a:srgbClr val="CBD5E1"/>
-            </a:solidFill>
-            <a:prstDash val="solid"/>
-          </a:ln>
-        </p:spPr>
-      </p:sp>
-      <p:pic>
-        <p:nvPicPr>
-          <p:cNvPr id="60" name="Image 7" descr="flow icon from tabler-icons (MIT)">    </p:cNvPr>
-          <p:cNvPicPr>
-            <a:picLocks noChangeAspect="1"/>
-          </p:cNvPicPr>
-          <p:nvPr/>
-        </p:nvPicPr>
-        <p:blipFill>
-          <a:blip r:embed="rId15">
-            <a:extLst>
-              <a:ext uri="{96DAC541-7B7A-43D3-8B79-37D633B846F1}">
-                <asvg:svgBlip xmlns:asvg="http://schemas.microsoft.com/office/drawing/2016/SVG/main" r:embed="rId16"/>
-              </a:ext>
-            </a:extLst>
-          </a:blip>
-          <a:stretch>
-            <a:fillRect/>
-          </a:stretch>
-        </p:blipFill>
-        <p:spPr>
-          <a:xfrm>
-            <a:off x="6535674" y="4489704"/>
-            <a:ext cx="438912" cy="438912"/>
-          </a:xfrm>
-          <a:prstGeom prst="rect">
-            <a:avLst/>
-          </a:prstGeom>
-        </p:spPr>
-      </p:pic>
-      <p:sp>
-        <p:nvSpPr>
-          <p:cNvPr id="61" name="mdpr:1-2-e3669a:item-4:block-15-chunk-1"/>
-          <p:cNvSpPr txBox="1"/>
-          <p:nvPr/>
-        </p:nvSpPr>
-        <p:spPr>
-          <a:xfrm>
-            <a:off x="7175754" y="3913632"/>
-            <a:ext cx="3961638" cy="1591056"/>
-          </a:xfrm>
-          <a:prstGeom prst="rect">
-            <a:avLst/>
-          </a:prstGeom>
-          <a:noFill/>
-          <a:ln/>
-        </p:spPr>
-        <p:txBody>
-          <a:bodyPr wrap="square" lIns="0" tIns="25400" rIns="25400" bIns="0" rtlCol="0" anchor="ctr"/>
-          <a:lstStyle/>
           <a:p>
             <a:pPr algn="l" indent="0" marL="0">
               <a:lnSpc>
@@ -9647,7 +9060,7 @@
               <a:buNone/>
             </a:pPr>
             <a:r>
-              <a:rPr lang="en-US" sz="2200" b="1" dirty="0">
+              <a:rPr lang="en-US" sz="1800" b="1" dirty="0">
                 <a:solidFill>
                   <a:srgbClr val="0F766E"/>
                 </a:solidFill>
@@ -9655,8 +9068,11 @@
                 <a:ea typeface="Pretendard" pitchFamily="34" charset="-122"/>
                 <a:cs typeface="Pretendard" pitchFamily="34" charset="-120"/>
               </a:rPr>
-              <a:t>Connectors</a:t>
+              <a:t>- Connectors</a:t>
             </a:r>
+            <a:endParaRPr lang="en-US" sz="1800" dirty="0"/>
+          </a:p>
+          <a:p>
             <a:pPr algn="l" indent="0" marL="0">
               <a:lnSpc>
                 <a:spcPct val="120000"/>
@@ -9664,7 +9080,7 @@
               <a:buNone/>
             </a:pPr>
             <a:r>
-              <a:rPr lang="en-US" sz="2200" dirty="0">
+              <a:rPr lang="en-US" sz="1800" dirty="0">
                 <a:solidFill>
                   <a:srgbClr val="111111"/>
                 </a:solidFill>
@@ -9674,7 +9090,7 @@
               </a:rPr>
               <a:t>  straight-arrow, elbow-arrow, boundary-attach, overlap-joint, parallel-flow, contrast-flow.</a:t>
             </a:r>
-            <a:endParaRPr lang="en-US" sz="2200" dirty="0"/>
+            <a:endParaRPr lang="en-US" sz="1800" dirty="0"/>
           </a:p>
         </p:txBody>
       </p:sp>
@@ -20696,71 +20112,14 @@
       </p:sp>
       <p:sp>
         <p:nvSpPr>
-          <p:cNvPr id="48" name="Shape 43"/>
-          <p:cNvSpPr/>
-          <p:nvPr/>
-        </p:nvSpPr>
-        <p:spPr>
-          <a:xfrm>
-            <a:off x="1097280" y="2140428"/>
-            <a:ext cx="474025" cy="474025"/>
-          </a:xfrm>
-          <a:prstGeom prst="roundRect">
-            <a:avLst>
-              <a:gd name="adj" fmla="val 7716"/>
-            </a:avLst>
-          </a:prstGeom>
-          <a:solidFill>
-            <a:srgbClr val="F8FAFC"/>
-          </a:solidFill>
-          <a:ln w="12700">
-            <a:solidFill>
-              <a:srgbClr val="CBD5E1"/>
-            </a:solidFill>
-            <a:prstDash val="solid"/>
-          </a:ln>
-        </p:spPr>
-      </p:sp>
-      <p:pic>
-        <p:nvPicPr>
-          <p:cNvPr id="49" name="Image 3" descr="article icon from tabler-icons (MIT)">    </p:cNvPr>
-          <p:cNvPicPr>
-            <a:picLocks noChangeAspect="1"/>
-          </p:cNvPicPr>
-          <p:nvPr/>
-        </p:nvPicPr>
-        <p:blipFill>
-          <a:blip r:embed="rId7">
-            <a:extLst>
-              <a:ext uri="{96DAC541-7B7A-43D3-8B79-37D633B846F1}">
-                <asvg:svgBlip xmlns:asvg="http://schemas.microsoft.com/office/drawing/2016/SVG/main" r:embed="rId8"/>
-              </a:ext>
-            </a:extLst>
-          </a:blip>
-          <a:stretch>
-            <a:fillRect/>
-          </a:stretch>
-        </p:blipFill>
-        <p:spPr>
-          <a:xfrm>
-            <a:off x="1170432" y="2213580"/>
-            <a:ext cx="327721" cy="327721"/>
-          </a:xfrm>
-          <a:prstGeom prst="rect">
-            <a:avLst/>
-          </a:prstGeom>
-        </p:spPr>
-      </p:pic>
-      <p:sp>
-        <p:nvSpPr>
-          <p:cNvPr id="50" name="mdpr:1-2-ea42c8:item-1:block-27-chunk-1"/>
+          <p:cNvPr id="48" name="mdpr:1-2-ea42c8:item-1:block-27-chunk-1"/>
           <p:cNvSpPr txBox="1"/>
           <p:nvPr/>
         </p:nvSpPr>
         <p:spPr>
           <a:xfrm>
-            <a:off x="1699321" y="1987296"/>
-            <a:ext cx="9255191" cy="780288"/>
+            <a:off x="1133856" y="1957548"/>
+            <a:ext cx="9820656" cy="839785"/>
           </a:xfrm>
           <a:prstGeom prst="rect">
             <a:avLst/>
@@ -20812,71 +20171,14 @@
       </p:sp>
       <p:sp>
         <p:nvSpPr>
-          <p:cNvPr id="51" name="Shape 45"/>
-          <p:cNvSpPr/>
-          <p:nvPr/>
-        </p:nvSpPr>
-        <p:spPr>
-          <a:xfrm>
-            <a:off x="1097280" y="3466308"/>
-            <a:ext cx="474025" cy="474025"/>
-          </a:xfrm>
-          <a:prstGeom prst="roundRect">
-            <a:avLst>
-              <a:gd name="adj" fmla="val 7716"/>
-            </a:avLst>
-          </a:prstGeom>
-          <a:solidFill>
-            <a:srgbClr val="F8FAFC"/>
-          </a:solidFill>
-          <a:ln w="12700">
-            <a:solidFill>
-              <a:srgbClr val="CBD5E1"/>
-            </a:solidFill>
-            <a:prstDash val="solid"/>
-          </a:ln>
-        </p:spPr>
-      </p:sp>
-      <p:pic>
-        <p:nvPicPr>
-          <p:cNvPr id="52" name="Image 4" descr="article icon from tabler-icons (MIT)">    </p:cNvPr>
-          <p:cNvPicPr>
-            <a:picLocks noChangeAspect="1"/>
-          </p:cNvPicPr>
-          <p:nvPr/>
-        </p:nvPicPr>
-        <p:blipFill>
-          <a:blip r:embed="rId9">
-            <a:extLst>
-              <a:ext uri="{96DAC541-7B7A-43D3-8B79-37D633B846F1}">
-                <asvg:svgBlip xmlns:asvg="http://schemas.microsoft.com/office/drawing/2016/SVG/main" r:embed="rId10"/>
-              </a:ext>
-            </a:extLst>
-          </a:blip>
-          <a:stretch>
-            <a:fillRect/>
-          </a:stretch>
-        </p:blipFill>
-        <p:spPr>
-          <a:xfrm>
-            <a:off x="1170432" y="3539460"/>
-            <a:ext cx="327721" cy="327721"/>
-          </a:xfrm>
-          <a:prstGeom prst="rect">
-            <a:avLst/>
-          </a:prstGeom>
-        </p:spPr>
-      </p:pic>
-      <p:sp>
-        <p:nvSpPr>
-          <p:cNvPr id="53" name="mdpr:1-2-ea42c8:item-2:block-27-chunk-1"/>
+          <p:cNvPr id="49" name="mdpr:1-2-ea42c8:item-2:block-27-chunk-1"/>
           <p:cNvSpPr txBox="1"/>
           <p:nvPr/>
         </p:nvSpPr>
         <p:spPr>
           <a:xfrm>
-            <a:off x="1699321" y="3313176"/>
-            <a:ext cx="9255191" cy="780288"/>
+            <a:off x="1133856" y="3283428"/>
+            <a:ext cx="9820656" cy="839785"/>
           </a:xfrm>
           <a:prstGeom prst="rect">
             <a:avLst/>
@@ -20928,71 +20230,14 @@
       </p:sp>
       <p:sp>
         <p:nvSpPr>
-          <p:cNvPr id="54" name="Shape 47"/>
-          <p:cNvSpPr/>
-          <p:nvPr/>
-        </p:nvSpPr>
-        <p:spPr>
-          <a:xfrm>
-            <a:off x="1097280" y="4783044"/>
-            <a:ext cx="474025" cy="474025"/>
-          </a:xfrm>
-          <a:prstGeom prst="roundRect">
-            <a:avLst>
-              <a:gd name="adj" fmla="val 7716"/>
-            </a:avLst>
-          </a:prstGeom>
-          <a:solidFill>
-            <a:srgbClr val="F8FAFC"/>
-          </a:solidFill>
-          <a:ln w="12700">
-            <a:solidFill>
-              <a:srgbClr val="CBD5E1"/>
-            </a:solidFill>
-            <a:prstDash val="solid"/>
-          </a:ln>
-        </p:spPr>
-      </p:sp>
-      <p:pic>
-        <p:nvPicPr>
-          <p:cNvPr id="55" name="Image 5" descr="article icon from tabler-icons (MIT)">    </p:cNvPr>
-          <p:cNvPicPr>
-            <a:picLocks noChangeAspect="1"/>
-          </p:cNvPicPr>
-          <p:nvPr/>
-        </p:nvPicPr>
-        <p:blipFill>
-          <a:blip r:embed="rId11">
-            <a:extLst>
-              <a:ext uri="{96DAC541-7B7A-43D3-8B79-37D633B846F1}">
-                <asvg:svgBlip xmlns:asvg="http://schemas.microsoft.com/office/drawing/2016/SVG/main" r:embed="rId12"/>
-              </a:ext>
-            </a:extLst>
-          </a:blip>
-          <a:stretch>
-            <a:fillRect/>
-          </a:stretch>
-        </p:blipFill>
-        <p:spPr>
-          <a:xfrm>
-            <a:off x="1170432" y="4856196"/>
-            <a:ext cx="327721" cy="327721"/>
-          </a:xfrm>
-          <a:prstGeom prst="rect">
-            <a:avLst/>
-          </a:prstGeom>
-        </p:spPr>
-      </p:pic>
-      <p:sp>
-        <p:nvSpPr>
-          <p:cNvPr id="56" name="mdpr:1-2-ea42c8:item-3:block-27-chunk-1"/>
+          <p:cNvPr id="50" name="mdpr:1-2-ea42c8:item-3:block-27-chunk-1"/>
           <p:cNvSpPr txBox="1"/>
           <p:nvPr/>
         </p:nvSpPr>
         <p:spPr>
           <a:xfrm>
-            <a:off x="1699321" y="4629912"/>
-            <a:ext cx="9255191" cy="780288"/>
+            <a:off x="1133856" y="4600164"/>
+            <a:ext cx="9820656" cy="839785"/>
           </a:xfrm>
           <a:prstGeom prst="rect">
             <a:avLst/>
@@ -25544,71 +24789,14 @@
       </p:sp>
       <p:sp>
         <p:nvSpPr>
-          <p:cNvPr id="50" name="Shape 44"/>
-          <p:cNvSpPr/>
-          <p:nvPr/>
-        </p:nvSpPr>
-        <p:spPr>
-          <a:xfrm>
-            <a:off x="976122" y="2130552"/>
-            <a:ext cx="585216" cy="585216"/>
-          </a:xfrm>
-          <a:prstGeom prst="roundRect">
-            <a:avLst>
-              <a:gd name="adj" fmla="val 6250"/>
-            </a:avLst>
-          </a:prstGeom>
-          <a:solidFill>
-            <a:srgbClr val="F8FAFC"/>
-          </a:solidFill>
-          <a:ln w="12700">
-            <a:solidFill>
-              <a:srgbClr val="CBD5E1"/>
-            </a:solidFill>
-            <a:prstDash val="solid"/>
-          </a:ln>
-        </p:spPr>
-      </p:sp>
-      <p:pic>
-        <p:nvPicPr>
-          <p:cNvPr id="51" name="Image 4" descr="article icon from tabler-icons (MIT)">    </p:cNvPr>
-          <p:cNvPicPr>
-            <a:picLocks noChangeAspect="1"/>
-          </p:cNvPicPr>
-          <p:nvPr/>
-        </p:nvPicPr>
-        <p:blipFill>
-          <a:blip r:embed="rId9">
-            <a:extLst>
-              <a:ext uri="{96DAC541-7B7A-43D3-8B79-37D633B846F1}">
-                <asvg:svgBlip xmlns:asvg="http://schemas.microsoft.com/office/drawing/2016/SVG/main" r:embed="rId10"/>
-              </a:ext>
-            </a:extLst>
-          </a:blip>
-          <a:stretch>
-            <a:fillRect/>
-          </a:stretch>
-        </p:blipFill>
-        <p:spPr>
-          <a:xfrm>
-            <a:off x="1049274" y="2203704"/>
-            <a:ext cx="438912" cy="438912"/>
-          </a:xfrm>
-          <a:prstGeom prst="rect">
-            <a:avLst/>
-          </a:prstGeom>
-        </p:spPr>
-      </p:pic>
-      <p:sp>
-        <p:nvSpPr>
-          <p:cNvPr id="52" name="mdpr:icon-and-text-aside-8429fc:item-1:block-29"/>
+          <p:cNvPr id="50" name="mdpr:icon-and-text-aside-8429fc:item-1:block-29"/>
           <p:cNvSpPr txBox="1"/>
           <p:nvPr/>
         </p:nvSpPr>
         <p:spPr>
           <a:xfrm>
-            <a:off x="1689354" y="2033016"/>
-            <a:ext cx="3961638" cy="780288"/>
+            <a:off x="1042416" y="1627632"/>
+            <a:ext cx="4608576" cy="1591056"/>
           </a:xfrm>
           <a:prstGeom prst="rect">
             <a:avLst/>
@@ -25660,71 +24848,14 @@
       </p:sp>
       <p:sp>
         <p:nvSpPr>
-          <p:cNvPr id="53" name="Shape 46"/>
-          <p:cNvSpPr/>
-          <p:nvPr/>
-        </p:nvSpPr>
-        <p:spPr>
-          <a:xfrm>
-            <a:off x="6462522" y="2130552"/>
-            <a:ext cx="585216" cy="585216"/>
-          </a:xfrm>
-          <a:prstGeom prst="roundRect">
-            <a:avLst>
-              <a:gd name="adj" fmla="val 6250"/>
-            </a:avLst>
-          </a:prstGeom>
-          <a:solidFill>
-            <a:srgbClr val="F8FAFC"/>
-          </a:solidFill>
-          <a:ln w="12700">
-            <a:solidFill>
-              <a:srgbClr val="CBD5E1"/>
-            </a:solidFill>
-            <a:prstDash val="solid"/>
-          </a:ln>
-        </p:spPr>
-      </p:sp>
-      <p:pic>
-        <p:nvPicPr>
-          <p:cNvPr id="54" name="Image 5" descr="article icon from tabler-icons (MIT)">    </p:cNvPr>
-          <p:cNvPicPr>
-            <a:picLocks noChangeAspect="1"/>
-          </p:cNvPicPr>
-          <p:nvPr/>
-        </p:nvPicPr>
-        <p:blipFill>
-          <a:blip r:embed="rId11">
-            <a:extLst>
-              <a:ext uri="{96DAC541-7B7A-43D3-8B79-37D633B846F1}">
-                <asvg:svgBlip xmlns:asvg="http://schemas.microsoft.com/office/drawing/2016/SVG/main" r:embed="rId12"/>
-              </a:ext>
-            </a:extLst>
-          </a:blip>
-          <a:stretch>
-            <a:fillRect/>
-          </a:stretch>
-        </p:blipFill>
-        <p:spPr>
-          <a:xfrm>
-            <a:off x="6535674" y="2203704"/>
-            <a:ext cx="438912" cy="438912"/>
-          </a:xfrm>
-          <a:prstGeom prst="rect">
-            <a:avLst/>
-          </a:prstGeom>
-        </p:spPr>
-      </p:pic>
-      <p:sp>
-        <p:nvSpPr>
-          <p:cNvPr id="55" name="mdpr:icon-and-text-aside-8429fc:item-2:block-29"/>
+          <p:cNvPr id="51" name="mdpr:icon-and-text-aside-8429fc:item-2:block-29"/>
           <p:cNvSpPr txBox="1"/>
           <p:nvPr/>
         </p:nvSpPr>
         <p:spPr>
           <a:xfrm>
-            <a:off x="7175754" y="1865376"/>
-            <a:ext cx="3961638" cy="1115568"/>
+            <a:off x="6528816" y="1627632"/>
+            <a:ext cx="4608576" cy="1591056"/>
           </a:xfrm>
           <a:prstGeom prst="rect">
             <a:avLst/>
@@ -25776,71 +24907,14 @@
       </p:sp>
       <p:sp>
         <p:nvSpPr>
-          <p:cNvPr id="56" name="Shape 48"/>
-          <p:cNvSpPr/>
-          <p:nvPr/>
-        </p:nvSpPr>
-        <p:spPr>
-          <a:xfrm>
-            <a:off x="976122" y="4416552"/>
-            <a:ext cx="585216" cy="585216"/>
-          </a:xfrm>
-          <a:prstGeom prst="roundRect">
-            <a:avLst>
-              <a:gd name="adj" fmla="val 6250"/>
-            </a:avLst>
-          </a:prstGeom>
-          <a:solidFill>
-            <a:srgbClr val="F8FAFC"/>
-          </a:solidFill>
-          <a:ln w="12700">
-            <a:solidFill>
-              <a:srgbClr val="CBD5E1"/>
-            </a:solidFill>
-            <a:prstDash val="solid"/>
-          </a:ln>
-        </p:spPr>
-      </p:sp>
-      <p:pic>
-        <p:nvPicPr>
-          <p:cNvPr id="57" name="Image 6" descr="article icon from tabler-icons (MIT)">    </p:cNvPr>
-          <p:cNvPicPr>
-            <a:picLocks noChangeAspect="1"/>
-          </p:cNvPicPr>
-          <p:nvPr/>
-        </p:nvPicPr>
-        <p:blipFill>
-          <a:blip r:embed="rId13">
-            <a:extLst>
-              <a:ext uri="{96DAC541-7B7A-43D3-8B79-37D633B846F1}">
-                <asvg:svgBlip xmlns:asvg="http://schemas.microsoft.com/office/drawing/2016/SVG/main" r:embed="rId14"/>
-              </a:ext>
-            </a:extLst>
-          </a:blip>
-          <a:stretch>
-            <a:fillRect/>
-          </a:stretch>
-        </p:blipFill>
-        <p:spPr>
-          <a:xfrm>
-            <a:off x="1049274" y="4489704"/>
-            <a:ext cx="438912" cy="438912"/>
-          </a:xfrm>
-          <a:prstGeom prst="rect">
-            <a:avLst/>
-          </a:prstGeom>
-        </p:spPr>
-      </p:pic>
-      <p:sp>
-        <p:nvSpPr>
-          <p:cNvPr id="58" name="mdpr:icon-and-text-aside-8429fc:item-3:block-29"/>
+          <p:cNvPr id="52" name="mdpr:icon-and-text-aside-8429fc:item-3:block-29"/>
           <p:cNvSpPr txBox="1"/>
           <p:nvPr/>
         </p:nvSpPr>
         <p:spPr>
           <a:xfrm>
-            <a:off x="1689354" y="4151376"/>
-            <a:ext cx="3961638" cy="1115568"/>
+            <a:off x="1042416" y="3913632"/>
+            <a:ext cx="4608576" cy="1591056"/>
           </a:xfrm>
           <a:prstGeom prst="rect">
             <a:avLst/>
@@ -25892,71 +24966,14 @@
       </p:sp>
       <p:sp>
         <p:nvSpPr>
-          <p:cNvPr id="59" name="Shape 50"/>
-          <p:cNvSpPr/>
-          <p:nvPr/>
-        </p:nvSpPr>
-        <p:spPr>
-          <a:xfrm>
-            <a:off x="6462522" y="4416552"/>
-            <a:ext cx="585216" cy="585216"/>
-          </a:xfrm>
-          <a:prstGeom prst="roundRect">
-            <a:avLst>
-              <a:gd name="adj" fmla="val 6250"/>
-            </a:avLst>
-          </a:prstGeom>
-          <a:solidFill>
-            <a:srgbClr val="F8FAFC"/>
-          </a:solidFill>
-          <a:ln w="12700">
-            <a:solidFill>
-              <a:srgbClr val="CBD5E1"/>
-            </a:solidFill>
-            <a:prstDash val="solid"/>
-          </a:ln>
-        </p:spPr>
-      </p:sp>
-      <p:pic>
-        <p:nvPicPr>
-          <p:cNvPr id="60" name="Image 7" descr="table icon from tabler-icons (MIT)">    </p:cNvPr>
-          <p:cNvPicPr>
-            <a:picLocks noChangeAspect="1"/>
-          </p:cNvPicPr>
-          <p:nvPr/>
-        </p:nvPicPr>
-        <p:blipFill>
-          <a:blip r:embed="rId15">
-            <a:extLst>
-              <a:ext uri="{96DAC541-7B7A-43D3-8B79-37D633B846F1}">
-                <asvg:svgBlip xmlns:asvg="http://schemas.microsoft.com/office/drawing/2016/SVG/main" r:embed="rId16"/>
-              </a:ext>
-            </a:extLst>
-          </a:blip>
-          <a:stretch>
-            <a:fillRect/>
-          </a:stretch>
-        </p:blipFill>
-        <p:spPr>
-          <a:xfrm>
-            <a:off x="6535674" y="4489704"/>
-            <a:ext cx="438912" cy="438912"/>
-          </a:xfrm>
-          <a:prstGeom prst="rect">
-            <a:avLst/>
-          </a:prstGeom>
-        </p:spPr>
-      </p:pic>
-      <p:sp>
-        <p:nvSpPr>
-          <p:cNvPr id="61" name="mdpr:icon-and-text-aside-8429fc:item-4:block-29"/>
+          <p:cNvPr id="53" name="mdpr:icon-and-text-aside-8429fc:item-4:block-29"/>
           <p:cNvSpPr txBox="1"/>
           <p:nvPr/>
         </p:nvSpPr>
         <p:spPr>
           <a:xfrm>
-            <a:off x="7175754" y="4151376"/>
-            <a:ext cx="3961638" cy="1115568"/>
+            <a:off x="6528816" y="3913632"/>
+            <a:ext cx="4608576" cy="1591056"/>
           </a:xfrm>
           <a:prstGeom prst="rect">
             <a:avLst/>
@@ -27349,71 +26366,14 @@
       </p:sp>
       <p:sp>
         <p:nvSpPr>
-          <p:cNvPr id="50" name="Shape 44"/>
-          <p:cNvSpPr/>
-          <p:nvPr/>
-        </p:nvSpPr>
-        <p:spPr>
-          <a:xfrm>
-            <a:off x="976122" y="2130552"/>
-            <a:ext cx="585216" cy="585216"/>
-          </a:xfrm>
-          <a:prstGeom prst="roundRect">
-            <a:avLst>
-              <a:gd name="adj" fmla="val 6250"/>
-            </a:avLst>
-          </a:prstGeom>
-          <a:solidFill>
-            <a:srgbClr val="F8FAFC"/>
-          </a:solidFill>
-          <a:ln w="12700">
-            <a:solidFill>
-              <a:srgbClr val="CBD5E1"/>
-            </a:solidFill>
-            <a:prstDash val="solid"/>
-          </a:ln>
-        </p:spPr>
-      </p:sp>
-      <p:pic>
-        <p:nvPicPr>
-          <p:cNvPr id="51" name="Image 4" descr="verified icon from tabler-icons (MIT)">    </p:cNvPr>
-          <p:cNvPicPr>
-            <a:picLocks noChangeAspect="1"/>
-          </p:cNvPicPr>
-          <p:nvPr/>
-        </p:nvPicPr>
-        <p:blipFill>
-          <a:blip r:embed="rId9">
-            <a:extLst>
-              <a:ext uri="{96DAC541-7B7A-43D3-8B79-37D633B846F1}">
-                <asvg:svgBlip xmlns:asvg="http://schemas.microsoft.com/office/drawing/2016/SVG/main" r:embed="rId10"/>
-              </a:ext>
-            </a:extLst>
-          </a:blip>
-          <a:stretch>
-            <a:fillRect/>
-          </a:stretch>
-        </p:blipFill>
-        <p:spPr>
-          <a:xfrm>
-            <a:off x="1049274" y="2203704"/>
-            <a:ext cx="438912" cy="438912"/>
-          </a:xfrm>
-          <a:prstGeom prst="rect">
-            <a:avLst/>
-          </a:prstGeom>
-        </p:spPr>
-      </p:pic>
-      <p:sp>
-        <p:nvSpPr>
-          <p:cNvPr id="52" name="mdpr:overflow-guard-f8d03e:item-1:block-31"/>
+          <p:cNvPr id="50" name="mdpr:overflow-guard-f8d03e:item-1:block-31"/>
           <p:cNvSpPr txBox="1"/>
           <p:nvPr/>
         </p:nvSpPr>
         <p:spPr>
           <a:xfrm>
-            <a:off x="1689354" y="1865376"/>
-            <a:ext cx="3961638" cy="1115568"/>
+            <a:off x="1042416" y="1627632"/>
+            <a:ext cx="4608576" cy="1591056"/>
           </a:xfrm>
           <a:prstGeom prst="rect">
             <a:avLst/>
@@ -27465,71 +26425,14 @@
       </p:sp>
       <p:sp>
         <p:nvSpPr>
-          <p:cNvPr id="53" name="Shape 46"/>
-          <p:cNvSpPr/>
-          <p:nvPr/>
-        </p:nvSpPr>
-        <p:spPr>
-          <a:xfrm>
-            <a:off x="6462522" y="2130552"/>
-            <a:ext cx="585216" cy="585216"/>
-          </a:xfrm>
-          <a:prstGeom prst="roundRect">
-            <a:avLst>
-              <a:gd name="adj" fmla="val 6250"/>
-            </a:avLst>
-          </a:prstGeom>
-          <a:solidFill>
-            <a:srgbClr val="F8FAFC"/>
-          </a:solidFill>
-          <a:ln w="12700">
-            <a:solidFill>
-              <a:srgbClr val="CBD5E1"/>
-            </a:solidFill>
-            <a:prstDash val="solid"/>
-          </a:ln>
-        </p:spPr>
-      </p:sp>
-      <p:pic>
-        <p:nvPicPr>
-          <p:cNvPr id="54" name="Image 5" descr="table icon from tabler-icons (MIT)">    </p:cNvPr>
-          <p:cNvPicPr>
-            <a:picLocks noChangeAspect="1"/>
-          </p:cNvPicPr>
-          <p:nvPr/>
-        </p:nvPicPr>
-        <p:blipFill>
-          <a:blip r:embed="rId11">
-            <a:extLst>
-              <a:ext uri="{96DAC541-7B7A-43D3-8B79-37D633B846F1}">
-                <asvg:svgBlip xmlns:asvg="http://schemas.microsoft.com/office/drawing/2016/SVG/main" r:embed="rId12"/>
-              </a:ext>
-            </a:extLst>
-          </a:blip>
-          <a:stretch>
-            <a:fillRect/>
-          </a:stretch>
-        </p:blipFill>
-        <p:spPr>
-          <a:xfrm>
-            <a:off x="6535674" y="2203704"/>
-            <a:ext cx="438912" cy="438912"/>
-          </a:xfrm>
-          <a:prstGeom prst="rect">
-            <a:avLst/>
-          </a:prstGeom>
-        </p:spPr>
-      </p:pic>
-      <p:sp>
-        <p:nvSpPr>
-          <p:cNvPr id="55" name="mdpr:overflow-guard-f8d03e:item-2:block-31"/>
+          <p:cNvPr id="51" name="mdpr:overflow-guard-f8d03e:item-2:block-31"/>
           <p:cNvSpPr txBox="1"/>
           <p:nvPr/>
         </p:nvSpPr>
         <p:spPr>
           <a:xfrm>
-            <a:off x="7175754" y="1697736"/>
-            <a:ext cx="3961638" cy="1450848"/>
+            <a:off x="6528816" y="1627632"/>
+            <a:ext cx="4608576" cy="1591056"/>
           </a:xfrm>
           <a:prstGeom prst="rect">
             <a:avLst/>
@@ -27581,71 +26484,14 @@
       </p:sp>
       <p:sp>
         <p:nvSpPr>
-          <p:cNvPr id="56" name="Shape 48"/>
-          <p:cNvSpPr/>
-          <p:nvPr/>
-        </p:nvSpPr>
-        <p:spPr>
-          <a:xfrm>
-            <a:off x="976122" y="4416552"/>
-            <a:ext cx="585216" cy="585216"/>
-          </a:xfrm>
-          <a:prstGeom prst="roundRect">
-            <a:avLst>
-              <a:gd name="adj" fmla="val 6250"/>
-            </a:avLst>
-          </a:prstGeom>
-          <a:solidFill>
-            <a:srgbClr val="F8FAFC"/>
-          </a:solidFill>
-          <a:ln w="12700">
-            <a:solidFill>
-              <a:srgbClr val="CBD5E1"/>
-            </a:solidFill>
-            <a:prstDash val="solid"/>
-          </a:ln>
-        </p:spPr>
-      </p:sp>
-      <p:pic>
-        <p:nvPicPr>
-          <p:cNvPr id="57" name="Image 6" descr="article icon from tabler-icons (MIT)">    </p:cNvPr>
-          <p:cNvPicPr>
-            <a:picLocks noChangeAspect="1"/>
-          </p:cNvPicPr>
-          <p:nvPr/>
-        </p:nvPicPr>
-        <p:blipFill>
-          <a:blip r:embed="rId13">
-            <a:extLst>
-              <a:ext uri="{96DAC541-7B7A-43D3-8B79-37D633B846F1}">
-                <asvg:svgBlip xmlns:asvg="http://schemas.microsoft.com/office/drawing/2016/SVG/main" r:embed="rId14"/>
-              </a:ext>
-            </a:extLst>
-          </a:blip>
-          <a:stretch>
-            <a:fillRect/>
-          </a:stretch>
-        </p:blipFill>
-        <p:spPr>
-          <a:xfrm>
-            <a:off x="1049274" y="4489704"/>
-            <a:ext cx="438912" cy="438912"/>
-          </a:xfrm>
-          <a:prstGeom prst="rect">
-            <a:avLst/>
-          </a:prstGeom>
-        </p:spPr>
-      </p:pic>
-      <p:sp>
-        <p:nvSpPr>
-          <p:cNvPr id="58" name="mdpr:overflow-guard-f8d03e:item-3:block-31"/>
+          <p:cNvPr id="52" name="mdpr:overflow-guard-f8d03e:item-3:block-31"/>
           <p:cNvSpPr txBox="1"/>
           <p:nvPr/>
         </p:nvSpPr>
         <p:spPr>
           <a:xfrm>
-            <a:off x="1689354" y="4151376"/>
-            <a:ext cx="3961638" cy="1115568"/>
+            <a:off x="1042416" y="3913632"/>
+            <a:ext cx="4608576" cy="1591056"/>
           </a:xfrm>
           <a:prstGeom prst="rect">
             <a:avLst/>
@@ -27697,71 +26543,14 @@
       </p:sp>
       <p:sp>
         <p:nvSpPr>
-          <p:cNvPr id="59" name="Shape 50"/>
-          <p:cNvSpPr/>
-          <p:nvPr/>
-        </p:nvSpPr>
-        <p:spPr>
-          <a:xfrm>
-            <a:off x="6462522" y="4416552"/>
-            <a:ext cx="585216" cy="585216"/>
-          </a:xfrm>
-          <a:prstGeom prst="roundRect">
-            <a:avLst>
-              <a:gd name="adj" fmla="val 6250"/>
-            </a:avLst>
-          </a:prstGeom>
-          <a:solidFill>
-            <a:srgbClr val="F8FAFC"/>
-          </a:solidFill>
-          <a:ln w="12700">
-            <a:solidFill>
-              <a:srgbClr val="CBD5E1"/>
-            </a:solidFill>
-            <a:prstDash val="solid"/>
-          </a:ln>
-        </p:spPr>
-      </p:sp>
-      <p:pic>
-        <p:nvPicPr>
-          <p:cNvPr id="60" name="Image 7" descr="article icon from tabler-icons (MIT)">    </p:cNvPr>
-          <p:cNvPicPr>
-            <a:picLocks noChangeAspect="1"/>
-          </p:cNvPicPr>
-          <p:nvPr/>
-        </p:nvPicPr>
-        <p:blipFill>
-          <a:blip r:embed="rId15">
-            <a:extLst>
-              <a:ext uri="{96DAC541-7B7A-43D3-8B79-37D633B846F1}">
-                <asvg:svgBlip xmlns:asvg="http://schemas.microsoft.com/office/drawing/2016/SVG/main" r:embed="rId16"/>
-              </a:ext>
-            </a:extLst>
-          </a:blip>
-          <a:stretch>
-            <a:fillRect/>
-          </a:stretch>
-        </p:blipFill>
-        <p:spPr>
-          <a:xfrm>
-            <a:off x="6535674" y="4489704"/>
-            <a:ext cx="438912" cy="438912"/>
-          </a:xfrm>
-          <a:prstGeom prst="rect">
-            <a:avLst/>
-          </a:prstGeom>
-        </p:spPr>
-      </p:pic>
-      <p:sp>
-        <p:nvSpPr>
-          <p:cNvPr id="61" name="mdpr:overflow-guard-f8d03e:item-4:block-31"/>
+          <p:cNvPr id="53" name="mdpr:overflow-guard-f8d03e:item-4:block-31"/>
           <p:cNvSpPr txBox="1"/>
           <p:nvPr/>
         </p:nvSpPr>
         <p:spPr>
           <a:xfrm>
-            <a:off x="7175754" y="4151376"/>
-            <a:ext cx="3961638" cy="1115568"/>
+            <a:off x="6528816" y="3913632"/>
+            <a:ext cx="4608576" cy="1591056"/>
           </a:xfrm>
           <a:prstGeom prst="rect">
             <a:avLst/>
@@ -32102,71 +30891,14 @@
       </p:sp>
       <p:sp>
         <p:nvSpPr>
-          <p:cNvPr id="48" name="Shape 43"/>
-          <p:cNvSpPr/>
-          <p:nvPr/>
-        </p:nvSpPr>
-        <p:spPr>
-          <a:xfrm>
-            <a:off x="1097280" y="2140428"/>
-            <a:ext cx="474025" cy="474025"/>
-          </a:xfrm>
-          <a:prstGeom prst="roundRect">
-            <a:avLst>
-              <a:gd name="adj" fmla="val 7716"/>
-            </a:avLst>
-          </a:prstGeom>
-          <a:solidFill>
-            <a:srgbClr val="F8FAFC"/>
-          </a:solidFill>
-          <a:ln w="12700">
-            <a:solidFill>
-              <a:srgbClr val="CBD5E1"/>
-            </a:solidFill>
-            <a:prstDash val="solid"/>
-          </a:ln>
-        </p:spPr>
-      </p:sp>
-      <p:pic>
-        <p:nvPicPr>
-          <p:cNvPr id="49" name="Image 3" descr="flow icon from tabler-icons (MIT)">    </p:cNvPr>
-          <p:cNvPicPr>
-            <a:picLocks noChangeAspect="1"/>
-          </p:cNvPicPr>
-          <p:nvPr/>
-        </p:nvPicPr>
-        <p:blipFill>
-          <a:blip r:embed="rId7">
-            <a:extLst>
-              <a:ext uri="{96DAC541-7B7A-43D3-8B79-37D633B846F1}">
-                <asvg:svgBlip xmlns:asvg="http://schemas.microsoft.com/office/drawing/2016/SVG/main" r:embed="rId8"/>
-              </a:ext>
-            </a:extLst>
-          </a:blip>
-          <a:stretch>
-            <a:fillRect/>
-          </a:stretch>
-        </p:blipFill>
-        <p:spPr>
-          <a:xfrm>
-            <a:off x="1170432" y="2213580"/>
-            <a:ext cx="327721" cy="327721"/>
-          </a:xfrm>
-          <a:prstGeom prst="rect">
-            <a:avLst/>
-          </a:prstGeom>
-        </p:spPr>
-      </p:pic>
-      <p:sp>
-        <p:nvSpPr>
-          <p:cNvPr id="50" name="mdpr:actions-output-review-326e07:item-1:block-41"/>
+          <p:cNvPr id="48" name="mdpr:actions-output-review-326e07:item-1:block-41"/>
           <p:cNvSpPr txBox="1"/>
           <p:nvPr/>
         </p:nvSpPr>
         <p:spPr>
           <a:xfrm>
-            <a:off x="1699321" y="1987296"/>
-            <a:ext cx="9255191" cy="780288"/>
+            <a:off x="1133856" y="1957548"/>
+            <a:ext cx="9820656" cy="839785"/>
           </a:xfrm>
           <a:prstGeom prst="rect">
             <a:avLst/>
@@ -32218,71 +30950,14 @@
       </p:sp>
       <p:sp>
         <p:nvSpPr>
-          <p:cNvPr id="51" name="Shape 45"/>
-          <p:cNvSpPr/>
-          <p:nvPr/>
-        </p:nvSpPr>
-        <p:spPr>
-          <a:xfrm>
-            <a:off x="1097280" y="3466308"/>
-            <a:ext cx="474025" cy="474025"/>
-          </a:xfrm>
-          <a:prstGeom prst="roundRect">
-            <a:avLst>
-              <a:gd name="adj" fmla="val 7716"/>
-            </a:avLst>
-          </a:prstGeom>
-          <a:solidFill>
-            <a:srgbClr val="F8FAFC"/>
-          </a:solidFill>
-          <a:ln w="12700">
-            <a:solidFill>
-              <a:srgbClr val="CBD5E1"/>
-            </a:solidFill>
-            <a:prstDash val="solid"/>
-          </a:ln>
-        </p:spPr>
-      </p:sp>
-      <p:pic>
-        <p:nvPicPr>
-          <p:cNvPr id="52" name="Image 4" descr="verified icon from tabler-icons (MIT)">    </p:cNvPr>
-          <p:cNvPicPr>
-            <a:picLocks noChangeAspect="1"/>
-          </p:cNvPicPr>
-          <p:nvPr/>
-        </p:nvPicPr>
-        <p:blipFill>
-          <a:blip r:embed="rId9">
-            <a:extLst>
-              <a:ext uri="{96DAC541-7B7A-43D3-8B79-37D633B846F1}">
-                <asvg:svgBlip xmlns:asvg="http://schemas.microsoft.com/office/drawing/2016/SVG/main" r:embed="rId10"/>
-              </a:ext>
-            </a:extLst>
-          </a:blip>
-          <a:stretch>
-            <a:fillRect/>
-          </a:stretch>
-        </p:blipFill>
-        <p:spPr>
-          <a:xfrm>
-            <a:off x="1170432" y="3539460"/>
-            <a:ext cx="327721" cy="327721"/>
-          </a:xfrm>
-          <a:prstGeom prst="rect">
-            <a:avLst/>
-          </a:prstGeom>
-        </p:spPr>
-      </p:pic>
-      <p:sp>
-        <p:nvSpPr>
-          <p:cNvPr id="53" name="mdpr:actions-output-review-326e07:item-2:block-41"/>
+          <p:cNvPr id="49" name="mdpr:actions-output-review-326e07:item-2:block-41"/>
           <p:cNvSpPr txBox="1"/>
           <p:nvPr/>
         </p:nvSpPr>
         <p:spPr>
           <a:xfrm>
-            <a:off x="1699321" y="3313176"/>
-            <a:ext cx="9255191" cy="780288"/>
+            <a:off x="1133856" y="3283428"/>
+            <a:ext cx="9820656" cy="839785"/>
           </a:xfrm>
           <a:prstGeom prst="rect">
             <a:avLst/>
@@ -32334,71 +31009,14 @@
       </p:sp>
       <p:sp>
         <p:nvSpPr>
-          <p:cNvPr id="54" name="Shape 47"/>
-          <p:cNvSpPr/>
-          <p:nvPr/>
-        </p:nvSpPr>
-        <p:spPr>
-          <a:xfrm>
-            <a:off x="1097280" y="4783044"/>
-            <a:ext cx="474025" cy="474025"/>
-          </a:xfrm>
-          <a:prstGeom prst="roundRect">
-            <a:avLst>
-              <a:gd name="adj" fmla="val 7716"/>
-            </a:avLst>
-          </a:prstGeom>
-          <a:solidFill>
-            <a:srgbClr val="F8FAFC"/>
-          </a:solidFill>
-          <a:ln w="12700">
-            <a:solidFill>
-              <a:srgbClr val="CBD5E1"/>
-            </a:solidFill>
-            <a:prstDash val="solid"/>
-          </a:ln>
-        </p:spPr>
-      </p:sp>
-      <p:pic>
-        <p:nvPicPr>
-          <p:cNvPr id="55" name="Image 5" descr="spark icon from tabler-icons (MIT)">    </p:cNvPr>
-          <p:cNvPicPr>
-            <a:picLocks noChangeAspect="1"/>
-          </p:cNvPicPr>
-          <p:nvPr/>
-        </p:nvPicPr>
-        <p:blipFill>
-          <a:blip r:embed="rId11">
-            <a:extLst>
-              <a:ext uri="{96DAC541-7B7A-43D3-8B79-37D633B846F1}">
-                <asvg:svgBlip xmlns:asvg="http://schemas.microsoft.com/office/drawing/2016/SVG/main" r:embed="rId12"/>
-              </a:ext>
-            </a:extLst>
-          </a:blip>
-          <a:stretch>
-            <a:fillRect/>
-          </a:stretch>
-        </p:blipFill>
-        <p:spPr>
-          <a:xfrm>
-            <a:off x="1170432" y="4856196"/>
-            <a:ext cx="327721" cy="327721"/>
-          </a:xfrm>
-          <a:prstGeom prst="rect">
-            <a:avLst/>
-          </a:prstGeom>
-        </p:spPr>
-      </p:pic>
-      <p:sp>
-        <p:nvSpPr>
-          <p:cNvPr id="56" name="mdpr:actions-output-review-326e07:item-3:block-41"/>
+          <p:cNvPr id="50" name="mdpr:actions-output-review-326e07:item-3:block-41"/>
           <p:cNvSpPr txBox="1"/>
           <p:nvPr/>
         </p:nvSpPr>
         <p:spPr>
           <a:xfrm>
-            <a:off x="1699321" y="4629912"/>
-            <a:ext cx="9255191" cy="780288"/>
+            <a:off x="1133856" y="4600164"/>
+            <a:ext cx="9820656" cy="839785"/>
           </a:xfrm>
           <a:prstGeom prst="rect">
             <a:avLst/>
@@ -36131,71 +34749,14 @@
       </p:sp>
       <p:sp>
         <p:nvSpPr>
-          <p:cNvPr id="48" name="Shape 43"/>
-          <p:cNvSpPr/>
-          <p:nvPr/>
-        </p:nvSpPr>
-        <p:spPr>
-          <a:xfrm>
-            <a:off x="1097280" y="2140428"/>
-            <a:ext cx="474025" cy="474025"/>
-          </a:xfrm>
-          <a:prstGeom prst="roundRect">
-            <a:avLst>
-              <a:gd name="adj" fmla="val 7716"/>
-            </a:avLst>
-          </a:prstGeom>
-          <a:solidFill>
-            <a:srgbClr val="F8FAFC"/>
-          </a:solidFill>
-          <a:ln w="12700">
-            <a:solidFill>
-              <a:srgbClr val="CBD5E1"/>
-            </a:solidFill>
-            <a:prstDash val="solid"/>
-          </a:ln>
-        </p:spPr>
-      </p:sp>
-      <p:pic>
-        <p:nvPicPr>
-          <p:cNvPr id="49" name="Image 3" descr="article icon from tabler-icons (MIT)">    </p:cNvPr>
-          <p:cNvPicPr>
-            <a:picLocks noChangeAspect="1"/>
-          </p:cNvPicPr>
-          <p:nvPr/>
-        </p:nvPicPr>
-        <p:blipFill>
-          <a:blip r:embed="rId7">
-            <a:extLst>
-              <a:ext uri="{96DAC541-7B7A-43D3-8B79-37D633B846F1}">
-                <asvg:svgBlip xmlns:asvg="http://schemas.microsoft.com/office/drawing/2016/SVG/main" r:embed="rId8"/>
-              </a:ext>
-            </a:extLst>
-          </a:blip>
-          <a:stretch>
-            <a:fillRect/>
-          </a:stretch>
-        </p:blipFill>
-        <p:spPr>
-          <a:xfrm>
-            <a:off x="1170432" y="2213580"/>
-            <a:ext cx="327721" cy="327721"/>
-          </a:xfrm>
-          <a:prstGeom prst="rect">
-            <a:avLst/>
-          </a:prstGeom>
-        </p:spPr>
-      </p:pic>
-      <p:sp>
-        <p:nvSpPr>
-          <p:cNvPr id="50" name="mdpr:1-2-32ac08:item-1:block-6-chunk-1"/>
+          <p:cNvPr id="48" name="mdpr:1-2-32ac08:item-1:block-6-chunk-1"/>
           <p:cNvSpPr txBox="1"/>
           <p:nvPr/>
         </p:nvSpPr>
         <p:spPr>
           <a:xfrm>
-            <a:off x="1699321" y="1987296"/>
-            <a:ext cx="9255191" cy="780288"/>
+            <a:off x="1133856" y="1957548"/>
+            <a:ext cx="9820656" cy="839785"/>
           </a:xfrm>
           <a:prstGeom prst="rect">
             <a:avLst/>
@@ -36247,71 +34808,14 @@
       </p:sp>
       <p:sp>
         <p:nvSpPr>
-          <p:cNvPr id="51" name="Shape 45"/>
-          <p:cNvSpPr/>
-          <p:nvPr/>
-        </p:nvSpPr>
-        <p:spPr>
-          <a:xfrm>
-            <a:off x="1097280" y="3466308"/>
-            <a:ext cx="474025" cy="474025"/>
-          </a:xfrm>
-          <a:prstGeom prst="roundRect">
-            <a:avLst>
-              <a:gd name="adj" fmla="val 7716"/>
-            </a:avLst>
-          </a:prstGeom>
-          <a:solidFill>
-            <a:srgbClr val="F8FAFC"/>
-          </a:solidFill>
-          <a:ln w="12700">
-            <a:solidFill>
-              <a:srgbClr val="CBD5E1"/>
-            </a:solidFill>
-            <a:prstDash val="solid"/>
-          </a:ln>
-        </p:spPr>
-      </p:sp>
-      <p:pic>
-        <p:nvPicPr>
-          <p:cNvPr id="52" name="Image 4" descr="chart icon from tabler-icons (MIT)">    </p:cNvPr>
-          <p:cNvPicPr>
-            <a:picLocks noChangeAspect="1"/>
-          </p:cNvPicPr>
-          <p:nvPr/>
-        </p:nvPicPr>
-        <p:blipFill>
-          <a:blip r:embed="rId9">
-            <a:extLst>
-              <a:ext uri="{96DAC541-7B7A-43D3-8B79-37D633B846F1}">
-                <asvg:svgBlip xmlns:asvg="http://schemas.microsoft.com/office/drawing/2016/SVG/main" r:embed="rId10"/>
-              </a:ext>
-            </a:extLst>
-          </a:blip>
-          <a:stretch>
-            <a:fillRect/>
-          </a:stretch>
-        </p:blipFill>
-        <p:spPr>
-          <a:xfrm>
-            <a:off x="1170432" y="3539460"/>
-            <a:ext cx="327721" cy="327721"/>
-          </a:xfrm>
-          <a:prstGeom prst="rect">
-            <a:avLst/>
-          </a:prstGeom>
-        </p:spPr>
-      </p:pic>
-      <p:sp>
-        <p:nvSpPr>
-          <p:cNvPr id="53" name="mdpr:1-2-32ac08:item-2:block-6-chunk-1"/>
+          <p:cNvPr id="49" name="mdpr:1-2-32ac08:item-2:block-6-chunk-1"/>
           <p:cNvSpPr txBox="1"/>
           <p:nvPr/>
         </p:nvSpPr>
         <p:spPr>
           <a:xfrm>
-            <a:off x="1699321" y="3313176"/>
-            <a:ext cx="9255191" cy="780288"/>
+            <a:off x="1133856" y="3283428"/>
+            <a:ext cx="9820656" cy="839785"/>
           </a:xfrm>
           <a:prstGeom prst="rect">
             <a:avLst/>
@@ -36363,71 +34867,14 @@
       </p:sp>
       <p:sp>
         <p:nvSpPr>
-          <p:cNvPr id="54" name="Shape 47"/>
-          <p:cNvSpPr/>
-          <p:nvPr/>
-        </p:nvSpPr>
-        <p:spPr>
-          <a:xfrm>
-            <a:off x="1097280" y="4783044"/>
-            <a:ext cx="474025" cy="474025"/>
-          </a:xfrm>
-          <a:prstGeom prst="roundRect">
-            <a:avLst>
-              <a:gd name="adj" fmla="val 7716"/>
-            </a:avLst>
-          </a:prstGeom>
-          <a:solidFill>
-            <a:srgbClr val="F8FAFC"/>
-          </a:solidFill>
-          <a:ln w="12700">
-            <a:solidFill>
-              <a:srgbClr val="CBD5E1"/>
-            </a:solidFill>
-            <a:prstDash val="solid"/>
-          </a:ln>
-        </p:spPr>
-      </p:sp>
-      <p:pic>
-        <p:nvPicPr>
-          <p:cNvPr id="55" name="Image 5" descr="article icon from tabler-icons (MIT)">    </p:cNvPr>
-          <p:cNvPicPr>
-            <a:picLocks noChangeAspect="1"/>
-          </p:cNvPicPr>
-          <p:nvPr/>
-        </p:nvPicPr>
-        <p:blipFill>
-          <a:blip r:embed="rId11">
-            <a:extLst>
-              <a:ext uri="{96DAC541-7B7A-43D3-8B79-37D633B846F1}">
-                <asvg:svgBlip xmlns:asvg="http://schemas.microsoft.com/office/drawing/2016/SVG/main" r:embed="rId12"/>
-              </a:ext>
-            </a:extLst>
-          </a:blip>
-          <a:stretch>
-            <a:fillRect/>
-          </a:stretch>
-        </p:blipFill>
-        <p:spPr>
-          <a:xfrm>
-            <a:off x="1170432" y="4856196"/>
-            <a:ext cx="327721" cy="327721"/>
-          </a:xfrm>
-          <a:prstGeom prst="rect">
-            <a:avLst/>
-          </a:prstGeom>
-        </p:spPr>
-      </p:pic>
-      <p:sp>
-        <p:nvSpPr>
-          <p:cNvPr id="56" name="mdpr:1-2-32ac08:item-3:block-6-chunk-1"/>
+          <p:cNvPr id="50" name="mdpr:1-2-32ac08:item-3:block-6-chunk-1"/>
           <p:cNvSpPr txBox="1"/>
           <p:nvPr/>
         </p:nvSpPr>
         <p:spPr>
           <a:xfrm>
-            <a:off x="1699321" y="4629912"/>
-            <a:ext cx="9255191" cy="780288"/>
+            <a:off x="1133856" y="4600164"/>
+            <a:ext cx="9820656" cy="839785"/>
           </a:xfrm>
           <a:prstGeom prst="rect">
             <a:avLst/>
@@ -38897,71 +37344,14 @@
       </p:sp>
       <p:sp>
         <p:nvSpPr>
-          <p:cNvPr id="48" name="Shape 43"/>
-          <p:cNvSpPr/>
-          <p:nvPr/>
-        </p:nvSpPr>
-        <p:spPr>
-          <a:xfrm>
-            <a:off x="1097280" y="2140428"/>
-            <a:ext cx="474025" cy="474025"/>
-          </a:xfrm>
-          <a:prstGeom prst="roundRect">
-            <a:avLst>
-              <a:gd name="adj" fmla="val 7716"/>
-            </a:avLst>
-          </a:prstGeom>
-          <a:solidFill>
-            <a:srgbClr val="F8FAFC"/>
-          </a:solidFill>
-          <a:ln w="12700">
-            <a:solidFill>
-              <a:srgbClr val="CBD5E1"/>
-            </a:solidFill>
-            <a:prstDash val="solid"/>
-          </a:ln>
-        </p:spPr>
-      </p:sp>
-      <p:pic>
-        <p:nvPicPr>
-          <p:cNvPr id="49" name="Image 3" descr="article icon from tabler-icons (MIT)">    </p:cNvPr>
-          <p:cNvPicPr>
-            <a:picLocks noChangeAspect="1"/>
-          </p:cNvPicPr>
-          <p:nvPr/>
-        </p:nvPicPr>
-        <p:blipFill>
-          <a:blip r:embed="rId7">
-            <a:extLst>
-              <a:ext uri="{96DAC541-7B7A-43D3-8B79-37D633B846F1}">
-                <asvg:svgBlip xmlns:asvg="http://schemas.microsoft.com/office/drawing/2016/SVG/main" r:embed="rId8"/>
-              </a:ext>
-            </a:extLst>
-          </a:blip>
-          <a:stretch>
-            <a:fillRect/>
-          </a:stretch>
-        </p:blipFill>
-        <p:spPr>
-          <a:xfrm>
-            <a:off x="1170432" y="2213580"/>
-            <a:ext cx="327721" cy="327721"/>
-          </a:xfrm>
-          <a:prstGeom prst="rect">
-            <a:avLst/>
-          </a:prstGeom>
-        </p:spPr>
-      </p:pic>
-      <p:sp>
-        <p:nvSpPr>
-          <p:cNvPr id="50" name="mdpr:1-2-dfa474:item-1:block-8-chunk-1"/>
+          <p:cNvPr id="48" name="mdpr:1-2-dfa474:item-1:block-8-chunk-1"/>
           <p:cNvSpPr txBox="1"/>
           <p:nvPr/>
         </p:nvSpPr>
         <p:spPr>
           <a:xfrm>
-            <a:off x="1699321" y="1987296"/>
-            <a:ext cx="9255191" cy="780288"/>
+            <a:off x="1133856" y="1957548"/>
+            <a:ext cx="9820656" cy="839785"/>
           </a:xfrm>
           <a:prstGeom prst="rect">
             <a:avLst/>
@@ -39013,71 +37403,14 @@
       </p:sp>
       <p:sp>
         <p:nvSpPr>
-          <p:cNvPr id="51" name="Shape 45"/>
-          <p:cNvSpPr/>
-          <p:nvPr/>
-        </p:nvSpPr>
-        <p:spPr>
-          <a:xfrm>
-            <a:off x="1097280" y="3466308"/>
-            <a:ext cx="474025" cy="474025"/>
-          </a:xfrm>
-          <a:prstGeom prst="roundRect">
-            <a:avLst>
-              <a:gd name="adj" fmla="val 7716"/>
-            </a:avLst>
-          </a:prstGeom>
-          <a:solidFill>
-            <a:srgbClr val="F8FAFC"/>
-          </a:solidFill>
-          <a:ln w="12700">
-            <a:solidFill>
-              <a:srgbClr val="CBD5E1"/>
-            </a:solidFill>
-            <a:prstDash val="solid"/>
-          </a:ln>
-        </p:spPr>
-      </p:sp>
-      <p:pic>
-        <p:nvPicPr>
-          <p:cNvPr id="52" name="Image 4" descr="article icon from tabler-icons (MIT)">    </p:cNvPr>
-          <p:cNvPicPr>
-            <a:picLocks noChangeAspect="1"/>
-          </p:cNvPicPr>
-          <p:nvPr/>
-        </p:nvPicPr>
-        <p:blipFill>
-          <a:blip r:embed="rId9">
-            <a:extLst>
-              <a:ext uri="{96DAC541-7B7A-43D3-8B79-37D633B846F1}">
-                <asvg:svgBlip xmlns:asvg="http://schemas.microsoft.com/office/drawing/2016/SVG/main" r:embed="rId10"/>
-              </a:ext>
-            </a:extLst>
-          </a:blip>
-          <a:stretch>
-            <a:fillRect/>
-          </a:stretch>
-        </p:blipFill>
-        <p:spPr>
-          <a:xfrm>
-            <a:off x="1170432" y="3539460"/>
-            <a:ext cx="327721" cy="327721"/>
-          </a:xfrm>
-          <a:prstGeom prst="rect">
-            <a:avLst/>
-          </a:prstGeom>
-        </p:spPr>
-      </p:pic>
-      <p:sp>
-        <p:nvSpPr>
-          <p:cNvPr id="53" name="mdpr:1-2-dfa474:item-2:block-8-chunk-1"/>
+          <p:cNvPr id="49" name="mdpr:1-2-dfa474:item-2:block-8-chunk-1"/>
           <p:cNvSpPr txBox="1"/>
           <p:nvPr/>
         </p:nvSpPr>
         <p:spPr>
           <a:xfrm>
-            <a:off x="1699321" y="3313176"/>
-            <a:ext cx="9255191" cy="780288"/>
+            <a:off x="1133856" y="3283428"/>
+            <a:ext cx="9820656" cy="839785"/>
           </a:xfrm>
           <a:prstGeom prst="rect">
             <a:avLst/>
@@ -39129,71 +37462,14 @@
       </p:sp>
       <p:sp>
         <p:nvSpPr>
-          <p:cNvPr id="54" name="Shape 47"/>
-          <p:cNvSpPr/>
-          <p:nvPr/>
-        </p:nvSpPr>
-        <p:spPr>
-          <a:xfrm>
-            <a:off x="1097280" y="4783044"/>
-            <a:ext cx="474025" cy="474025"/>
-          </a:xfrm>
-          <a:prstGeom prst="roundRect">
-            <a:avLst>
-              <a:gd name="adj" fmla="val 7716"/>
-            </a:avLst>
-          </a:prstGeom>
-          <a:solidFill>
-            <a:srgbClr val="F8FAFC"/>
-          </a:solidFill>
-          <a:ln w="12700">
-            <a:solidFill>
-              <a:srgbClr val="CBD5E1"/>
-            </a:solidFill>
-            <a:prstDash val="solid"/>
-          </a:ln>
-        </p:spPr>
-      </p:sp>
-      <p:pic>
-        <p:nvPicPr>
-          <p:cNvPr id="55" name="Image 5" descr="article icon from tabler-icons (MIT)">    </p:cNvPr>
-          <p:cNvPicPr>
-            <a:picLocks noChangeAspect="1"/>
-          </p:cNvPicPr>
-          <p:nvPr/>
-        </p:nvPicPr>
-        <p:blipFill>
-          <a:blip r:embed="rId11">
-            <a:extLst>
-              <a:ext uri="{96DAC541-7B7A-43D3-8B79-37D633B846F1}">
-                <asvg:svgBlip xmlns:asvg="http://schemas.microsoft.com/office/drawing/2016/SVG/main" r:embed="rId12"/>
-              </a:ext>
-            </a:extLst>
-          </a:blip>
-          <a:stretch>
-            <a:fillRect/>
-          </a:stretch>
-        </p:blipFill>
-        <p:spPr>
-          <a:xfrm>
-            <a:off x="1170432" y="4856196"/>
-            <a:ext cx="327721" cy="327721"/>
-          </a:xfrm>
-          <a:prstGeom prst="rect">
-            <a:avLst/>
-          </a:prstGeom>
-        </p:spPr>
-      </p:pic>
-      <p:sp>
-        <p:nvSpPr>
-          <p:cNvPr id="56" name="mdpr:1-2-dfa474:item-3:block-8-chunk-1"/>
+          <p:cNvPr id="50" name="mdpr:1-2-dfa474:item-3:block-8-chunk-1"/>
           <p:cNvSpPr txBox="1"/>
           <p:nvPr/>
         </p:nvSpPr>
         <p:spPr>
           <a:xfrm>
-            <a:off x="1699321" y="4629912"/>
-            <a:ext cx="9255191" cy="780288"/>
+            <a:off x="1133856" y="4600164"/>
+            <a:ext cx="9820656" cy="839785"/>
           </a:xfrm>
           <a:prstGeom prst="rect">
             <a:avLst/>

--- a/docs/theme-preview/pptx/bentogrid.pptx
+++ b/docs/theme-preview/pptx/bentogrid.pptx
@@ -4470,33 +4470,6 @@
         </p:nvSpPr>
         <p:spPr>
           <a:xfrm>
-            <a:off x="731520" y="1207008"/>
-            <a:ext cx="1325880" cy="54864"/>
-          </a:xfrm>
-          <a:prstGeom prst="rect">
-            <a:avLst/>
-          </a:prstGeom>
-          <a:solidFill>
-            <a:srgbClr val="0F766E"/>
-          </a:solidFill>
-          <a:ln w="12700">
-            <a:solidFill>
-              <a:srgbClr val="0F766E">
-                <a:alpha val="0"/>
-              </a:srgbClr>
-            </a:solidFill>
-            <a:prstDash val="solid"/>
-          </a:ln>
-        </p:spPr>
-      </p:sp>
-      <p:sp>
-        <p:nvSpPr>
-          <p:cNvPr id="37" name="Shape 35"/>
-          <p:cNvSpPr/>
-          <p:nvPr/>
-        </p:nvSpPr>
-        <p:spPr>
-          <a:xfrm>
             <a:off x="0" y="0"/>
             <a:ext cx="12191695" cy="201168"/>
           </a:xfrm>
@@ -4518,36 +4491,7 @@
       </p:sp>
       <p:sp>
         <p:nvSpPr>
-          <p:cNvPr id="38" name="Shape 36"/>
-          <p:cNvSpPr/>
-          <p:nvPr/>
-        </p:nvSpPr>
-        <p:spPr>
-          <a:xfrm>
-            <a:off x="9357055" y="6528816"/>
-            <a:ext cx="2148840" cy="73152"/>
-          </a:xfrm>
-          <a:prstGeom prst="rect">
-            <a:avLst/>
-          </a:prstGeom>
-          <a:solidFill>
-            <a:srgbClr val="FFFFFF">
-              <a:alpha val="90000"/>
-            </a:srgbClr>
-          </a:solidFill>
-          <a:ln w="12700">
-            <a:solidFill>
-              <a:srgbClr val="FFFFFF">
-                <a:alpha val="0"/>
-              </a:srgbClr>
-            </a:solidFill>
-            <a:prstDash val="solid"/>
-          </a:ln>
-        </p:spPr>
-      </p:sp>
-      <p:sp>
-        <p:nvSpPr>
-          <p:cNvPr id="39" name="mdpr:mdpr-design-grammar-b3a462:title:__title:mdpr-design-grammar-b3a462"/>
+          <p:cNvPr id="37" name="mdpr:mdpr-design-grammar-b3a462:title:__title:mdpr-design-grammar-b3a462"/>
           <p:cNvSpPr txBox="1"/>
           <p:nvPr/>
         </p:nvSpPr>
@@ -5487,16 +5431,148 @@
           </a:ln>
         </p:spPr>
       </p:sp>
-      <p:sp>
-        <p:nvSpPr>
-          <p:cNvPr id="36" name="Shape 34"/>
-          <p:cNvSpPr/>
-          <p:nvPr/>
-        </p:nvSpPr>
-        <p:spPr>
-          <a:xfrm>
-            <a:off x="731520" y="1207008"/>
-            <a:ext cx="1325880" cy="54864"/>
+      <p:pic>
+        <p:nvPicPr>
+          <p:cNvPr id="36" name="Image 0" descr="preencoded.png">    </p:cNvPr>
+          <p:cNvPicPr>
+            <a:picLocks noChangeAspect="1"/>
+          </p:cNvPicPr>
+          <p:nvPr/>
+        </p:nvPicPr>
+        <p:blipFill>
+          <a:blip r:embed="rId1">
+            <a:extLst>
+              <a:ext uri="{96DAC541-7B7A-43D3-8B79-37D633B846F1}">
+                <asvg:svgBlip xmlns:asvg="http://schemas.microsoft.com/office/drawing/2016/SVG/main" r:embed="rId2"/>
+              </a:ext>
+            </a:extLst>
+          </a:blip>
+          <a:stretch>
+            <a:fillRect/>
+          </a:stretch>
+        </p:blipFill>
+        <p:spPr>
+          <a:xfrm>
+            <a:off x="914400" y="2523744"/>
+            <a:ext cx="10241280" cy="1024128"/>
+          </a:xfrm>
+          <a:prstGeom prst="rect">
+            <a:avLst/>
+          </a:prstGeom>
+        </p:spPr>
+      </p:pic>
+      <p:sp>
+        <p:nvSpPr>
+          <p:cNvPr id="37" name="Shape 34"/>
+          <p:cNvSpPr/>
+          <p:nvPr/>
+        </p:nvSpPr>
+        <p:spPr>
+          <a:xfrm>
+            <a:off x="914400" y="2523744"/>
+            <a:ext cx="10241280" cy="1024128"/>
+          </a:xfrm>
+          <a:prstGeom prst="rect">
+            <a:avLst/>
+          </a:prstGeom>
+          <a:solidFill>
+            <a:srgbClr val="FFFFFF">
+              <a:alpha val="0"/>
+            </a:srgbClr>
+          </a:solidFill>
+          <a:ln w="12700">
+            <a:solidFill>
+              <a:srgbClr val="CBD5E1">
+                <a:alpha val="0"/>
+              </a:srgbClr>
+            </a:solidFill>
+            <a:prstDash val="solid"/>
+          </a:ln>
+          <a:effectLst>
+            <a:outerShdw sx="100000" sy="100000" kx="0" ky="0" algn="bl" rotWithShape="0" blurRad="12700" dist="50800" dir="2700000">
+              <a:srgbClr val="000000">
+                <a:alpha val="8000"/>
+              </a:srgbClr>
+            </a:outerShdw>
+          </a:effectLst>
+        </p:spPr>
+      </p:sp>
+      <p:pic>
+        <p:nvPicPr>
+          <p:cNvPr id="38" name="Image 1" descr="preencoded.png">    </p:cNvPr>
+          <p:cNvPicPr>
+            <a:picLocks noChangeAspect="1"/>
+          </p:cNvPicPr>
+          <p:nvPr/>
+        </p:nvPicPr>
+        <p:blipFill>
+          <a:blip r:embed="rId3">
+            <a:extLst>
+              <a:ext uri="{96DAC541-7B7A-43D3-8B79-37D633B846F1}">
+                <asvg:svgBlip xmlns:asvg="http://schemas.microsoft.com/office/drawing/2016/SVG/main" r:embed="rId4"/>
+              </a:ext>
+            </a:extLst>
+          </a:blip>
+          <a:stretch>
+            <a:fillRect/>
+          </a:stretch>
+        </p:blipFill>
+        <p:spPr>
+          <a:xfrm>
+            <a:off x="914400" y="3849624"/>
+            <a:ext cx="10241280" cy="1024128"/>
+          </a:xfrm>
+          <a:prstGeom prst="rect">
+            <a:avLst/>
+          </a:prstGeom>
+        </p:spPr>
+      </p:pic>
+      <p:sp>
+        <p:nvSpPr>
+          <p:cNvPr id="39" name="Shape 35"/>
+          <p:cNvSpPr/>
+          <p:nvPr/>
+        </p:nvSpPr>
+        <p:spPr>
+          <a:xfrm>
+            <a:off x="914400" y="3849624"/>
+            <a:ext cx="10241280" cy="1024128"/>
+          </a:xfrm>
+          <a:prstGeom prst="rect">
+            <a:avLst/>
+          </a:prstGeom>
+          <a:solidFill>
+            <a:srgbClr val="FFFFFF">
+              <a:alpha val="0"/>
+            </a:srgbClr>
+          </a:solidFill>
+          <a:ln w="12700">
+            <a:solidFill>
+              <a:srgbClr val="CBD5E1">
+                <a:alpha val="0"/>
+              </a:srgbClr>
+            </a:solidFill>
+            <a:prstDash val="solid"/>
+          </a:ln>
+          <a:effectLst>
+            <a:outerShdw sx="100000" sy="100000" kx="0" ky="0" algn="bl" rotWithShape="0" blurRad="12700" dist="50800" dir="2700000">
+              <a:srgbClr val="000000">
+                <a:alpha val="8000"/>
+              </a:srgbClr>
+            </a:outerShdw>
+          </a:effectLst>
+        </p:spPr>
+      </p:sp>
+      <p:sp>
+        <p:nvSpPr>
+          <p:cNvPr id="40" name="Shape 36"/>
+          <p:cNvSpPr/>
+          <p:nvPr/>
+        </p:nvSpPr>
+        <p:spPr>
+          <a:xfrm>
+            <a:off x="914400" y="2523744"/>
+            <a:ext cx="73152" cy="1024128"/>
           </a:xfrm>
           <a:prstGeom prst="rect">
             <a:avLst/>
@@ -5516,24 +5592,24 @@
       </p:sp>
       <p:sp>
         <p:nvSpPr>
-          <p:cNvPr id="37" name="Shape 35"/>
-          <p:cNvSpPr/>
-          <p:nvPr/>
-        </p:nvSpPr>
-        <p:spPr>
-          <a:xfrm>
-            <a:off x="822960" y="1554480"/>
-            <a:ext cx="4937760" cy="73152"/>
+          <p:cNvPr id="41" name="Shape 37"/>
+          <p:cNvSpPr/>
+          <p:nvPr/>
+        </p:nvSpPr>
+        <p:spPr>
+          <a:xfrm>
+            <a:off x="914400" y="3849624"/>
+            <a:ext cx="73152" cy="1024128"/>
           </a:xfrm>
           <a:prstGeom prst="rect">
             <a:avLst/>
           </a:prstGeom>
           <a:solidFill>
-            <a:srgbClr val="0F766E"/>
+            <a:srgbClr val="F0AA11"/>
           </a:solidFill>
           <a:ln w="12700">
             <a:solidFill>
-              <a:srgbClr val="0F766E">
+              <a:srgbClr val="F0AA11">
                 <a:alpha val="0"/>
               </a:srgbClr>
             </a:solidFill>
@@ -5543,34 +5619,7 @@
       </p:sp>
       <p:sp>
         <p:nvSpPr>
-          <p:cNvPr id="38" name="Shape 36"/>
-          <p:cNvSpPr/>
-          <p:nvPr/>
-        </p:nvSpPr>
-        <p:spPr>
-          <a:xfrm>
-            <a:off x="6400800" y="1554480"/>
-            <a:ext cx="4937760" cy="73152"/>
-          </a:xfrm>
-          <a:prstGeom prst="rect">
-            <a:avLst/>
-          </a:prstGeom>
-          <a:solidFill>
-            <a:srgbClr val="0F766E"/>
-          </a:solidFill>
-          <a:ln w="12700">
-            <a:solidFill>
-              <a:srgbClr val="0F766E">
-                <a:alpha val="0"/>
-              </a:srgbClr>
-            </a:solidFill>
-            <a:prstDash val="solid"/>
-          </a:ln>
-        </p:spPr>
-      </p:sp>
-      <p:sp>
-        <p:nvSpPr>
-          <p:cNvPr id="39" name="mdpr:2-2-a9df10:title:__title:2-2-a9df10"/>
+          <p:cNvPr id="42" name="mdpr:2-2-a9df10:title:__title:2-2-a9df10"/>
           <p:cNvSpPr txBox="1"/>
           <p:nvPr/>
         </p:nvSpPr>
@@ -5604,7 +5653,24 @@
                 <a:ea typeface="Pretendard" pitchFamily="34" charset="-122"/>
                 <a:cs typeface="Pretendard" pitchFamily="34" charset="-120"/>
               </a:rPr>
-              <a:t>Semantic Blocks (Cont. 2/2)</a:t>
+              <a:t>Semantic Blocks</a:t>
+            </a:r>
+            <a:pPr algn="ctr" indent="0" marL="0">
+              <a:lnSpc>
+                <a:spcPct val="120000"/>
+              </a:lnSpc>
+              <a:buNone/>
+            </a:pPr>
+            <a:r>
+              <a:rPr lang="en-US" sz="2000" dirty="0">
+                <a:solidFill>
+                  <a:srgbClr val="919191"/>
+                </a:solidFill>
+                <a:latin typeface="Pretendard" pitchFamily="34" charset="0"/>
+                <a:ea typeface="Pretendard" pitchFamily="34" charset="-122"/>
+                <a:cs typeface="Pretendard" pitchFamily="34" charset="-120"/>
+              </a:rPr>
+              <a:t> (Cont. 2/2)</a:t>
             </a:r>
             <a:endParaRPr lang="en-US" sz="3400" dirty="0"/>
           </a:p>
@@ -5612,14 +5678,14 @@
       </p:sp>
       <p:sp>
         <p:nvSpPr>
-          <p:cNvPr id="40" name="mdpr:2-2-a9df10:left:block-10-chunk-2"/>
+          <p:cNvPr id="43" name="mdpr:2-2-a9df10:item-1:block-10-chunk-2"/>
           <p:cNvSpPr txBox="1"/>
           <p:nvPr/>
         </p:nvSpPr>
         <p:spPr>
           <a:xfrm>
-            <a:off x="896112" y="1664208"/>
-            <a:ext cx="4791456" cy="4169664"/>
+            <a:off x="1133856" y="2615916"/>
+            <a:ext cx="9820656" cy="839785"/>
           </a:xfrm>
           <a:prstGeom prst="rect">
             <a:avLst/>
@@ -5628,7 +5694,7 @@
           <a:ln/>
         </p:spPr>
         <p:txBody>
-          <a:bodyPr wrap="square" lIns="0" tIns="25400" rIns="25400" bIns="0" rtlCol="0" anchor="t"/>
+          <a:bodyPr wrap="square" lIns="0" tIns="25400" rIns="25400" bIns="0" rtlCol="0" anchor="ctr"/>
           <a:lstStyle/>
           <a:p>
             <a:pPr algn="l" indent="0" marL="0">
@@ -5646,7 +5712,7 @@
                 <a:ea typeface="Pretendard" pitchFamily="34" charset="-122"/>
                 <a:cs typeface="Pretendard" pitchFamily="34" charset="-120"/>
               </a:rPr>
-              <a:t>- Constraint:</a:t>
+              <a:t>Constraint:</a:t>
             </a:r>
             <a:pPr algn="l" indent="0" marL="0">
               <a:lnSpc>
@@ -5671,14 +5737,14 @@
       </p:sp>
       <p:sp>
         <p:nvSpPr>
-          <p:cNvPr id="41" name="mdpr:2-2-a9df10:right:block-10-chunk-2"/>
+          <p:cNvPr id="44" name="mdpr:2-2-a9df10:item-2:block-10-chunk-2"/>
           <p:cNvSpPr txBox="1"/>
           <p:nvPr/>
         </p:nvSpPr>
         <p:spPr>
           <a:xfrm>
-            <a:off x="6473952" y="1664208"/>
-            <a:ext cx="4791456" cy="4169664"/>
+            <a:off x="1133856" y="3941796"/>
+            <a:ext cx="9820656" cy="839785"/>
           </a:xfrm>
           <a:prstGeom prst="rect">
             <a:avLst/>
@@ -5687,7 +5753,7 @@
           <a:ln/>
         </p:spPr>
         <p:txBody>
-          <a:bodyPr wrap="square" lIns="0" tIns="25400" rIns="25400" bIns="0" rtlCol="0" anchor="t"/>
+          <a:bodyPr wrap="square" lIns="0" tIns="25400" rIns="25400" bIns="0" rtlCol="0" anchor="ctr"/>
           <a:lstStyle/>
           <a:p>
             <a:pPr algn="l" indent="0" marL="0">
@@ -5705,7 +5771,7 @@
                 <a:ea typeface="Pretendard" pitchFamily="34" charset="-122"/>
                 <a:cs typeface="Pretendard" pitchFamily="34" charset="-120"/>
               </a:rPr>
-              <a:t>- Emphasis</a:t>
+              <a:t>Emphasis</a:t>
             </a:r>
             <a:pPr algn="l" indent="0" marL="0">
               <a:lnSpc>
@@ -6630,34 +6696,7 @@
       </p:sp>
       <p:sp>
         <p:nvSpPr>
-          <p:cNvPr id="36" name="Shape 34"/>
-          <p:cNvSpPr/>
-          <p:nvPr/>
-        </p:nvSpPr>
-        <p:spPr>
-          <a:xfrm>
-            <a:off x="731520" y="1207008"/>
-            <a:ext cx="1325880" cy="54864"/>
-          </a:xfrm>
-          <a:prstGeom prst="rect">
-            <a:avLst/>
-          </a:prstGeom>
-          <a:solidFill>
-            <a:srgbClr val="0F766E"/>
-          </a:solidFill>
-          <a:ln w="12700">
-            <a:solidFill>
-              <a:srgbClr val="0F766E">
-                <a:alpha val="0"/>
-              </a:srgbClr>
-            </a:solidFill>
-            <a:prstDash val="solid"/>
-          </a:ln>
-        </p:spPr>
-      </p:sp>
-      <p:sp>
-        <p:nvSpPr>
-          <p:cNvPr id="37" name="mdpr:pipeline-diagram-51792c:title:__title:pipeline-diagram-51792c"/>
+          <p:cNvPr id="36" name="mdpr:pipeline-diagram-51792c:title:__title:pipeline-diagram-51792c"/>
           <p:cNvSpPr txBox="1"/>
           <p:nvPr/>
         </p:nvSpPr>
@@ -6699,7 +6738,7 @@
       </p:sp>
       <p:sp>
         <p:nvSpPr>
-          <p:cNvPr id="38" name="Shape 36"/>
+          <p:cNvPr id="37" name="Shape 35"/>
           <p:cNvSpPr/>
           <p:nvPr/>
         </p:nvSpPr>
@@ -6723,7 +6762,7 @@
       </p:sp>
       <p:sp>
         <p:nvSpPr>
-          <p:cNvPr id="39" name="Shape 37"/>
+          <p:cNvPr id="38" name="Shape 36"/>
           <p:cNvSpPr/>
           <p:nvPr/>
         </p:nvSpPr>
@@ -6747,7 +6786,7 @@
       </p:sp>
       <p:sp>
         <p:nvSpPr>
-          <p:cNvPr id="40" name="Shape 38"/>
+          <p:cNvPr id="39" name="Shape 37"/>
           <p:cNvSpPr/>
           <p:nvPr/>
         </p:nvSpPr>
@@ -6771,7 +6810,7 @@
       </p:sp>
       <p:sp>
         <p:nvSpPr>
-          <p:cNvPr id="41" name="Shape 39"/>
+          <p:cNvPr id="40" name="Shape 38"/>
           <p:cNvSpPr/>
           <p:nvPr/>
         </p:nvSpPr>
@@ -6795,7 +6834,7 @@
       </p:sp>
       <p:sp>
         <p:nvSpPr>
-          <p:cNvPr id="42" name="Shape 40"/>
+          <p:cNvPr id="41" name="Shape 39"/>
           <p:cNvSpPr/>
           <p:nvPr/>
         </p:nvSpPr>
@@ -6819,7 +6858,7 @@
       </p:sp>
       <p:sp>
         <p:nvSpPr>
-          <p:cNvPr id="43" name="Shape 41"/>
+          <p:cNvPr id="42" name="Shape 40"/>
           <p:cNvSpPr/>
           <p:nvPr/>
         </p:nvSpPr>
@@ -6853,7 +6892,7 @@
       </p:sp>
       <p:sp>
         <p:nvSpPr>
-          <p:cNvPr id="44" name="Shape 42"/>
+          <p:cNvPr id="43" name="Shape 41"/>
           <p:cNvSpPr/>
           <p:nvPr/>
         </p:nvSpPr>
@@ -6880,7 +6919,7 @@
       </p:sp>
       <p:sp>
         <p:nvSpPr>
-          <p:cNvPr id="45" name="Shape 43"/>
+          <p:cNvPr id="44" name="Shape 42"/>
           <p:cNvSpPr/>
           <p:nvPr/>
         </p:nvSpPr>
@@ -6907,7 +6946,7 @@
       </p:sp>
       <p:sp>
         <p:nvSpPr>
-          <p:cNvPr id="46" name="Text 44"/>
+          <p:cNvPr id="45" name="Text 43"/>
           <p:cNvSpPr txBox="1"/>
           <p:nvPr/>
         </p:nvSpPr>
@@ -6935,7 +6974,7 @@
               <a:buNone/>
             </a:pPr>
             <a:r>
-              <a:rPr lang="en-US" sz="1500" b="1" dirty="0">
+              <a:rPr lang="en-US" sz="1600" b="1" dirty="0">
                 <a:solidFill>
                   <a:srgbClr val="F8FAFC"/>
                 </a:solidFill>
@@ -6945,13 +6984,13 @@
               </a:rPr>
               <a:t>1</a:t>
             </a:r>
-            <a:endParaRPr lang="en-US" sz="1500" dirty="0"/>
+            <a:endParaRPr lang="en-US" sz="1600" dirty="0"/>
           </a:p>
         </p:txBody>
       </p:sp>
       <p:sp>
         <p:nvSpPr>
-          <p:cNvPr id="47" name="Text 45"/>
+          <p:cNvPr id="46" name="Text 44"/>
           <p:cNvSpPr txBox="1"/>
           <p:nvPr/>
         </p:nvSpPr>
@@ -6995,7 +7034,7 @@
       </p:sp>
       <p:sp>
         <p:nvSpPr>
-          <p:cNvPr id="48" name="Shape 46"/>
+          <p:cNvPr id="47" name="Shape 45"/>
           <p:cNvSpPr/>
           <p:nvPr/>
         </p:nvSpPr>
@@ -7029,7 +7068,7 @@
       </p:sp>
       <p:sp>
         <p:nvSpPr>
-          <p:cNvPr id="49" name="Shape 47"/>
+          <p:cNvPr id="48" name="Shape 46"/>
           <p:cNvSpPr/>
           <p:nvPr/>
         </p:nvSpPr>
@@ -7056,7 +7095,7 @@
       </p:sp>
       <p:sp>
         <p:nvSpPr>
-          <p:cNvPr id="50" name="Shape 48"/>
+          <p:cNvPr id="49" name="Shape 47"/>
           <p:cNvSpPr/>
           <p:nvPr/>
         </p:nvSpPr>
@@ -7083,7 +7122,7 @@
       </p:sp>
       <p:sp>
         <p:nvSpPr>
-          <p:cNvPr id="51" name="Text 49"/>
+          <p:cNvPr id="50" name="Text 48"/>
           <p:cNvSpPr txBox="1"/>
           <p:nvPr/>
         </p:nvSpPr>
@@ -7111,7 +7150,7 @@
               <a:buNone/>
             </a:pPr>
             <a:r>
-              <a:rPr lang="en-US" sz="1500" b="1" dirty="0">
+              <a:rPr lang="en-US" sz="1600" b="1" dirty="0">
                 <a:solidFill>
                   <a:srgbClr val="F8FAFC"/>
                 </a:solidFill>
@@ -7121,13 +7160,13 @@
               </a:rPr>
               <a:t>2</a:t>
             </a:r>
-            <a:endParaRPr lang="en-US" sz="1500" dirty="0"/>
+            <a:endParaRPr lang="en-US" sz="1600" dirty="0"/>
           </a:p>
         </p:txBody>
       </p:sp>
       <p:sp>
         <p:nvSpPr>
-          <p:cNvPr id="52" name="Text 50"/>
+          <p:cNvPr id="51" name="Text 49"/>
           <p:cNvSpPr txBox="1"/>
           <p:nvPr/>
         </p:nvSpPr>
@@ -7171,7 +7210,7 @@
       </p:sp>
       <p:sp>
         <p:nvSpPr>
-          <p:cNvPr id="53" name="Shape 51"/>
+          <p:cNvPr id="52" name="Shape 50"/>
           <p:cNvSpPr/>
           <p:nvPr/>
         </p:nvSpPr>
@@ -7205,7 +7244,7 @@
       </p:sp>
       <p:sp>
         <p:nvSpPr>
-          <p:cNvPr id="54" name="Shape 52"/>
+          <p:cNvPr id="53" name="Shape 51"/>
           <p:cNvSpPr/>
           <p:nvPr/>
         </p:nvSpPr>
@@ -7232,7 +7271,7 @@
       </p:sp>
       <p:sp>
         <p:nvSpPr>
-          <p:cNvPr id="55" name="Shape 53"/>
+          <p:cNvPr id="54" name="Shape 52"/>
           <p:cNvSpPr/>
           <p:nvPr/>
         </p:nvSpPr>
@@ -7259,7 +7298,7 @@
       </p:sp>
       <p:sp>
         <p:nvSpPr>
-          <p:cNvPr id="56" name="Text 54"/>
+          <p:cNvPr id="55" name="Text 53"/>
           <p:cNvSpPr txBox="1"/>
           <p:nvPr/>
         </p:nvSpPr>
@@ -7287,7 +7326,7 @@
               <a:buNone/>
             </a:pPr>
             <a:r>
-              <a:rPr lang="en-US" sz="1500" b="1" dirty="0">
+              <a:rPr lang="en-US" sz="1600" b="1" dirty="0">
                 <a:solidFill>
                   <a:srgbClr val="F8FAFC"/>
                 </a:solidFill>
@@ -7297,13 +7336,13 @@
               </a:rPr>
               <a:t>3</a:t>
             </a:r>
-            <a:endParaRPr lang="en-US" sz="1500" dirty="0"/>
+            <a:endParaRPr lang="en-US" sz="1600" dirty="0"/>
           </a:p>
         </p:txBody>
       </p:sp>
       <p:sp>
         <p:nvSpPr>
-          <p:cNvPr id="57" name="Text 55"/>
+          <p:cNvPr id="56" name="Text 54"/>
           <p:cNvSpPr txBox="1"/>
           <p:nvPr/>
         </p:nvSpPr>
@@ -7347,7 +7386,7 @@
       </p:sp>
       <p:sp>
         <p:nvSpPr>
-          <p:cNvPr id="58" name="Shape 56"/>
+          <p:cNvPr id="57" name="Shape 55"/>
           <p:cNvSpPr/>
           <p:nvPr/>
         </p:nvSpPr>
@@ -7381,7 +7420,7 @@
       </p:sp>
       <p:sp>
         <p:nvSpPr>
-          <p:cNvPr id="59" name="Shape 57"/>
+          <p:cNvPr id="58" name="Shape 56"/>
           <p:cNvSpPr/>
           <p:nvPr/>
         </p:nvSpPr>
@@ -7408,7 +7447,7 @@
       </p:sp>
       <p:sp>
         <p:nvSpPr>
-          <p:cNvPr id="60" name="Shape 58"/>
+          <p:cNvPr id="59" name="Shape 57"/>
           <p:cNvSpPr/>
           <p:nvPr/>
         </p:nvSpPr>
@@ -7435,7 +7474,7 @@
       </p:sp>
       <p:sp>
         <p:nvSpPr>
-          <p:cNvPr id="61" name="Text 59"/>
+          <p:cNvPr id="60" name="Text 58"/>
           <p:cNvSpPr txBox="1"/>
           <p:nvPr/>
         </p:nvSpPr>
@@ -7463,7 +7502,7 @@
               <a:buNone/>
             </a:pPr>
             <a:r>
-              <a:rPr lang="en-US" sz="1500" b="1" dirty="0">
+              <a:rPr lang="en-US" sz="1600" b="1" dirty="0">
                 <a:solidFill>
                   <a:srgbClr val="F8FAFC"/>
                 </a:solidFill>
@@ -7473,13 +7512,13 @@
               </a:rPr>
               <a:t>4</a:t>
             </a:r>
-            <a:endParaRPr lang="en-US" sz="1500" dirty="0"/>
+            <a:endParaRPr lang="en-US" sz="1600" dirty="0"/>
           </a:p>
         </p:txBody>
       </p:sp>
       <p:sp>
         <p:nvSpPr>
-          <p:cNvPr id="62" name="Text 60"/>
+          <p:cNvPr id="61" name="Text 59"/>
           <p:cNvSpPr txBox="1"/>
           <p:nvPr/>
         </p:nvSpPr>
@@ -7523,7 +7562,7 @@
       </p:sp>
       <p:sp>
         <p:nvSpPr>
-          <p:cNvPr id="63" name="Shape 61"/>
+          <p:cNvPr id="62" name="Shape 60"/>
           <p:cNvSpPr/>
           <p:nvPr/>
         </p:nvSpPr>
@@ -7557,7 +7596,7 @@
       </p:sp>
       <p:sp>
         <p:nvSpPr>
-          <p:cNvPr id="64" name="Shape 62"/>
+          <p:cNvPr id="63" name="Shape 61"/>
           <p:cNvSpPr/>
           <p:nvPr/>
         </p:nvSpPr>
@@ -7584,7 +7623,7 @@
       </p:sp>
       <p:sp>
         <p:nvSpPr>
-          <p:cNvPr id="65" name="Shape 63"/>
+          <p:cNvPr id="64" name="Shape 62"/>
           <p:cNvSpPr/>
           <p:nvPr/>
         </p:nvSpPr>
@@ -7611,7 +7650,7 @@
       </p:sp>
       <p:sp>
         <p:nvSpPr>
-          <p:cNvPr id="66" name="Text 64"/>
+          <p:cNvPr id="65" name="Text 63"/>
           <p:cNvSpPr txBox="1"/>
           <p:nvPr/>
         </p:nvSpPr>
@@ -7639,7 +7678,7 @@
               <a:buNone/>
             </a:pPr>
             <a:r>
-              <a:rPr lang="en-US" sz="1500" b="1" dirty="0">
+              <a:rPr lang="en-US" sz="1600" b="1" dirty="0">
                 <a:solidFill>
                   <a:srgbClr val="F8FAFC"/>
                 </a:solidFill>
@@ -7649,13 +7688,13 @@
               </a:rPr>
               <a:t>5</a:t>
             </a:r>
-            <a:endParaRPr lang="en-US" sz="1500" dirty="0"/>
+            <a:endParaRPr lang="en-US" sz="1600" dirty="0"/>
           </a:p>
         </p:txBody>
       </p:sp>
       <p:sp>
         <p:nvSpPr>
-          <p:cNvPr id="67" name="Text 65"/>
+          <p:cNvPr id="66" name="Text 64"/>
           <p:cNvSpPr txBox="1"/>
           <p:nvPr/>
         </p:nvSpPr>
@@ -7699,7 +7738,7 @@
       </p:sp>
       <p:sp>
         <p:nvSpPr>
-          <p:cNvPr id="68" name="Shape 66"/>
+          <p:cNvPr id="67" name="Shape 65"/>
           <p:cNvSpPr/>
           <p:nvPr/>
         </p:nvSpPr>
@@ -7733,7 +7772,7 @@
       </p:sp>
       <p:sp>
         <p:nvSpPr>
-          <p:cNvPr id="69" name="Shape 67"/>
+          <p:cNvPr id="68" name="Shape 66"/>
           <p:cNvSpPr/>
           <p:nvPr/>
         </p:nvSpPr>
@@ -7760,7 +7799,7 @@
       </p:sp>
       <p:sp>
         <p:nvSpPr>
-          <p:cNvPr id="70" name="Shape 68"/>
+          <p:cNvPr id="69" name="Shape 67"/>
           <p:cNvSpPr/>
           <p:nvPr/>
         </p:nvSpPr>
@@ -7787,7 +7826,7 @@
       </p:sp>
       <p:sp>
         <p:nvSpPr>
-          <p:cNvPr id="71" name="Text 69"/>
+          <p:cNvPr id="70" name="Text 68"/>
           <p:cNvSpPr txBox="1"/>
           <p:nvPr/>
         </p:nvSpPr>
@@ -7815,7 +7854,7 @@
               <a:buNone/>
             </a:pPr>
             <a:r>
-              <a:rPr lang="en-US" sz="1500" b="1" dirty="0">
+              <a:rPr lang="en-US" sz="1600" b="1" dirty="0">
                 <a:solidFill>
                   <a:srgbClr val="F8FAFC"/>
                 </a:solidFill>
@@ -7825,13 +7864,13 @@
               </a:rPr>
               <a:t>6</a:t>
             </a:r>
-            <a:endParaRPr lang="en-US" sz="1500" dirty="0"/>
+            <a:endParaRPr lang="en-US" sz="1600" dirty="0"/>
           </a:p>
         </p:txBody>
       </p:sp>
       <p:sp>
         <p:nvSpPr>
-          <p:cNvPr id="72" name="Text 70"/>
+          <p:cNvPr id="71" name="Text 69"/>
           <p:cNvSpPr txBox="1"/>
           <p:nvPr/>
         </p:nvSpPr>
@@ -8775,88 +8814,7 @@
       </p:sp>
       <p:sp>
         <p:nvSpPr>
-          <p:cNvPr id="36" name="Shape 34"/>
-          <p:cNvSpPr/>
-          <p:nvPr/>
-        </p:nvSpPr>
-        <p:spPr>
-          <a:xfrm>
-            <a:off x="731520" y="1207008"/>
-            <a:ext cx="1325880" cy="54864"/>
-          </a:xfrm>
-          <a:prstGeom prst="rect">
-            <a:avLst/>
-          </a:prstGeom>
-          <a:solidFill>
-            <a:srgbClr val="0F766E"/>
-          </a:solidFill>
-          <a:ln w="12700">
-            <a:solidFill>
-              <a:srgbClr val="0F766E">
-                <a:alpha val="0"/>
-              </a:srgbClr>
-            </a:solidFill>
-            <a:prstDash val="solid"/>
-          </a:ln>
-        </p:spPr>
-      </p:sp>
-      <p:sp>
-        <p:nvSpPr>
-          <p:cNvPr id="37" name="Shape 35"/>
-          <p:cNvSpPr/>
-          <p:nvPr/>
-        </p:nvSpPr>
-        <p:spPr>
-          <a:xfrm>
-            <a:off x="822960" y="1389888"/>
-            <a:ext cx="4937760" cy="73152"/>
-          </a:xfrm>
-          <a:prstGeom prst="rect">
-            <a:avLst/>
-          </a:prstGeom>
-          <a:solidFill>
-            <a:srgbClr val="0F766E"/>
-          </a:solidFill>
-          <a:ln w="12700">
-            <a:solidFill>
-              <a:srgbClr val="0F766E">
-                <a:alpha val="0"/>
-              </a:srgbClr>
-            </a:solidFill>
-            <a:prstDash val="solid"/>
-          </a:ln>
-        </p:spPr>
-      </p:sp>
-      <p:sp>
-        <p:nvSpPr>
-          <p:cNvPr id="38" name="Shape 36"/>
-          <p:cNvSpPr/>
-          <p:nvPr/>
-        </p:nvSpPr>
-        <p:spPr>
-          <a:xfrm>
-            <a:off x="6400800" y="1389888"/>
-            <a:ext cx="4937760" cy="73152"/>
-          </a:xfrm>
-          <a:prstGeom prst="rect">
-            <a:avLst/>
-          </a:prstGeom>
-          <a:solidFill>
-            <a:srgbClr val="0F766E"/>
-          </a:solidFill>
-          <a:ln w="12700">
-            <a:solidFill>
-              <a:srgbClr val="0F766E">
-                <a:alpha val="0"/>
-              </a:srgbClr>
-            </a:solidFill>
-            <a:prstDash val="solid"/>
-          </a:ln>
-        </p:spPr>
-      </p:sp>
-      <p:sp>
-        <p:nvSpPr>
-          <p:cNvPr id="39" name="mdpr:1-2-e3669a:title:__title:1-2-e3669a"/>
+          <p:cNvPr id="36" name="mdpr:1-2-e3669a:title:__title:1-2-e3669a"/>
           <p:cNvSpPr txBox="1"/>
           <p:nvPr/>
         </p:nvSpPr>
@@ -8898,14 +8856,14 @@
       </p:sp>
       <p:sp>
         <p:nvSpPr>
-          <p:cNvPr id="40" name="mdpr:1-2-e3669a:left:block-15-chunk-1-block-15-chunk-1"/>
+          <p:cNvPr id="37" name="mdpr:1-2-e3669a:left:block-15-chunk-1-block-15-chunk-1"/>
           <p:cNvSpPr txBox="1"/>
           <p:nvPr/>
         </p:nvSpPr>
         <p:spPr>
           <a:xfrm>
-            <a:off x="896112" y="1499616"/>
-            <a:ext cx="4791456" cy="4398264"/>
+            <a:off x="896112" y="1463040"/>
+            <a:ext cx="4791456" cy="4261104"/>
           </a:xfrm>
           <a:prstGeom prst="rect">
             <a:avLst/>
@@ -8997,14 +8955,14 @@
       </p:sp>
       <p:sp>
         <p:nvSpPr>
-          <p:cNvPr id="41" name="mdpr:1-2-e3669a:right:block-15-chunk-1-block-15-chunk-1"/>
+          <p:cNvPr id="38" name="mdpr:1-2-e3669a:right:block-15-chunk-1"/>
           <p:cNvSpPr txBox="1"/>
           <p:nvPr/>
         </p:nvSpPr>
         <p:spPr>
           <a:xfrm>
-            <a:off x="6473952" y="1499616"/>
-            <a:ext cx="4791456" cy="4398264"/>
+            <a:off x="6473952" y="1463040"/>
+            <a:ext cx="4791456" cy="4261104"/>
           </a:xfrm>
           <a:prstGeom prst="rect">
             <a:avLst/>
@@ -9052,46 +9010,6 @@
             </a:r>
             <a:endParaRPr lang="en-US" sz="1800" dirty="0"/>
           </a:p>
-          <a:p>
-            <a:pPr algn="l" indent="0" marL="0">
-              <a:lnSpc>
-                <a:spcPct val="120000"/>
-              </a:lnSpc>
-              <a:buNone/>
-            </a:pPr>
-            <a:r>
-              <a:rPr lang="en-US" sz="1800" b="1" dirty="0">
-                <a:solidFill>
-                  <a:srgbClr val="0F766E"/>
-                </a:solidFill>
-                <a:latin typeface="Pretendard" pitchFamily="34" charset="0"/>
-                <a:ea typeface="Pretendard" pitchFamily="34" charset="-122"/>
-                <a:cs typeface="Pretendard" pitchFamily="34" charset="-120"/>
-              </a:rPr>
-              <a:t>- Connectors</a:t>
-            </a:r>
-            <a:endParaRPr lang="en-US" sz="1800" dirty="0"/>
-          </a:p>
-          <a:p>
-            <a:pPr algn="l" indent="0" marL="0">
-              <a:lnSpc>
-                <a:spcPct val="120000"/>
-              </a:lnSpc>
-              <a:buNone/>
-            </a:pPr>
-            <a:r>
-              <a:rPr lang="en-US" sz="1800" dirty="0">
-                <a:solidFill>
-                  <a:srgbClr val="111111"/>
-                </a:solidFill>
-                <a:latin typeface="Pretendard" pitchFamily="34" charset="0"/>
-                <a:ea typeface="Pretendard" pitchFamily="34" charset="-122"/>
-                <a:cs typeface="Pretendard" pitchFamily="34" charset="-120"/>
-              </a:rPr>
-              <a:t>  straight-arrow, elbow-arrow, boundary-attach, overlap-joint, parallel-flow, contrast-flow.</a:t>
-            </a:r>
-            <a:endParaRPr lang="en-US" sz="1800" dirty="0"/>
-          </a:p>
         </p:txBody>
       </p:sp>
     </p:spTree>
@@ -9996,88 +9914,7 @@
       </p:sp>
       <p:sp>
         <p:nvSpPr>
-          <p:cNvPr id="36" name="Shape 34"/>
-          <p:cNvSpPr/>
-          <p:nvPr/>
-        </p:nvSpPr>
-        <p:spPr>
-          <a:xfrm>
-            <a:off x="731520" y="1207008"/>
-            <a:ext cx="1325880" cy="54864"/>
-          </a:xfrm>
-          <a:prstGeom prst="rect">
-            <a:avLst/>
-          </a:prstGeom>
-          <a:solidFill>
-            <a:srgbClr val="0F766E"/>
-          </a:solidFill>
-          <a:ln w="12700">
-            <a:solidFill>
-              <a:srgbClr val="0F766E">
-                <a:alpha val="0"/>
-              </a:srgbClr>
-            </a:solidFill>
-            <a:prstDash val="solid"/>
-          </a:ln>
-        </p:spPr>
-      </p:sp>
-      <p:sp>
-        <p:nvSpPr>
-          <p:cNvPr id="37" name="Shape 35"/>
-          <p:cNvSpPr/>
-          <p:nvPr/>
-        </p:nvSpPr>
-        <p:spPr>
-          <a:xfrm>
-            <a:off x="822960" y="1554480"/>
-            <a:ext cx="4937760" cy="73152"/>
-          </a:xfrm>
-          <a:prstGeom prst="rect">
-            <a:avLst/>
-          </a:prstGeom>
-          <a:solidFill>
-            <a:srgbClr val="0F766E"/>
-          </a:solidFill>
-          <a:ln w="12700">
-            <a:solidFill>
-              <a:srgbClr val="0F766E">
-                <a:alpha val="0"/>
-              </a:srgbClr>
-            </a:solidFill>
-            <a:prstDash val="solid"/>
-          </a:ln>
-        </p:spPr>
-      </p:sp>
-      <p:sp>
-        <p:nvSpPr>
-          <p:cNvPr id="38" name="Shape 36"/>
-          <p:cNvSpPr/>
-          <p:nvPr/>
-        </p:nvSpPr>
-        <p:spPr>
-          <a:xfrm>
-            <a:off x="6400800" y="1554480"/>
-            <a:ext cx="4937760" cy="73152"/>
-          </a:xfrm>
-          <a:prstGeom prst="rect">
-            <a:avLst/>
-          </a:prstGeom>
-          <a:solidFill>
-            <a:srgbClr val="0F766E"/>
-          </a:solidFill>
-          <a:ln w="12700">
-            <a:solidFill>
-              <a:srgbClr val="0F766E">
-                <a:alpha val="0"/>
-              </a:srgbClr>
-            </a:solidFill>
-            <a:prstDash val="solid"/>
-          </a:ln>
-        </p:spPr>
-      </p:sp>
-      <p:sp>
-        <p:nvSpPr>
-          <p:cNvPr id="39" name="mdpr:2-2-c23e9b:title:__title:2-2-c23e9b"/>
+          <p:cNvPr id="36" name="mdpr:2-2-c23e9b:title:__title:2-2-c23e9b"/>
           <p:cNvSpPr txBox="1"/>
           <p:nvPr/>
         </p:nvSpPr>
@@ -10111,7 +9948,24 @@
                 <a:ea typeface="Pretendard" pitchFamily="34" charset="-122"/>
                 <a:cs typeface="Pretendard" pitchFamily="34" charset="-120"/>
               </a:rPr>
-              <a:t>Decoration Pattern Catalog (Cont. 2/2)</a:t>
+              <a:t>Decoration Pattern Catalog</a:t>
+            </a:r>
+            <a:pPr algn="ctr" indent="0" marL="0">
+              <a:lnSpc>
+                <a:spcPct val="120000"/>
+              </a:lnSpc>
+              <a:buNone/>
+            </a:pPr>
+            <a:r>
+              <a:rPr lang="en-US" sz="2000" dirty="0">
+                <a:solidFill>
+                  <a:srgbClr val="919191"/>
+                </a:solidFill>
+                <a:latin typeface="Pretendard" pitchFamily="34" charset="0"/>
+                <a:ea typeface="Pretendard" pitchFamily="34" charset="-122"/>
+                <a:cs typeface="Pretendard" pitchFamily="34" charset="-120"/>
+              </a:rPr>
+              <a:t> (Cont. 2/2)</a:t>
             </a:r>
             <a:endParaRPr lang="en-US" sz="3400" dirty="0"/>
           </a:p>
@@ -10119,14 +9973,14 @@
       </p:sp>
       <p:sp>
         <p:nvSpPr>
-          <p:cNvPr id="40" name="mdpr:2-2-c23e9b:left:block-15-chunk-2"/>
+          <p:cNvPr id="37" name="mdpr:2-2-c23e9b:left:block-15-chunk-2-block-15-chunk-2"/>
           <p:cNvSpPr txBox="1"/>
           <p:nvPr/>
         </p:nvSpPr>
         <p:spPr>
           <a:xfrm>
-            <a:off x="896112" y="1664208"/>
-            <a:ext cx="4791456" cy="4169664"/>
+            <a:off x="896112" y="1463040"/>
+            <a:ext cx="4791456" cy="4261104"/>
           </a:xfrm>
           <a:prstGeom prst="rect">
             <a:avLst/>
@@ -10145,7 +9999,44 @@
               <a:buNone/>
             </a:pPr>
             <a:r>
-              <a:rPr lang="en-US" sz="2200" b="1" dirty="0">
+              <a:rPr lang="en-US" sz="1800" b="1" dirty="0">
+                <a:solidFill>
+                  <a:srgbClr val="0F766E"/>
+                </a:solidFill>
+                <a:latin typeface="Pretendard" pitchFamily="34" charset="0"/>
+                <a:ea typeface="Pretendard" pitchFamily="34" charset="-122"/>
+                <a:cs typeface="Pretendard" pitchFamily="34" charset="-120"/>
+              </a:rPr>
+              <a:t>- Connectors</a:t>
+            </a:r>
+            <a:pPr algn="l" indent="0" marL="0">
+              <a:lnSpc>
+                <a:spcPct val="120000"/>
+              </a:lnSpc>
+              <a:buNone/>
+            </a:pPr>
+            <a:r>
+              <a:rPr lang="en-US" sz="1800" dirty="0">
+                <a:solidFill>
+                  <a:srgbClr val="111111"/>
+                </a:solidFill>
+                <a:latin typeface="Pretendard" pitchFamily="34" charset="0"/>
+                <a:ea typeface="Pretendard" pitchFamily="34" charset="-122"/>
+                <a:cs typeface="Pretendard" pitchFamily="34" charset="-120"/>
+              </a:rPr>
+              <a:t>  straight-arrow, elbow-arrow, boundary-attach, overlap-joint, parallel-flow, contrast-flow.</a:t>
+            </a:r>
+            <a:endParaRPr lang="en-US" sz="1800" dirty="0"/>
+          </a:p>
+          <a:p>
+            <a:pPr algn="l" indent="0" marL="0">
+              <a:lnSpc>
+                <a:spcPct val="120000"/>
+              </a:lnSpc>
+              <a:buNone/>
+            </a:pPr>
+            <a:r>
+              <a:rPr lang="en-US" sz="1800" b="1" dirty="0">
                 <a:solidFill>
                   <a:srgbClr val="0F766E"/>
                 </a:solidFill>
@@ -10155,6 +10046,9 @@
               </a:rPr>
               <a:t>- Icons</a:t>
             </a:r>
+            <a:endParaRPr lang="en-US" sz="1800" dirty="0"/>
+          </a:p>
+          <a:p>
             <a:pPr algn="l" indent="0" marL="0">
               <a:lnSpc>
                 <a:spcPct val="120000"/>
@@ -10162,7 +10056,7 @@
               <a:buNone/>
             </a:pPr>
             <a:r>
-              <a:rPr lang="en-US" sz="2200" dirty="0">
+              <a:rPr lang="en-US" sz="1800" dirty="0">
                 <a:solidFill>
                   <a:srgbClr val="111111"/>
                 </a:solidFill>
@@ -10172,20 +10066,20 @@
               </a:rPr>
               <a:t>  number-badge, mono-icon-slot, letter-disc, quiet-aside, image-safe-frame, brand-glyph.</a:t>
             </a:r>
-            <a:endParaRPr lang="en-US" sz="2200" dirty="0"/>
+            <a:endParaRPr lang="en-US" sz="1800" dirty="0"/>
           </a:p>
         </p:txBody>
       </p:sp>
       <p:sp>
         <p:nvSpPr>
-          <p:cNvPr id="41" name="mdpr:2-2-c23e9b:right:block-15-chunk-2"/>
+          <p:cNvPr id="38" name="mdpr:2-2-c23e9b:right:block-15-chunk-2"/>
           <p:cNvSpPr txBox="1"/>
           <p:nvPr/>
         </p:nvSpPr>
         <p:spPr>
           <a:xfrm>
-            <a:off x="6473952" y="1664208"/>
-            <a:ext cx="4791456" cy="4169664"/>
+            <a:off x="6473952" y="1463040"/>
+            <a:ext cx="4791456" cy="4261104"/>
           </a:xfrm>
           <a:prstGeom prst="rect">
             <a:avLst/>
@@ -10204,7 +10098,7 @@
               <a:buNone/>
             </a:pPr>
             <a:r>
-              <a:rPr lang="en-US" sz="2200" b="1" dirty="0">
+              <a:rPr lang="en-US" sz="1800" b="1" dirty="0">
                 <a:solidFill>
                   <a:srgbClr val="0F766E"/>
                 </a:solidFill>
@@ -10221,7 +10115,7 @@
               <a:buNone/>
             </a:pPr>
             <a:r>
-              <a:rPr lang="en-US" sz="2200" dirty="0">
+              <a:rPr lang="en-US" sz="1800" dirty="0">
                 <a:solidFill>
                   <a:srgbClr val="111111"/>
                 </a:solidFill>
@@ -10231,7 +10125,7 @@
               </a:rPr>
               <a:t>  skeuomorphic-bevel, glassmorphism-surface, newmorphic-panel, clay-blob, bento-tile, liquid-lens.</a:t>
             </a:r>
-            <a:endParaRPr lang="en-US" sz="2200" dirty="0"/>
+            <a:endParaRPr lang="en-US" sz="1800" dirty="0"/>
           </a:p>
         </p:txBody>
       </p:sp>
@@ -11135,36 +11029,9 @@
           </a:ln>
         </p:spPr>
       </p:sp>
-      <p:sp>
-        <p:nvSpPr>
-          <p:cNvPr id="36" name="Shape 34"/>
-          <p:cNvSpPr/>
-          <p:nvPr/>
-        </p:nvSpPr>
-        <p:spPr>
-          <a:xfrm>
-            <a:off x="731520" y="1207008"/>
-            <a:ext cx="1325880" cy="54864"/>
-          </a:xfrm>
-          <a:prstGeom prst="rect">
-            <a:avLst/>
-          </a:prstGeom>
-          <a:solidFill>
-            <a:srgbClr val="0F766E"/>
-          </a:solidFill>
-          <a:ln w="12700">
-            <a:solidFill>
-              <a:srgbClr val="0F766E">
-                <a:alpha val="0"/>
-              </a:srgbClr>
-            </a:solidFill>
-            <a:prstDash val="solid"/>
-          </a:ln>
-        </p:spPr>
-      </p:sp>
       <p:pic>
         <p:nvPicPr>
-          <p:cNvPr id="37" name="Image 0" descr="preencoded.png">    </p:cNvPr>
+          <p:cNvPr id="36" name="Image 0" descr="preencoded.png">    </p:cNvPr>
           <p:cNvPicPr>
             <a:picLocks noChangeAspect="1"/>
           </p:cNvPicPr>
@@ -11194,7 +11061,7 @@
       </p:pic>
       <p:sp>
         <p:nvSpPr>
-          <p:cNvPr id="38" name="Shape 35"/>
+          <p:cNvPr id="37" name="Shape 34"/>
           <p:cNvSpPr/>
           <p:nvPr/>
         </p:nvSpPr>
@@ -11230,7 +11097,7 @@
       </p:sp>
       <p:sp>
         <p:nvSpPr>
-          <p:cNvPr id="39" name="mdpr:table-coherence-2f9a7b:title:__title:table-coherence-2f9a7b"/>
+          <p:cNvPr id="38" name="mdpr:table-coherence-2f9a7b:title:__title:table-coherence-2f9a7b"/>
           <p:cNvSpPr txBox="1"/>
           <p:nvPr/>
         </p:nvSpPr>
@@ -13225,36 +13092,9 @@
           </a:ln>
         </p:spPr>
       </p:sp>
-      <p:sp>
-        <p:nvSpPr>
-          <p:cNvPr id="36" name="Shape 34"/>
-          <p:cNvSpPr/>
-          <p:nvPr/>
-        </p:nvSpPr>
-        <p:spPr>
-          <a:xfrm>
-            <a:off x="731520" y="1207008"/>
-            <a:ext cx="1325880" cy="54864"/>
-          </a:xfrm>
-          <a:prstGeom prst="rect">
-            <a:avLst/>
-          </a:prstGeom>
-          <a:solidFill>
-            <a:srgbClr val="0F766E"/>
-          </a:solidFill>
-          <a:ln w="12700">
-            <a:solidFill>
-              <a:srgbClr val="0F766E">
-                <a:alpha val="0"/>
-              </a:srgbClr>
-            </a:solidFill>
-            <a:prstDash val="solid"/>
-          </a:ln>
-        </p:spPr>
-      </p:sp>
       <p:pic>
         <p:nvPicPr>
-          <p:cNvPr id="37" name="Image 0" descr="preencoded.png">    </p:cNvPr>
+          <p:cNvPr id="36" name="Image 0" descr="preencoded.png">    </p:cNvPr>
           <p:cNvPicPr>
             <a:picLocks noChangeAspect="1"/>
           </p:cNvPicPr>
@@ -13284,7 +13124,7 @@
       </p:pic>
       <p:sp>
         <p:nvSpPr>
-          <p:cNvPr id="38" name="Shape 35"/>
+          <p:cNvPr id="37" name="Shape 34"/>
           <p:cNvSpPr/>
           <p:nvPr/>
         </p:nvSpPr>
@@ -13320,7 +13160,7 @@
       </p:sp>
       <p:sp>
         <p:nvSpPr>
-          <p:cNvPr id="39" name="Shape 36"/>
+          <p:cNvPr id="38" name="Shape 35"/>
           <p:cNvSpPr/>
           <p:nvPr/>
         </p:nvSpPr>
@@ -13347,7 +13187,7 @@
       </p:sp>
       <p:sp>
         <p:nvSpPr>
-          <p:cNvPr id="40" name="mdpr:1-2-2ff3f0:title:__title:1-2-2ff3f0"/>
+          <p:cNvPr id="39" name="mdpr:1-2-2ff3f0:title:__title:1-2-2ff3f0"/>
           <p:cNvSpPr txBox="1"/>
           <p:nvPr/>
         </p:nvSpPr>
@@ -13389,7 +13229,7 @@
       </p:sp>
       <p:sp>
         <p:nvSpPr>
-          <p:cNvPr id="41" name="mdpr:1-2-2ff3f0:body:block-19"/>
+          <p:cNvPr id="40" name="mdpr:1-2-2ff3f0:body:block-19"/>
           <p:cNvSpPr txBox="1"/>
           <p:nvPr/>
         </p:nvSpPr>
@@ -13528,7 +13368,7 @@
       </p:sp>
       <p:graphicFrame>
         <p:nvGraphicFramePr>
-          <p:cNvPr id="42" name="Chart 0" descr=""/>
+          <p:cNvPr id="41" name="Chart 0" descr=""/>
           <p:cNvGraphicFramePr/>
           <p:nvPr/>
         </p:nvGraphicFramePr>
@@ -14442,36 +14282,9 @@
           </a:ln>
         </p:spPr>
       </p:sp>
-      <p:sp>
-        <p:nvSpPr>
-          <p:cNvPr id="36" name="Shape 34"/>
-          <p:cNvSpPr/>
-          <p:nvPr/>
-        </p:nvSpPr>
-        <p:spPr>
-          <a:xfrm>
-            <a:off x="731520" y="1207008"/>
-            <a:ext cx="1325880" cy="54864"/>
-          </a:xfrm>
-          <a:prstGeom prst="rect">
-            <a:avLst/>
-          </a:prstGeom>
-          <a:solidFill>
-            <a:srgbClr val="0F766E"/>
-          </a:solidFill>
-          <a:ln w="12700">
-            <a:solidFill>
-              <a:srgbClr val="0F766E">
-                <a:alpha val="0"/>
-              </a:srgbClr>
-            </a:solidFill>
-            <a:prstDash val="solid"/>
-          </a:ln>
-        </p:spPr>
-      </p:sp>
       <p:pic>
         <p:nvPicPr>
-          <p:cNvPr id="37" name="Image 0" descr="preencoded.png">    </p:cNvPr>
+          <p:cNvPr id="36" name="Image 0" descr="preencoded.png">    </p:cNvPr>
           <p:cNvPicPr>
             <a:picLocks noChangeAspect="1"/>
           </p:cNvPicPr>
@@ -14501,7 +14314,7 @@
       </p:pic>
       <p:sp>
         <p:nvSpPr>
-          <p:cNvPr id="38" name="Shape 35"/>
+          <p:cNvPr id="37" name="Shape 34"/>
           <p:cNvSpPr/>
           <p:nvPr/>
         </p:nvSpPr>
@@ -14537,7 +14350,7 @@
       </p:sp>
       <p:sp>
         <p:nvSpPr>
-          <p:cNvPr id="39" name="mdpr:2-2-542095:title:__title:2-2-542095"/>
+          <p:cNvPr id="38" name="mdpr:2-2-542095:title:__title:2-2-542095"/>
           <p:cNvSpPr txBox="1"/>
           <p:nvPr/>
         </p:nvSpPr>
@@ -14571,7 +14384,24 @@
                 <a:ea typeface="Pretendard" pitchFamily="34" charset="-122"/>
                 <a:cs typeface="Pretendard" pitchFamily="34" charset="-120"/>
               </a:rPr>
-              <a:t>Chart and Table Pair (Cont. 2/2)</a:t>
+              <a:t>Chart and Table Pair</a:t>
+            </a:r>
+            <a:pPr algn="ctr" indent="0" marL="0">
+              <a:lnSpc>
+                <a:spcPct val="120000"/>
+              </a:lnSpc>
+              <a:buNone/>
+            </a:pPr>
+            <a:r>
+              <a:rPr lang="en-US" sz="2000" dirty="0">
+                <a:solidFill>
+                  <a:srgbClr val="919191"/>
+                </a:solidFill>
+                <a:latin typeface="Pretendard" pitchFamily="34" charset="0"/>
+                <a:ea typeface="Pretendard" pitchFamily="34" charset="-122"/>
+                <a:cs typeface="Pretendard" pitchFamily="34" charset="-120"/>
+              </a:rPr>
+              <a:t> (Cont. 2/2)</a:t>
             </a:r>
             <a:endParaRPr lang="en-US" sz="3400" dirty="0"/>
           </a:p>
@@ -16320,36 +16150,9 @@
           </a:ln>
         </p:spPr>
       </p:sp>
-      <p:sp>
-        <p:nvSpPr>
-          <p:cNvPr id="36" name="Shape 34"/>
-          <p:cNvSpPr/>
-          <p:nvPr/>
-        </p:nvSpPr>
-        <p:spPr>
-          <a:xfrm>
-            <a:off x="731520" y="1207008"/>
-            <a:ext cx="1325880" cy="54864"/>
-          </a:xfrm>
-          <a:prstGeom prst="rect">
-            <a:avLst/>
-          </a:prstGeom>
-          <a:solidFill>
-            <a:srgbClr val="0F766E"/>
-          </a:solidFill>
-          <a:ln w="12700">
-            <a:solidFill>
-              <a:srgbClr val="0F766E">
-                <a:alpha val="0"/>
-              </a:srgbClr>
-            </a:solidFill>
-            <a:prstDash val="solid"/>
-          </a:ln>
-        </p:spPr>
-      </p:sp>
       <p:pic>
         <p:nvPicPr>
-          <p:cNvPr id="37" name="Image 0" descr="preencoded.png">    </p:cNvPr>
+          <p:cNvPr id="36" name="Image 0" descr="preencoded.png">    </p:cNvPr>
           <p:cNvPicPr>
             <a:picLocks noChangeAspect="1"/>
           </p:cNvPicPr>
@@ -16379,7 +16182,7 @@
       </p:pic>
       <p:sp>
         <p:nvSpPr>
-          <p:cNvPr id="38" name="Shape 35"/>
+          <p:cNvPr id="37" name="Shape 34"/>
           <p:cNvSpPr/>
           <p:nvPr/>
         </p:nvSpPr>
@@ -16415,7 +16218,7 @@
       </p:sp>
       <p:sp>
         <p:nvSpPr>
-          <p:cNvPr id="39" name="mdpr:1-2-b8955f:title:__title:1-2-b8955f"/>
+          <p:cNvPr id="38" name="mdpr:1-2-b8955f:title:__title:1-2-b8955f"/>
           <p:cNvSpPr txBox="1"/>
           <p:nvPr/>
         </p:nvSpPr>
@@ -16457,7 +16260,7 @@
       </p:sp>
       <p:sp>
         <p:nvSpPr>
-          <p:cNvPr id="40" name="Shape 37"/>
+          <p:cNvPr id="39" name="Shape 36"/>
           <p:cNvSpPr/>
           <p:nvPr/>
         </p:nvSpPr>
@@ -16490,7 +16293,7 @@
       </p:sp>
       <p:sp>
         <p:nvSpPr>
-          <p:cNvPr id="41" name="Shape 38"/>
+          <p:cNvPr id="40" name="Shape 37"/>
           <p:cNvSpPr/>
           <p:nvPr/>
         </p:nvSpPr>
@@ -16521,7 +16324,7 @@
       </p:sp>
       <p:sp>
         <p:nvSpPr>
-          <p:cNvPr id="42" name="Shape 39"/>
+          <p:cNvPr id="41" name="Shape 38"/>
           <p:cNvSpPr/>
           <p:nvPr/>
         </p:nvSpPr>
@@ -16552,7 +16355,7 @@
       </p:sp>
       <p:sp>
         <p:nvSpPr>
-          <p:cNvPr id="43" name="Shape 40"/>
+          <p:cNvPr id="42" name="Shape 39"/>
           <p:cNvSpPr/>
           <p:nvPr/>
         </p:nvSpPr>
@@ -16577,7 +16380,7 @@
       </p:sp>
       <p:sp>
         <p:nvSpPr>
-          <p:cNvPr id="44" name="Shape 41"/>
+          <p:cNvPr id="43" name="Shape 40"/>
           <p:cNvSpPr/>
           <p:nvPr/>
         </p:nvSpPr>
@@ -16604,7 +16407,7 @@
       </p:sp>
       <p:sp>
         <p:nvSpPr>
-          <p:cNvPr id="45" name="Text 42"/>
+          <p:cNvPr id="44" name="Text 41"/>
           <p:cNvSpPr txBox="1"/>
           <p:nvPr/>
         </p:nvSpPr>
@@ -16648,7 +16451,7 @@
       </p:sp>
       <p:sp>
         <p:nvSpPr>
-          <p:cNvPr id="46" name="Text 43"/>
+          <p:cNvPr id="45" name="Text 42"/>
           <p:cNvSpPr txBox="1"/>
           <p:nvPr/>
         </p:nvSpPr>
@@ -16690,7 +16493,7 @@
       </p:sp>
       <p:sp>
         <p:nvSpPr>
-          <p:cNvPr id="47" name="Shape 44"/>
+          <p:cNvPr id="46" name="Shape 43"/>
           <p:cNvSpPr/>
           <p:nvPr/>
         </p:nvSpPr>
@@ -16717,7 +16520,7 @@
       </p:sp>
       <p:sp>
         <p:nvSpPr>
-          <p:cNvPr id="48" name="Text 45"/>
+          <p:cNvPr id="47" name="Text 44"/>
           <p:cNvSpPr txBox="1"/>
           <p:nvPr/>
         </p:nvSpPr>
@@ -16761,7 +16564,7 @@
       </p:sp>
       <p:sp>
         <p:nvSpPr>
-          <p:cNvPr id="49" name="Shape 46"/>
+          <p:cNvPr id="48" name="Shape 45"/>
           <p:cNvSpPr/>
           <p:nvPr/>
         </p:nvSpPr>
@@ -16788,7 +16591,7 @@
       </p:sp>
       <p:sp>
         <p:nvSpPr>
-          <p:cNvPr id="50" name="Text 47"/>
+          <p:cNvPr id="49" name="Text 46"/>
           <p:cNvSpPr txBox="1"/>
           <p:nvPr/>
         </p:nvSpPr>
@@ -16832,7 +16635,7 @@
       </p:sp>
       <p:sp>
         <p:nvSpPr>
-          <p:cNvPr id="51" name="Shape 48"/>
+          <p:cNvPr id="50" name="Shape 47"/>
           <p:cNvSpPr/>
           <p:nvPr/>
         </p:nvSpPr>
@@ -16863,7 +16666,7 @@
       </p:sp>
       <p:sp>
         <p:nvSpPr>
-          <p:cNvPr id="52" name="Shape 49"/>
+          <p:cNvPr id="51" name="Shape 48"/>
           <p:cNvSpPr/>
           <p:nvPr/>
         </p:nvSpPr>
@@ -16892,7 +16695,7 @@
       </p:sp>
       <p:sp>
         <p:nvSpPr>
-          <p:cNvPr id="53" name="Shape 50"/>
+          <p:cNvPr id="52" name="Shape 49"/>
           <p:cNvSpPr/>
           <p:nvPr/>
         </p:nvSpPr>
@@ -16915,7 +16718,7 @@
       </p:sp>
       <p:sp>
         <p:nvSpPr>
-          <p:cNvPr id="54" name="Shape 51"/>
+          <p:cNvPr id="53" name="Shape 50"/>
           <p:cNvSpPr/>
           <p:nvPr/>
         </p:nvSpPr>
@@ -16940,7 +16743,7 @@
       </p:sp>
       <p:sp>
         <p:nvSpPr>
-          <p:cNvPr id="55" name="Shape 52"/>
+          <p:cNvPr id="54" name="Shape 51"/>
           <p:cNvSpPr/>
           <p:nvPr/>
         </p:nvSpPr>
@@ -16965,7 +16768,7 @@
       </p:sp>
       <p:sp>
         <p:nvSpPr>
-          <p:cNvPr id="56" name="Shape 53"/>
+          <p:cNvPr id="55" name="Shape 52"/>
           <p:cNvSpPr/>
           <p:nvPr/>
         </p:nvSpPr>
@@ -16990,7 +16793,7 @@
       </p:sp>
       <p:sp>
         <p:nvSpPr>
-          <p:cNvPr id="57" name="Text 54"/>
+          <p:cNvPr id="56" name="Text 53"/>
           <p:cNvSpPr txBox="1"/>
           <p:nvPr/>
         </p:nvSpPr>
@@ -17034,7 +16837,7 @@
       </p:sp>
       <p:sp>
         <p:nvSpPr>
-          <p:cNvPr id="58" name="Text 55"/>
+          <p:cNvPr id="57" name="Text 54"/>
           <p:cNvSpPr txBox="1"/>
           <p:nvPr/>
         </p:nvSpPr>
@@ -17076,7 +16879,7 @@
       </p:sp>
       <p:sp>
         <p:nvSpPr>
-          <p:cNvPr id="59" name="Text 56"/>
+          <p:cNvPr id="58" name="Text 55"/>
           <p:cNvSpPr txBox="1"/>
           <p:nvPr/>
         </p:nvSpPr>
@@ -17118,7 +16921,7 @@
       </p:sp>
       <p:sp>
         <p:nvSpPr>
-          <p:cNvPr id="60" name="Text 57"/>
+          <p:cNvPr id="59" name="Text 56"/>
           <p:cNvSpPr txBox="1"/>
           <p:nvPr/>
         </p:nvSpPr>
@@ -18058,36 +17861,9 @@
           </a:ln>
         </p:spPr>
       </p:sp>
-      <p:sp>
-        <p:nvSpPr>
-          <p:cNvPr id="36" name="Shape 34"/>
-          <p:cNvSpPr/>
-          <p:nvPr/>
-        </p:nvSpPr>
-        <p:spPr>
-          <a:xfrm>
-            <a:off x="731520" y="1207008"/>
-            <a:ext cx="1325880" cy="54864"/>
-          </a:xfrm>
-          <a:prstGeom prst="rect">
-            <a:avLst/>
-          </a:prstGeom>
-          <a:solidFill>
-            <a:srgbClr val="0F766E"/>
-          </a:solidFill>
-          <a:ln w="12700">
-            <a:solidFill>
-              <a:srgbClr val="0F766E">
-                <a:alpha val="0"/>
-              </a:srgbClr>
-            </a:solidFill>
-            <a:prstDash val="solid"/>
-          </a:ln>
-        </p:spPr>
-      </p:sp>
       <p:pic>
         <p:nvPicPr>
-          <p:cNvPr id="37" name="Image 0" descr="preencoded.png">    </p:cNvPr>
+          <p:cNvPr id="36" name="Image 0" descr="preencoded.png">    </p:cNvPr>
           <p:cNvPicPr>
             <a:picLocks noChangeAspect="1"/>
           </p:cNvPicPr>
@@ -18117,7 +17893,7 @@
       </p:pic>
       <p:sp>
         <p:nvSpPr>
-          <p:cNvPr id="38" name="Shape 35"/>
+          <p:cNvPr id="37" name="Shape 34"/>
           <p:cNvSpPr/>
           <p:nvPr/>
         </p:nvSpPr>
@@ -18153,7 +17929,7 @@
       </p:sp>
       <p:sp>
         <p:nvSpPr>
-          <p:cNvPr id="39" name="mdpr:2-2-4dc4c1:title:__title:2-2-4dc4c1"/>
+          <p:cNvPr id="38" name="mdpr:2-2-4dc4c1:title:__title:2-2-4dc4c1"/>
           <p:cNvSpPr txBox="1"/>
           <p:nvPr/>
         </p:nvSpPr>
@@ -18187,7 +17963,24 @@
                 <a:ea typeface="Pretendard" pitchFamily="34" charset="-122"/>
                 <a:cs typeface="Pretendard" pitchFamily="34" charset="-120"/>
               </a:rPr>
-              <a:t>Editable Proof Objects (Cont. 2/2)</a:t>
+              <a:t>Editable Proof Objects</a:t>
+            </a:r>
+            <a:pPr algn="ctr" indent="0" marL="0">
+              <a:lnSpc>
+                <a:spcPct val="120000"/>
+              </a:lnSpc>
+              <a:buNone/>
+            </a:pPr>
+            <a:r>
+              <a:rPr lang="en-US" sz="2000" dirty="0">
+                <a:solidFill>
+                  <a:srgbClr val="919191"/>
+                </a:solidFill>
+                <a:latin typeface="Pretendard" pitchFamily="34" charset="0"/>
+                <a:ea typeface="Pretendard" pitchFamily="34" charset="-122"/>
+                <a:cs typeface="Pretendard" pitchFamily="34" charset="-120"/>
+              </a:rPr>
+              <a:t> (Cont. 2/2)</a:t>
             </a:r>
             <a:endParaRPr lang="en-US" sz="3400" dirty="0"/>
           </a:p>
@@ -18195,7 +17988,7 @@
       </p:sp>
       <p:sp>
         <p:nvSpPr>
-          <p:cNvPr id="40" name="Shape 37"/>
+          <p:cNvPr id="39" name="Shape 36"/>
           <p:cNvSpPr/>
           <p:nvPr/>
         </p:nvSpPr>
@@ -18222,7 +18015,7 @@
       </p:sp>
       <p:sp>
         <p:nvSpPr>
-          <p:cNvPr id="41" name="Shape 38"/>
+          <p:cNvPr id="40" name="Shape 37"/>
           <p:cNvSpPr/>
           <p:nvPr/>
         </p:nvSpPr>
@@ -18249,7 +18042,7 @@
       </p:sp>
       <p:sp>
         <p:nvSpPr>
-          <p:cNvPr id="42" name="Text 39"/>
+          <p:cNvPr id="41" name="Text 38"/>
           <p:cNvSpPr txBox="1"/>
           <p:nvPr/>
         </p:nvSpPr>
@@ -18293,7 +18086,7 @@
       </p:sp>
       <p:sp>
         <p:nvSpPr>
-          <p:cNvPr id="43" name="Text 40"/>
+          <p:cNvPr id="42" name="Text 39"/>
           <p:cNvSpPr txBox="1"/>
           <p:nvPr/>
         </p:nvSpPr>
@@ -18337,7 +18130,7 @@
       </p:sp>
       <p:sp>
         <p:nvSpPr>
-          <p:cNvPr id="44" name="Shape 41"/>
+          <p:cNvPr id="43" name="Shape 40"/>
           <p:cNvSpPr/>
           <p:nvPr/>
         </p:nvSpPr>
@@ -18364,7 +18157,7 @@
       </p:sp>
       <p:sp>
         <p:nvSpPr>
-          <p:cNvPr id="45" name="Shape 42"/>
+          <p:cNvPr id="44" name="Shape 41"/>
           <p:cNvSpPr/>
           <p:nvPr/>
         </p:nvSpPr>
@@ -18391,7 +18184,7 @@
       </p:sp>
       <p:sp>
         <p:nvSpPr>
-          <p:cNvPr id="46" name="Text 43"/>
+          <p:cNvPr id="45" name="Text 42"/>
           <p:cNvSpPr txBox="1"/>
           <p:nvPr/>
         </p:nvSpPr>
@@ -18435,7 +18228,7 @@
       </p:sp>
       <p:sp>
         <p:nvSpPr>
-          <p:cNvPr id="47" name="Text 44"/>
+          <p:cNvPr id="46" name="Text 43"/>
           <p:cNvSpPr txBox="1"/>
           <p:nvPr/>
         </p:nvSpPr>
@@ -18479,7 +18272,7 @@
       </p:sp>
       <p:sp>
         <p:nvSpPr>
-          <p:cNvPr id="48" name="Shape 45"/>
+          <p:cNvPr id="47" name="Shape 44"/>
           <p:cNvSpPr/>
           <p:nvPr/>
         </p:nvSpPr>
@@ -18506,7 +18299,7 @@
       </p:sp>
       <p:sp>
         <p:nvSpPr>
-          <p:cNvPr id="49" name="Shape 46"/>
+          <p:cNvPr id="48" name="Shape 45"/>
           <p:cNvSpPr/>
           <p:nvPr/>
         </p:nvSpPr>
@@ -18533,7 +18326,7 @@
       </p:sp>
       <p:sp>
         <p:nvSpPr>
-          <p:cNvPr id="50" name="Text 47"/>
+          <p:cNvPr id="49" name="Text 46"/>
           <p:cNvSpPr txBox="1"/>
           <p:nvPr/>
         </p:nvSpPr>
@@ -18577,7 +18370,7 @@
       </p:sp>
       <p:sp>
         <p:nvSpPr>
-          <p:cNvPr id="51" name="Text 48"/>
+          <p:cNvPr id="50" name="Text 47"/>
           <p:cNvSpPr txBox="1"/>
           <p:nvPr/>
         </p:nvSpPr>
@@ -18621,7 +18414,7 @@
       </p:sp>
       <p:sp>
         <p:nvSpPr>
-          <p:cNvPr id="52" name="Shape 49"/>
+          <p:cNvPr id="51" name="Shape 48"/>
           <p:cNvSpPr/>
           <p:nvPr/>
         </p:nvSpPr>
@@ -18648,7 +18441,7 @@
       </p:sp>
       <p:sp>
         <p:nvSpPr>
-          <p:cNvPr id="53" name="Shape 50"/>
+          <p:cNvPr id="52" name="Shape 49"/>
           <p:cNvSpPr/>
           <p:nvPr/>
         </p:nvSpPr>
@@ -18675,7 +18468,7 @@
       </p:sp>
       <p:sp>
         <p:nvSpPr>
-          <p:cNvPr id="54" name="Text 51"/>
+          <p:cNvPr id="53" name="Text 50"/>
           <p:cNvSpPr txBox="1"/>
           <p:nvPr/>
         </p:nvSpPr>
@@ -18719,7 +18512,7 @@
       </p:sp>
       <p:sp>
         <p:nvSpPr>
-          <p:cNvPr id="55" name="Text 52"/>
+          <p:cNvPr id="54" name="Text 51"/>
           <p:cNvSpPr txBox="1"/>
           <p:nvPr/>
         </p:nvSpPr>
@@ -18763,7 +18556,7 @@
       </p:sp>
       <p:sp>
         <p:nvSpPr>
-          <p:cNvPr id="56" name="Shape 53"/>
+          <p:cNvPr id="55" name="Shape 52"/>
           <p:cNvSpPr/>
           <p:nvPr/>
         </p:nvSpPr>
@@ -18787,7 +18580,7 @@
       </p:sp>
       <p:sp>
         <p:nvSpPr>
-          <p:cNvPr id="57" name="Shape 54"/>
+          <p:cNvPr id="56" name="Shape 53"/>
           <p:cNvSpPr/>
           <p:nvPr/>
         </p:nvSpPr>
@@ -18811,7 +18604,7 @@
       </p:sp>
       <p:sp>
         <p:nvSpPr>
-          <p:cNvPr id="58" name="Shape 55"/>
+          <p:cNvPr id="57" name="Shape 54"/>
           <p:cNvSpPr/>
           <p:nvPr/>
         </p:nvSpPr>
@@ -19741,8 +19534,8 @@
         </p:nvSpPr>
         <p:spPr>
           <a:xfrm>
-            <a:off x="731520" y="1207008"/>
-            <a:ext cx="1325880" cy="54864"/>
+            <a:off x="822960" y="1938528"/>
+            <a:ext cx="73152" cy="2514600"/>
           </a:xfrm>
           <a:prstGeom prst="rect">
             <a:avLst/>
@@ -19760,222 +19553,22 @@
           </a:ln>
         </p:spPr>
       </p:sp>
-      <p:pic>
-        <p:nvPicPr>
-          <p:cNvPr id="37" name="Image 0" descr="preencoded.png">    </p:cNvPr>
-          <p:cNvPicPr>
-            <a:picLocks noChangeAspect="1"/>
-          </p:cNvPicPr>
-          <p:nvPr/>
-        </p:nvPicPr>
-        <p:blipFill>
-          <a:blip r:embed="rId1">
-            <a:extLst>
-              <a:ext uri="{96DAC541-7B7A-43D3-8B79-37D633B846F1}">
-                <asvg:svgBlip xmlns:asvg="http://schemas.microsoft.com/office/drawing/2016/SVG/main" r:embed="rId2"/>
-              </a:ext>
-            </a:extLst>
-          </a:blip>
-          <a:stretch>
-            <a:fillRect/>
-          </a:stretch>
-        </p:blipFill>
-        <p:spPr>
-          <a:xfrm>
-            <a:off x="914400" y="1865376"/>
-            <a:ext cx="10241280" cy="1024128"/>
+      <p:sp>
+        <p:nvSpPr>
+          <p:cNvPr id="37" name="Shape 35"/>
+          <p:cNvSpPr/>
+          <p:nvPr/>
+        </p:nvSpPr>
+        <p:spPr>
+          <a:xfrm>
+            <a:off x="4343400" y="1938528"/>
+            <a:ext cx="73152" cy="2514600"/>
           </a:xfrm>
           <a:prstGeom prst="rect">
             <a:avLst/>
           </a:prstGeom>
-        </p:spPr>
-      </p:pic>
-      <p:sp>
-        <p:nvSpPr>
-          <p:cNvPr id="38" name="Shape 35"/>
-          <p:cNvSpPr/>
-          <p:nvPr/>
-        </p:nvSpPr>
-        <p:spPr>
-          <a:xfrm>
-            <a:off x="914400" y="1865376"/>
-            <a:ext cx="10241280" cy="1024128"/>
-          </a:xfrm>
-          <a:prstGeom prst="rect">
-            <a:avLst/>
-          </a:prstGeom>
           <a:solidFill>
-            <a:srgbClr val="FFFFFF">
-              <a:alpha val="0"/>
-            </a:srgbClr>
-          </a:solidFill>
-          <a:ln w="12700">
-            <a:solidFill>
-              <a:srgbClr val="CBD5E1">
-                <a:alpha val="0"/>
-              </a:srgbClr>
-            </a:solidFill>
-            <a:prstDash val="solid"/>
-          </a:ln>
-          <a:effectLst>
-            <a:outerShdw sx="100000" sy="100000" kx="0" ky="0" algn="bl" rotWithShape="0" blurRad="12700" dist="50800" dir="2700000">
-              <a:srgbClr val="000000">
-                <a:alpha val="8000"/>
-              </a:srgbClr>
-            </a:outerShdw>
-          </a:effectLst>
-        </p:spPr>
-      </p:sp>
-      <p:pic>
-        <p:nvPicPr>
-          <p:cNvPr id="39" name="Image 1" descr="preencoded.png">    </p:cNvPr>
-          <p:cNvPicPr>
-            <a:picLocks noChangeAspect="1"/>
-          </p:cNvPicPr>
-          <p:nvPr/>
-        </p:nvPicPr>
-        <p:blipFill>
-          <a:blip r:embed="rId3">
-            <a:extLst>
-              <a:ext uri="{96DAC541-7B7A-43D3-8B79-37D633B846F1}">
-                <asvg:svgBlip xmlns:asvg="http://schemas.microsoft.com/office/drawing/2016/SVG/main" r:embed="rId4"/>
-              </a:ext>
-            </a:extLst>
-          </a:blip>
-          <a:stretch>
-            <a:fillRect/>
-          </a:stretch>
-        </p:blipFill>
-        <p:spPr>
-          <a:xfrm>
-            <a:off x="914400" y="3191256"/>
-            <a:ext cx="10241280" cy="1024128"/>
-          </a:xfrm>
-          <a:prstGeom prst="rect">
-            <a:avLst/>
-          </a:prstGeom>
-        </p:spPr>
-      </p:pic>
-      <p:sp>
-        <p:nvSpPr>
-          <p:cNvPr id="40" name="Shape 36"/>
-          <p:cNvSpPr/>
-          <p:nvPr/>
-        </p:nvSpPr>
-        <p:spPr>
-          <a:xfrm>
-            <a:off x="914400" y="3191256"/>
-            <a:ext cx="10241280" cy="1024128"/>
-          </a:xfrm>
-          <a:prstGeom prst="rect">
-            <a:avLst/>
-          </a:prstGeom>
-          <a:solidFill>
-            <a:srgbClr val="FFFFFF">
-              <a:alpha val="0"/>
-            </a:srgbClr>
-          </a:solidFill>
-          <a:ln w="12700">
-            <a:solidFill>
-              <a:srgbClr val="CBD5E1">
-                <a:alpha val="0"/>
-              </a:srgbClr>
-            </a:solidFill>
-            <a:prstDash val="solid"/>
-          </a:ln>
-          <a:effectLst>
-            <a:outerShdw sx="100000" sy="100000" kx="0" ky="0" algn="bl" rotWithShape="0" blurRad="12700" dist="50800" dir="2700000">
-              <a:srgbClr val="000000">
-                <a:alpha val="8000"/>
-              </a:srgbClr>
-            </a:outerShdw>
-          </a:effectLst>
-        </p:spPr>
-      </p:sp>
-      <p:pic>
-        <p:nvPicPr>
-          <p:cNvPr id="41" name="Image 2" descr="preencoded.png">    </p:cNvPr>
-          <p:cNvPicPr>
-            <a:picLocks noChangeAspect="1"/>
-          </p:cNvPicPr>
-          <p:nvPr/>
-        </p:nvPicPr>
-        <p:blipFill>
-          <a:blip r:embed="rId5">
-            <a:extLst>
-              <a:ext uri="{96DAC541-7B7A-43D3-8B79-37D633B846F1}">
-                <asvg:svgBlip xmlns:asvg="http://schemas.microsoft.com/office/drawing/2016/SVG/main" r:embed="rId6"/>
-              </a:ext>
-            </a:extLst>
-          </a:blip>
-          <a:stretch>
-            <a:fillRect/>
-          </a:stretch>
-        </p:blipFill>
-        <p:spPr>
-          <a:xfrm>
-            <a:off x="914400" y="4507992"/>
-            <a:ext cx="10241280" cy="1024128"/>
-          </a:xfrm>
-          <a:prstGeom prst="rect">
-            <a:avLst/>
-          </a:prstGeom>
-        </p:spPr>
-      </p:pic>
-      <p:sp>
-        <p:nvSpPr>
-          <p:cNvPr id="42" name="Shape 37"/>
-          <p:cNvSpPr/>
-          <p:nvPr/>
-        </p:nvSpPr>
-        <p:spPr>
-          <a:xfrm>
-            <a:off x="914400" y="4507992"/>
-            <a:ext cx="10241280" cy="1024128"/>
-          </a:xfrm>
-          <a:prstGeom prst="rect">
-            <a:avLst/>
-          </a:prstGeom>
-          <a:solidFill>
-            <a:srgbClr val="FFFFFF">
-              <a:alpha val="0"/>
-            </a:srgbClr>
-          </a:solidFill>
-          <a:ln w="12700">
-            <a:solidFill>
-              <a:srgbClr val="CBD5E1">
-                <a:alpha val="0"/>
-              </a:srgbClr>
-            </a:solidFill>
-            <a:prstDash val="solid"/>
-          </a:ln>
-          <a:effectLst>
-            <a:outerShdw sx="100000" sy="100000" kx="0" ky="0" algn="bl" rotWithShape="0" blurRad="12700" dist="50800" dir="2700000">
-              <a:srgbClr val="000000">
-                <a:alpha val="8000"/>
-              </a:srgbClr>
-            </a:outerShdw>
-          </a:effectLst>
-        </p:spPr>
-      </p:sp>
-      <p:sp>
-        <p:nvSpPr>
-          <p:cNvPr id="43" name="Shape 38"/>
-          <p:cNvSpPr/>
-          <p:nvPr/>
-        </p:nvSpPr>
-        <p:spPr>
-          <a:xfrm>
-            <a:off x="786384" y="1956816"/>
-            <a:ext cx="32004" cy="3483864"/>
-          </a:xfrm>
-          <a:prstGeom prst="rect">
-            <a:avLst/>
-          </a:prstGeom>
-          <a:solidFill>
-            <a:srgbClr val="F0AA11">
-              <a:alpha val="80000"/>
-            </a:srgbClr>
+            <a:srgbClr val="F0AA11"/>
           </a:solidFill>
           <a:ln w="12700">
             <a:solidFill>
@@ -19989,14 +19582,14 @@
       </p:sp>
       <p:sp>
         <p:nvSpPr>
-          <p:cNvPr id="44" name="Shape 39"/>
-          <p:cNvSpPr/>
-          <p:nvPr/>
-        </p:nvSpPr>
-        <p:spPr>
-          <a:xfrm>
-            <a:off x="914400" y="1865376"/>
-            <a:ext cx="73152" cy="1024128"/>
+          <p:cNvPr id="38" name="Shape 36"/>
+          <p:cNvSpPr/>
+          <p:nvPr/>
+        </p:nvSpPr>
+        <p:spPr>
+          <a:xfrm>
+            <a:off x="7863840" y="1938528"/>
+            <a:ext cx="73152" cy="2514600"/>
           </a:xfrm>
           <a:prstGeom prst="rect">
             <a:avLst/>
@@ -20016,61 +19609,7 @@
       </p:sp>
       <p:sp>
         <p:nvSpPr>
-          <p:cNvPr id="45" name="Shape 40"/>
-          <p:cNvSpPr/>
-          <p:nvPr/>
-        </p:nvSpPr>
-        <p:spPr>
-          <a:xfrm>
-            <a:off x="914400" y="3191256"/>
-            <a:ext cx="73152" cy="1024128"/>
-          </a:xfrm>
-          <a:prstGeom prst="rect">
-            <a:avLst/>
-          </a:prstGeom>
-          <a:solidFill>
-            <a:srgbClr val="F0AA11"/>
-          </a:solidFill>
-          <a:ln w="12700">
-            <a:solidFill>
-              <a:srgbClr val="F0AA11">
-                <a:alpha val="0"/>
-              </a:srgbClr>
-            </a:solidFill>
-            <a:prstDash val="solid"/>
-          </a:ln>
-        </p:spPr>
-      </p:sp>
-      <p:sp>
-        <p:nvSpPr>
-          <p:cNvPr id="46" name="Shape 41"/>
-          <p:cNvSpPr/>
-          <p:nvPr/>
-        </p:nvSpPr>
-        <p:spPr>
-          <a:xfrm>
-            <a:off x="914400" y="4507992"/>
-            <a:ext cx="73152" cy="1024128"/>
-          </a:xfrm>
-          <a:prstGeom prst="rect">
-            <a:avLst/>
-          </a:prstGeom>
-          <a:solidFill>
-            <a:srgbClr val="0F766E"/>
-          </a:solidFill>
-          <a:ln w="12700">
-            <a:solidFill>
-              <a:srgbClr val="0F766E">
-                <a:alpha val="0"/>
-              </a:srgbClr>
-            </a:solidFill>
-            <a:prstDash val="solid"/>
-          </a:ln>
-        </p:spPr>
-      </p:sp>
-      <p:sp>
-        <p:nvSpPr>
-          <p:cNvPr id="47" name="mdpr:1-2-ea42c8:title:__title:1-2-ea42c8"/>
+          <p:cNvPr id="39" name="mdpr:1-2-ea42c8:title:__title:1-2-ea42c8"/>
           <p:cNvSpPr txBox="1"/>
           <p:nvPr/>
         </p:nvSpPr>
@@ -20112,14 +19651,14 @@
       </p:sp>
       <p:sp>
         <p:nvSpPr>
-          <p:cNvPr id="48" name="mdpr:1-2-ea42c8:item-1:block-27-chunk-1"/>
+          <p:cNvPr id="40" name="mdpr:1-2-ea42c8:item-1:block-27-chunk-1"/>
           <p:cNvSpPr txBox="1"/>
           <p:nvPr/>
         </p:nvSpPr>
         <p:spPr>
           <a:xfrm>
-            <a:off x="1133856" y="1957548"/>
-            <a:ext cx="9820656" cy="839785"/>
+            <a:off x="1042416" y="2103120"/>
+            <a:ext cx="2825496" cy="2185416"/>
           </a:xfrm>
           <a:prstGeom prst="rect">
             <a:avLst/>
@@ -20171,14 +19710,14 @@
       </p:sp>
       <p:sp>
         <p:nvSpPr>
-          <p:cNvPr id="49" name="mdpr:1-2-ea42c8:item-2:block-27-chunk-1"/>
+          <p:cNvPr id="41" name="mdpr:1-2-ea42c8:item-2:block-27-chunk-1"/>
           <p:cNvSpPr txBox="1"/>
           <p:nvPr/>
         </p:nvSpPr>
         <p:spPr>
           <a:xfrm>
-            <a:off x="1133856" y="3283428"/>
-            <a:ext cx="9820656" cy="839785"/>
+            <a:off x="4562856" y="2103120"/>
+            <a:ext cx="2825496" cy="2185416"/>
           </a:xfrm>
           <a:prstGeom prst="rect">
             <a:avLst/>
@@ -20230,14 +19769,14 @@
       </p:sp>
       <p:sp>
         <p:nvSpPr>
-          <p:cNvPr id="50" name="mdpr:1-2-ea42c8:item-3:block-27-chunk-1"/>
+          <p:cNvPr id="42" name="mdpr:1-2-ea42c8:item-3:block-27-chunk-1"/>
           <p:cNvSpPr txBox="1"/>
           <p:nvPr/>
         </p:nvSpPr>
         <p:spPr>
           <a:xfrm>
-            <a:off x="1133856" y="4600164"/>
-            <a:ext cx="9820656" cy="839785"/>
+            <a:off x="8083296" y="2103120"/>
+            <a:ext cx="2825496" cy="2185416"/>
           </a:xfrm>
           <a:prstGeom prst="rect">
             <a:avLst/>
@@ -21195,8 +20734,8 @@
         </p:nvSpPr>
         <p:spPr>
           <a:xfrm>
-            <a:off x="731520" y="1207008"/>
-            <a:ext cx="1325880" cy="54864"/>
+            <a:off x="822960" y="1737360"/>
+            <a:ext cx="73152" cy="841248"/>
           </a:xfrm>
           <a:prstGeom prst="rect">
             <a:avLst/>
@@ -21222,8 +20761,35 @@
         </p:nvSpPr>
         <p:spPr>
           <a:xfrm>
-            <a:off x="822960" y="1188720"/>
-            <a:ext cx="10515600" cy="45720"/>
+            <a:off x="822960" y="2779776"/>
+            <a:ext cx="73152" cy="841248"/>
+          </a:xfrm>
+          <a:prstGeom prst="rect">
+            <a:avLst/>
+          </a:prstGeom>
+          <a:solidFill>
+            <a:srgbClr val="F0AA11"/>
+          </a:solidFill>
+          <a:ln w="12700">
+            <a:solidFill>
+              <a:srgbClr val="F0AA11">
+                <a:alpha val="0"/>
+              </a:srgbClr>
+            </a:solidFill>
+            <a:prstDash val="solid"/>
+          </a:ln>
+        </p:spPr>
+      </p:sp>
+      <p:sp>
+        <p:nvSpPr>
+          <p:cNvPr id="38" name="Shape 36"/>
+          <p:cNvSpPr/>
+          <p:nvPr/>
+        </p:nvSpPr>
+        <p:spPr>
+          <a:xfrm>
+            <a:off x="822960" y="3822192"/>
+            <a:ext cx="73152" cy="841248"/>
           </a:xfrm>
           <a:prstGeom prst="rect">
             <a:avLst/>
@@ -21243,14 +20809,14 @@
       </p:sp>
       <p:sp>
         <p:nvSpPr>
-          <p:cNvPr id="38" name="Shape 36"/>
-          <p:cNvSpPr/>
-          <p:nvPr/>
-        </p:nvSpPr>
-        <p:spPr>
-          <a:xfrm>
-            <a:off x="822960" y="6382512"/>
-            <a:ext cx="2011680" cy="45720"/>
+          <p:cNvPr id="39" name="Shape 37"/>
+          <p:cNvSpPr/>
+          <p:nvPr/>
+        </p:nvSpPr>
+        <p:spPr>
+          <a:xfrm>
+            <a:off x="822960" y="4864608"/>
+            <a:ext cx="73152" cy="841248"/>
           </a:xfrm>
           <a:prstGeom prst="rect">
             <a:avLst/>
@@ -21270,43 +20836,14 @@
       </p:sp>
       <p:sp>
         <p:nvSpPr>
-          <p:cNvPr id="39" name="Shape 37"/>
-          <p:cNvSpPr/>
-          <p:nvPr/>
-        </p:nvSpPr>
-        <p:spPr>
-          <a:xfrm>
-            <a:off x="6080760" y="1389888"/>
-            <a:ext cx="22860" cy="4846320"/>
-          </a:xfrm>
-          <a:prstGeom prst="rect">
-            <a:avLst/>
-          </a:prstGeom>
-          <a:solidFill>
-            <a:srgbClr val="CBD5E1">
-              <a:alpha val="90000"/>
-            </a:srgbClr>
-          </a:solidFill>
-          <a:ln w="12700">
-            <a:solidFill>
-              <a:srgbClr val="CBD5E1">
-                <a:alpha val="0"/>
-              </a:srgbClr>
-            </a:solidFill>
-            <a:prstDash val="solid"/>
-          </a:ln>
-        </p:spPr>
-      </p:sp>
-      <p:sp>
-        <p:nvSpPr>
           <p:cNvPr id="40" name="Shape 38"/>
           <p:cNvSpPr/>
           <p:nvPr/>
         </p:nvSpPr>
         <p:spPr>
           <a:xfrm>
-            <a:off x="822960" y="1389888"/>
-            <a:ext cx="73152" cy="566928"/>
+            <a:off x="6272784" y="1737360"/>
+            <a:ext cx="73152" cy="841248"/>
           </a:xfrm>
           <a:prstGeom prst="rect">
             <a:avLst/>
@@ -21332,8 +20869,8 @@
         </p:nvSpPr>
         <p:spPr>
           <a:xfrm>
-            <a:off x="822960" y="2103120"/>
-            <a:ext cx="73152" cy="566928"/>
+            <a:off x="6272784" y="2779776"/>
+            <a:ext cx="73152" cy="841248"/>
           </a:xfrm>
           <a:prstGeom prst="rect">
             <a:avLst/>
@@ -21359,8 +20896,8 @@
         </p:nvSpPr>
         <p:spPr>
           <a:xfrm>
-            <a:off x="822960" y="2816352"/>
-            <a:ext cx="73152" cy="566928"/>
+            <a:off x="6272784" y="3822192"/>
+            <a:ext cx="73152" cy="841248"/>
           </a:xfrm>
           <a:prstGeom prst="rect">
             <a:avLst/>
@@ -21386,8 +20923,8 @@
         </p:nvSpPr>
         <p:spPr>
           <a:xfrm>
-            <a:off x="822960" y="3529584"/>
-            <a:ext cx="73152" cy="566928"/>
+            <a:off x="6272784" y="4864608"/>
+            <a:ext cx="73152" cy="841248"/>
           </a:xfrm>
           <a:prstGeom prst="rect">
             <a:avLst/>
@@ -21407,277 +20944,7 @@
       </p:sp>
       <p:sp>
         <p:nvSpPr>
-          <p:cNvPr id="44" name="Shape 42"/>
-          <p:cNvSpPr/>
-          <p:nvPr/>
-        </p:nvSpPr>
-        <p:spPr>
-          <a:xfrm>
-            <a:off x="822960" y="4242816"/>
-            <a:ext cx="73152" cy="566928"/>
-          </a:xfrm>
-          <a:prstGeom prst="rect">
-            <a:avLst/>
-          </a:prstGeom>
-          <a:solidFill>
-            <a:srgbClr val="0F766E"/>
-          </a:solidFill>
-          <a:ln w="12700">
-            <a:solidFill>
-              <a:srgbClr val="0F766E">
-                <a:alpha val="0"/>
-              </a:srgbClr>
-            </a:solidFill>
-            <a:prstDash val="solid"/>
-          </a:ln>
-        </p:spPr>
-      </p:sp>
-      <p:sp>
-        <p:nvSpPr>
-          <p:cNvPr id="45" name="Shape 43"/>
-          <p:cNvSpPr/>
-          <p:nvPr/>
-        </p:nvSpPr>
-        <p:spPr>
-          <a:xfrm>
-            <a:off x="822960" y="4956048"/>
-            <a:ext cx="73152" cy="566928"/>
-          </a:xfrm>
-          <a:prstGeom prst="rect">
-            <a:avLst/>
-          </a:prstGeom>
-          <a:solidFill>
-            <a:srgbClr val="F0AA11"/>
-          </a:solidFill>
-          <a:ln w="12700">
-            <a:solidFill>
-              <a:srgbClr val="F0AA11">
-                <a:alpha val="0"/>
-              </a:srgbClr>
-            </a:solidFill>
-            <a:prstDash val="solid"/>
-          </a:ln>
-        </p:spPr>
-      </p:sp>
-      <p:sp>
-        <p:nvSpPr>
-          <p:cNvPr id="46" name="Shape 44"/>
-          <p:cNvSpPr/>
-          <p:nvPr/>
-        </p:nvSpPr>
-        <p:spPr>
-          <a:xfrm>
-            <a:off x="822960" y="5669280"/>
-            <a:ext cx="73152" cy="566928"/>
-          </a:xfrm>
-          <a:prstGeom prst="rect">
-            <a:avLst/>
-          </a:prstGeom>
-          <a:solidFill>
-            <a:srgbClr val="0F766E"/>
-          </a:solidFill>
-          <a:ln w="12700">
-            <a:solidFill>
-              <a:srgbClr val="0F766E">
-                <a:alpha val="0"/>
-              </a:srgbClr>
-            </a:solidFill>
-            <a:prstDash val="solid"/>
-          </a:ln>
-        </p:spPr>
-      </p:sp>
-      <p:sp>
-        <p:nvSpPr>
-          <p:cNvPr id="47" name="Shape 45"/>
-          <p:cNvSpPr/>
-          <p:nvPr/>
-        </p:nvSpPr>
-        <p:spPr>
-          <a:xfrm>
-            <a:off x="6272784" y="1389888"/>
-            <a:ext cx="73152" cy="566928"/>
-          </a:xfrm>
-          <a:prstGeom prst="rect">
-            <a:avLst/>
-          </a:prstGeom>
-          <a:solidFill>
-            <a:srgbClr val="F0AA11"/>
-          </a:solidFill>
-          <a:ln w="12700">
-            <a:solidFill>
-              <a:srgbClr val="F0AA11">
-                <a:alpha val="0"/>
-              </a:srgbClr>
-            </a:solidFill>
-            <a:prstDash val="solid"/>
-          </a:ln>
-        </p:spPr>
-      </p:sp>
-      <p:sp>
-        <p:nvSpPr>
-          <p:cNvPr id="48" name="Shape 46"/>
-          <p:cNvSpPr/>
-          <p:nvPr/>
-        </p:nvSpPr>
-        <p:spPr>
-          <a:xfrm>
-            <a:off x="6272784" y="2103120"/>
-            <a:ext cx="73152" cy="566928"/>
-          </a:xfrm>
-          <a:prstGeom prst="rect">
-            <a:avLst/>
-          </a:prstGeom>
-          <a:solidFill>
-            <a:srgbClr val="0F766E"/>
-          </a:solidFill>
-          <a:ln w="12700">
-            <a:solidFill>
-              <a:srgbClr val="0F766E">
-                <a:alpha val="0"/>
-              </a:srgbClr>
-            </a:solidFill>
-            <a:prstDash val="solid"/>
-          </a:ln>
-        </p:spPr>
-      </p:sp>
-      <p:sp>
-        <p:nvSpPr>
-          <p:cNvPr id="49" name="Shape 47"/>
-          <p:cNvSpPr/>
-          <p:nvPr/>
-        </p:nvSpPr>
-        <p:spPr>
-          <a:xfrm>
-            <a:off x="6272784" y="2816352"/>
-            <a:ext cx="73152" cy="566928"/>
-          </a:xfrm>
-          <a:prstGeom prst="rect">
-            <a:avLst/>
-          </a:prstGeom>
-          <a:solidFill>
-            <a:srgbClr val="F0AA11"/>
-          </a:solidFill>
-          <a:ln w="12700">
-            <a:solidFill>
-              <a:srgbClr val="F0AA11">
-                <a:alpha val="0"/>
-              </a:srgbClr>
-            </a:solidFill>
-            <a:prstDash val="solid"/>
-          </a:ln>
-        </p:spPr>
-      </p:sp>
-      <p:sp>
-        <p:nvSpPr>
-          <p:cNvPr id="50" name="Shape 48"/>
-          <p:cNvSpPr/>
-          <p:nvPr/>
-        </p:nvSpPr>
-        <p:spPr>
-          <a:xfrm>
-            <a:off x="6272784" y="3529584"/>
-            <a:ext cx="73152" cy="566928"/>
-          </a:xfrm>
-          <a:prstGeom prst="rect">
-            <a:avLst/>
-          </a:prstGeom>
-          <a:solidFill>
-            <a:srgbClr val="0F766E"/>
-          </a:solidFill>
-          <a:ln w="12700">
-            <a:solidFill>
-              <a:srgbClr val="0F766E">
-                <a:alpha val="0"/>
-              </a:srgbClr>
-            </a:solidFill>
-            <a:prstDash val="solid"/>
-          </a:ln>
-        </p:spPr>
-      </p:sp>
-      <p:sp>
-        <p:nvSpPr>
-          <p:cNvPr id="51" name="Shape 49"/>
-          <p:cNvSpPr/>
-          <p:nvPr/>
-        </p:nvSpPr>
-        <p:spPr>
-          <a:xfrm>
-            <a:off x="6272784" y="4242816"/>
-            <a:ext cx="73152" cy="566928"/>
-          </a:xfrm>
-          <a:prstGeom prst="rect">
-            <a:avLst/>
-          </a:prstGeom>
-          <a:solidFill>
-            <a:srgbClr val="F0AA11"/>
-          </a:solidFill>
-          <a:ln w="12700">
-            <a:solidFill>
-              <a:srgbClr val="F0AA11">
-                <a:alpha val="0"/>
-              </a:srgbClr>
-            </a:solidFill>
-            <a:prstDash val="solid"/>
-          </a:ln>
-        </p:spPr>
-      </p:sp>
-      <p:sp>
-        <p:nvSpPr>
-          <p:cNvPr id="52" name="Shape 50"/>
-          <p:cNvSpPr/>
-          <p:nvPr/>
-        </p:nvSpPr>
-        <p:spPr>
-          <a:xfrm>
-            <a:off x="6272784" y="4956048"/>
-            <a:ext cx="73152" cy="566928"/>
-          </a:xfrm>
-          <a:prstGeom prst="rect">
-            <a:avLst/>
-          </a:prstGeom>
-          <a:solidFill>
-            <a:srgbClr val="0F766E"/>
-          </a:solidFill>
-          <a:ln w="12700">
-            <a:solidFill>
-              <a:srgbClr val="0F766E">
-                <a:alpha val="0"/>
-              </a:srgbClr>
-            </a:solidFill>
-            <a:prstDash val="solid"/>
-          </a:ln>
-        </p:spPr>
-      </p:sp>
-      <p:sp>
-        <p:nvSpPr>
-          <p:cNvPr id="53" name="Shape 51"/>
-          <p:cNvSpPr/>
-          <p:nvPr/>
-        </p:nvSpPr>
-        <p:spPr>
-          <a:xfrm>
-            <a:off x="6272784" y="5669280"/>
-            <a:ext cx="73152" cy="566928"/>
-          </a:xfrm>
-          <a:prstGeom prst="rect">
-            <a:avLst/>
-          </a:prstGeom>
-          <a:solidFill>
-            <a:srgbClr val="F0AA11"/>
-          </a:solidFill>
-          <a:ln w="12700">
-            <a:solidFill>
-              <a:srgbClr val="F0AA11">
-                <a:alpha val="0"/>
-              </a:srgbClr>
-            </a:solidFill>
-            <a:prstDash val="solid"/>
-          </a:ln>
-        </p:spPr>
-      </p:sp>
-      <p:sp>
-        <p:nvSpPr>
-          <p:cNvPr id="54" name="mdpr:1-2-0772f8:title:__title:1-2-0772f8"/>
+          <p:cNvPr id="44" name="mdpr:1-2-0772f8:title:__title:1-2-0772f8"/>
           <p:cNvSpPr txBox="1"/>
           <p:nvPr/>
         </p:nvSpPr>
@@ -21719,14 +20986,14 @@
       </p:sp>
       <p:sp>
         <p:nvSpPr>
-          <p:cNvPr id="55" name="mdpr:1-2-0772f8:toc-item-1:toc-item-1"/>
+          <p:cNvPr id="45" name="mdpr:1-2-0772f8:toc-item-1:toc-item-1"/>
           <p:cNvSpPr txBox="1"/>
           <p:nvPr/>
         </p:nvSpPr>
         <p:spPr>
           <a:xfrm>
-            <a:off x="1042416" y="1481328"/>
-            <a:ext cx="4645152" cy="384048"/>
+            <a:off x="1042416" y="1828800"/>
+            <a:ext cx="4645152" cy="658368"/>
           </a:xfrm>
           <a:prstGeom prst="rect">
             <a:avLst/>
@@ -21761,14 +21028,14 @@
       </p:sp>
       <p:sp>
         <p:nvSpPr>
-          <p:cNvPr id="56" name="mdpr:1-2-0772f8:toc-item-2:toc-item-2"/>
+          <p:cNvPr id="46" name="mdpr:1-2-0772f8:toc-item-2:toc-item-2"/>
           <p:cNvSpPr txBox="1"/>
           <p:nvPr/>
         </p:nvSpPr>
         <p:spPr>
           <a:xfrm>
-            <a:off x="1042416" y="2194560"/>
-            <a:ext cx="4645152" cy="384048"/>
+            <a:off x="1042416" y="2871216"/>
+            <a:ext cx="4645152" cy="658368"/>
           </a:xfrm>
           <a:prstGeom prst="rect">
             <a:avLst/>
@@ -21803,14 +21070,14 @@
       </p:sp>
       <p:sp>
         <p:nvSpPr>
-          <p:cNvPr id="57" name="mdpr:1-2-0772f8:toc-item-3:toc-item-3"/>
+          <p:cNvPr id="47" name="mdpr:1-2-0772f8:toc-item-3:toc-item-3"/>
           <p:cNvSpPr txBox="1"/>
           <p:nvPr/>
         </p:nvSpPr>
         <p:spPr>
           <a:xfrm>
-            <a:off x="1042416" y="2907792"/>
-            <a:ext cx="4645152" cy="384048"/>
+            <a:off x="1042416" y="3913632"/>
+            <a:ext cx="4645152" cy="658368"/>
           </a:xfrm>
           <a:prstGeom prst="rect">
             <a:avLst/>
@@ -21845,14 +21112,14 @@
       </p:sp>
       <p:sp>
         <p:nvSpPr>
-          <p:cNvPr id="58" name="mdpr:1-2-0772f8:toc-item-4:toc-item-4"/>
+          <p:cNvPr id="48" name="mdpr:1-2-0772f8:toc-item-4:toc-item-4"/>
           <p:cNvSpPr txBox="1"/>
           <p:nvPr/>
         </p:nvSpPr>
         <p:spPr>
           <a:xfrm>
-            <a:off x="1042416" y="3621024"/>
-            <a:ext cx="4645152" cy="384048"/>
+            <a:off x="1042416" y="4956048"/>
+            <a:ext cx="4645152" cy="658368"/>
           </a:xfrm>
           <a:prstGeom prst="rect">
             <a:avLst/>
@@ -21887,14 +21154,14 @@
       </p:sp>
       <p:sp>
         <p:nvSpPr>
-          <p:cNvPr id="59" name="mdpr:1-2-0772f8:toc-item-5:toc-item-5"/>
+          <p:cNvPr id="49" name="mdpr:1-2-0772f8:toc-item-5:toc-item-5"/>
           <p:cNvSpPr txBox="1"/>
           <p:nvPr/>
         </p:nvSpPr>
         <p:spPr>
           <a:xfrm>
-            <a:off x="1042416" y="4334256"/>
-            <a:ext cx="4645152" cy="384048"/>
+            <a:off x="6492240" y="1828800"/>
+            <a:ext cx="4645152" cy="658368"/>
           </a:xfrm>
           <a:prstGeom prst="rect">
             <a:avLst/>
@@ -21929,14 +21196,14 @@
       </p:sp>
       <p:sp>
         <p:nvSpPr>
-          <p:cNvPr id="60" name="mdpr:1-2-0772f8:toc-item-6:toc-item-6"/>
+          <p:cNvPr id="50" name="mdpr:1-2-0772f8:toc-item-6:toc-item-6"/>
           <p:cNvSpPr txBox="1"/>
           <p:nvPr/>
         </p:nvSpPr>
         <p:spPr>
           <a:xfrm>
-            <a:off x="1042416" y="5047488"/>
-            <a:ext cx="4645152" cy="384048"/>
+            <a:off x="6492240" y="2871216"/>
+            <a:ext cx="4645152" cy="658368"/>
           </a:xfrm>
           <a:prstGeom prst="rect">
             <a:avLst/>
@@ -21971,14 +21238,14 @@
       </p:sp>
       <p:sp>
         <p:nvSpPr>
-          <p:cNvPr id="61" name="mdpr:1-2-0772f8:toc-item-7:toc-item-7"/>
+          <p:cNvPr id="51" name="mdpr:1-2-0772f8:toc-item-7:toc-item-7"/>
           <p:cNvSpPr txBox="1"/>
           <p:nvPr/>
         </p:nvSpPr>
         <p:spPr>
           <a:xfrm>
-            <a:off x="1042416" y="5760720"/>
-            <a:ext cx="4645152" cy="384048"/>
+            <a:off x="6492240" y="3913632"/>
+            <a:ext cx="4645152" cy="658368"/>
           </a:xfrm>
           <a:prstGeom prst="rect">
             <a:avLst/>
@@ -22013,14 +21280,14 @@
       </p:sp>
       <p:sp>
         <p:nvSpPr>
-          <p:cNvPr id="62" name="mdpr:1-2-0772f8:toc-item-8:toc-item-8"/>
+          <p:cNvPr id="52" name="mdpr:1-2-0772f8:toc-item-8:toc-item-8"/>
           <p:cNvSpPr txBox="1"/>
           <p:nvPr/>
         </p:nvSpPr>
         <p:spPr>
           <a:xfrm>
-            <a:off x="6492240" y="1481328"/>
-            <a:ext cx="4645152" cy="384048"/>
+            <a:off x="6492240" y="4956048"/>
+            <a:ext cx="4645152" cy="658368"/>
           </a:xfrm>
           <a:prstGeom prst="rect">
             <a:avLst/>
@@ -22048,258 +21315,6 @@
                 <a:cs typeface="Pretendard" pitchFamily="34" charset="-120"/>
               </a:rPr>
               <a:t>08  Chart and Table Pair</a:t>
-            </a:r>
-            <a:endParaRPr lang="en-US" sz="1800" dirty="0"/>
-          </a:p>
-        </p:txBody>
-      </p:sp>
-      <p:sp>
-        <p:nvSpPr>
-          <p:cNvPr id="63" name="mdpr:1-2-0772f8:toc-item-9:toc-item-9"/>
-          <p:cNvSpPr txBox="1"/>
-          <p:nvPr/>
-        </p:nvSpPr>
-        <p:spPr>
-          <a:xfrm>
-            <a:off x="6492240" y="2194560"/>
-            <a:ext cx="4645152" cy="384048"/>
-          </a:xfrm>
-          <a:prstGeom prst="rect">
-            <a:avLst/>
-          </a:prstGeom>
-          <a:noFill/>
-          <a:ln/>
-        </p:spPr>
-        <p:txBody>
-          <a:bodyPr wrap="square" lIns="0" tIns="25400" rIns="25400" bIns="0" rtlCol="0" anchor="ctr"/>
-          <a:lstStyle/>
-          <a:p>
-            <a:pPr algn="ctr" indent="0" marL="0">
-              <a:lnSpc>
-                <a:spcPct val="120000"/>
-              </a:lnSpc>
-              <a:buNone/>
-            </a:pPr>
-            <a:r>
-              <a:rPr lang="en-US" sz="1800" dirty="0">
-                <a:solidFill>
-                  <a:srgbClr val="111111"/>
-                </a:solidFill>
-                <a:latin typeface="Pretendard" pitchFamily="34" charset="0"/>
-                <a:ea typeface="Pretendard" pitchFamily="34" charset="-122"/>
-                <a:cs typeface="Pretendard" pitchFamily="34" charset="-120"/>
-              </a:rPr>
-              <a:t>09  Editable Proof Objects</a:t>
-            </a:r>
-            <a:endParaRPr lang="en-US" sz="1800" dirty="0"/>
-          </a:p>
-        </p:txBody>
-      </p:sp>
-      <p:sp>
-        <p:nvSpPr>
-          <p:cNvPr id="64" name="mdpr:1-2-0772f8:toc-item-10:toc-item-10"/>
-          <p:cNvSpPr txBox="1"/>
-          <p:nvPr/>
-        </p:nvSpPr>
-        <p:spPr>
-          <a:xfrm>
-            <a:off x="6492240" y="2907792"/>
-            <a:ext cx="4645152" cy="384048"/>
-          </a:xfrm>
-          <a:prstGeom prst="rect">
-            <a:avLst/>
-          </a:prstGeom>
-          <a:noFill/>
-          <a:ln/>
-        </p:spPr>
-        <p:txBody>
-          <a:bodyPr wrap="square" lIns="0" tIns="25400" rIns="25400" bIns="0" rtlCol="0" anchor="ctr"/>
-          <a:lstStyle/>
-          <a:p>
-            <a:pPr algn="ctr" indent="0" marL="0">
-              <a:lnSpc>
-                <a:spcPct val="120000"/>
-              </a:lnSpc>
-              <a:buNone/>
-            </a:pPr>
-            <a:r>
-              <a:rPr lang="en-US" sz="1800" dirty="0">
-                <a:solidFill>
-                  <a:srgbClr val="111111"/>
-                </a:solidFill>
-                <a:latin typeface="Pretendard" pitchFamily="34" charset="0"/>
-                <a:ea typeface="Pretendard" pitchFamily="34" charset="-122"/>
-                <a:cs typeface="Pretendard" pitchFamily="34" charset="-120"/>
-              </a:rPr>
-              <a:t>10  Object Shape Grammar</a:t>
-            </a:r>
-            <a:endParaRPr lang="en-US" sz="1800" dirty="0"/>
-          </a:p>
-        </p:txBody>
-      </p:sp>
-      <p:sp>
-        <p:nvSpPr>
-          <p:cNvPr id="65" name="mdpr:1-2-0772f8:toc-item-11:toc-item-11"/>
-          <p:cNvSpPr txBox="1"/>
-          <p:nvPr/>
-        </p:nvSpPr>
-        <p:spPr>
-          <a:xfrm>
-            <a:off x="6492240" y="3621024"/>
-            <a:ext cx="4645152" cy="384048"/>
-          </a:xfrm>
-          <a:prstGeom prst="rect">
-            <a:avLst/>
-          </a:prstGeom>
-          <a:noFill/>
-          <a:ln/>
-        </p:spPr>
-        <p:txBody>
-          <a:bodyPr wrap="square" lIns="0" tIns="25400" rIns="25400" bIns="0" rtlCol="0" anchor="ctr"/>
-          <a:lstStyle/>
-          <a:p>
-            <a:pPr algn="ctr" indent="0" marL="0">
-              <a:lnSpc>
-                <a:spcPct val="120000"/>
-              </a:lnSpc>
-              <a:buNone/>
-            </a:pPr>
-            <a:r>
-              <a:rPr lang="en-US" sz="1800" dirty="0">
-                <a:solidFill>
-                  <a:srgbClr val="111111"/>
-                </a:solidFill>
-                <a:latin typeface="Pretendard" pitchFamily="34" charset="0"/>
-                <a:ea typeface="Pretendard" pitchFamily="34" charset="-122"/>
-                <a:cs typeface="Pretendard" pitchFamily="34" charset="-120"/>
-              </a:rPr>
-              <a:t>11  Icon and Text Aside</a:t>
-            </a:r>
-            <a:endParaRPr lang="en-US" sz="1800" dirty="0"/>
-          </a:p>
-        </p:txBody>
-      </p:sp>
-      <p:sp>
-        <p:nvSpPr>
-          <p:cNvPr id="66" name="mdpr:1-2-0772f8:toc-item-12:toc-item-12"/>
-          <p:cNvSpPr txBox="1"/>
-          <p:nvPr/>
-        </p:nvSpPr>
-        <p:spPr>
-          <a:xfrm>
-            <a:off x="6492240" y="4334256"/>
-            <a:ext cx="4645152" cy="384048"/>
-          </a:xfrm>
-          <a:prstGeom prst="rect">
-            <a:avLst/>
-          </a:prstGeom>
-          <a:noFill/>
-          <a:ln/>
-        </p:spPr>
-        <p:txBody>
-          <a:bodyPr wrap="square" lIns="0" tIns="25400" rIns="25400" bIns="0" rtlCol="0" anchor="ctr"/>
-          <a:lstStyle/>
-          <a:p>
-            <a:pPr algn="ctr" indent="0" marL="0">
-              <a:lnSpc>
-                <a:spcPct val="120000"/>
-              </a:lnSpc>
-              <a:buNone/>
-            </a:pPr>
-            <a:r>
-              <a:rPr lang="en-US" sz="1800" dirty="0">
-                <a:solidFill>
-                  <a:srgbClr val="111111"/>
-                </a:solidFill>
-                <a:latin typeface="Pretendard" pitchFamily="34" charset="0"/>
-                <a:ea typeface="Pretendard" pitchFamily="34" charset="-122"/>
-                <a:cs typeface="Pretendard" pitchFamily="34" charset="-120"/>
-              </a:rPr>
-              <a:t>12  Overflow Guard</a:t>
-            </a:r>
-            <a:endParaRPr lang="en-US" sz="1800" dirty="0"/>
-          </a:p>
-        </p:txBody>
-      </p:sp>
-      <p:sp>
-        <p:nvSpPr>
-          <p:cNvPr id="67" name="mdpr:1-2-0772f8:toc-item-13:toc-item-13"/>
-          <p:cNvSpPr txBox="1"/>
-          <p:nvPr/>
-        </p:nvSpPr>
-        <p:spPr>
-          <a:xfrm>
-            <a:off x="6492240" y="5047488"/>
-            <a:ext cx="4645152" cy="384048"/>
-          </a:xfrm>
-          <a:prstGeom prst="rect">
-            <a:avLst/>
-          </a:prstGeom>
-          <a:noFill/>
-          <a:ln/>
-        </p:spPr>
-        <p:txBody>
-          <a:bodyPr wrap="square" lIns="0" tIns="25400" rIns="25400" bIns="0" rtlCol="0" anchor="ctr"/>
-          <a:lstStyle/>
-          <a:p>
-            <a:pPr algn="ctr" indent="0" marL="0">
-              <a:lnSpc>
-                <a:spcPct val="120000"/>
-              </a:lnSpc>
-              <a:buNone/>
-            </a:pPr>
-            <a:r>
-              <a:rPr lang="en-US" sz="1800" dirty="0">
-                <a:solidFill>
-                  <a:srgbClr val="111111"/>
-                </a:solidFill>
-                <a:latin typeface="Pretendard" pitchFamily="34" charset="0"/>
-                <a:ea typeface="Pretendard" pitchFamily="34" charset="-122"/>
-                <a:cs typeface="Pretendard" pitchFamily="34" charset="-120"/>
-              </a:rPr>
-              <a:t>13  Image Safe Frame</a:t>
-            </a:r>
-            <a:endParaRPr lang="en-US" sz="1800" dirty="0"/>
-          </a:p>
-        </p:txBody>
-      </p:sp>
-      <p:sp>
-        <p:nvSpPr>
-          <p:cNvPr id="68" name="mdpr:1-2-0772f8:toc-item-14:toc-item-14"/>
-          <p:cNvSpPr txBox="1"/>
-          <p:nvPr/>
-        </p:nvSpPr>
-        <p:spPr>
-          <a:xfrm>
-            <a:off x="6492240" y="5760720"/>
-            <a:ext cx="4645152" cy="384048"/>
-          </a:xfrm>
-          <a:prstGeom prst="rect">
-            <a:avLst/>
-          </a:prstGeom>
-          <a:noFill/>
-          <a:ln/>
-        </p:spPr>
-        <p:txBody>
-          <a:bodyPr wrap="square" lIns="0" tIns="25400" rIns="25400" bIns="0" rtlCol="0" anchor="ctr"/>
-          <a:lstStyle/>
-          <a:p>
-            <a:pPr algn="ctr" indent="0" marL="0">
-              <a:lnSpc>
-                <a:spcPct val="120000"/>
-              </a:lnSpc>
-              <a:buNone/>
-            </a:pPr>
-            <a:r>
-              <a:rPr lang="en-US" sz="1800" dirty="0">
-                <a:solidFill>
-                  <a:srgbClr val="111111"/>
-                </a:solidFill>
-                <a:latin typeface="Pretendard" pitchFamily="34" charset="0"/>
-                <a:ea typeface="Pretendard" pitchFamily="34" charset="-122"/>
-                <a:cs typeface="Pretendard" pitchFamily="34" charset="-120"/>
-              </a:rPr>
-              <a:t>14  Mixed Object Packing</a:t>
             </a:r>
             <a:endParaRPr lang="en-US" sz="1800" dirty="0"/>
           </a:p>
@@ -23213,8 +22228,8 @@
         </p:nvSpPr>
         <p:spPr>
           <a:xfrm>
-            <a:off x="731520" y="1207008"/>
-            <a:ext cx="1325880" cy="54864"/>
+            <a:off x="914400" y="1463040"/>
+            <a:ext cx="10241280" cy="73152"/>
           </a:xfrm>
           <a:prstGeom prst="rect">
             <a:avLst/>
@@ -23234,61 +22249,7 @@
       </p:sp>
       <p:sp>
         <p:nvSpPr>
-          <p:cNvPr id="37" name="Shape 35"/>
-          <p:cNvSpPr/>
-          <p:nvPr/>
-        </p:nvSpPr>
-        <p:spPr>
-          <a:xfrm>
-            <a:off x="822960" y="1554480"/>
-            <a:ext cx="4937760" cy="73152"/>
-          </a:xfrm>
-          <a:prstGeom prst="rect">
-            <a:avLst/>
-          </a:prstGeom>
-          <a:solidFill>
-            <a:srgbClr val="0F766E"/>
-          </a:solidFill>
-          <a:ln w="12700">
-            <a:solidFill>
-              <a:srgbClr val="0F766E">
-                <a:alpha val="0"/>
-              </a:srgbClr>
-            </a:solidFill>
-            <a:prstDash val="solid"/>
-          </a:ln>
-        </p:spPr>
-      </p:sp>
-      <p:sp>
-        <p:nvSpPr>
-          <p:cNvPr id="38" name="Shape 36"/>
-          <p:cNvSpPr/>
-          <p:nvPr/>
-        </p:nvSpPr>
-        <p:spPr>
-          <a:xfrm>
-            <a:off x="6400800" y="1554480"/>
-            <a:ext cx="4937760" cy="73152"/>
-          </a:xfrm>
-          <a:prstGeom prst="rect">
-            <a:avLst/>
-          </a:prstGeom>
-          <a:solidFill>
-            <a:srgbClr val="0F766E"/>
-          </a:solidFill>
-          <a:ln w="12700">
-            <a:solidFill>
-              <a:srgbClr val="0F766E">
-                <a:alpha val="0"/>
-              </a:srgbClr>
-            </a:solidFill>
-            <a:prstDash val="solid"/>
-          </a:ln>
-        </p:spPr>
-      </p:sp>
-      <p:sp>
-        <p:nvSpPr>
-          <p:cNvPr id="39" name="mdpr:2-2-4f71ba:title:__title:2-2-4f71ba"/>
+          <p:cNvPr id="37" name="mdpr:2-2-4f71ba:title:__title:2-2-4f71ba"/>
           <p:cNvSpPr txBox="1"/>
           <p:nvPr/>
         </p:nvSpPr>
@@ -23322,7 +22283,24 @@
                 <a:ea typeface="Pretendard" pitchFamily="34" charset="-122"/>
                 <a:cs typeface="Pretendard" pitchFamily="34" charset="-120"/>
               </a:rPr>
-              <a:t>Object Shape Grammar (Cont. 2/2)</a:t>
+              <a:t>Object Shape Grammar</a:t>
+            </a:r>
+            <a:pPr algn="ctr" indent="0" marL="0">
+              <a:lnSpc>
+                <a:spcPct val="120000"/>
+              </a:lnSpc>
+              <a:buNone/>
+            </a:pPr>
+            <a:r>
+              <a:rPr lang="en-US" sz="2000" dirty="0">
+                <a:solidFill>
+                  <a:srgbClr val="919191"/>
+                </a:solidFill>
+                <a:latin typeface="Pretendard" pitchFamily="34" charset="0"/>
+                <a:ea typeface="Pretendard" pitchFamily="34" charset="-122"/>
+                <a:cs typeface="Pretendard" pitchFamily="34" charset="-120"/>
+              </a:rPr>
+              <a:t> (Cont. 2/2)</a:t>
             </a:r>
             <a:endParaRPr lang="en-US" sz="3400" dirty="0"/>
           </a:p>
@@ -23330,14 +22308,14 @@
       </p:sp>
       <p:sp>
         <p:nvSpPr>
-          <p:cNvPr id="40" name="mdpr:2-2-4f71ba:left:block-27-chunk-2"/>
+          <p:cNvPr id="38" name="mdpr:2-2-4f71ba:body:block-27-chunk-2"/>
           <p:cNvSpPr txBox="1"/>
           <p:nvPr/>
         </p:nvSpPr>
         <p:spPr>
           <a:xfrm>
-            <a:off x="896112" y="1664208"/>
-            <a:ext cx="4791456" cy="4169664"/>
+            <a:off x="987552" y="1572768"/>
+            <a:ext cx="10094976" cy="4261104"/>
           </a:xfrm>
           <a:prstGeom prst="rect">
             <a:avLst/>
@@ -23385,28 +22363,6 @@
             </a:r>
             <a:endParaRPr lang="en-US" sz="2200" dirty="0"/>
           </a:p>
-        </p:txBody>
-      </p:sp>
-      <p:sp>
-        <p:nvSpPr>
-          <p:cNvPr id="41" name="mdpr:2-2-4f71ba:right:block-27-chunk-2"/>
-          <p:cNvSpPr txBox="1"/>
-          <p:nvPr/>
-        </p:nvSpPr>
-        <p:spPr>
-          <a:xfrm>
-            <a:off x="6473952" y="1664208"/>
-            <a:ext cx="4791456" cy="4169664"/>
-          </a:xfrm>
-          <a:prstGeom prst="rect">
-            <a:avLst/>
-          </a:prstGeom>
-          <a:noFill/>
-          <a:ln/>
-        </p:spPr>
-        <p:txBody>
-          <a:bodyPr wrap="square" lIns="0" tIns="25400" rIns="25400" bIns="0" rtlCol="0" anchor="t"/>
-          <a:lstStyle/>
           <a:p>
             <a:pPr algn="l" indent="0" marL="0">
               <a:lnSpc>
@@ -23425,6 +22381,9 @@
               </a:rPr>
               <a:t>- Rounded panel</a:t>
             </a:r>
+            <a:endParaRPr lang="en-US" sz="2200" dirty="0"/>
+          </a:p>
+          <a:p>
             <a:pPr algn="l" indent="0" marL="0">
               <a:lnSpc>
                 <a:spcPct val="120000"/>
@@ -24346,36 +23305,9 @@
           </a:ln>
         </p:spPr>
       </p:sp>
-      <p:sp>
-        <p:nvSpPr>
-          <p:cNvPr id="36" name="Shape 34"/>
-          <p:cNvSpPr/>
-          <p:nvPr/>
-        </p:nvSpPr>
-        <p:spPr>
-          <a:xfrm>
-            <a:off x="731520" y="1207008"/>
-            <a:ext cx="1325880" cy="54864"/>
-          </a:xfrm>
-          <a:prstGeom prst="rect">
-            <a:avLst/>
-          </a:prstGeom>
-          <a:solidFill>
-            <a:srgbClr val="0F766E"/>
-          </a:solidFill>
-          <a:ln w="12700">
-            <a:solidFill>
-              <a:srgbClr val="0F766E">
-                <a:alpha val="0"/>
-              </a:srgbClr>
-            </a:solidFill>
-            <a:prstDash val="solid"/>
-          </a:ln>
-        </p:spPr>
-      </p:sp>
       <p:pic>
         <p:nvPicPr>
-          <p:cNvPr id="37" name="Image 0" descr="preencoded.png">    </p:cNvPr>
+          <p:cNvPr id="36" name="Image 0" descr="preencoded.png">    </p:cNvPr>
           <p:cNvPicPr>
             <a:picLocks noChangeAspect="1"/>
           </p:cNvPicPr>
@@ -24405,7 +23337,7 @@
       </p:pic>
       <p:sp>
         <p:nvSpPr>
-          <p:cNvPr id="38" name="Shape 35"/>
+          <p:cNvPr id="37" name="Shape 34"/>
           <p:cNvSpPr/>
           <p:nvPr/>
         </p:nvSpPr>
@@ -24441,7 +23373,7 @@
       </p:sp>
       <p:pic>
         <p:nvPicPr>
-          <p:cNvPr id="39" name="Image 1" descr="preencoded.png">    </p:cNvPr>
+          <p:cNvPr id="38" name="Image 1" descr="preencoded.png">    </p:cNvPr>
           <p:cNvPicPr>
             <a:picLocks noChangeAspect="1"/>
           </p:cNvPicPr>
@@ -24471,7 +23403,7 @@
       </p:pic>
       <p:sp>
         <p:nvSpPr>
-          <p:cNvPr id="40" name="Shape 36"/>
+          <p:cNvPr id="39" name="Shape 35"/>
           <p:cNvSpPr/>
           <p:nvPr/>
         </p:nvSpPr>
@@ -24507,7 +23439,7 @@
       </p:sp>
       <p:pic>
         <p:nvPicPr>
-          <p:cNvPr id="41" name="Image 2" descr="preencoded.png">    </p:cNvPr>
+          <p:cNvPr id="40" name="Image 2" descr="preencoded.png">    </p:cNvPr>
           <p:cNvPicPr>
             <a:picLocks noChangeAspect="1"/>
           </p:cNvPicPr>
@@ -24537,7 +23469,7 @@
       </p:pic>
       <p:sp>
         <p:nvSpPr>
-          <p:cNvPr id="42" name="Shape 37"/>
+          <p:cNvPr id="41" name="Shape 36"/>
           <p:cNvSpPr/>
           <p:nvPr/>
         </p:nvSpPr>
@@ -24573,7 +23505,7 @@
       </p:sp>
       <p:pic>
         <p:nvPicPr>
-          <p:cNvPr id="43" name="Image 3" descr="preencoded.png">    </p:cNvPr>
+          <p:cNvPr id="42" name="Image 3" descr="preencoded.png">    </p:cNvPr>
           <p:cNvPicPr>
             <a:picLocks noChangeAspect="1"/>
           </p:cNvPicPr>
@@ -24603,7 +23535,7 @@
       </p:pic>
       <p:sp>
         <p:nvSpPr>
-          <p:cNvPr id="44" name="Shape 38"/>
+          <p:cNvPr id="43" name="Shape 37"/>
           <p:cNvSpPr/>
           <p:nvPr/>
         </p:nvSpPr>
@@ -24639,7 +23571,7 @@
       </p:sp>
       <p:sp>
         <p:nvSpPr>
-          <p:cNvPr id="45" name="Shape 39"/>
+          <p:cNvPr id="44" name="Shape 38"/>
           <p:cNvSpPr/>
           <p:nvPr/>
         </p:nvSpPr>
@@ -24666,7 +23598,7 @@
       </p:sp>
       <p:sp>
         <p:nvSpPr>
-          <p:cNvPr id="46" name="Shape 40"/>
+          <p:cNvPr id="45" name="Shape 39"/>
           <p:cNvSpPr/>
           <p:nvPr/>
         </p:nvSpPr>
@@ -24693,7 +23625,7 @@
       </p:sp>
       <p:sp>
         <p:nvSpPr>
-          <p:cNvPr id="47" name="Shape 41"/>
+          <p:cNvPr id="46" name="Shape 40"/>
           <p:cNvSpPr/>
           <p:nvPr/>
         </p:nvSpPr>
@@ -24720,7 +23652,7 @@
       </p:sp>
       <p:sp>
         <p:nvSpPr>
-          <p:cNvPr id="48" name="Shape 42"/>
+          <p:cNvPr id="47" name="Shape 41"/>
           <p:cNvSpPr/>
           <p:nvPr/>
         </p:nvSpPr>
@@ -24747,7 +23679,7 @@
       </p:sp>
       <p:sp>
         <p:nvSpPr>
-          <p:cNvPr id="49" name="mdpr:icon-and-text-aside-8429fc:title:__title:icon-and-text-aside-8429fc"/>
+          <p:cNvPr id="48" name="mdpr:icon-and-text-aside-8429fc:title:__title:icon-and-text-aside-8429fc"/>
           <p:cNvSpPr txBox="1"/>
           <p:nvPr/>
         </p:nvSpPr>
@@ -24789,7 +23721,7 @@
       </p:sp>
       <p:sp>
         <p:nvSpPr>
-          <p:cNvPr id="50" name="mdpr:icon-and-text-aside-8429fc:item-1:block-29"/>
+          <p:cNvPr id="49" name="mdpr:icon-and-text-aside-8429fc:item-1:block-29"/>
           <p:cNvSpPr txBox="1"/>
           <p:nvPr/>
         </p:nvSpPr>
@@ -24848,7 +23780,7 @@
       </p:sp>
       <p:sp>
         <p:nvSpPr>
-          <p:cNvPr id="51" name="mdpr:icon-and-text-aside-8429fc:item-2:block-29"/>
+          <p:cNvPr id="50" name="mdpr:icon-and-text-aside-8429fc:item-2:block-29"/>
           <p:cNvSpPr txBox="1"/>
           <p:nvPr/>
         </p:nvSpPr>
@@ -24907,7 +23839,7 @@
       </p:sp>
       <p:sp>
         <p:nvSpPr>
-          <p:cNvPr id="52" name="mdpr:icon-and-text-aside-8429fc:item-3:block-29"/>
+          <p:cNvPr id="51" name="mdpr:icon-and-text-aside-8429fc:item-3:block-29"/>
           <p:cNvSpPr txBox="1"/>
           <p:nvPr/>
         </p:nvSpPr>
@@ -24966,7 +23898,7 @@
       </p:sp>
       <p:sp>
         <p:nvSpPr>
-          <p:cNvPr id="53" name="mdpr:icon-and-text-aside-8429fc:item-4:block-29"/>
+          <p:cNvPr id="52" name="mdpr:icon-and-text-aside-8429fc:item-4:block-29"/>
           <p:cNvSpPr txBox="1"/>
           <p:nvPr/>
         </p:nvSpPr>
@@ -25923,36 +24855,9 @@
           </a:ln>
         </p:spPr>
       </p:sp>
-      <p:sp>
-        <p:nvSpPr>
-          <p:cNvPr id="36" name="Shape 34"/>
-          <p:cNvSpPr/>
-          <p:nvPr/>
-        </p:nvSpPr>
-        <p:spPr>
-          <a:xfrm>
-            <a:off x="731520" y="1207008"/>
-            <a:ext cx="1325880" cy="54864"/>
-          </a:xfrm>
-          <a:prstGeom prst="rect">
-            <a:avLst/>
-          </a:prstGeom>
-          <a:solidFill>
-            <a:srgbClr val="0F766E"/>
-          </a:solidFill>
-          <a:ln w="12700">
-            <a:solidFill>
-              <a:srgbClr val="0F766E">
-                <a:alpha val="0"/>
-              </a:srgbClr>
-            </a:solidFill>
-            <a:prstDash val="solid"/>
-          </a:ln>
-        </p:spPr>
-      </p:sp>
       <p:pic>
         <p:nvPicPr>
-          <p:cNvPr id="37" name="Image 0" descr="preencoded.png">    </p:cNvPr>
+          <p:cNvPr id="36" name="Image 0" descr="preencoded.png">    </p:cNvPr>
           <p:cNvPicPr>
             <a:picLocks noChangeAspect="1"/>
           </p:cNvPicPr>
@@ -25982,7 +24887,7 @@
       </p:pic>
       <p:sp>
         <p:nvSpPr>
-          <p:cNvPr id="38" name="Shape 35"/>
+          <p:cNvPr id="37" name="Shape 34"/>
           <p:cNvSpPr/>
           <p:nvPr/>
         </p:nvSpPr>
@@ -26018,7 +24923,7 @@
       </p:sp>
       <p:pic>
         <p:nvPicPr>
-          <p:cNvPr id="39" name="Image 1" descr="preencoded.png">    </p:cNvPr>
+          <p:cNvPr id="38" name="Image 1" descr="preencoded.png">    </p:cNvPr>
           <p:cNvPicPr>
             <a:picLocks noChangeAspect="1"/>
           </p:cNvPicPr>
@@ -26048,7 +24953,7 @@
       </p:pic>
       <p:sp>
         <p:nvSpPr>
-          <p:cNvPr id="40" name="Shape 36"/>
+          <p:cNvPr id="39" name="Shape 35"/>
           <p:cNvSpPr/>
           <p:nvPr/>
         </p:nvSpPr>
@@ -26084,7 +24989,7 @@
       </p:sp>
       <p:pic>
         <p:nvPicPr>
-          <p:cNvPr id="41" name="Image 2" descr="preencoded.png">    </p:cNvPr>
+          <p:cNvPr id="40" name="Image 2" descr="preencoded.png">    </p:cNvPr>
           <p:cNvPicPr>
             <a:picLocks noChangeAspect="1"/>
           </p:cNvPicPr>
@@ -26114,7 +25019,7 @@
       </p:pic>
       <p:sp>
         <p:nvSpPr>
-          <p:cNvPr id="42" name="Shape 37"/>
+          <p:cNvPr id="41" name="Shape 36"/>
           <p:cNvSpPr/>
           <p:nvPr/>
         </p:nvSpPr>
@@ -26150,7 +25055,7 @@
       </p:sp>
       <p:pic>
         <p:nvPicPr>
-          <p:cNvPr id="43" name="Image 3" descr="preencoded.png">    </p:cNvPr>
+          <p:cNvPr id="42" name="Image 3" descr="preencoded.png">    </p:cNvPr>
           <p:cNvPicPr>
             <a:picLocks noChangeAspect="1"/>
           </p:cNvPicPr>
@@ -26180,7 +25085,7 @@
       </p:pic>
       <p:sp>
         <p:nvSpPr>
-          <p:cNvPr id="44" name="Shape 38"/>
+          <p:cNvPr id="43" name="Shape 37"/>
           <p:cNvSpPr/>
           <p:nvPr/>
         </p:nvSpPr>
@@ -26216,7 +25121,7 @@
       </p:sp>
       <p:sp>
         <p:nvSpPr>
-          <p:cNvPr id="45" name="Shape 39"/>
+          <p:cNvPr id="44" name="Shape 38"/>
           <p:cNvSpPr/>
           <p:nvPr/>
         </p:nvSpPr>
@@ -26243,7 +25148,7 @@
       </p:sp>
       <p:sp>
         <p:nvSpPr>
-          <p:cNvPr id="46" name="Shape 40"/>
+          <p:cNvPr id="45" name="Shape 39"/>
           <p:cNvSpPr/>
           <p:nvPr/>
         </p:nvSpPr>
@@ -26270,7 +25175,7 @@
       </p:sp>
       <p:sp>
         <p:nvSpPr>
-          <p:cNvPr id="47" name="Shape 41"/>
+          <p:cNvPr id="46" name="Shape 40"/>
           <p:cNvSpPr/>
           <p:nvPr/>
         </p:nvSpPr>
@@ -26297,7 +25202,7 @@
       </p:sp>
       <p:sp>
         <p:nvSpPr>
-          <p:cNvPr id="48" name="Shape 42"/>
+          <p:cNvPr id="47" name="Shape 41"/>
           <p:cNvSpPr/>
           <p:nvPr/>
         </p:nvSpPr>
@@ -26324,7 +25229,7 @@
       </p:sp>
       <p:sp>
         <p:nvSpPr>
-          <p:cNvPr id="49" name="mdpr:overflow-guard-f8d03e:title:__title:overflow-guard-f8d03e"/>
+          <p:cNvPr id="48" name="mdpr:overflow-guard-f8d03e:title:__title:overflow-guard-f8d03e"/>
           <p:cNvSpPr txBox="1"/>
           <p:nvPr/>
         </p:nvSpPr>
@@ -26366,7 +25271,7 @@
       </p:sp>
       <p:sp>
         <p:nvSpPr>
-          <p:cNvPr id="50" name="mdpr:overflow-guard-f8d03e:item-1:block-31"/>
+          <p:cNvPr id="49" name="mdpr:overflow-guard-f8d03e:item-1:block-31"/>
           <p:cNvSpPr txBox="1"/>
           <p:nvPr/>
         </p:nvSpPr>
@@ -26425,7 +25330,7 @@
       </p:sp>
       <p:sp>
         <p:nvSpPr>
-          <p:cNvPr id="51" name="mdpr:overflow-guard-f8d03e:item-2:block-31"/>
+          <p:cNvPr id="50" name="mdpr:overflow-guard-f8d03e:item-2:block-31"/>
           <p:cNvSpPr txBox="1"/>
           <p:nvPr/>
         </p:nvSpPr>
@@ -26484,7 +25389,7 @@
       </p:sp>
       <p:sp>
         <p:nvSpPr>
-          <p:cNvPr id="52" name="mdpr:overflow-guard-f8d03e:item-3:block-31"/>
+          <p:cNvPr id="51" name="mdpr:overflow-guard-f8d03e:item-3:block-31"/>
           <p:cNvSpPr txBox="1"/>
           <p:nvPr/>
         </p:nvSpPr>
@@ -26543,7 +25448,7 @@
       </p:sp>
       <p:sp>
         <p:nvSpPr>
-          <p:cNvPr id="53" name="mdpr:overflow-guard-f8d03e:item-4:block-31"/>
+          <p:cNvPr id="52" name="mdpr:overflow-guard-f8d03e:item-4:block-31"/>
           <p:cNvSpPr txBox="1"/>
           <p:nvPr/>
         </p:nvSpPr>
@@ -27500,36 +26405,9 @@
           </a:ln>
         </p:spPr>
       </p:sp>
-      <p:sp>
-        <p:nvSpPr>
-          <p:cNvPr id="36" name="Shape 34"/>
-          <p:cNvSpPr/>
-          <p:nvPr/>
-        </p:nvSpPr>
-        <p:spPr>
-          <a:xfrm>
-            <a:off x="731520" y="1207008"/>
-            <a:ext cx="1325880" cy="54864"/>
-          </a:xfrm>
-          <a:prstGeom prst="rect">
-            <a:avLst/>
-          </a:prstGeom>
-          <a:solidFill>
-            <a:srgbClr val="0F766E"/>
-          </a:solidFill>
-          <a:ln w="12700">
-            <a:solidFill>
-              <a:srgbClr val="0F766E">
-                <a:alpha val="0"/>
-              </a:srgbClr>
-            </a:solidFill>
-            <a:prstDash val="solid"/>
-          </a:ln>
-        </p:spPr>
-      </p:sp>
       <p:pic>
         <p:nvPicPr>
-          <p:cNvPr id="37" name="Image 0" descr="preencoded.png">    </p:cNvPr>
+          <p:cNvPr id="36" name="Image 0" descr="preencoded.png">    </p:cNvPr>
           <p:cNvPicPr>
             <a:picLocks noChangeAspect="1"/>
           </p:cNvPicPr>
@@ -27559,7 +26437,7 @@
       </p:pic>
       <p:sp>
         <p:nvSpPr>
-          <p:cNvPr id="38" name="Shape 35"/>
+          <p:cNvPr id="37" name="Shape 34"/>
           <p:cNvSpPr/>
           <p:nvPr/>
         </p:nvSpPr>
@@ -27595,7 +26473,7 @@
       </p:sp>
       <p:sp>
         <p:nvSpPr>
-          <p:cNvPr id="39" name="Shape 36"/>
+          <p:cNvPr id="38" name="Shape 35"/>
           <p:cNvSpPr/>
           <p:nvPr/>
         </p:nvSpPr>
@@ -27622,7 +26500,7 @@
       </p:sp>
       <p:sp>
         <p:nvSpPr>
-          <p:cNvPr id="40" name="mdpr:image-safe-frame-d4d6a4:title:__title:image-safe-frame-d4d6a4"/>
+          <p:cNvPr id="39" name="mdpr:image-safe-frame-d4d6a4:title:__title:image-safe-frame-d4d6a4"/>
           <p:cNvSpPr txBox="1"/>
           <p:nvPr/>
         </p:nvSpPr>
@@ -27664,7 +26542,7 @@
       </p:sp>
       <p:sp>
         <p:nvSpPr>
-          <p:cNvPr id="41" name="mdpr:image-safe-frame-d4d6a4:body:block-33-block-33-block-33"/>
+          <p:cNvPr id="40" name="mdpr:image-safe-frame-d4d6a4:body:block-33-block-33-block-33"/>
           <p:cNvSpPr txBox="1"/>
           <p:nvPr/>
         </p:nvSpPr>
@@ -27803,7 +26681,7 @@
       </p:sp>
       <p:pic>
         <p:nvPicPr>
-          <p:cNvPr id="42" name="mdpr:image-safe-frame-d4d6a4:image-1:block-34" descr="{&quot;mdpr&quot;:{&quot;slideId&quot;:&quot;image-safe-frame-d4d6a4&quot;,&quot;layoutSlideId&quot;:&quot;layout-image-safe-frame-d4d6a4&quot;,&quot;regionId&quot;:&quot;image-1&quot;,&quot;blockIds&quot;:[&quot;block-34&quot;],&quot;objectKind&quot;:&quot;native-image&quot;,&quot;role&quot;:&quot;image&quot;,&quot;editable&quot;:false}}">    </p:cNvPr>
+          <p:cNvPr id="41" name="mdpr:image-safe-frame-d4d6a4:image-1:block-34" descr="{&quot;mdpr&quot;:{&quot;slideId&quot;:&quot;image-safe-frame-d4d6a4&quot;,&quot;layoutSlideId&quot;:&quot;layout-image-safe-frame-d4d6a4&quot;,&quot;regionId&quot;:&quot;image-1&quot;,&quot;blockIds&quot;:[&quot;block-34&quot;],&quot;objectKind&quot;:&quot;native-image&quot;,&quot;role&quot;:&quot;image&quot;,&quot;editable&quot;:false}}">    </p:cNvPr>
           <p:cNvPicPr>
             <a:picLocks noChangeAspect="1"/>
           </p:cNvPicPr>
@@ -28731,36 +27609,9 @@
           </a:ln>
         </p:spPr>
       </p:sp>
-      <p:sp>
-        <p:nvSpPr>
-          <p:cNvPr id="36" name="Shape 34"/>
-          <p:cNvSpPr/>
-          <p:nvPr/>
-        </p:nvSpPr>
-        <p:spPr>
-          <a:xfrm>
-            <a:off x="731520" y="1207008"/>
-            <a:ext cx="1325880" cy="54864"/>
-          </a:xfrm>
-          <a:prstGeom prst="rect">
-            <a:avLst/>
-          </a:prstGeom>
-          <a:solidFill>
-            <a:srgbClr val="0F766E"/>
-          </a:solidFill>
-          <a:ln w="12700">
-            <a:solidFill>
-              <a:srgbClr val="0F766E">
-                <a:alpha val="0"/>
-              </a:srgbClr>
-            </a:solidFill>
-            <a:prstDash val="solid"/>
-          </a:ln>
-        </p:spPr>
-      </p:sp>
       <p:pic>
         <p:nvPicPr>
-          <p:cNvPr id="37" name="Image 0" descr="preencoded.png">    </p:cNvPr>
+          <p:cNvPr id="36" name="Image 0" descr="preencoded.png">    </p:cNvPr>
           <p:cNvPicPr>
             <a:picLocks noChangeAspect="1"/>
           </p:cNvPicPr>
@@ -28790,7 +27641,7 @@
       </p:pic>
       <p:sp>
         <p:nvSpPr>
-          <p:cNvPr id="38" name="Shape 35"/>
+          <p:cNvPr id="37" name="Shape 34"/>
           <p:cNvSpPr/>
           <p:nvPr/>
         </p:nvSpPr>
@@ -28826,7 +27677,7 @@
       </p:sp>
       <p:pic>
         <p:nvPicPr>
-          <p:cNvPr id="39" name="Image 1" descr="preencoded.png">    </p:cNvPr>
+          <p:cNvPr id="38" name="Image 1" descr="preencoded.png">    </p:cNvPr>
           <p:cNvPicPr>
             <a:picLocks noChangeAspect="1"/>
           </p:cNvPicPr>
@@ -28856,7 +27707,7 @@
       </p:pic>
       <p:sp>
         <p:nvSpPr>
-          <p:cNvPr id="40" name="Shape 36"/>
+          <p:cNvPr id="39" name="Shape 35"/>
           <p:cNvSpPr/>
           <p:nvPr/>
         </p:nvSpPr>
@@ -28892,7 +27743,7 @@
       </p:sp>
       <p:pic>
         <p:nvPicPr>
-          <p:cNvPr id="41" name="Image 2" descr="preencoded.png">    </p:cNvPr>
+          <p:cNvPr id="40" name="Image 2" descr="preencoded.png">    </p:cNvPr>
           <p:cNvPicPr>
             <a:picLocks noChangeAspect="1"/>
           </p:cNvPicPr>
@@ -28922,7 +27773,7 @@
       </p:pic>
       <p:sp>
         <p:nvSpPr>
-          <p:cNvPr id="42" name="Shape 37"/>
+          <p:cNvPr id="41" name="Shape 36"/>
           <p:cNvSpPr/>
           <p:nvPr/>
         </p:nvSpPr>
@@ -28958,7 +27809,7 @@
       </p:sp>
       <p:sp>
         <p:nvSpPr>
-          <p:cNvPr id="43" name="Shape 38"/>
+          <p:cNvPr id="42" name="Shape 37"/>
           <p:cNvSpPr/>
           <p:nvPr/>
         </p:nvSpPr>
@@ -28985,7 +27836,7 @@
       </p:sp>
       <p:sp>
         <p:nvSpPr>
-          <p:cNvPr id="44" name="mdpr:mixed-object-packing-438299:title:__title:mixed-object-packing-438299"/>
+          <p:cNvPr id="43" name="mdpr:mixed-object-packing-438299:title:__title:mixed-object-packing-438299"/>
           <p:cNvSpPr txBox="1"/>
           <p:nvPr/>
         </p:nvSpPr>
@@ -29027,7 +27878,7 @@
       </p:sp>
       <p:graphicFrame>
         <p:nvGraphicFramePr>
-          <p:cNvPr id="45" name="Chart 0" descr=""/>
+          <p:cNvPr id="44" name="Chart 0" descr=""/>
           <p:cNvGraphicFramePr/>
           <p:nvPr/>
         </p:nvGraphicFramePr>
@@ -29485,7 +28336,7 @@
       </p:graphicFrame>
       <p:sp>
         <p:nvSpPr>
-          <p:cNvPr id="47" name="mdpr:mixed-object-packing-438299:body:block-36"/>
+          <p:cNvPr id="46" name="mdpr:mixed-object-packing-438299:body:block-36"/>
           <p:cNvSpPr txBox="1"/>
           <p:nvPr/>
         </p:nvSpPr>
@@ -29584,7 +28435,7 @@
       </p:sp>
       <p:pic>
         <p:nvPicPr>
-          <p:cNvPr id="48" name="mdpr:mixed-object-packing-438299:image-1:block-39" descr="{&quot;mdpr&quot;:{&quot;slideId&quot;:&quot;mixed-object-packing-438299&quot;,&quot;layoutSlideId&quot;:&quot;layout-mixed-object-packing-438299&quot;,&quot;regionId&quot;:&quot;image-1&quot;,&quot;blockIds&quot;:[&quot;block-39&quot;],&quot;objectKind&quot;:&quot;native-image&quot;,&quot;role&quot;:&quot;image&quot;,&quot;editable&quot;:false}}">    </p:cNvPr>
+          <p:cNvPr id="47" name="mdpr:mixed-object-packing-438299:image-1:block-39" descr="{&quot;mdpr&quot;:{&quot;slideId&quot;:&quot;mixed-object-packing-438299&quot;,&quot;layoutSlideId&quot;:&quot;layout-mixed-object-packing-438299&quot;,&quot;regionId&quot;:&quot;image-1&quot;,&quot;blockIds&quot;:[&quot;block-39&quot;],&quot;objectKind&quot;:&quot;native-image&quot;,&quot;role&quot;:&quot;image&quot;,&quot;editable&quot;:false}}">    </p:cNvPr>
           <p:cNvPicPr>
             <a:picLocks noChangeAspect="1"/>
           </p:cNvPicPr>
@@ -30520,8 +29371,8 @@
         </p:nvSpPr>
         <p:spPr>
           <a:xfrm>
-            <a:off x="731520" y="1207008"/>
-            <a:ext cx="1325880" cy="54864"/>
+            <a:off x="822960" y="1938528"/>
+            <a:ext cx="73152" cy="2514600"/>
           </a:xfrm>
           <a:prstGeom prst="rect">
             <a:avLst/>
@@ -30539,222 +29390,22 @@
           </a:ln>
         </p:spPr>
       </p:sp>
-      <p:pic>
-        <p:nvPicPr>
-          <p:cNvPr id="37" name="Image 0" descr="preencoded.png">    </p:cNvPr>
-          <p:cNvPicPr>
-            <a:picLocks noChangeAspect="1"/>
-          </p:cNvPicPr>
-          <p:nvPr/>
-        </p:nvPicPr>
-        <p:blipFill>
-          <a:blip r:embed="rId1">
-            <a:extLst>
-              <a:ext uri="{96DAC541-7B7A-43D3-8B79-37D633B846F1}">
-                <asvg:svgBlip xmlns:asvg="http://schemas.microsoft.com/office/drawing/2016/SVG/main" r:embed="rId2"/>
-              </a:ext>
-            </a:extLst>
-          </a:blip>
-          <a:stretch>
-            <a:fillRect/>
-          </a:stretch>
-        </p:blipFill>
-        <p:spPr>
-          <a:xfrm>
-            <a:off x="914400" y="1865376"/>
-            <a:ext cx="10241280" cy="1024128"/>
+      <p:sp>
+        <p:nvSpPr>
+          <p:cNvPr id="37" name="Shape 35"/>
+          <p:cNvSpPr/>
+          <p:nvPr/>
+        </p:nvSpPr>
+        <p:spPr>
+          <a:xfrm>
+            <a:off x="4343400" y="1938528"/>
+            <a:ext cx="73152" cy="2514600"/>
           </a:xfrm>
           <a:prstGeom prst="rect">
             <a:avLst/>
           </a:prstGeom>
-        </p:spPr>
-      </p:pic>
-      <p:sp>
-        <p:nvSpPr>
-          <p:cNvPr id="38" name="Shape 35"/>
-          <p:cNvSpPr/>
-          <p:nvPr/>
-        </p:nvSpPr>
-        <p:spPr>
-          <a:xfrm>
-            <a:off x="914400" y="1865376"/>
-            <a:ext cx="10241280" cy="1024128"/>
-          </a:xfrm>
-          <a:prstGeom prst="rect">
-            <a:avLst/>
-          </a:prstGeom>
           <a:solidFill>
-            <a:srgbClr val="FFFFFF">
-              <a:alpha val="0"/>
-            </a:srgbClr>
-          </a:solidFill>
-          <a:ln w="12700">
-            <a:solidFill>
-              <a:srgbClr val="CBD5E1">
-                <a:alpha val="0"/>
-              </a:srgbClr>
-            </a:solidFill>
-            <a:prstDash val="solid"/>
-          </a:ln>
-          <a:effectLst>
-            <a:outerShdw sx="100000" sy="100000" kx="0" ky="0" algn="bl" rotWithShape="0" blurRad="12700" dist="50800" dir="2700000">
-              <a:srgbClr val="000000">
-                <a:alpha val="8000"/>
-              </a:srgbClr>
-            </a:outerShdw>
-          </a:effectLst>
-        </p:spPr>
-      </p:sp>
-      <p:pic>
-        <p:nvPicPr>
-          <p:cNvPr id="39" name="Image 1" descr="preencoded.png">    </p:cNvPr>
-          <p:cNvPicPr>
-            <a:picLocks noChangeAspect="1"/>
-          </p:cNvPicPr>
-          <p:nvPr/>
-        </p:nvPicPr>
-        <p:blipFill>
-          <a:blip r:embed="rId3">
-            <a:extLst>
-              <a:ext uri="{96DAC541-7B7A-43D3-8B79-37D633B846F1}">
-                <asvg:svgBlip xmlns:asvg="http://schemas.microsoft.com/office/drawing/2016/SVG/main" r:embed="rId4"/>
-              </a:ext>
-            </a:extLst>
-          </a:blip>
-          <a:stretch>
-            <a:fillRect/>
-          </a:stretch>
-        </p:blipFill>
-        <p:spPr>
-          <a:xfrm>
-            <a:off x="914400" y="3191256"/>
-            <a:ext cx="10241280" cy="1024128"/>
-          </a:xfrm>
-          <a:prstGeom prst="rect">
-            <a:avLst/>
-          </a:prstGeom>
-        </p:spPr>
-      </p:pic>
-      <p:sp>
-        <p:nvSpPr>
-          <p:cNvPr id="40" name="Shape 36"/>
-          <p:cNvSpPr/>
-          <p:nvPr/>
-        </p:nvSpPr>
-        <p:spPr>
-          <a:xfrm>
-            <a:off x="914400" y="3191256"/>
-            <a:ext cx="10241280" cy="1024128"/>
-          </a:xfrm>
-          <a:prstGeom prst="rect">
-            <a:avLst/>
-          </a:prstGeom>
-          <a:solidFill>
-            <a:srgbClr val="FFFFFF">
-              <a:alpha val="0"/>
-            </a:srgbClr>
-          </a:solidFill>
-          <a:ln w="12700">
-            <a:solidFill>
-              <a:srgbClr val="CBD5E1">
-                <a:alpha val="0"/>
-              </a:srgbClr>
-            </a:solidFill>
-            <a:prstDash val="solid"/>
-          </a:ln>
-          <a:effectLst>
-            <a:outerShdw sx="100000" sy="100000" kx="0" ky="0" algn="bl" rotWithShape="0" blurRad="12700" dist="50800" dir="2700000">
-              <a:srgbClr val="000000">
-                <a:alpha val="8000"/>
-              </a:srgbClr>
-            </a:outerShdw>
-          </a:effectLst>
-        </p:spPr>
-      </p:sp>
-      <p:pic>
-        <p:nvPicPr>
-          <p:cNvPr id="41" name="Image 2" descr="preencoded.png">    </p:cNvPr>
-          <p:cNvPicPr>
-            <a:picLocks noChangeAspect="1"/>
-          </p:cNvPicPr>
-          <p:nvPr/>
-        </p:nvPicPr>
-        <p:blipFill>
-          <a:blip r:embed="rId5">
-            <a:extLst>
-              <a:ext uri="{96DAC541-7B7A-43D3-8B79-37D633B846F1}">
-                <asvg:svgBlip xmlns:asvg="http://schemas.microsoft.com/office/drawing/2016/SVG/main" r:embed="rId6"/>
-              </a:ext>
-            </a:extLst>
-          </a:blip>
-          <a:stretch>
-            <a:fillRect/>
-          </a:stretch>
-        </p:blipFill>
-        <p:spPr>
-          <a:xfrm>
-            <a:off x="914400" y="4507992"/>
-            <a:ext cx="10241280" cy="1024128"/>
-          </a:xfrm>
-          <a:prstGeom prst="rect">
-            <a:avLst/>
-          </a:prstGeom>
-        </p:spPr>
-      </p:pic>
-      <p:sp>
-        <p:nvSpPr>
-          <p:cNvPr id="42" name="Shape 37"/>
-          <p:cNvSpPr/>
-          <p:nvPr/>
-        </p:nvSpPr>
-        <p:spPr>
-          <a:xfrm>
-            <a:off x="914400" y="4507992"/>
-            <a:ext cx="10241280" cy="1024128"/>
-          </a:xfrm>
-          <a:prstGeom prst="rect">
-            <a:avLst/>
-          </a:prstGeom>
-          <a:solidFill>
-            <a:srgbClr val="FFFFFF">
-              <a:alpha val="0"/>
-            </a:srgbClr>
-          </a:solidFill>
-          <a:ln w="12700">
-            <a:solidFill>
-              <a:srgbClr val="CBD5E1">
-                <a:alpha val="0"/>
-              </a:srgbClr>
-            </a:solidFill>
-            <a:prstDash val="solid"/>
-          </a:ln>
-          <a:effectLst>
-            <a:outerShdw sx="100000" sy="100000" kx="0" ky="0" algn="bl" rotWithShape="0" blurRad="12700" dist="50800" dir="2700000">
-              <a:srgbClr val="000000">
-                <a:alpha val="8000"/>
-              </a:srgbClr>
-            </a:outerShdw>
-          </a:effectLst>
-        </p:spPr>
-      </p:sp>
-      <p:sp>
-        <p:nvSpPr>
-          <p:cNvPr id="43" name="Shape 38"/>
-          <p:cNvSpPr/>
-          <p:nvPr/>
-        </p:nvSpPr>
-        <p:spPr>
-          <a:xfrm>
-            <a:off x="786384" y="1956816"/>
-            <a:ext cx="32004" cy="3483864"/>
-          </a:xfrm>
-          <a:prstGeom prst="rect">
-            <a:avLst/>
-          </a:prstGeom>
-          <a:solidFill>
-            <a:srgbClr val="F0AA11">
-              <a:alpha val="80000"/>
-            </a:srgbClr>
+            <a:srgbClr val="F0AA11"/>
           </a:solidFill>
           <a:ln w="12700">
             <a:solidFill>
@@ -30768,14 +29419,14 @@
       </p:sp>
       <p:sp>
         <p:nvSpPr>
-          <p:cNvPr id="44" name="Shape 39"/>
-          <p:cNvSpPr/>
-          <p:nvPr/>
-        </p:nvSpPr>
-        <p:spPr>
-          <a:xfrm>
-            <a:off x="914400" y="1865376"/>
-            <a:ext cx="73152" cy="1024128"/>
+          <p:cNvPr id="38" name="Shape 36"/>
+          <p:cNvSpPr/>
+          <p:nvPr/>
+        </p:nvSpPr>
+        <p:spPr>
+          <a:xfrm>
+            <a:off x="7863840" y="1938528"/>
+            <a:ext cx="73152" cy="2514600"/>
           </a:xfrm>
           <a:prstGeom prst="rect">
             <a:avLst/>
@@ -30795,61 +29446,7 @@
       </p:sp>
       <p:sp>
         <p:nvSpPr>
-          <p:cNvPr id="45" name="Shape 40"/>
-          <p:cNvSpPr/>
-          <p:nvPr/>
-        </p:nvSpPr>
-        <p:spPr>
-          <a:xfrm>
-            <a:off x="914400" y="3191256"/>
-            <a:ext cx="73152" cy="1024128"/>
-          </a:xfrm>
-          <a:prstGeom prst="rect">
-            <a:avLst/>
-          </a:prstGeom>
-          <a:solidFill>
-            <a:srgbClr val="F0AA11"/>
-          </a:solidFill>
-          <a:ln w="12700">
-            <a:solidFill>
-              <a:srgbClr val="F0AA11">
-                <a:alpha val="0"/>
-              </a:srgbClr>
-            </a:solidFill>
-            <a:prstDash val="solid"/>
-          </a:ln>
-        </p:spPr>
-      </p:sp>
-      <p:sp>
-        <p:nvSpPr>
-          <p:cNvPr id="46" name="Shape 41"/>
-          <p:cNvSpPr/>
-          <p:nvPr/>
-        </p:nvSpPr>
-        <p:spPr>
-          <a:xfrm>
-            <a:off x="914400" y="4507992"/>
-            <a:ext cx="73152" cy="1024128"/>
-          </a:xfrm>
-          <a:prstGeom prst="rect">
-            <a:avLst/>
-          </a:prstGeom>
-          <a:solidFill>
-            <a:srgbClr val="0F766E"/>
-          </a:solidFill>
-          <a:ln w="12700">
-            <a:solidFill>
-              <a:srgbClr val="0F766E">
-                <a:alpha val="0"/>
-              </a:srgbClr>
-            </a:solidFill>
-            <a:prstDash val="solid"/>
-          </a:ln>
-        </p:spPr>
-      </p:sp>
-      <p:sp>
-        <p:nvSpPr>
-          <p:cNvPr id="47" name="mdpr:actions-output-review-326e07:title:__title:actions-output-review-326e07"/>
+          <p:cNvPr id="39" name="mdpr:actions-output-review-326e07:title:__title:actions-output-review-326e07"/>
           <p:cNvSpPr txBox="1"/>
           <p:nvPr/>
         </p:nvSpPr>
@@ -30891,14 +29488,14 @@
       </p:sp>
       <p:sp>
         <p:nvSpPr>
-          <p:cNvPr id="48" name="mdpr:actions-output-review-326e07:item-1:block-41"/>
+          <p:cNvPr id="40" name="mdpr:actions-output-review-326e07:item-1:block-41"/>
           <p:cNvSpPr txBox="1"/>
           <p:nvPr/>
         </p:nvSpPr>
         <p:spPr>
           <a:xfrm>
-            <a:off x="1133856" y="1957548"/>
-            <a:ext cx="9820656" cy="839785"/>
+            <a:off x="1042416" y="2103120"/>
+            <a:ext cx="2825496" cy="2185416"/>
           </a:xfrm>
           <a:prstGeom prst="rect">
             <a:avLst/>
@@ -30950,14 +29547,14 @@
       </p:sp>
       <p:sp>
         <p:nvSpPr>
-          <p:cNvPr id="49" name="mdpr:actions-output-review-326e07:item-2:block-41"/>
+          <p:cNvPr id="41" name="mdpr:actions-output-review-326e07:item-2:block-41"/>
           <p:cNvSpPr txBox="1"/>
           <p:nvPr/>
         </p:nvSpPr>
         <p:spPr>
           <a:xfrm>
-            <a:off x="1133856" y="3283428"/>
-            <a:ext cx="9820656" cy="839785"/>
+            <a:off x="4562856" y="2103120"/>
+            <a:ext cx="2825496" cy="2185416"/>
           </a:xfrm>
           <a:prstGeom prst="rect">
             <a:avLst/>
@@ -31009,14 +29606,14 @@
       </p:sp>
       <p:sp>
         <p:nvSpPr>
-          <p:cNvPr id="50" name="mdpr:actions-output-review-326e07:item-3:block-41"/>
+          <p:cNvPr id="42" name="mdpr:actions-output-review-326e07:item-3:block-41"/>
           <p:cNvSpPr txBox="1"/>
           <p:nvPr/>
         </p:nvSpPr>
         <p:spPr>
           <a:xfrm>
-            <a:off x="1133856" y="4600164"/>
-            <a:ext cx="9820656" cy="839785"/>
+            <a:off x="8083296" y="2103120"/>
+            <a:ext cx="2825496" cy="2185416"/>
           </a:xfrm>
           <a:prstGeom prst="rect">
             <a:avLst/>
@@ -31974,8 +30571,8 @@
         </p:nvSpPr>
         <p:spPr>
           <a:xfrm>
-            <a:off x="731520" y="1207008"/>
-            <a:ext cx="1325880" cy="54864"/>
+            <a:off x="822960" y="1737360"/>
+            <a:ext cx="73152" cy="841248"/>
           </a:xfrm>
           <a:prstGeom prst="rect">
             <a:avLst/>
@@ -32001,8 +30598,35 @@
         </p:nvSpPr>
         <p:spPr>
           <a:xfrm>
-            <a:off x="822960" y="3099816"/>
-            <a:ext cx="10515600" cy="45720"/>
+            <a:off x="822960" y="2779776"/>
+            <a:ext cx="73152" cy="841248"/>
+          </a:xfrm>
+          <a:prstGeom prst="rect">
+            <a:avLst/>
+          </a:prstGeom>
+          <a:solidFill>
+            <a:srgbClr val="F0AA11"/>
+          </a:solidFill>
+          <a:ln w="12700">
+            <a:solidFill>
+              <a:srgbClr val="F0AA11">
+                <a:alpha val="0"/>
+              </a:srgbClr>
+            </a:solidFill>
+            <a:prstDash val="solid"/>
+          </a:ln>
+        </p:spPr>
+      </p:sp>
+      <p:sp>
+        <p:nvSpPr>
+          <p:cNvPr id="38" name="Shape 36"/>
+          <p:cNvSpPr/>
+          <p:nvPr/>
+        </p:nvSpPr>
+        <p:spPr>
+          <a:xfrm>
+            <a:off x="822960" y="3822192"/>
+            <a:ext cx="73152" cy="841248"/>
           </a:xfrm>
           <a:prstGeom prst="rect">
             <a:avLst/>
@@ -32022,14 +30646,14 @@
       </p:sp>
       <p:sp>
         <p:nvSpPr>
-          <p:cNvPr id="38" name="Shape 36"/>
-          <p:cNvSpPr/>
-          <p:nvPr/>
-        </p:nvSpPr>
-        <p:spPr>
-          <a:xfrm>
-            <a:off x="822960" y="4288536"/>
-            <a:ext cx="2011680" cy="45720"/>
+          <p:cNvPr id="39" name="Shape 37"/>
+          <p:cNvSpPr/>
+          <p:nvPr/>
+        </p:nvSpPr>
+        <p:spPr>
+          <a:xfrm>
+            <a:off x="822960" y="4864608"/>
+            <a:ext cx="73152" cy="841248"/>
           </a:xfrm>
           <a:prstGeom prst="rect">
             <a:avLst/>
@@ -32049,13 +30673,13 @@
       </p:sp>
       <p:sp>
         <p:nvSpPr>
-          <p:cNvPr id="39" name="Shape 37"/>
-          <p:cNvSpPr/>
-          <p:nvPr/>
-        </p:nvSpPr>
-        <p:spPr>
-          <a:xfrm>
-            <a:off x="822960" y="3300984"/>
+          <p:cNvPr id="40" name="Shape 38"/>
+          <p:cNvSpPr/>
+          <p:nvPr/>
+        </p:nvSpPr>
+        <p:spPr>
+          <a:xfrm>
+            <a:off x="6272784" y="1737360"/>
             <a:ext cx="73152" cy="841248"/>
           </a:xfrm>
           <a:prstGeom prst="rect">
@@ -32076,7 +30700,61 @@
       </p:sp>
       <p:sp>
         <p:nvSpPr>
-          <p:cNvPr id="40" name="mdpr:2-2-7bfb60:title:__title:2-2-7bfb60"/>
+          <p:cNvPr id="41" name="Shape 39"/>
+          <p:cNvSpPr/>
+          <p:nvPr/>
+        </p:nvSpPr>
+        <p:spPr>
+          <a:xfrm>
+            <a:off x="6272784" y="2779776"/>
+            <a:ext cx="73152" cy="841248"/>
+          </a:xfrm>
+          <a:prstGeom prst="rect">
+            <a:avLst/>
+          </a:prstGeom>
+          <a:solidFill>
+            <a:srgbClr val="F0AA11"/>
+          </a:solidFill>
+          <a:ln w="12700">
+            <a:solidFill>
+              <a:srgbClr val="F0AA11">
+                <a:alpha val="0"/>
+              </a:srgbClr>
+            </a:solidFill>
+            <a:prstDash val="solid"/>
+          </a:ln>
+        </p:spPr>
+      </p:sp>
+      <p:sp>
+        <p:nvSpPr>
+          <p:cNvPr id="42" name="Shape 40"/>
+          <p:cNvSpPr/>
+          <p:nvPr/>
+        </p:nvSpPr>
+        <p:spPr>
+          <a:xfrm>
+            <a:off x="6272784" y="3822192"/>
+            <a:ext cx="73152" cy="841248"/>
+          </a:xfrm>
+          <a:prstGeom prst="rect">
+            <a:avLst/>
+          </a:prstGeom>
+          <a:solidFill>
+            <a:srgbClr val="0F766E"/>
+          </a:solidFill>
+          <a:ln w="12700">
+            <a:solidFill>
+              <a:srgbClr val="0F766E">
+                <a:alpha val="0"/>
+              </a:srgbClr>
+            </a:solidFill>
+            <a:prstDash val="solid"/>
+          </a:ln>
+        </p:spPr>
+      </p:sp>
+      <p:sp>
+        <p:nvSpPr>
+          <p:cNvPr id="43" name="mdpr:2-2-7bfb60:title:__title:2-2-7bfb60"/>
           <p:cNvSpPr txBox="1"/>
           <p:nvPr/>
         </p:nvSpPr>
@@ -32110,7 +30788,24 @@
                 <a:ea typeface="Pretendard" pitchFamily="34" charset="-122"/>
                 <a:cs typeface="Pretendard" pitchFamily="34" charset="-120"/>
               </a:rPr>
-              <a:t>Agenda (Cont. 2/2)</a:t>
+              <a:t>Agenda</a:t>
+            </a:r>
+            <a:pPr algn="ctr" indent="0" marL="0">
+              <a:lnSpc>
+                <a:spcPct val="120000"/>
+              </a:lnSpc>
+              <a:buNone/>
+            </a:pPr>
+            <a:r>
+              <a:rPr lang="en-US" sz="2300" dirty="0">
+                <a:solidFill>
+                  <a:srgbClr val="919191"/>
+                </a:solidFill>
+                <a:latin typeface="Pretendard" pitchFamily="34" charset="0"/>
+                <a:ea typeface="Pretendard" pitchFamily="34" charset="-122"/>
+                <a:cs typeface="Pretendard" pitchFamily="34" charset="-120"/>
+              </a:rPr>
+              <a:t> (Cont. 2/2)</a:t>
             </a:r>
             <a:endParaRPr lang="en-US" sz="3800" dirty="0"/>
           </a:p>
@@ -32118,14 +30813,14 @@
       </p:sp>
       <p:sp>
         <p:nvSpPr>
-          <p:cNvPr id="41" name="mdpr:2-2-7bfb60:toc-item-1:toc-item-15"/>
+          <p:cNvPr id="44" name="mdpr:2-2-7bfb60:toc-item-1:toc-item-9"/>
           <p:cNvSpPr txBox="1"/>
           <p:nvPr/>
         </p:nvSpPr>
         <p:spPr>
           <a:xfrm>
-            <a:off x="1042416" y="3392424"/>
-            <a:ext cx="10094976" cy="658368"/>
+            <a:off x="1042416" y="1828800"/>
+            <a:ext cx="4645152" cy="658368"/>
           </a:xfrm>
           <a:prstGeom prst="rect">
             <a:avLst/>
@@ -32144,7 +30839,7 @@
               <a:buNone/>
             </a:pPr>
             <a:r>
-              <a:rPr lang="en-US" sz="2200" dirty="0">
+              <a:rPr lang="en-US" sz="1800" dirty="0">
                 <a:solidFill>
                   <a:srgbClr val="111111"/>
                 </a:solidFill>
@@ -32152,9 +30847,261 @@
                 <a:ea typeface="Pretendard" pitchFamily="34" charset="-122"/>
                 <a:cs typeface="Pretendard" pitchFamily="34" charset="-120"/>
               </a:rPr>
-              <a:t>01  Actions Output Review</a:t>
+              <a:t>09  Editable Proof Objects</a:t>
             </a:r>
-            <a:endParaRPr lang="en-US" sz="2200" dirty="0"/>
+            <a:endParaRPr lang="en-US" sz="1800" dirty="0"/>
+          </a:p>
+        </p:txBody>
+      </p:sp>
+      <p:sp>
+        <p:nvSpPr>
+          <p:cNvPr id="45" name="mdpr:2-2-7bfb60:toc-item-2:toc-item-10"/>
+          <p:cNvSpPr txBox="1"/>
+          <p:nvPr/>
+        </p:nvSpPr>
+        <p:spPr>
+          <a:xfrm>
+            <a:off x="1042416" y="2871216"/>
+            <a:ext cx="4645152" cy="658368"/>
+          </a:xfrm>
+          <a:prstGeom prst="rect">
+            <a:avLst/>
+          </a:prstGeom>
+          <a:noFill/>
+          <a:ln/>
+        </p:spPr>
+        <p:txBody>
+          <a:bodyPr wrap="square" lIns="0" tIns="25400" rIns="25400" bIns="0" rtlCol="0" anchor="ctr"/>
+          <a:lstStyle/>
+          <a:p>
+            <a:pPr algn="ctr" indent="0" marL="0">
+              <a:lnSpc>
+                <a:spcPct val="120000"/>
+              </a:lnSpc>
+              <a:buNone/>
+            </a:pPr>
+            <a:r>
+              <a:rPr lang="en-US" sz="1800" dirty="0">
+                <a:solidFill>
+                  <a:srgbClr val="111111"/>
+                </a:solidFill>
+                <a:latin typeface="Pretendard" pitchFamily="34" charset="0"/>
+                <a:ea typeface="Pretendard" pitchFamily="34" charset="-122"/>
+                <a:cs typeface="Pretendard" pitchFamily="34" charset="-120"/>
+              </a:rPr>
+              <a:t>10  Object Shape Grammar</a:t>
+            </a:r>
+            <a:endParaRPr lang="en-US" sz="1800" dirty="0"/>
+          </a:p>
+        </p:txBody>
+      </p:sp>
+      <p:sp>
+        <p:nvSpPr>
+          <p:cNvPr id="46" name="mdpr:2-2-7bfb60:toc-item-3:toc-item-11"/>
+          <p:cNvSpPr txBox="1"/>
+          <p:nvPr/>
+        </p:nvSpPr>
+        <p:spPr>
+          <a:xfrm>
+            <a:off x="1042416" y="3913632"/>
+            <a:ext cx="4645152" cy="658368"/>
+          </a:xfrm>
+          <a:prstGeom prst="rect">
+            <a:avLst/>
+          </a:prstGeom>
+          <a:noFill/>
+          <a:ln/>
+        </p:spPr>
+        <p:txBody>
+          <a:bodyPr wrap="square" lIns="0" tIns="25400" rIns="25400" bIns="0" rtlCol="0" anchor="ctr"/>
+          <a:lstStyle/>
+          <a:p>
+            <a:pPr algn="ctr" indent="0" marL="0">
+              <a:lnSpc>
+                <a:spcPct val="120000"/>
+              </a:lnSpc>
+              <a:buNone/>
+            </a:pPr>
+            <a:r>
+              <a:rPr lang="en-US" sz="1800" dirty="0">
+                <a:solidFill>
+                  <a:srgbClr val="111111"/>
+                </a:solidFill>
+                <a:latin typeface="Pretendard" pitchFamily="34" charset="0"/>
+                <a:ea typeface="Pretendard" pitchFamily="34" charset="-122"/>
+                <a:cs typeface="Pretendard" pitchFamily="34" charset="-120"/>
+              </a:rPr>
+              <a:t>11  Icon and Text Aside</a:t>
+            </a:r>
+            <a:endParaRPr lang="en-US" sz="1800" dirty="0"/>
+          </a:p>
+        </p:txBody>
+      </p:sp>
+      <p:sp>
+        <p:nvSpPr>
+          <p:cNvPr id="47" name="mdpr:2-2-7bfb60:toc-item-4:toc-item-12"/>
+          <p:cNvSpPr txBox="1"/>
+          <p:nvPr/>
+        </p:nvSpPr>
+        <p:spPr>
+          <a:xfrm>
+            <a:off x="1042416" y="4956048"/>
+            <a:ext cx="4645152" cy="658368"/>
+          </a:xfrm>
+          <a:prstGeom prst="rect">
+            <a:avLst/>
+          </a:prstGeom>
+          <a:noFill/>
+          <a:ln/>
+        </p:spPr>
+        <p:txBody>
+          <a:bodyPr wrap="square" lIns="0" tIns="25400" rIns="25400" bIns="0" rtlCol="0" anchor="ctr"/>
+          <a:lstStyle/>
+          <a:p>
+            <a:pPr algn="ctr" indent="0" marL="0">
+              <a:lnSpc>
+                <a:spcPct val="120000"/>
+              </a:lnSpc>
+              <a:buNone/>
+            </a:pPr>
+            <a:r>
+              <a:rPr lang="en-US" sz="1800" dirty="0">
+                <a:solidFill>
+                  <a:srgbClr val="111111"/>
+                </a:solidFill>
+                <a:latin typeface="Pretendard" pitchFamily="34" charset="0"/>
+                <a:ea typeface="Pretendard" pitchFamily="34" charset="-122"/>
+                <a:cs typeface="Pretendard" pitchFamily="34" charset="-120"/>
+              </a:rPr>
+              <a:t>12  Overflow Guard</a:t>
+            </a:r>
+            <a:endParaRPr lang="en-US" sz="1800" dirty="0"/>
+          </a:p>
+        </p:txBody>
+      </p:sp>
+      <p:sp>
+        <p:nvSpPr>
+          <p:cNvPr id="48" name="mdpr:2-2-7bfb60:toc-item-5:toc-item-13"/>
+          <p:cNvSpPr txBox="1"/>
+          <p:nvPr/>
+        </p:nvSpPr>
+        <p:spPr>
+          <a:xfrm>
+            <a:off x="6492240" y="1828800"/>
+            <a:ext cx="4645152" cy="658368"/>
+          </a:xfrm>
+          <a:prstGeom prst="rect">
+            <a:avLst/>
+          </a:prstGeom>
+          <a:noFill/>
+          <a:ln/>
+        </p:spPr>
+        <p:txBody>
+          <a:bodyPr wrap="square" lIns="0" tIns="25400" rIns="25400" bIns="0" rtlCol="0" anchor="ctr"/>
+          <a:lstStyle/>
+          <a:p>
+            <a:pPr algn="ctr" indent="0" marL="0">
+              <a:lnSpc>
+                <a:spcPct val="120000"/>
+              </a:lnSpc>
+              <a:buNone/>
+            </a:pPr>
+            <a:r>
+              <a:rPr lang="en-US" sz="1800" dirty="0">
+                <a:solidFill>
+                  <a:srgbClr val="111111"/>
+                </a:solidFill>
+                <a:latin typeface="Pretendard" pitchFamily="34" charset="0"/>
+                <a:ea typeface="Pretendard" pitchFamily="34" charset="-122"/>
+                <a:cs typeface="Pretendard" pitchFamily="34" charset="-120"/>
+              </a:rPr>
+              <a:t>13  Image Safe Frame</a:t>
+            </a:r>
+            <a:endParaRPr lang="en-US" sz="1800" dirty="0"/>
+          </a:p>
+        </p:txBody>
+      </p:sp>
+      <p:sp>
+        <p:nvSpPr>
+          <p:cNvPr id="49" name="mdpr:2-2-7bfb60:toc-item-6:toc-item-14"/>
+          <p:cNvSpPr txBox="1"/>
+          <p:nvPr/>
+        </p:nvSpPr>
+        <p:spPr>
+          <a:xfrm>
+            <a:off x="6492240" y="2871216"/>
+            <a:ext cx="4645152" cy="658368"/>
+          </a:xfrm>
+          <a:prstGeom prst="rect">
+            <a:avLst/>
+          </a:prstGeom>
+          <a:noFill/>
+          <a:ln/>
+        </p:spPr>
+        <p:txBody>
+          <a:bodyPr wrap="square" lIns="0" tIns="25400" rIns="25400" bIns="0" rtlCol="0" anchor="ctr"/>
+          <a:lstStyle/>
+          <a:p>
+            <a:pPr algn="ctr" indent="0" marL="0">
+              <a:lnSpc>
+                <a:spcPct val="120000"/>
+              </a:lnSpc>
+              <a:buNone/>
+            </a:pPr>
+            <a:r>
+              <a:rPr lang="en-US" sz="1800" dirty="0">
+                <a:solidFill>
+                  <a:srgbClr val="111111"/>
+                </a:solidFill>
+                <a:latin typeface="Pretendard" pitchFamily="34" charset="0"/>
+                <a:ea typeface="Pretendard" pitchFamily="34" charset="-122"/>
+                <a:cs typeface="Pretendard" pitchFamily="34" charset="-120"/>
+              </a:rPr>
+              <a:t>14  Mixed Object Packing</a:t>
+            </a:r>
+            <a:endParaRPr lang="en-US" sz="1800" dirty="0"/>
+          </a:p>
+        </p:txBody>
+      </p:sp>
+      <p:sp>
+        <p:nvSpPr>
+          <p:cNvPr id="50" name="mdpr:2-2-7bfb60:toc-item-7:toc-item-15"/>
+          <p:cNvSpPr txBox="1"/>
+          <p:nvPr/>
+        </p:nvSpPr>
+        <p:spPr>
+          <a:xfrm>
+            <a:off x="6492240" y="3913632"/>
+            <a:ext cx="4645152" cy="658368"/>
+          </a:xfrm>
+          <a:prstGeom prst="rect">
+            <a:avLst/>
+          </a:prstGeom>
+          <a:noFill/>
+          <a:ln/>
+        </p:spPr>
+        <p:txBody>
+          <a:bodyPr wrap="square" lIns="0" tIns="25400" rIns="25400" bIns="0" rtlCol="0" anchor="ctr"/>
+          <a:lstStyle/>
+          <a:p>
+            <a:pPr algn="ctr" indent="0" marL="0">
+              <a:lnSpc>
+                <a:spcPct val="120000"/>
+              </a:lnSpc>
+              <a:buNone/>
+            </a:pPr>
+            <a:r>
+              <a:rPr lang="en-US" sz="1800" dirty="0">
+                <a:solidFill>
+                  <a:srgbClr val="111111"/>
+                </a:solidFill>
+                <a:latin typeface="Pretendard" pitchFamily="34" charset="0"/>
+                <a:ea typeface="Pretendard" pitchFamily="34" charset="-122"/>
+                <a:cs typeface="Pretendard" pitchFamily="34" charset="-120"/>
+              </a:rPr>
+              <a:t>15  Actions Output Review</a:t>
+            </a:r>
+            <a:endParaRPr lang="en-US" sz="1800" dirty="0"/>
           </a:p>
         </p:txBody>
       </p:sp>
@@ -33058,36 +32005,9 @@
           </a:ln>
         </p:spPr>
       </p:sp>
-      <p:sp>
-        <p:nvSpPr>
-          <p:cNvPr id="36" name="Shape 34"/>
-          <p:cNvSpPr/>
-          <p:nvPr/>
-        </p:nvSpPr>
-        <p:spPr>
-          <a:xfrm>
-            <a:off x="731520" y="1207008"/>
-            <a:ext cx="1325880" cy="54864"/>
-          </a:xfrm>
-          <a:prstGeom prst="rect">
-            <a:avLst/>
-          </a:prstGeom>
-          <a:solidFill>
-            <a:srgbClr val="0F766E"/>
-          </a:solidFill>
-          <a:ln w="12700">
-            <a:solidFill>
-              <a:srgbClr val="0F766E">
-                <a:alpha val="0"/>
-              </a:srgbClr>
-            </a:solidFill>
-            <a:prstDash val="solid"/>
-          </a:ln>
-        </p:spPr>
-      </p:sp>
       <p:pic>
         <p:nvPicPr>
-          <p:cNvPr id="37" name="Image 0" descr="preencoded.png">    </p:cNvPr>
+          <p:cNvPr id="36" name="Image 0" descr="preencoded.png">    </p:cNvPr>
           <p:cNvPicPr>
             <a:picLocks noChangeAspect="1"/>
           </p:cNvPicPr>
@@ -33117,7 +32037,7 @@
       </p:pic>
       <p:sp>
         <p:nvSpPr>
-          <p:cNvPr id="38" name="Shape 35"/>
+          <p:cNvPr id="37" name="Shape 34"/>
           <p:cNvSpPr/>
           <p:nvPr/>
         </p:nvSpPr>
@@ -33153,7 +32073,7 @@
       </p:sp>
       <p:sp>
         <p:nvSpPr>
-          <p:cNvPr id="39" name="Shape 36"/>
+          <p:cNvPr id="38" name="Shape 35"/>
           <p:cNvSpPr/>
           <p:nvPr/>
         </p:nvSpPr>
@@ -33182,7 +32102,7 @@
       </p:sp>
       <p:sp>
         <p:nvSpPr>
-          <p:cNvPr id="40" name="Shape 37"/>
+          <p:cNvPr id="39" name="Shape 36"/>
           <p:cNvSpPr/>
           <p:nvPr/>
         </p:nvSpPr>
@@ -33209,7 +32129,7 @@
       </p:sp>
       <p:sp>
         <p:nvSpPr>
-          <p:cNvPr id="41" name="mdpr:teaser-summary-7731dc:title:__title:teaser-summary-7731dc"/>
+          <p:cNvPr id="40" name="mdpr:teaser-summary-7731dc:title:__title:teaser-summary-7731dc"/>
           <p:cNvSpPr txBox="1"/>
           <p:nvPr/>
         </p:nvSpPr>
@@ -33251,7 +32171,7 @@
       </p:sp>
       <p:sp>
         <p:nvSpPr>
-          <p:cNvPr id="42" name="mdpr:teaser-summary-7731dc:key-message:block-3"/>
+          <p:cNvPr id="41" name="mdpr:teaser-summary-7731dc:key-message:block-3"/>
           <p:cNvSpPr txBox="1"/>
           <p:nvPr/>
         </p:nvSpPr>
@@ -33293,7 +32213,7 @@
       </p:sp>
       <p:sp>
         <p:nvSpPr>
-          <p:cNvPr id="43" name="mdpr:teaser-summary-7731dc:body:block-4"/>
+          <p:cNvPr id="42" name="mdpr:teaser-summary-7731dc:body:block-4"/>
           <p:cNvSpPr txBox="1"/>
           <p:nvPr/>
         </p:nvSpPr>
@@ -34378,8 +33298,8 @@
         </p:nvSpPr>
         <p:spPr>
           <a:xfrm>
-            <a:off x="731520" y="1207008"/>
-            <a:ext cx="1325880" cy="54864"/>
+            <a:off x="822960" y="1938528"/>
+            <a:ext cx="73152" cy="2514600"/>
           </a:xfrm>
           <a:prstGeom prst="rect">
             <a:avLst/>
@@ -34397,222 +33317,22 @@
           </a:ln>
         </p:spPr>
       </p:sp>
-      <p:pic>
-        <p:nvPicPr>
-          <p:cNvPr id="37" name="Image 0" descr="preencoded.png">    </p:cNvPr>
-          <p:cNvPicPr>
-            <a:picLocks noChangeAspect="1"/>
-          </p:cNvPicPr>
-          <p:nvPr/>
-        </p:nvPicPr>
-        <p:blipFill>
-          <a:blip r:embed="rId1">
-            <a:extLst>
-              <a:ext uri="{96DAC541-7B7A-43D3-8B79-37D633B846F1}">
-                <asvg:svgBlip xmlns:asvg="http://schemas.microsoft.com/office/drawing/2016/SVG/main" r:embed="rId2"/>
-              </a:ext>
-            </a:extLst>
-          </a:blip>
-          <a:stretch>
-            <a:fillRect/>
-          </a:stretch>
-        </p:blipFill>
-        <p:spPr>
-          <a:xfrm>
-            <a:off x="914400" y="1865376"/>
-            <a:ext cx="10241280" cy="1024128"/>
+      <p:sp>
+        <p:nvSpPr>
+          <p:cNvPr id="37" name="Shape 35"/>
+          <p:cNvSpPr/>
+          <p:nvPr/>
+        </p:nvSpPr>
+        <p:spPr>
+          <a:xfrm>
+            <a:off x="4343400" y="1938528"/>
+            <a:ext cx="73152" cy="2514600"/>
           </a:xfrm>
           <a:prstGeom prst="rect">
             <a:avLst/>
           </a:prstGeom>
-        </p:spPr>
-      </p:pic>
-      <p:sp>
-        <p:nvSpPr>
-          <p:cNvPr id="38" name="Shape 35"/>
-          <p:cNvSpPr/>
-          <p:nvPr/>
-        </p:nvSpPr>
-        <p:spPr>
-          <a:xfrm>
-            <a:off x="914400" y="1865376"/>
-            <a:ext cx="10241280" cy="1024128"/>
-          </a:xfrm>
-          <a:prstGeom prst="rect">
-            <a:avLst/>
-          </a:prstGeom>
           <a:solidFill>
-            <a:srgbClr val="FFFFFF">
-              <a:alpha val="0"/>
-            </a:srgbClr>
-          </a:solidFill>
-          <a:ln w="12700">
-            <a:solidFill>
-              <a:srgbClr val="CBD5E1">
-                <a:alpha val="0"/>
-              </a:srgbClr>
-            </a:solidFill>
-            <a:prstDash val="solid"/>
-          </a:ln>
-          <a:effectLst>
-            <a:outerShdw sx="100000" sy="100000" kx="0" ky="0" algn="bl" rotWithShape="0" blurRad="12700" dist="50800" dir="2700000">
-              <a:srgbClr val="000000">
-                <a:alpha val="8000"/>
-              </a:srgbClr>
-            </a:outerShdw>
-          </a:effectLst>
-        </p:spPr>
-      </p:sp>
-      <p:pic>
-        <p:nvPicPr>
-          <p:cNvPr id="39" name="Image 1" descr="preencoded.png">    </p:cNvPr>
-          <p:cNvPicPr>
-            <a:picLocks noChangeAspect="1"/>
-          </p:cNvPicPr>
-          <p:nvPr/>
-        </p:nvPicPr>
-        <p:blipFill>
-          <a:blip r:embed="rId3">
-            <a:extLst>
-              <a:ext uri="{96DAC541-7B7A-43D3-8B79-37D633B846F1}">
-                <asvg:svgBlip xmlns:asvg="http://schemas.microsoft.com/office/drawing/2016/SVG/main" r:embed="rId4"/>
-              </a:ext>
-            </a:extLst>
-          </a:blip>
-          <a:stretch>
-            <a:fillRect/>
-          </a:stretch>
-        </p:blipFill>
-        <p:spPr>
-          <a:xfrm>
-            <a:off x="914400" y="3191256"/>
-            <a:ext cx="10241280" cy="1024128"/>
-          </a:xfrm>
-          <a:prstGeom prst="rect">
-            <a:avLst/>
-          </a:prstGeom>
-        </p:spPr>
-      </p:pic>
-      <p:sp>
-        <p:nvSpPr>
-          <p:cNvPr id="40" name="Shape 36"/>
-          <p:cNvSpPr/>
-          <p:nvPr/>
-        </p:nvSpPr>
-        <p:spPr>
-          <a:xfrm>
-            <a:off x="914400" y="3191256"/>
-            <a:ext cx="10241280" cy="1024128"/>
-          </a:xfrm>
-          <a:prstGeom prst="rect">
-            <a:avLst/>
-          </a:prstGeom>
-          <a:solidFill>
-            <a:srgbClr val="FFFFFF">
-              <a:alpha val="0"/>
-            </a:srgbClr>
-          </a:solidFill>
-          <a:ln w="12700">
-            <a:solidFill>
-              <a:srgbClr val="CBD5E1">
-                <a:alpha val="0"/>
-              </a:srgbClr>
-            </a:solidFill>
-            <a:prstDash val="solid"/>
-          </a:ln>
-          <a:effectLst>
-            <a:outerShdw sx="100000" sy="100000" kx="0" ky="0" algn="bl" rotWithShape="0" blurRad="12700" dist="50800" dir="2700000">
-              <a:srgbClr val="000000">
-                <a:alpha val="8000"/>
-              </a:srgbClr>
-            </a:outerShdw>
-          </a:effectLst>
-        </p:spPr>
-      </p:sp>
-      <p:pic>
-        <p:nvPicPr>
-          <p:cNvPr id="41" name="Image 2" descr="preencoded.png">    </p:cNvPr>
-          <p:cNvPicPr>
-            <a:picLocks noChangeAspect="1"/>
-          </p:cNvPicPr>
-          <p:nvPr/>
-        </p:nvPicPr>
-        <p:blipFill>
-          <a:blip r:embed="rId5">
-            <a:extLst>
-              <a:ext uri="{96DAC541-7B7A-43D3-8B79-37D633B846F1}">
-                <asvg:svgBlip xmlns:asvg="http://schemas.microsoft.com/office/drawing/2016/SVG/main" r:embed="rId6"/>
-              </a:ext>
-            </a:extLst>
-          </a:blip>
-          <a:stretch>
-            <a:fillRect/>
-          </a:stretch>
-        </p:blipFill>
-        <p:spPr>
-          <a:xfrm>
-            <a:off x="914400" y="4507992"/>
-            <a:ext cx="10241280" cy="1024128"/>
-          </a:xfrm>
-          <a:prstGeom prst="rect">
-            <a:avLst/>
-          </a:prstGeom>
-        </p:spPr>
-      </p:pic>
-      <p:sp>
-        <p:nvSpPr>
-          <p:cNvPr id="42" name="Shape 37"/>
-          <p:cNvSpPr/>
-          <p:nvPr/>
-        </p:nvSpPr>
-        <p:spPr>
-          <a:xfrm>
-            <a:off x="914400" y="4507992"/>
-            <a:ext cx="10241280" cy="1024128"/>
-          </a:xfrm>
-          <a:prstGeom prst="rect">
-            <a:avLst/>
-          </a:prstGeom>
-          <a:solidFill>
-            <a:srgbClr val="FFFFFF">
-              <a:alpha val="0"/>
-            </a:srgbClr>
-          </a:solidFill>
-          <a:ln w="12700">
-            <a:solidFill>
-              <a:srgbClr val="CBD5E1">
-                <a:alpha val="0"/>
-              </a:srgbClr>
-            </a:solidFill>
-            <a:prstDash val="solid"/>
-          </a:ln>
-          <a:effectLst>
-            <a:outerShdw sx="100000" sy="100000" kx="0" ky="0" algn="bl" rotWithShape="0" blurRad="12700" dist="50800" dir="2700000">
-              <a:srgbClr val="000000">
-                <a:alpha val="8000"/>
-              </a:srgbClr>
-            </a:outerShdw>
-          </a:effectLst>
-        </p:spPr>
-      </p:sp>
-      <p:sp>
-        <p:nvSpPr>
-          <p:cNvPr id="43" name="Shape 38"/>
-          <p:cNvSpPr/>
-          <p:nvPr/>
-        </p:nvSpPr>
-        <p:spPr>
-          <a:xfrm>
-            <a:off x="786384" y="1956816"/>
-            <a:ext cx="32004" cy="3483864"/>
-          </a:xfrm>
-          <a:prstGeom prst="rect">
-            <a:avLst/>
-          </a:prstGeom>
-          <a:solidFill>
-            <a:srgbClr val="F0AA11">
-              <a:alpha val="80000"/>
-            </a:srgbClr>
+            <a:srgbClr val="F0AA11"/>
           </a:solidFill>
           <a:ln w="12700">
             <a:solidFill>
@@ -34626,14 +33346,14 @@
       </p:sp>
       <p:sp>
         <p:nvSpPr>
-          <p:cNvPr id="44" name="Shape 39"/>
-          <p:cNvSpPr/>
-          <p:nvPr/>
-        </p:nvSpPr>
-        <p:spPr>
-          <a:xfrm>
-            <a:off x="914400" y="1865376"/>
-            <a:ext cx="73152" cy="1024128"/>
+          <p:cNvPr id="38" name="Shape 36"/>
+          <p:cNvSpPr/>
+          <p:nvPr/>
+        </p:nvSpPr>
+        <p:spPr>
+          <a:xfrm>
+            <a:off x="7863840" y="1938528"/>
+            <a:ext cx="73152" cy="2514600"/>
           </a:xfrm>
           <a:prstGeom prst="rect">
             <a:avLst/>
@@ -34653,61 +33373,7 @@
       </p:sp>
       <p:sp>
         <p:nvSpPr>
-          <p:cNvPr id="45" name="Shape 40"/>
-          <p:cNvSpPr/>
-          <p:nvPr/>
-        </p:nvSpPr>
-        <p:spPr>
-          <a:xfrm>
-            <a:off x="914400" y="3191256"/>
-            <a:ext cx="73152" cy="1024128"/>
-          </a:xfrm>
-          <a:prstGeom prst="rect">
-            <a:avLst/>
-          </a:prstGeom>
-          <a:solidFill>
-            <a:srgbClr val="F0AA11"/>
-          </a:solidFill>
-          <a:ln w="12700">
-            <a:solidFill>
-              <a:srgbClr val="F0AA11">
-                <a:alpha val="0"/>
-              </a:srgbClr>
-            </a:solidFill>
-            <a:prstDash val="solid"/>
-          </a:ln>
-        </p:spPr>
-      </p:sp>
-      <p:sp>
-        <p:nvSpPr>
-          <p:cNvPr id="46" name="Shape 41"/>
-          <p:cNvSpPr/>
-          <p:nvPr/>
-        </p:nvSpPr>
-        <p:spPr>
-          <a:xfrm>
-            <a:off x="914400" y="4507992"/>
-            <a:ext cx="73152" cy="1024128"/>
-          </a:xfrm>
-          <a:prstGeom prst="rect">
-            <a:avLst/>
-          </a:prstGeom>
-          <a:solidFill>
-            <a:srgbClr val="0F766E"/>
-          </a:solidFill>
-          <a:ln w="12700">
-            <a:solidFill>
-              <a:srgbClr val="0F766E">
-                <a:alpha val="0"/>
-              </a:srgbClr>
-            </a:solidFill>
-            <a:prstDash val="solid"/>
-          </a:ln>
-        </p:spPr>
-      </p:sp>
-      <p:sp>
-        <p:nvSpPr>
-          <p:cNvPr id="47" name="mdpr:1-2-32ac08:title:__title:1-2-32ac08"/>
+          <p:cNvPr id="39" name="mdpr:1-2-32ac08:title:__title:1-2-32ac08"/>
           <p:cNvSpPr txBox="1"/>
           <p:nvPr/>
         </p:nvSpPr>
@@ -34749,14 +33415,14 @@
       </p:sp>
       <p:sp>
         <p:nvSpPr>
-          <p:cNvPr id="48" name="mdpr:1-2-32ac08:item-1:block-6-chunk-1"/>
+          <p:cNvPr id="40" name="mdpr:1-2-32ac08:item-1:block-6-chunk-1"/>
           <p:cNvSpPr txBox="1"/>
           <p:nvPr/>
         </p:nvSpPr>
         <p:spPr>
           <a:xfrm>
-            <a:off x="1133856" y="1957548"/>
-            <a:ext cx="9820656" cy="839785"/>
+            <a:off x="1042416" y="2103120"/>
+            <a:ext cx="2825496" cy="2185416"/>
           </a:xfrm>
           <a:prstGeom prst="rect">
             <a:avLst/>
@@ -34808,14 +33474,14 @@
       </p:sp>
       <p:sp>
         <p:nvSpPr>
-          <p:cNvPr id="49" name="mdpr:1-2-32ac08:item-2:block-6-chunk-1"/>
+          <p:cNvPr id="41" name="mdpr:1-2-32ac08:item-2:block-6-chunk-1"/>
           <p:cNvSpPr txBox="1"/>
           <p:nvPr/>
         </p:nvSpPr>
         <p:spPr>
           <a:xfrm>
-            <a:off x="1133856" y="3283428"/>
-            <a:ext cx="9820656" cy="839785"/>
+            <a:off x="4562856" y="2103120"/>
+            <a:ext cx="2825496" cy="2185416"/>
           </a:xfrm>
           <a:prstGeom prst="rect">
             <a:avLst/>
@@ -34867,14 +33533,14 @@
       </p:sp>
       <p:sp>
         <p:nvSpPr>
-          <p:cNvPr id="50" name="mdpr:1-2-32ac08:item-3:block-6-chunk-1"/>
+          <p:cNvPr id="42" name="mdpr:1-2-32ac08:item-3:block-6-chunk-1"/>
           <p:cNvSpPr txBox="1"/>
           <p:nvPr/>
         </p:nvSpPr>
         <p:spPr>
           <a:xfrm>
-            <a:off x="1133856" y="4600164"/>
-            <a:ext cx="9820656" cy="839785"/>
+            <a:off x="8083296" y="2103120"/>
+            <a:ext cx="2825496" cy="2185416"/>
           </a:xfrm>
           <a:prstGeom prst="rect">
             <a:avLst/>
@@ -35826,88 +34492,7 @@
       </p:sp>
       <p:sp>
         <p:nvSpPr>
-          <p:cNvPr id="36" name="Shape 34"/>
-          <p:cNvSpPr/>
-          <p:nvPr/>
-        </p:nvSpPr>
-        <p:spPr>
-          <a:xfrm>
-            <a:off x="731520" y="1207008"/>
-            <a:ext cx="1325880" cy="54864"/>
-          </a:xfrm>
-          <a:prstGeom prst="rect">
-            <a:avLst/>
-          </a:prstGeom>
-          <a:solidFill>
-            <a:srgbClr val="0F766E"/>
-          </a:solidFill>
-          <a:ln w="12700">
-            <a:solidFill>
-              <a:srgbClr val="0F766E">
-                <a:alpha val="0"/>
-              </a:srgbClr>
-            </a:solidFill>
-            <a:prstDash val="solid"/>
-          </a:ln>
-        </p:spPr>
-      </p:sp>
-      <p:sp>
-        <p:nvSpPr>
-          <p:cNvPr id="37" name="Shape 35"/>
-          <p:cNvSpPr/>
-          <p:nvPr/>
-        </p:nvSpPr>
-        <p:spPr>
-          <a:xfrm>
-            <a:off x="822960" y="1554480"/>
-            <a:ext cx="4937760" cy="73152"/>
-          </a:xfrm>
-          <a:prstGeom prst="rect">
-            <a:avLst/>
-          </a:prstGeom>
-          <a:solidFill>
-            <a:srgbClr val="0F766E"/>
-          </a:solidFill>
-          <a:ln w="12700">
-            <a:solidFill>
-              <a:srgbClr val="0F766E">
-                <a:alpha val="0"/>
-              </a:srgbClr>
-            </a:solidFill>
-            <a:prstDash val="solid"/>
-          </a:ln>
-        </p:spPr>
-      </p:sp>
-      <p:sp>
-        <p:nvSpPr>
-          <p:cNvPr id="38" name="Shape 36"/>
-          <p:cNvSpPr/>
-          <p:nvPr/>
-        </p:nvSpPr>
-        <p:spPr>
-          <a:xfrm>
-            <a:off x="6400800" y="1554480"/>
-            <a:ext cx="4937760" cy="73152"/>
-          </a:xfrm>
-          <a:prstGeom prst="rect">
-            <a:avLst/>
-          </a:prstGeom>
-          <a:solidFill>
-            <a:srgbClr val="0F766E"/>
-          </a:solidFill>
-          <a:ln w="12700">
-            <a:solidFill>
-              <a:srgbClr val="0F766E">
-                <a:alpha val="0"/>
-              </a:srgbClr>
-            </a:solidFill>
-            <a:prstDash val="solid"/>
-          </a:ln>
-        </p:spPr>
-      </p:sp>
-      <p:sp>
-        <p:nvSpPr>
-          <p:cNvPr id="39" name="mdpr:2-2-14f8eb:title:__title:2-2-14f8eb"/>
+          <p:cNvPr id="36" name="mdpr:2-2-14f8eb:title:__title:2-2-14f8eb"/>
           <p:cNvSpPr txBox="1"/>
           <p:nvPr/>
         </p:nvSpPr>
@@ -35941,7 +34526,24 @@
                 <a:ea typeface="Pretendard" pitchFamily="34" charset="-122"/>
                 <a:cs typeface="Pretendard" pitchFamily="34" charset="-120"/>
               </a:rPr>
-              <a:t>Composition Contract (Cont. 2/2)</a:t>
+              <a:t>Composition Contract</a:t>
+            </a:r>
+            <a:pPr algn="ctr" indent="0" marL="0">
+              <a:lnSpc>
+                <a:spcPct val="120000"/>
+              </a:lnSpc>
+              <a:buNone/>
+            </a:pPr>
+            <a:r>
+              <a:rPr lang="en-US" sz="2000" dirty="0">
+                <a:solidFill>
+                  <a:srgbClr val="919191"/>
+                </a:solidFill>
+                <a:latin typeface="Pretendard" pitchFamily="34" charset="0"/>
+                <a:ea typeface="Pretendard" pitchFamily="34" charset="-122"/>
+                <a:cs typeface="Pretendard" pitchFamily="34" charset="-120"/>
+              </a:rPr>
+              <a:t> (Cont. 2/2)</a:t>
             </a:r>
             <a:endParaRPr lang="en-US" sz="3400" dirty="0"/>
           </a:p>
@@ -35949,14 +34551,14 @@
       </p:sp>
       <p:sp>
         <p:nvSpPr>
-          <p:cNvPr id="40" name="mdpr:2-2-14f8eb:left:block-6-chunk-2"/>
+          <p:cNvPr id="37" name="mdpr:2-2-14f8eb:left:block-6-chunk-2"/>
           <p:cNvSpPr txBox="1"/>
           <p:nvPr/>
         </p:nvSpPr>
         <p:spPr>
           <a:xfrm>
-            <a:off x="896112" y="1664208"/>
-            <a:ext cx="4791456" cy="4169664"/>
+            <a:off x="896112" y="1463040"/>
+            <a:ext cx="4791456" cy="4261104"/>
           </a:xfrm>
           <a:prstGeom prst="rect">
             <a:avLst/>
@@ -36008,14 +34610,14 @@
       </p:sp>
       <p:sp>
         <p:nvSpPr>
-          <p:cNvPr id="41" name="mdpr:2-2-14f8eb:right:block-6-chunk-2"/>
+          <p:cNvPr id="38" name="mdpr:2-2-14f8eb:right:block-6-chunk-2"/>
           <p:cNvSpPr txBox="1"/>
           <p:nvPr/>
         </p:nvSpPr>
         <p:spPr>
           <a:xfrm>
-            <a:off x="6473952" y="1664208"/>
-            <a:ext cx="4791456" cy="4169664"/>
+            <a:off x="6473952" y="1463040"/>
+            <a:ext cx="4791456" cy="4261104"/>
           </a:xfrm>
           <a:prstGeom prst="rect">
             <a:avLst/>
@@ -36973,8 +35575,8 @@
         </p:nvSpPr>
         <p:spPr>
           <a:xfrm>
-            <a:off x="731520" y="1207008"/>
-            <a:ext cx="1325880" cy="54864"/>
+            <a:off x="822960" y="1938528"/>
+            <a:ext cx="73152" cy="2514600"/>
           </a:xfrm>
           <a:prstGeom prst="rect">
             <a:avLst/>
@@ -36992,222 +35594,22 @@
           </a:ln>
         </p:spPr>
       </p:sp>
-      <p:pic>
-        <p:nvPicPr>
-          <p:cNvPr id="37" name="Image 0" descr="preencoded.png">    </p:cNvPr>
-          <p:cNvPicPr>
-            <a:picLocks noChangeAspect="1"/>
-          </p:cNvPicPr>
-          <p:nvPr/>
-        </p:nvPicPr>
-        <p:blipFill>
-          <a:blip r:embed="rId1">
-            <a:extLst>
-              <a:ext uri="{96DAC541-7B7A-43D3-8B79-37D633B846F1}">
-                <asvg:svgBlip xmlns:asvg="http://schemas.microsoft.com/office/drawing/2016/SVG/main" r:embed="rId2"/>
-              </a:ext>
-            </a:extLst>
-          </a:blip>
-          <a:stretch>
-            <a:fillRect/>
-          </a:stretch>
-        </p:blipFill>
-        <p:spPr>
-          <a:xfrm>
-            <a:off x="914400" y="1865376"/>
-            <a:ext cx="10241280" cy="1024128"/>
+      <p:sp>
+        <p:nvSpPr>
+          <p:cNvPr id="37" name="Shape 35"/>
+          <p:cNvSpPr/>
+          <p:nvPr/>
+        </p:nvSpPr>
+        <p:spPr>
+          <a:xfrm>
+            <a:off x="4343400" y="1938528"/>
+            <a:ext cx="73152" cy="2514600"/>
           </a:xfrm>
           <a:prstGeom prst="rect">
             <a:avLst/>
           </a:prstGeom>
-        </p:spPr>
-      </p:pic>
-      <p:sp>
-        <p:nvSpPr>
-          <p:cNvPr id="38" name="Shape 35"/>
-          <p:cNvSpPr/>
-          <p:nvPr/>
-        </p:nvSpPr>
-        <p:spPr>
-          <a:xfrm>
-            <a:off x="914400" y="1865376"/>
-            <a:ext cx="10241280" cy="1024128"/>
-          </a:xfrm>
-          <a:prstGeom prst="rect">
-            <a:avLst/>
-          </a:prstGeom>
           <a:solidFill>
-            <a:srgbClr val="FFFFFF">
-              <a:alpha val="0"/>
-            </a:srgbClr>
-          </a:solidFill>
-          <a:ln w="12700">
-            <a:solidFill>
-              <a:srgbClr val="CBD5E1">
-                <a:alpha val="0"/>
-              </a:srgbClr>
-            </a:solidFill>
-            <a:prstDash val="solid"/>
-          </a:ln>
-          <a:effectLst>
-            <a:outerShdw sx="100000" sy="100000" kx="0" ky="0" algn="bl" rotWithShape="0" blurRad="12700" dist="50800" dir="2700000">
-              <a:srgbClr val="000000">
-                <a:alpha val="8000"/>
-              </a:srgbClr>
-            </a:outerShdw>
-          </a:effectLst>
-        </p:spPr>
-      </p:sp>
-      <p:pic>
-        <p:nvPicPr>
-          <p:cNvPr id="39" name="Image 1" descr="preencoded.png">    </p:cNvPr>
-          <p:cNvPicPr>
-            <a:picLocks noChangeAspect="1"/>
-          </p:cNvPicPr>
-          <p:nvPr/>
-        </p:nvPicPr>
-        <p:blipFill>
-          <a:blip r:embed="rId3">
-            <a:extLst>
-              <a:ext uri="{96DAC541-7B7A-43D3-8B79-37D633B846F1}">
-                <asvg:svgBlip xmlns:asvg="http://schemas.microsoft.com/office/drawing/2016/SVG/main" r:embed="rId4"/>
-              </a:ext>
-            </a:extLst>
-          </a:blip>
-          <a:stretch>
-            <a:fillRect/>
-          </a:stretch>
-        </p:blipFill>
-        <p:spPr>
-          <a:xfrm>
-            <a:off x="914400" y="3191256"/>
-            <a:ext cx="10241280" cy="1024128"/>
-          </a:xfrm>
-          <a:prstGeom prst="rect">
-            <a:avLst/>
-          </a:prstGeom>
-        </p:spPr>
-      </p:pic>
-      <p:sp>
-        <p:nvSpPr>
-          <p:cNvPr id="40" name="Shape 36"/>
-          <p:cNvSpPr/>
-          <p:nvPr/>
-        </p:nvSpPr>
-        <p:spPr>
-          <a:xfrm>
-            <a:off x="914400" y="3191256"/>
-            <a:ext cx="10241280" cy="1024128"/>
-          </a:xfrm>
-          <a:prstGeom prst="rect">
-            <a:avLst/>
-          </a:prstGeom>
-          <a:solidFill>
-            <a:srgbClr val="FFFFFF">
-              <a:alpha val="0"/>
-            </a:srgbClr>
-          </a:solidFill>
-          <a:ln w="12700">
-            <a:solidFill>
-              <a:srgbClr val="CBD5E1">
-                <a:alpha val="0"/>
-              </a:srgbClr>
-            </a:solidFill>
-            <a:prstDash val="solid"/>
-          </a:ln>
-          <a:effectLst>
-            <a:outerShdw sx="100000" sy="100000" kx="0" ky="0" algn="bl" rotWithShape="0" blurRad="12700" dist="50800" dir="2700000">
-              <a:srgbClr val="000000">
-                <a:alpha val="8000"/>
-              </a:srgbClr>
-            </a:outerShdw>
-          </a:effectLst>
-        </p:spPr>
-      </p:sp>
-      <p:pic>
-        <p:nvPicPr>
-          <p:cNvPr id="41" name="Image 2" descr="preencoded.png">    </p:cNvPr>
-          <p:cNvPicPr>
-            <a:picLocks noChangeAspect="1"/>
-          </p:cNvPicPr>
-          <p:nvPr/>
-        </p:nvPicPr>
-        <p:blipFill>
-          <a:blip r:embed="rId5">
-            <a:extLst>
-              <a:ext uri="{96DAC541-7B7A-43D3-8B79-37D633B846F1}">
-                <asvg:svgBlip xmlns:asvg="http://schemas.microsoft.com/office/drawing/2016/SVG/main" r:embed="rId6"/>
-              </a:ext>
-            </a:extLst>
-          </a:blip>
-          <a:stretch>
-            <a:fillRect/>
-          </a:stretch>
-        </p:blipFill>
-        <p:spPr>
-          <a:xfrm>
-            <a:off x="914400" y="4507992"/>
-            <a:ext cx="10241280" cy="1024128"/>
-          </a:xfrm>
-          <a:prstGeom prst="rect">
-            <a:avLst/>
-          </a:prstGeom>
-        </p:spPr>
-      </p:pic>
-      <p:sp>
-        <p:nvSpPr>
-          <p:cNvPr id="42" name="Shape 37"/>
-          <p:cNvSpPr/>
-          <p:nvPr/>
-        </p:nvSpPr>
-        <p:spPr>
-          <a:xfrm>
-            <a:off x="914400" y="4507992"/>
-            <a:ext cx="10241280" cy="1024128"/>
-          </a:xfrm>
-          <a:prstGeom prst="rect">
-            <a:avLst/>
-          </a:prstGeom>
-          <a:solidFill>
-            <a:srgbClr val="FFFFFF">
-              <a:alpha val="0"/>
-            </a:srgbClr>
-          </a:solidFill>
-          <a:ln w="12700">
-            <a:solidFill>
-              <a:srgbClr val="CBD5E1">
-                <a:alpha val="0"/>
-              </a:srgbClr>
-            </a:solidFill>
-            <a:prstDash val="solid"/>
-          </a:ln>
-          <a:effectLst>
-            <a:outerShdw sx="100000" sy="100000" kx="0" ky="0" algn="bl" rotWithShape="0" blurRad="12700" dist="50800" dir="2700000">
-              <a:srgbClr val="000000">
-                <a:alpha val="8000"/>
-              </a:srgbClr>
-            </a:outerShdw>
-          </a:effectLst>
-        </p:spPr>
-      </p:sp>
-      <p:sp>
-        <p:nvSpPr>
-          <p:cNvPr id="43" name="Shape 38"/>
-          <p:cNvSpPr/>
-          <p:nvPr/>
-        </p:nvSpPr>
-        <p:spPr>
-          <a:xfrm>
-            <a:off x="786384" y="1956816"/>
-            <a:ext cx="32004" cy="3483864"/>
-          </a:xfrm>
-          <a:prstGeom prst="rect">
-            <a:avLst/>
-          </a:prstGeom>
-          <a:solidFill>
-            <a:srgbClr val="F0AA11">
-              <a:alpha val="80000"/>
-            </a:srgbClr>
+            <a:srgbClr val="F0AA11"/>
           </a:solidFill>
           <a:ln w="12700">
             <a:solidFill>
@@ -37221,14 +35623,14 @@
       </p:sp>
       <p:sp>
         <p:nvSpPr>
-          <p:cNvPr id="44" name="Shape 39"/>
-          <p:cNvSpPr/>
-          <p:nvPr/>
-        </p:nvSpPr>
-        <p:spPr>
-          <a:xfrm>
-            <a:off x="914400" y="1865376"/>
-            <a:ext cx="73152" cy="1024128"/>
+          <p:cNvPr id="38" name="Shape 36"/>
+          <p:cNvSpPr/>
+          <p:nvPr/>
+        </p:nvSpPr>
+        <p:spPr>
+          <a:xfrm>
+            <a:off x="7863840" y="1938528"/>
+            <a:ext cx="73152" cy="2514600"/>
           </a:xfrm>
           <a:prstGeom prst="rect">
             <a:avLst/>
@@ -37248,61 +35650,7 @@
       </p:sp>
       <p:sp>
         <p:nvSpPr>
-          <p:cNvPr id="45" name="Shape 40"/>
-          <p:cNvSpPr/>
-          <p:nvPr/>
-        </p:nvSpPr>
-        <p:spPr>
-          <a:xfrm>
-            <a:off x="914400" y="3191256"/>
-            <a:ext cx="73152" cy="1024128"/>
-          </a:xfrm>
-          <a:prstGeom prst="rect">
-            <a:avLst/>
-          </a:prstGeom>
-          <a:solidFill>
-            <a:srgbClr val="F0AA11"/>
-          </a:solidFill>
-          <a:ln w="12700">
-            <a:solidFill>
-              <a:srgbClr val="F0AA11">
-                <a:alpha val="0"/>
-              </a:srgbClr>
-            </a:solidFill>
-            <a:prstDash val="solid"/>
-          </a:ln>
-        </p:spPr>
-      </p:sp>
-      <p:sp>
-        <p:nvSpPr>
-          <p:cNvPr id="46" name="Shape 41"/>
-          <p:cNvSpPr/>
-          <p:nvPr/>
-        </p:nvSpPr>
-        <p:spPr>
-          <a:xfrm>
-            <a:off x="914400" y="4507992"/>
-            <a:ext cx="73152" cy="1024128"/>
-          </a:xfrm>
-          <a:prstGeom prst="rect">
-            <a:avLst/>
-          </a:prstGeom>
-          <a:solidFill>
-            <a:srgbClr val="0F766E"/>
-          </a:solidFill>
-          <a:ln w="12700">
-            <a:solidFill>
-              <a:srgbClr val="0F766E">
-                <a:alpha val="0"/>
-              </a:srgbClr>
-            </a:solidFill>
-            <a:prstDash val="solid"/>
-          </a:ln>
-        </p:spPr>
-      </p:sp>
-      <p:sp>
-        <p:nvSpPr>
-          <p:cNvPr id="47" name="mdpr:1-2-dfa474:title:__title:1-2-dfa474"/>
+          <p:cNvPr id="39" name="mdpr:1-2-dfa474:title:__title:1-2-dfa474"/>
           <p:cNvSpPr txBox="1"/>
           <p:nvPr/>
         </p:nvSpPr>
@@ -37344,14 +35692,14 @@
       </p:sp>
       <p:sp>
         <p:nvSpPr>
-          <p:cNvPr id="48" name="mdpr:1-2-dfa474:item-1:block-8-chunk-1"/>
+          <p:cNvPr id="40" name="mdpr:1-2-dfa474:item-1:block-8-chunk-1"/>
           <p:cNvSpPr txBox="1"/>
           <p:nvPr/>
         </p:nvSpPr>
         <p:spPr>
           <a:xfrm>
-            <a:off x="1133856" y="1957548"/>
-            <a:ext cx="9820656" cy="839785"/>
+            <a:off x="1042416" y="2103120"/>
+            <a:ext cx="2825496" cy="2185416"/>
           </a:xfrm>
           <a:prstGeom prst="rect">
             <a:avLst/>
@@ -37403,14 +35751,14 @@
       </p:sp>
       <p:sp>
         <p:nvSpPr>
-          <p:cNvPr id="49" name="mdpr:1-2-dfa474:item-2:block-8-chunk-1"/>
+          <p:cNvPr id="41" name="mdpr:1-2-dfa474:item-2:block-8-chunk-1"/>
           <p:cNvSpPr txBox="1"/>
           <p:nvPr/>
         </p:nvSpPr>
         <p:spPr>
           <a:xfrm>
-            <a:off x="1133856" y="3283428"/>
-            <a:ext cx="9820656" cy="839785"/>
+            <a:off x="4562856" y="2103120"/>
+            <a:ext cx="2825496" cy="2185416"/>
           </a:xfrm>
           <a:prstGeom prst="rect">
             <a:avLst/>
@@ -37462,14 +35810,14 @@
       </p:sp>
       <p:sp>
         <p:nvSpPr>
-          <p:cNvPr id="50" name="mdpr:1-2-dfa474:item-3:block-8-chunk-1"/>
+          <p:cNvPr id="42" name="mdpr:1-2-dfa474:item-3:block-8-chunk-1"/>
           <p:cNvSpPr txBox="1"/>
           <p:nvPr/>
         </p:nvSpPr>
         <p:spPr>
           <a:xfrm>
-            <a:off x="1133856" y="4600164"/>
-            <a:ext cx="9820656" cy="839785"/>
+            <a:off x="8083296" y="2103120"/>
+            <a:ext cx="2825496" cy="2185416"/>
           </a:xfrm>
           <a:prstGeom prst="rect">
             <a:avLst/>
@@ -38421,88 +36769,7 @@
       </p:sp>
       <p:sp>
         <p:nvSpPr>
-          <p:cNvPr id="36" name="Shape 34"/>
-          <p:cNvSpPr/>
-          <p:nvPr/>
-        </p:nvSpPr>
-        <p:spPr>
-          <a:xfrm>
-            <a:off x="731520" y="1207008"/>
-            <a:ext cx="1325880" cy="54864"/>
-          </a:xfrm>
-          <a:prstGeom prst="rect">
-            <a:avLst/>
-          </a:prstGeom>
-          <a:solidFill>
-            <a:srgbClr val="0F766E"/>
-          </a:solidFill>
-          <a:ln w="12700">
-            <a:solidFill>
-              <a:srgbClr val="0F766E">
-                <a:alpha val="0"/>
-              </a:srgbClr>
-            </a:solidFill>
-            <a:prstDash val="solid"/>
-          </a:ln>
-        </p:spPr>
-      </p:sp>
-      <p:sp>
-        <p:nvSpPr>
-          <p:cNvPr id="37" name="Shape 35"/>
-          <p:cNvSpPr/>
-          <p:nvPr/>
-        </p:nvSpPr>
-        <p:spPr>
-          <a:xfrm>
-            <a:off x="822960" y="1554480"/>
-            <a:ext cx="4937760" cy="73152"/>
-          </a:xfrm>
-          <a:prstGeom prst="rect">
-            <a:avLst/>
-          </a:prstGeom>
-          <a:solidFill>
-            <a:srgbClr val="0F766E"/>
-          </a:solidFill>
-          <a:ln w="12700">
-            <a:solidFill>
-              <a:srgbClr val="0F766E">
-                <a:alpha val="0"/>
-              </a:srgbClr>
-            </a:solidFill>
-            <a:prstDash val="solid"/>
-          </a:ln>
-        </p:spPr>
-      </p:sp>
-      <p:sp>
-        <p:nvSpPr>
-          <p:cNvPr id="38" name="Shape 36"/>
-          <p:cNvSpPr/>
-          <p:nvPr/>
-        </p:nvSpPr>
-        <p:spPr>
-          <a:xfrm>
-            <a:off x="6400800" y="1554480"/>
-            <a:ext cx="4937760" cy="73152"/>
-          </a:xfrm>
-          <a:prstGeom prst="rect">
-            <a:avLst/>
-          </a:prstGeom>
-          <a:solidFill>
-            <a:srgbClr val="0F766E"/>
-          </a:solidFill>
-          <a:ln w="12700">
-            <a:solidFill>
-              <a:srgbClr val="0F766E">
-                <a:alpha val="0"/>
-              </a:srgbClr>
-            </a:solidFill>
-            <a:prstDash val="solid"/>
-          </a:ln>
-        </p:spPr>
-      </p:sp>
-      <p:sp>
-        <p:nvSpPr>
-          <p:cNvPr id="39" name="mdpr:2-2-149bde:title:__title:2-2-149bde"/>
+          <p:cNvPr id="36" name="mdpr:2-2-149bde:title:__title:2-2-149bde"/>
           <p:cNvSpPr txBox="1"/>
           <p:nvPr/>
         </p:nvSpPr>
@@ -38536,7 +36803,24 @@
                 <a:ea typeface="Pretendard" pitchFamily="34" charset="-122"/>
                 <a:cs typeface="Pretendard" pitchFamily="34" charset="-120"/>
               </a:rPr>
-              <a:t>Pruned Style Families (Cont. 2/2)</a:t>
+              <a:t>Pruned Style Families</a:t>
+            </a:r>
+            <a:pPr algn="ctr" indent="0" marL="0">
+              <a:lnSpc>
+                <a:spcPct val="120000"/>
+              </a:lnSpc>
+              <a:buNone/>
+            </a:pPr>
+            <a:r>
+              <a:rPr lang="en-US" sz="2000" dirty="0">
+                <a:solidFill>
+                  <a:srgbClr val="919191"/>
+                </a:solidFill>
+                <a:latin typeface="Pretendard" pitchFamily="34" charset="0"/>
+                <a:ea typeface="Pretendard" pitchFamily="34" charset="-122"/>
+                <a:cs typeface="Pretendard" pitchFamily="34" charset="-120"/>
+              </a:rPr>
+              <a:t> (Cont. 2/2)</a:t>
             </a:r>
             <a:endParaRPr lang="en-US" sz="3400" dirty="0"/>
           </a:p>
@@ -38544,14 +36828,14 @@
       </p:sp>
       <p:sp>
         <p:nvSpPr>
-          <p:cNvPr id="40" name="mdpr:2-2-149bde:left:block-8-chunk-2"/>
+          <p:cNvPr id="37" name="mdpr:2-2-149bde:left:block-8-chunk-2"/>
           <p:cNvSpPr txBox="1"/>
           <p:nvPr/>
         </p:nvSpPr>
         <p:spPr>
           <a:xfrm>
-            <a:off x="896112" y="1664208"/>
-            <a:ext cx="4791456" cy="4169664"/>
+            <a:off x="896112" y="1463040"/>
+            <a:ext cx="4791456" cy="4261104"/>
           </a:xfrm>
           <a:prstGeom prst="rect">
             <a:avLst/>
@@ -38603,14 +36887,14 @@
       </p:sp>
       <p:sp>
         <p:nvSpPr>
-          <p:cNvPr id="41" name="mdpr:2-2-149bde:right:block-8-chunk-2"/>
+          <p:cNvPr id="38" name="mdpr:2-2-149bde:right:block-8-chunk-2"/>
           <p:cNvSpPr txBox="1"/>
           <p:nvPr/>
         </p:nvSpPr>
         <p:spPr>
           <a:xfrm>
-            <a:off x="6473952" y="1664208"/>
-            <a:ext cx="4791456" cy="4169664"/>
+            <a:off x="6473952" y="1463040"/>
+            <a:ext cx="4791456" cy="4261104"/>
           </a:xfrm>
           <a:prstGeom prst="rect">
             <a:avLst/>
@@ -39560,16 +37844,148 @@
           </a:ln>
         </p:spPr>
       </p:sp>
-      <p:sp>
-        <p:nvSpPr>
-          <p:cNvPr id="36" name="Shape 34"/>
-          <p:cNvSpPr/>
-          <p:nvPr/>
-        </p:nvSpPr>
-        <p:spPr>
-          <a:xfrm>
-            <a:off x="731520" y="1207008"/>
-            <a:ext cx="1325880" cy="54864"/>
+      <p:pic>
+        <p:nvPicPr>
+          <p:cNvPr id="36" name="Image 0" descr="preencoded.png">    </p:cNvPr>
+          <p:cNvPicPr>
+            <a:picLocks noChangeAspect="1"/>
+          </p:cNvPicPr>
+          <p:nvPr/>
+        </p:nvPicPr>
+        <p:blipFill>
+          <a:blip r:embed="rId1">
+            <a:extLst>
+              <a:ext uri="{96DAC541-7B7A-43D3-8B79-37D633B846F1}">
+                <asvg:svgBlip xmlns:asvg="http://schemas.microsoft.com/office/drawing/2016/SVG/main" r:embed="rId2"/>
+              </a:ext>
+            </a:extLst>
+          </a:blip>
+          <a:stretch>
+            <a:fillRect/>
+          </a:stretch>
+        </p:blipFill>
+        <p:spPr>
+          <a:xfrm>
+            <a:off x="914400" y="2523744"/>
+            <a:ext cx="10241280" cy="1024128"/>
+          </a:xfrm>
+          <a:prstGeom prst="rect">
+            <a:avLst/>
+          </a:prstGeom>
+        </p:spPr>
+      </p:pic>
+      <p:sp>
+        <p:nvSpPr>
+          <p:cNvPr id="37" name="Shape 34"/>
+          <p:cNvSpPr/>
+          <p:nvPr/>
+        </p:nvSpPr>
+        <p:spPr>
+          <a:xfrm>
+            <a:off x="914400" y="2523744"/>
+            <a:ext cx="10241280" cy="1024128"/>
+          </a:xfrm>
+          <a:prstGeom prst="rect">
+            <a:avLst/>
+          </a:prstGeom>
+          <a:solidFill>
+            <a:srgbClr val="FFFFFF">
+              <a:alpha val="0"/>
+            </a:srgbClr>
+          </a:solidFill>
+          <a:ln w="12700">
+            <a:solidFill>
+              <a:srgbClr val="CBD5E1">
+                <a:alpha val="0"/>
+              </a:srgbClr>
+            </a:solidFill>
+            <a:prstDash val="solid"/>
+          </a:ln>
+          <a:effectLst>
+            <a:outerShdw sx="100000" sy="100000" kx="0" ky="0" algn="bl" rotWithShape="0" blurRad="12700" dist="50800" dir="2700000">
+              <a:srgbClr val="000000">
+                <a:alpha val="8000"/>
+              </a:srgbClr>
+            </a:outerShdw>
+          </a:effectLst>
+        </p:spPr>
+      </p:sp>
+      <p:pic>
+        <p:nvPicPr>
+          <p:cNvPr id="38" name="Image 1" descr="preencoded.png">    </p:cNvPr>
+          <p:cNvPicPr>
+            <a:picLocks noChangeAspect="1"/>
+          </p:cNvPicPr>
+          <p:nvPr/>
+        </p:nvPicPr>
+        <p:blipFill>
+          <a:blip r:embed="rId3">
+            <a:extLst>
+              <a:ext uri="{96DAC541-7B7A-43D3-8B79-37D633B846F1}">
+                <asvg:svgBlip xmlns:asvg="http://schemas.microsoft.com/office/drawing/2016/SVG/main" r:embed="rId4"/>
+              </a:ext>
+            </a:extLst>
+          </a:blip>
+          <a:stretch>
+            <a:fillRect/>
+          </a:stretch>
+        </p:blipFill>
+        <p:spPr>
+          <a:xfrm>
+            <a:off x="914400" y="3849624"/>
+            <a:ext cx="10241280" cy="1024128"/>
+          </a:xfrm>
+          <a:prstGeom prst="rect">
+            <a:avLst/>
+          </a:prstGeom>
+        </p:spPr>
+      </p:pic>
+      <p:sp>
+        <p:nvSpPr>
+          <p:cNvPr id="39" name="Shape 35"/>
+          <p:cNvSpPr/>
+          <p:nvPr/>
+        </p:nvSpPr>
+        <p:spPr>
+          <a:xfrm>
+            <a:off x="914400" y="3849624"/>
+            <a:ext cx="10241280" cy="1024128"/>
+          </a:xfrm>
+          <a:prstGeom prst="rect">
+            <a:avLst/>
+          </a:prstGeom>
+          <a:solidFill>
+            <a:srgbClr val="FFFFFF">
+              <a:alpha val="0"/>
+            </a:srgbClr>
+          </a:solidFill>
+          <a:ln w="12700">
+            <a:solidFill>
+              <a:srgbClr val="CBD5E1">
+                <a:alpha val="0"/>
+              </a:srgbClr>
+            </a:solidFill>
+            <a:prstDash val="solid"/>
+          </a:ln>
+          <a:effectLst>
+            <a:outerShdw sx="100000" sy="100000" kx="0" ky="0" algn="bl" rotWithShape="0" blurRad="12700" dist="50800" dir="2700000">
+              <a:srgbClr val="000000">
+                <a:alpha val="8000"/>
+              </a:srgbClr>
+            </a:outerShdw>
+          </a:effectLst>
+        </p:spPr>
+      </p:sp>
+      <p:sp>
+        <p:nvSpPr>
+          <p:cNvPr id="40" name="Shape 36"/>
+          <p:cNvSpPr/>
+          <p:nvPr/>
+        </p:nvSpPr>
+        <p:spPr>
+          <a:xfrm>
+            <a:off x="914400" y="2523744"/>
+            <a:ext cx="73152" cy="1024128"/>
           </a:xfrm>
           <a:prstGeom prst="rect">
             <a:avLst/>
@@ -39589,24 +38005,24 @@
       </p:sp>
       <p:sp>
         <p:nvSpPr>
-          <p:cNvPr id="37" name="Shape 35"/>
-          <p:cNvSpPr/>
-          <p:nvPr/>
-        </p:nvSpPr>
-        <p:spPr>
-          <a:xfrm>
-            <a:off x="822960" y="1554480"/>
-            <a:ext cx="4937760" cy="73152"/>
+          <p:cNvPr id="41" name="Shape 37"/>
+          <p:cNvSpPr/>
+          <p:nvPr/>
+        </p:nvSpPr>
+        <p:spPr>
+          <a:xfrm>
+            <a:off x="914400" y="3849624"/>
+            <a:ext cx="73152" cy="1024128"/>
           </a:xfrm>
           <a:prstGeom prst="rect">
             <a:avLst/>
           </a:prstGeom>
           <a:solidFill>
-            <a:srgbClr val="0F766E"/>
+            <a:srgbClr val="F0AA11"/>
           </a:solidFill>
           <a:ln w="12700">
             <a:solidFill>
-              <a:srgbClr val="0F766E">
+              <a:srgbClr val="F0AA11">
                 <a:alpha val="0"/>
               </a:srgbClr>
             </a:solidFill>
@@ -39616,34 +38032,7 @@
       </p:sp>
       <p:sp>
         <p:nvSpPr>
-          <p:cNvPr id="38" name="Shape 36"/>
-          <p:cNvSpPr/>
-          <p:nvPr/>
-        </p:nvSpPr>
-        <p:spPr>
-          <a:xfrm>
-            <a:off x="6400800" y="1554480"/>
-            <a:ext cx="4937760" cy="73152"/>
-          </a:xfrm>
-          <a:prstGeom prst="rect">
-            <a:avLst/>
-          </a:prstGeom>
-          <a:solidFill>
-            <a:srgbClr val="0F766E"/>
-          </a:solidFill>
-          <a:ln w="12700">
-            <a:solidFill>
-              <a:srgbClr val="0F766E">
-                <a:alpha val="0"/>
-              </a:srgbClr>
-            </a:solidFill>
-            <a:prstDash val="solid"/>
-          </a:ln>
-        </p:spPr>
-      </p:sp>
-      <p:sp>
-        <p:nvSpPr>
-          <p:cNvPr id="39" name="mdpr:1-2-5a84f1:title:__title:1-2-5a84f1"/>
+          <p:cNvPr id="42" name="mdpr:1-2-5a84f1:title:__title:1-2-5a84f1"/>
           <p:cNvSpPr txBox="1"/>
           <p:nvPr/>
         </p:nvSpPr>
@@ -39685,14 +38074,14 @@
       </p:sp>
       <p:sp>
         <p:nvSpPr>
-          <p:cNvPr id="40" name="mdpr:1-2-5a84f1:left:block-10-chunk-1"/>
+          <p:cNvPr id="43" name="mdpr:1-2-5a84f1:item-1:block-10-chunk-1"/>
           <p:cNvSpPr txBox="1"/>
           <p:nvPr/>
         </p:nvSpPr>
         <p:spPr>
           <a:xfrm>
-            <a:off x="896112" y="1664208"/>
-            <a:ext cx="4791456" cy="4169664"/>
+            <a:off x="1133856" y="2615916"/>
+            <a:ext cx="9820656" cy="839785"/>
           </a:xfrm>
           <a:prstGeom prst="rect">
             <a:avLst/>
@@ -39701,7 +38090,7 @@
           <a:ln/>
         </p:spPr>
         <p:txBody>
-          <a:bodyPr wrap="square" lIns="0" tIns="25400" rIns="25400" bIns="0" rtlCol="0" anchor="t"/>
+          <a:bodyPr wrap="square" lIns="0" tIns="25400" rIns="25400" bIns="0" rtlCol="0" anchor="ctr"/>
           <a:lstStyle/>
           <a:p>
             <a:pPr algn="l" indent="0" marL="0">
@@ -39719,7 +38108,7 @@
                 <a:ea typeface="Pretendard" pitchFamily="34" charset="-122"/>
                 <a:cs typeface="Pretendard" pitchFamily="34" charset="-120"/>
               </a:rPr>
-              <a:t>- Headings</a:t>
+              <a:t>Headings</a:t>
             </a:r>
             <a:pPr algn="l" indent="0" marL="0">
               <a:lnSpc>
@@ -39744,14 +38133,14 @@
       </p:sp>
       <p:sp>
         <p:nvSpPr>
-          <p:cNvPr id="41" name="mdpr:1-2-5a84f1:right:block-10-chunk-1"/>
+          <p:cNvPr id="44" name="mdpr:1-2-5a84f1:item-2:block-10-chunk-1"/>
           <p:cNvSpPr txBox="1"/>
           <p:nvPr/>
         </p:nvSpPr>
         <p:spPr>
           <a:xfrm>
-            <a:off x="6473952" y="1664208"/>
-            <a:ext cx="4791456" cy="4169664"/>
+            <a:off x="1133856" y="3941796"/>
+            <a:ext cx="9820656" cy="839785"/>
           </a:xfrm>
           <a:prstGeom prst="rect">
             <a:avLst/>
@@ -39760,7 +38149,7 @@
           <a:ln/>
         </p:spPr>
         <p:txBody>
-          <a:bodyPr wrap="square" lIns="0" tIns="25400" rIns="25400" bIns="0" rtlCol="0" anchor="t"/>
+          <a:bodyPr wrap="square" lIns="0" tIns="25400" rIns="25400" bIns="0" rtlCol="0" anchor="ctr"/>
           <a:lstStyle/>
           <a:p>
             <a:pPr algn="l" indent="0" marL="0">
@@ -39778,7 +38167,7 @@
                 <a:ea typeface="Pretendard" pitchFamily="34" charset="-122"/>
                 <a:cs typeface="Pretendard" pitchFamily="34" charset="-120"/>
               </a:rPr>
-              <a:t>- Lists</a:t>
+              <a:t>Lists</a:t>
             </a:r>
             <a:pPr algn="l" indent="0" marL="0">
               <a:lnSpc>
